--- a/lessons/lesson-09/slides.pptx
+++ b/lessons/lesson-09/slides.pptx
@@ -2,32 +2,33 @@
 <file path=ppt/presentation.xml><?xml version="1.0" encoding="utf-8"?>
 <p:presentation xmlns:p="http://schemas.openxmlformats.org/presentationml/2006/main">
   <p:sldMasterIdLst>
-    <p:sldMasterId xmlns:r="http://schemas.openxmlformats.org/officeDocument/2006/relationships" id="2147483648" r:id="R09682036dab449c8"/>
+    <p:sldMasterId xmlns:r="http://schemas.openxmlformats.org/officeDocument/2006/relationships" id="2147483648" r:id="Re8a5e84f76b14b8c"/>
   </p:sldMasterIdLst>
   <p:notesMasterIdLst>
-    <p:notesMasterId xmlns:r="http://schemas.openxmlformats.org/officeDocument/2006/relationships" r:id="Ra9650c0613c444f0"/>
+    <p:notesMasterId xmlns:r="http://schemas.openxmlformats.org/officeDocument/2006/relationships" r:id="R54abf4cf57ec4e95"/>
   </p:notesMasterIdLst>
   <p:sldIdLst>
-    <p:sldId xmlns:r="http://schemas.openxmlformats.org/officeDocument/2006/relationships" id="256" r:id="R158db47936804db4"/>
-    <p:sldId xmlns:r="http://schemas.openxmlformats.org/officeDocument/2006/relationships" id="257" r:id="R8d0239400f174fdb"/>
-    <p:sldId xmlns:r="http://schemas.openxmlformats.org/officeDocument/2006/relationships" id="258" r:id="R93980e396b544f56"/>
-    <p:sldId xmlns:r="http://schemas.openxmlformats.org/officeDocument/2006/relationships" id="259" r:id="Re1c714e770204b17"/>
-    <p:sldId xmlns:r="http://schemas.openxmlformats.org/officeDocument/2006/relationships" id="260" r:id="Refb9204506c9408a"/>
-    <p:sldId xmlns:r="http://schemas.openxmlformats.org/officeDocument/2006/relationships" id="261" r:id="Recb7562a25e2421c"/>
-    <p:sldId xmlns:r="http://schemas.openxmlformats.org/officeDocument/2006/relationships" id="262" r:id="R9cd6ac006e004aa3"/>
-    <p:sldId xmlns:r="http://schemas.openxmlformats.org/officeDocument/2006/relationships" id="263" r:id="R5e8e430b89724d3a"/>
-    <p:sldId xmlns:r="http://schemas.openxmlformats.org/officeDocument/2006/relationships" id="264" r:id="R3b78e5620ca34f2f"/>
-    <p:sldId xmlns:r="http://schemas.openxmlformats.org/officeDocument/2006/relationships" id="265" r:id="R459b4f3eb6bc4e34"/>
-    <p:sldId xmlns:r="http://schemas.openxmlformats.org/officeDocument/2006/relationships" id="266" r:id="R019bc02ef23e4ee8"/>
-    <p:sldId xmlns:r="http://schemas.openxmlformats.org/officeDocument/2006/relationships" id="267" r:id="R40791c4de86c4142"/>
-    <p:sldId xmlns:r="http://schemas.openxmlformats.org/officeDocument/2006/relationships" id="268" r:id="Rd45116cf5f7a447f"/>
-    <p:sldId xmlns:r="http://schemas.openxmlformats.org/officeDocument/2006/relationships" id="269" r:id="R1161973d044e4b7b"/>
-    <p:sldId xmlns:r="http://schemas.openxmlformats.org/officeDocument/2006/relationships" id="270" r:id="R7e717a62c6fe4cb4"/>
-    <p:sldId xmlns:r="http://schemas.openxmlformats.org/officeDocument/2006/relationships" id="271" r:id="R0cfa5092a9df4a5e"/>
-    <p:sldId xmlns:r="http://schemas.openxmlformats.org/officeDocument/2006/relationships" id="272" r:id="Rab10df556b9548dd"/>
-    <p:sldId xmlns:r="http://schemas.openxmlformats.org/officeDocument/2006/relationships" id="273" r:id="R7de4ada7268341be"/>
-    <p:sldId xmlns:r="http://schemas.openxmlformats.org/officeDocument/2006/relationships" id="274" r:id="R330e48dccca240d6"/>
-    <p:sldId xmlns:r="http://schemas.openxmlformats.org/officeDocument/2006/relationships" id="275" r:id="Rf6e2f9357fb843ca"/>
+    <p:sldId xmlns:r="http://schemas.openxmlformats.org/officeDocument/2006/relationships" id="256" r:id="Ra49e8489cea248a0"/>
+    <p:sldId xmlns:r="http://schemas.openxmlformats.org/officeDocument/2006/relationships" id="257" r:id="R29ff6bf559904bdb"/>
+    <p:sldId xmlns:r="http://schemas.openxmlformats.org/officeDocument/2006/relationships" id="258" r:id="Rfa4c91c99c104cdd"/>
+    <p:sldId xmlns:r="http://schemas.openxmlformats.org/officeDocument/2006/relationships" id="259" r:id="R2b8680b319b44021"/>
+    <p:sldId xmlns:r="http://schemas.openxmlformats.org/officeDocument/2006/relationships" id="260" r:id="R0a430bbdb72042d6"/>
+    <p:sldId xmlns:r="http://schemas.openxmlformats.org/officeDocument/2006/relationships" id="261" r:id="Rb3f6f07decb04b06"/>
+    <p:sldId xmlns:r="http://schemas.openxmlformats.org/officeDocument/2006/relationships" id="262" r:id="Rf0b36331d2aa4bd3"/>
+    <p:sldId xmlns:r="http://schemas.openxmlformats.org/officeDocument/2006/relationships" id="263" r:id="R31c01f36b74c4d22"/>
+    <p:sldId xmlns:r="http://schemas.openxmlformats.org/officeDocument/2006/relationships" id="264" r:id="R36a185a101ee4b8f"/>
+    <p:sldId xmlns:r="http://schemas.openxmlformats.org/officeDocument/2006/relationships" id="265" r:id="Rd74e167a57764de7"/>
+    <p:sldId xmlns:r="http://schemas.openxmlformats.org/officeDocument/2006/relationships" id="266" r:id="Rf6827104fd3d4833"/>
+    <p:sldId xmlns:r="http://schemas.openxmlformats.org/officeDocument/2006/relationships" id="267" r:id="R8dd98d0e9122483b"/>
+    <p:sldId xmlns:r="http://schemas.openxmlformats.org/officeDocument/2006/relationships" id="268" r:id="R47d5f54f32924833"/>
+    <p:sldId xmlns:r="http://schemas.openxmlformats.org/officeDocument/2006/relationships" id="269" r:id="Ree19133dd52a432f"/>
+    <p:sldId xmlns:r="http://schemas.openxmlformats.org/officeDocument/2006/relationships" id="270" r:id="Rd68d6729513e422a"/>
+    <p:sldId xmlns:r="http://schemas.openxmlformats.org/officeDocument/2006/relationships" id="271" r:id="Rf488a791df814160"/>
+    <p:sldId xmlns:r="http://schemas.openxmlformats.org/officeDocument/2006/relationships" id="272" r:id="R59d74361bce74d86"/>
+    <p:sldId xmlns:r="http://schemas.openxmlformats.org/officeDocument/2006/relationships" id="273" r:id="R875884c6a28f4361"/>
+    <p:sldId xmlns:r="http://schemas.openxmlformats.org/officeDocument/2006/relationships" id="274" r:id="R9a8dd1cd1ddb459a"/>
+    <p:sldId xmlns:r="http://schemas.openxmlformats.org/officeDocument/2006/relationships" id="275" r:id="Rd503cef46d574eed"/>
+    <p:sldId xmlns:r="http://schemas.openxmlformats.org/officeDocument/2006/relationships" id="276" r:id="R7bf24dcb40964c16"/>
   </p:sldIdLst>
   <p:sldSz cx="12192000" cy="6858000"/>
   <p:notesSz cx="6858000" cy="9144000"/>
@@ -1602,6 +1603,101 @@
           <a:lstStyle xmlns:a="http://schemas.openxmlformats.org/drawingml/2006/main"/>
           <a:p xmlns:a="http://schemas.openxmlformats.org/drawingml/2006/main">
             <a:r>
+              <a:t>回收 baseline、公平性、实验规格、复现记录与判断门的关系。本页不替代提交说明。</a:t>
+            </a:r>
+          </a:p>
+          <a:p xmlns:a="http://schemas.openxmlformats.org/drawingml/2006/main">
+            <a:r>
+              <a:t/>
+            </a:r>
+          </a:p>
+          <a:p xmlns:a="http://schemas.openxmlformats.org/drawingml/2006/main">
+            <a:r>
+              <a:t>[Sources]</a:t>
+            </a:r>
+          </a:p>
+          <a:p xmlns:a="http://schemas.openxmlformats.org/drawingml/2006/main">
+            <a:r>
+              <a:t>- /Users/bright/Projects/courses/graduate/lessons/lesson-09/handout.md</a:t>
+            </a:r>
+          </a:p>
+          <a:p xmlns:a="http://schemas.openxmlformats.org/drawingml/2006/main">
+            <a:r>
+              <a:t>- /Users/bright/Projects/courses/graduate/course/assignments.md</a:t>
+            </a:r>
+          </a:p>
+          <a:p xmlns:a="http://schemas.openxmlformats.org/drawingml/2006/main">
+            <a:r>
+              <a:t>[/Sources]</a:t>
+            </a:r>
+          </a:p>
+        </p:txBody>
+      </p:sp>
+      <p:sp>
+        <p:nvSpPr>
+          <p:cNvPr id="4" name="Slide Number Placeholder 3"/>
+          <p:cNvSpPr>
+            <a:spLocks xmlns:a="http://schemas.openxmlformats.org/drawingml/2006/main" noGrp="1"/>
+          </p:cNvSpPr>
+          <p:nvPr>
+            <p:ph type="sldNum" idx="5"/>
+          </p:nvPr>
+        </p:nvSpPr>
+        <p:spPr/>
+        <p:txBody>
+          <a:bodyPr xmlns:a="http://schemas.openxmlformats.org/drawingml/2006/main"/>
+          <a:lstStyle xmlns:a="http://schemas.openxmlformats.org/drawingml/2006/main"/>
+          <a:p xmlns:a="http://schemas.openxmlformats.org/drawingml/2006/main"/>
+        </p:txBody>
+      </p:sp>
+    </p:spTree>
+  </p:cSld>
+  <p:clrMapOvr>
+    <a:masterClrMapping xmlns:a="http://schemas.openxmlformats.org/drawingml/2006/main"/>
+  </p:clrMapOvr>
+</p:notes>
+</file>
+
+<file path=ppt/notesSlides/notesSlide21.xml><?xml version="1.0" encoding="utf-8"?>
+<p:notes xmlns:p="http://schemas.openxmlformats.org/presentationml/2006/main">
+  <p:cSld>
+    <p:spTree>
+      <p:nvGrpSpPr>
+        <p:cNvPr id="1" name=""/>
+        <p:cNvGrpSpPr/>
+        <p:nvPr/>
+      </p:nvGrpSpPr>
+      <p:grpSpPr>
+        <a:xfrm xmlns:a="http://schemas.openxmlformats.org/drawingml/2006/main"/>
+      </p:grpSpPr>
+      <p:sp>
+        <p:nvSpPr>
+          <p:cNvPr id="2" name="Slide Image Placeholder 1"/>
+          <p:cNvSpPr>
+            <a:spLocks xmlns:a="http://schemas.openxmlformats.org/drawingml/2006/main" noGrp="1"/>
+          </p:cNvSpPr>
+          <p:nvPr>
+            <p:ph type="sldImg" idx="0"/>
+          </p:nvPr>
+        </p:nvSpPr>
+        <p:spPr/>
+      </p:sp>
+      <p:sp>
+        <p:nvSpPr>
+          <p:cNvPr id="3" name="Notes Placeholder 2"/>
+          <p:cNvSpPr>
+            <a:spLocks xmlns:a="http://schemas.openxmlformats.org/drawingml/2006/main" noGrp="1"/>
+          </p:cNvSpPr>
+          <p:nvPr>
+            <p:ph type="body" idx="1"/>
+          </p:nvPr>
+        </p:nvSpPr>
+        <p:spPr/>
+        <p:txBody>
+          <a:bodyPr xmlns:a="http://schemas.openxmlformats.org/drawingml/2006/main"/>
+          <a:lstStyle xmlns:a="http://schemas.openxmlformats.org/drawingml/2006/main"/>
+          <a:p xmlns:a="http://schemas.openxmlformats.org/drawingml/2006/main">
+            <a:r>
               <a:t>课后完成自查并提交判断门材料包；第一次未通过按课程规则修订。</a:t>
             </a:r>
           </a:p>
@@ -2393,7 +2489,7 @@
           <p:nvPr/>
         </p:nvPicPr>
         <p:blipFill>
-          <a:blip xmlns:r="http://schemas.openxmlformats.org/officeDocument/2006/relationships" xmlns:a="http://schemas.openxmlformats.org/drawingml/2006/main" r:embed="R4e0fff5735194c9d">
+          <a:blip xmlns:r="http://schemas.openxmlformats.org/officeDocument/2006/relationships" xmlns:a="http://schemas.openxmlformats.org/drawingml/2006/main" r:embed="R5e96b929a18b4e75">
             <a:duotone>
               <a:prstClr val="black"/>
               <a:schemeClr val="accent1">
@@ -2571,7 +2667,7 @@
           <p:nvPr/>
         </p:nvPicPr>
         <p:blipFill rotWithShape="1">
-          <a:blip xmlns:r="http://schemas.openxmlformats.org/officeDocument/2006/relationships" xmlns:a="http://schemas.openxmlformats.org/drawingml/2006/main" r:embed="R64e8248cdc43438c"/>
+          <a:blip xmlns:r="http://schemas.openxmlformats.org/officeDocument/2006/relationships" xmlns:a="http://schemas.openxmlformats.org/drawingml/2006/main" r:embed="R461abbd44cfa4ee4"/>
           <a:srcRect xmlns:a="http://schemas.openxmlformats.org/drawingml/2006/main" l="74359" t="0" r="1346" b="0"/>
           <a:stretch xmlns:a="http://schemas.openxmlformats.org/drawingml/2006/main"/>
         </p:blipFill>
@@ -2594,7 +2690,7 @@
           <p:nvPr/>
         </p:nvPicPr>
         <p:blipFill rotWithShape="1">
-          <a:blip xmlns:r="http://schemas.openxmlformats.org/officeDocument/2006/relationships" xmlns:a="http://schemas.openxmlformats.org/drawingml/2006/main" r:embed="R4444395036024068">
+          <a:blip xmlns:r="http://schemas.openxmlformats.org/officeDocument/2006/relationships" xmlns:a="http://schemas.openxmlformats.org/drawingml/2006/main" r:embed="Rdd2efd9cf0ec494b">
             <a:alphaModFix amt="35000"/>
           </a:blip>
           <a:srcRect xmlns:a="http://schemas.openxmlformats.org/drawingml/2006/main" l="0" t="9831" r="0" b="36385"/>
@@ -2856,7 +2952,7 @@
           <p:nvPr/>
         </p:nvPicPr>
         <p:blipFill>
-          <a:blip xmlns:r="http://schemas.openxmlformats.org/officeDocument/2006/relationships" xmlns:a="http://schemas.openxmlformats.org/drawingml/2006/main" r:embed="R59406d894d894437"/>
+          <a:blip xmlns:r="http://schemas.openxmlformats.org/officeDocument/2006/relationships" xmlns:a="http://schemas.openxmlformats.org/drawingml/2006/main" r:embed="R8702e19882304c42"/>
           <a:srcRect xmlns:a="http://schemas.openxmlformats.org/drawingml/2006/main" l="0" t="0" r="54251" b="0"/>
           <a:stretch xmlns:a="http://schemas.openxmlformats.org/drawingml/2006/main"/>
         </p:blipFill>
@@ -3113,7 +3209,7 @@
           <p:nvPr/>
         </p:nvPicPr>
         <p:blipFill rotWithShape="1">
-          <a:blip xmlns:r="http://schemas.openxmlformats.org/officeDocument/2006/relationships" xmlns:a="http://schemas.openxmlformats.org/drawingml/2006/main" r:embed="R6077a0d5ddd846e2"/>
+          <a:blip xmlns:r="http://schemas.openxmlformats.org/officeDocument/2006/relationships" xmlns:a="http://schemas.openxmlformats.org/drawingml/2006/main" r:embed="R33e8767e7f0f47c8"/>
           <a:srcRect xmlns:a="http://schemas.openxmlformats.org/drawingml/2006/main" l="0" t="0" r="1346" b="0"/>
           <a:stretch xmlns:a="http://schemas.openxmlformats.org/drawingml/2006/main"/>
         </p:blipFill>
@@ -3296,7 +3392,7 @@
           <p:nvPr/>
         </p:nvPicPr>
         <p:blipFill>
-          <a:blip xmlns:r="http://schemas.openxmlformats.org/officeDocument/2006/relationships" xmlns:a="http://schemas.openxmlformats.org/drawingml/2006/main" r:embed="R9d737ee0da6c41b4"/>
+          <a:blip xmlns:r="http://schemas.openxmlformats.org/officeDocument/2006/relationships" xmlns:a="http://schemas.openxmlformats.org/drawingml/2006/main" r:embed="R5abcb320336143f7"/>
           <a:stretch xmlns:a="http://schemas.openxmlformats.org/drawingml/2006/main">
             <a:fillRect l="0" t="0" r="0" b="0"/>
           </a:stretch>
@@ -3392,7 +3488,7 @@
           <p:nvPr/>
         </p:nvPicPr>
         <p:blipFill>
-          <a:blip xmlns:r="http://schemas.openxmlformats.org/officeDocument/2006/relationships" xmlns:a="http://schemas.openxmlformats.org/drawingml/2006/main" r:embed="R5774b424a07c46fb">
+          <a:blip xmlns:r="http://schemas.openxmlformats.org/officeDocument/2006/relationships" xmlns:a="http://schemas.openxmlformats.org/drawingml/2006/main" r:embed="Rb5f3e1bac6f845c6">
             <a:duotone>
               <a:prstClr val="black"/>
               <a:schemeClr val="accent1">
@@ -3559,7 +3655,7 @@
           <p:nvPr/>
         </p:nvPicPr>
         <p:blipFill rotWithShape="1">
-          <a:blip xmlns:r="http://schemas.openxmlformats.org/officeDocument/2006/relationships" xmlns:a="http://schemas.openxmlformats.org/drawingml/2006/main" r:embed="R019bbbd9ece2450c">
+          <a:blip xmlns:r="http://schemas.openxmlformats.org/officeDocument/2006/relationships" xmlns:a="http://schemas.openxmlformats.org/drawingml/2006/main" r:embed="Rd9444ec7ba7a4637">
             <a:alphaModFix amt="20000"/>
             <a:duotone>
               <a:schemeClr val="accent4">
@@ -3657,10 +3753,10 @@
   </p:cSld>
   <p:clrMap bg1="lt1" tx1="dk1" bg2="lt2" tx2="dk2" accent1="accent1" accent2="accent2" accent3="accent3" accent4="accent4" accent5="accent5" accent6="accent6" hlink="hlink" folHlink="folHlink"/>
   <p:sldLayoutIdLst>
-    <p:sldLayoutId xmlns:r="http://schemas.openxmlformats.org/officeDocument/2006/relationships" id="2147483649" r:id="R64bb2e450bc4457d"/>
-    <p:sldLayoutId xmlns:r="http://schemas.openxmlformats.org/officeDocument/2006/relationships" id="2147483650" r:id="Rae941e7c87de43de"/>
-    <p:sldLayoutId xmlns:r="http://schemas.openxmlformats.org/officeDocument/2006/relationships" id="2147483651" r:id="R57c8105c8c28451b"/>
-    <p:sldLayoutId xmlns:r="http://schemas.openxmlformats.org/officeDocument/2006/relationships" id="2147483652" r:id="R9b1c174a68804c95"/>
+    <p:sldLayoutId xmlns:r="http://schemas.openxmlformats.org/officeDocument/2006/relationships" id="2147483649" r:id="R72683eadf71b4867"/>
+    <p:sldLayoutId xmlns:r="http://schemas.openxmlformats.org/officeDocument/2006/relationships" id="2147483650" r:id="R8b0893f5367d459a"/>
+    <p:sldLayoutId xmlns:r="http://schemas.openxmlformats.org/officeDocument/2006/relationships" id="2147483651" r:id="Ra306127b95314bdd"/>
+    <p:sldLayoutId xmlns:r="http://schemas.openxmlformats.org/officeDocument/2006/relationships" id="2147483652" r:id="R94857ddaca5c43c6"/>
   </p:sldLayoutIdLst>
   <p:hf hdr="0" ftr="0" dt="0"/>
   <p:txStyles>
@@ -4193,120 +4289,6 @@
       </p:grpSpPr>
       <p:sp>
         <p:nvSpPr>
-          <p:cNvPr id="3" name="内容占位符 2">
-            <a:extLst xmlns:a="http://schemas.openxmlformats.org/drawingml/2006/main">
-              <a:ext uri="{FF2B5EF4-FFF2-40B4-BE49-F238E27FC236}">
-                <a16:creationId xmlns:a16="http://schemas.microsoft.com/office/drawing/2014/main" id="{D1D30E0E-D2D5-4C08-A919-2A1C2D5A8D02}"/>
-              </a:ext>
-            </a:extLst>
-          </p:cNvPr>
-          <p:cNvSpPr>
-            <a:spLocks xmlns:a="http://schemas.openxmlformats.org/drawingml/2006/main" noGrp="1"/>
-          </p:cNvSpPr>
-          <p:nvPr>
-            <p:ph idx="10"/>
-          </p:nvPr>
-        </p:nvSpPr>
-        <p:spPr>
-          <a:xfrm xmlns:a="http://schemas.openxmlformats.org/drawingml/2006/main">
-            <a:off x="1200150" y="3067050"/>
-            <a:ext cx="9791700" cy="2324100"/>
-          </a:xfrm>
-        </p:spPr>
-        <p:txBody>
-          <a:bodyPr xmlns:a="http://schemas.openxmlformats.org/drawingml/2006/main" lIns="0" tIns="0" rIns="0" bIns="0" anchor="ctr"/>
-          <a:lstStyle xmlns:a="http://schemas.openxmlformats.org/drawingml/2006/main"/>
-          <a:p xmlns:a="http://schemas.openxmlformats.org/drawingml/2006/main">
-            <a:pPr algn="ctr">
-              <a:lnSpc>
-                <a:spcPct val="125000"/>
-              </a:lnSpc>
-              <a:buNone/>
-            </a:pPr>
-            <a:r>
-              <a:rPr sz="1800" b="1">
-                <a:solidFill>
-                  <a:srgbClr val="18354E"/>
-                </a:solidFill>
-                <a:latin typeface="Microsoft YaHei"/>
-                <a:ea typeface="Microsoft YaHei"/>
-                <a:cs typeface="Microsoft YaHei"/>
-              </a:rPr>
-              <a:t>实验规格草图 → 公平 baseline → 可复现记录 → 判断门</a:t>
-            </a:r>
-            <a:endParaRPr>
-              <a:latin typeface="+mn-ea"/>
-              <a:ea typeface="+mn-ea"/>
-              <a:cs typeface="+mn-ea"/>
-            </a:endParaRPr>
-          </a:p>
-          <a:p xmlns:a="http://schemas.openxmlformats.org/drawingml/2006/main">
-            <a:r>
-              <a:rPr>
-                <a:latin typeface="+mn-ea"/>
-                <a:ea typeface="+mn-ea"/>
-                <a:cs typeface="+mn-ea"/>
-              </a:rPr>
-              <a:t/>
-            </a:r>
-            <a:endParaRPr>
-              <a:latin typeface="+mn-ea"/>
-              <a:ea typeface="+mn-ea"/>
-              <a:cs typeface="+mn-ea"/>
-            </a:endParaRPr>
-          </a:p>
-          <a:p xmlns:a="http://schemas.openxmlformats.org/drawingml/2006/main">
-            <a:pPr algn="ctr">
-              <a:lnSpc>
-                <a:spcPct val="125000"/>
-              </a:lnSpc>
-              <a:buNone/>
-            </a:pPr>
-            <a:r>
-              <a:rPr sz="1800" b="1">
-                <a:solidFill>
-                  <a:srgbClr val="18354E"/>
-                </a:solidFill>
-                <a:latin typeface="Microsoft YaHei"/>
-                <a:ea typeface="Microsoft YaHei"/>
-                <a:cs typeface="Microsoft YaHei"/>
-              </a:rPr>
-              <a:t>草图能跑，不等于别人能复现</a:t>
-            </a:r>
-            <a:endParaRPr>
-              <a:latin typeface="+mn-ea"/>
-              <a:ea typeface="+mn-ea"/>
-              <a:cs typeface="+mn-ea"/>
-            </a:endParaRPr>
-          </a:p>
-          <a:p xmlns:a="http://schemas.openxmlformats.org/drawingml/2006/main">
-            <a:pPr algn="ctr">
-              <a:lnSpc>
-                <a:spcPct val="125000"/>
-              </a:lnSpc>
-              <a:buNone/>
-            </a:pPr>
-            <a:r>
-              <a:rPr sz="1800" b="1">
-                <a:solidFill>
-                  <a:srgbClr val="18354E"/>
-                </a:solidFill>
-                <a:latin typeface="Microsoft YaHei"/>
-                <a:ea typeface="Microsoft YaHei"/>
-                <a:cs typeface="Microsoft YaHei"/>
-              </a:rPr>
-              <a:t>第九讲｜阶段六：研究判断成案 + 阶段七：原型验证起始</a:t>
-            </a:r>
-            <a:endParaRPr>
-              <a:latin typeface="+mn-ea"/>
-              <a:ea typeface="+mn-ea"/>
-              <a:cs typeface="+mn-ea"/>
-            </a:endParaRPr>
-          </a:p>
-        </p:txBody>
-      </p:sp>
-      <p:sp>
-        <p:nvSpPr>
           <p:cNvPr id="2" name="矩形 11">
             <a:extLst xmlns:a="http://schemas.openxmlformats.org/drawingml/2006/main">
               <a:ext uri="{FF2B5EF4-FFF2-40B4-BE49-F238E27FC236}">
@@ -4321,8 +4303,8 @@
         </p:nvSpPr>
         <p:spPr>
           <a:xfrm xmlns:a="http://schemas.openxmlformats.org/drawingml/2006/main">
-            <a:off x="1009650" y="1219200"/>
-            <a:ext cx="10172700" cy="1581150"/>
+            <a:off x="1143000" y="1790700"/>
+            <a:ext cx="9906000" cy="1524000"/>
           </a:xfrm>
           <a:prstGeom xmlns:a="http://schemas.openxmlformats.org/drawingml/2006/main" prst="rect">
             <a:avLst/>
@@ -4341,7 +4323,7 @@
               <a:buNone/>
             </a:pPr>
             <a:r>
-              <a:rPr sz="2850" b="1">
+              <a:rPr sz="2925" b="1">
                 <a:solidFill>
                   <a:srgbClr val="C8161E"/>
                 </a:solidFill>
@@ -4349,7 +4331,7 @@
                 <a:ea typeface="Microsoft YaHei"/>
                 <a:cs typeface="Microsoft YaHei"/>
               </a:rPr>
-              <a:t>Baseline、实验规格、可复现性与判断门</a:t>
+              <a:t>第9讲 Baseline、实验规格与可复现实验工程</a:t>
             </a:r>
             <a:endParaRPr sz="4000" b="1" kern="0" spc="20">
               <a:solidFill>
@@ -4461,7 +4443,7 @@
           <p:cNvPr id="6" name="p10-l-0">
             <a:extLst xmlns:a="http://schemas.openxmlformats.org/drawingml/2006/main">
               <a:ext uri="{FF2B5EF4-FFF2-40B4-BE49-F238E27FC236}">
-                <a16:creationId xmlns:a16="http://schemas.microsoft.com/office/drawing/2014/main" id="{5A20145F-E425-48B0-9338-16E955C9C54D}"/>
+                <a16:creationId xmlns:a16="http://schemas.microsoft.com/office/drawing/2014/main" id="{09B8B336-3151-493D-9D9F-95367DBC07C6}"/>
               </a:ext>
             </a:extLst>
           </p:cNvPr>
@@ -4518,7 +4500,7 @@
           <p:cNvPr id="7" name="p10-d-0">
             <a:extLst xmlns:a="http://schemas.openxmlformats.org/drawingml/2006/main">
               <a:ext uri="{FF2B5EF4-FFF2-40B4-BE49-F238E27FC236}">
-                <a16:creationId xmlns:a16="http://schemas.microsoft.com/office/drawing/2014/main" id="{95F5D93B-786D-487D-9575-1F7EDD6A6DFC}"/>
+                <a16:creationId xmlns:a16="http://schemas.microsoft.com/office/drawing/2014/main" id="{251338FA-4F16-47F5-B164-A8A7C8C5CC85}"/>
               </a:ext>
             </a:extLst>
           </p:cNvPr>
@@ -4603,7 +4585,7 @@
           <p:cNvPr id="8" name="p10-l-1">
             <a:extLst xmlns:a="http://schemas.openxmlformats.org/drawingml/2006/main">
               <a:ext uri="{FF2B5EF4-FFF2-40B4-BE49-F238E27FC236}">
-                <a16:creationId xmlns:a16="http://schemas.microsoft.com/office/drawing/2014/main" id="{8344EC74-1D59-40F4-854C-F4368BB44117}"/>
+                <a16:creationId xmlns:a16="http://schemas.microsoft.com/office/drawing/2014/main" id="{5F0AC9D2-5DFA-4295-85D2-8EEC71F2FB11}"/>
               </a:ext>
             </a:extLst>
           </p:cNvPr>
@@ -4660,7 +4642,7 @@
           <p:cNvPr id="9" name="p10-d-1">
             <a:extLst xmlns:a="http://schemas.openxmlformats.org/drawingml/2006/main">
               <a:ext uri="{FF2B5EF4-FFF2-40B4-BE49-F238E27FC236}">
-                <a16:creationId xmlns:a16="http://schemas.microsoft.com/office/drawing/2014/main" id="{56D34F07-3E42-4E90-BFCC-823F34C79378}"/>
+                <a16:creationId xmlns:a16="http://schemas.microsoft.com/office/drawing/2014/main" id="{D09C80F8-44EF-4655-9859-80A8D82BC56C}"/>
               </a:ext>
             </a:extLst>
           </p:cNvPr>
@@ -4745,7 +4727,7 @@
           <p:cNvPr id="10" name="p10-l-2">
             <a:extLst xmlns:a="http://schemas.openxmlformats.org/drawingml/2006/main">
               <a:ext uri="{FF2B5EF4-FFF2-40B4-BE49-F238E27FC236}">
-                <a16:creationId xmlns:a16="http://schemas.microsoft.com/office/drawing/2014/main" id="{75BA32E0-0A86-4593-AA38-822A6B660FAA}"/>
+                <a16:creationId xmlns:a16="http://schemas.microsoft.com/office/drawing/2014/main" id="{6C4E3183-52F5-41B3-9150-68C072BDF6B8}"/>
               </a:ext>
             </a:extLst>
           </p:cNvPr>
@@ -4802,7 +4784,7 @@
           <p:cNvPr id="11" name="p10-d-2">
             <a:extLst xmlns:a="http://schemas.openxmlformats.org/drawingml/2006/main">
               <a:ext uri="{FF2B5EF4-FFF2-40B4-BE49-F238E27FC236}">
-                <a16:creationId xmlns:a16="http://schemas.microsoft.com/office/drawing/2014/main" id="{21758890-0319-40B4-B643-06D5A661F2D8}"/>
+                <a16:creationId xmlns:a16="http://schemas.microsoft.com/office/drawing/2014/main" id="{72048308-0DF2-4A37-8A44-719EBDEA3099}"/>
               </a:ext>
             </a:extLst>
           </p:cNvPr>
@@ -4887,7 +4869,7 @@
           <p:cNvPr id="12" name="p10-l-3">
             <a:extLst xmlns:a="http://schemas.openxmlformats.org/drawingml/2006/main">
               <a:ext uri="{FF2B5EF4-FFF2-40B4-BE49-F238E27FC236}">
-                <a16:creationId xmlns:a16="http://schemas.microsoft.com/office/drawing/2014/main" id="{F6857EDA-72D7-4CD4-AF7E-60B3E5784AFD}"/>
+                <a16:creationId xmlns:a16="http://schemas.microsoft.com/office/drawing/2014/main" id="{DCFFA664-939C-4A78-86BA-242F58321750}"/>
               </a:ext>
             </a:extLst>
           </p:cNvPr>
@@ -4944,7 +4926,7 @@
           <p:cNvPr id="13" name="p10-d-3">
             <a:extLst xmlns:a="http://schemas.openxmlformats.org/drawingml/2006/main">
               <a:ext uri="{FF2B5EF4-FFF2-40B4-BE49-F238E27FC236}">
-                <a16:creationId xmlns:a16="http://schemas.microsoft.com/office/drawing/2014/main" id="{AEB2DB46-57B7-48E6-B2E7-E08EF9B9973C}"/>
+                <a16:creationId xmlns:a16="http://schemas.microsoft.com/office/drawing/2014/main" id="{6AAEA491-D69D-44EB-A19C-AEEDD95F31B8}"/>
               </a:ext>
             </a:extLst>
           </p:cNvPr>
@@ -5029,7 +5011,7 @@
           <p:cNvPr id="14" name="p10-case-title">
             <a:extLst xmlns:a="http://schemas.openxmlformats.org/drawingml/2006/main">
               <a:ext uri="{FF2B5EF4-FFF2-40B4-BE49-F238E27FC236}">
-                <a16:creationId xmlns:a16="http://schemas.microsoft.com/office/drawing/2014/main" id="{4589C024-D117-4050-BB05-5C33DDA2EF1D}"/>
+                <a16:creationId xmlns:a16="http://schemas.microsoft.com/office/drawing/2014/main" id="{1D7A0777-1970-470E-B16C-58C18BC6293C}"/>
               </a:ext>
             </a:extLst>
           </p:cNvPr>
@@ -5082,7 +5064,7 @@
           <p:cNvPr id="15" name="p10-case">
             <a:extLst xmlns:a="http://schemas.openxmlformats.org/drawingml/2006/main">
               <a:ext uri="{FF2B5EF4-FFF2-40B4-BE49-F238E27FC236}">
-                <a16:creationId xmlns:a16="http://schemas.microsoft.com/office/drawing/2014/main" id="{F1D334BD-2849-4EAF-81B8-7DACB5372DA4}"/>
+                <a16:creationId xmlns:a16="http://schemas.microsoft.com/office/drawing/2014/main" id="{B65188ED-D1DC-4A10-8BC4-37DCE64CA32F}"/>
               </a:ext>
             </a:extLst>
           </p:cNvPr>
@@ -5165,7 +5147,7 @@
           <p:cNvPr id="16" name="p10-bottom">
             <a:extLst xmlns:a="http://schemas.openxmlformats.org/drawingml/2006/main">
               <a:ext uri="{FF2B5EF4-FFF2-40B4-BE49-F238E27FC236}">
-                <a16:creationId xmlns:a16="http://schemas.microsoft.com/office/drawing/2014/main" id="{49E139BF-A3D6-4B9D-8BD7-F4D11F2A7EB5}"/>
+                <a16:creationId xmlns:a16="http://schemas.microsoft.com/office/drawing/2014/main" id="{2DEE5E5B-CF20-42F3-90B7-380FE39DA23C}"/>
               </a:ext>
             </a:extLst>
           </p:cNvPr>
@@ -5314,7 +5296,7 @@
           <p:cNvPr id="6" name="p11-line-0">
             <a:extLst xmlns:a="http://schemas.openxmlformats.org/drawingml/2006/main">
               <a:ext uri="{FF2B5EF4-FFF2-40B4-BE49-F238E27FC236}">
-                <a16:creationId xmlns:a16="http://schemas.microsoft.com/office/drawing/2014/main" id="{0FA241AC-C343-475B-BBB9-F8B58411CD84}"/>
+                <a16:creationId xmlns:a16="http://schemas.microsoft.com/office/drawing/2014/main" id="{A6C64F35-877D-4D10-93AD-F916186FB65A}"/>
               </a:ext>
             </a:extLst>
           </p:cNvPr>
@@ -5345,7 +5327,7 @@
           <p:cNvPr id="7" name="p11-line-1">
             <a:extLst xmlns:a="http://schemas.openxmlformats.org/drawingml/2006/main">
               <a:ext uri="{FF2B5EF4-FFF2-40B4-BE49-F238E27FC236}">
-                <a16:creationId xmlns:a16="http://schemas.microsoft.com/office/drawing/2014/main" id="{180F732C-1993-460B-813D-480AFDDB4EDC}"/>
+                <a16:creationId xmlns:a16="http://schemas.microsoft.com/office/drawing/2014/main" id="{BCC072A6-DE81-481C-BDDB-E4711742465E}"/>
               </a:ext>
             </a:extLst>
           </p:cNvPr>
@@ -5376,7 +5358,7 @@
           <p:cNvPr id="8" name="p11-line-2">
             <a:extLst xmlns:a="http://schemas.openxmlformats.org/drawingml/2006/main">
               <a:ext uri="{FF2B5EF4-FFF2-40B4-BE49-F238E27FC236}">
-                <a16:creationId xmlns:a16="http://schemas.microsoft.com/office/drawing/2014/main" id="{08B6533B-0145-4C4E-85EA-6FA92FD55FFC}"/>
+                <a16:creationId xmlns:a16="http://schemas.microsoft.com/office/drawing/2014/main" id="{8D00B6F3-B141-44A5-96C0-BA03E7D00B6B}"/>
               </a:ext>
             </a:extLst>
           </p:cNvPr>
@@ -5407,7 +5389,7 @@
           <p:cNvPr id="9" name="p11-line-3">
             <a:extLst xmlns:a="http://schemas.openxmlformats.org/drawingml/2006/main">
               <a:ext uri="{FF2B5EF4-FFF2-40B4-BE49-F238E27FC236}">
-                <a16:creationId xmlns:a16="http://schemas.microsoft.com/office/drawing/2014/main" id="{F049026B-9EF0-45EE-8939-C60827E412C7}"/>
+                <a16:creationId xmlns:a16="http://schemas.microsoft.com/office/drawing/2014/main" id="{DA617795-18A2-4349-8502-24F95EAA56A9}"/>
               </a:ext>
             </a:extLst>
           </p:cNvPr>
@@ -5438,7 +5420,7 @@
           <p:cNvPr id="10" name="p11-line-4">
             <a:extLst xmlns:a="http://schemas.openxmlformats.org/drawingml/2006/main">
               <a:ext uri="{FF2B5EF4-FFF2-40B4-BE49-F238E27FC236}">
-                <a16:creationId xmlns:a16="http://schemas.microsoft.com/office/drawing/2014/main" id="{3DE39735-C80C-490B-A26B-89B765208913}"/>
+                <a16:creationId xmlns:a16="http://schemas.microsoft.com/office/drawing/2014/main" id="{68ED2E3D-0A5C-4EA1-9BAF-28BD478C84E9}"/>
               </a:ext>
             </a:extLst>
           </p:cNvPr>
@@ -5469,7 +5451,7 @@
           <p:cNvPr id="11" name="p11-label-0">
             <a:extLst xmlns:a="http://schemas.openxmlformats.org/drawingml/2006/main">
               <a:ext uri="{FF2B5EF4-FFF2-40B4-BE49-F238E27FC236}">
-                <a16:creationId xmlns:a16="http://schemas.microsoft.com/office/drawing/2014/main" id="{5CC683B1-3023-4947-A9B3-BD57AE647E68}"/>
+                <a16:creationId xmlns:a16="http://schemas.microsoft.com/office/drawing/2014/main" id="{A4AB490A-5EE4-4187-B789-F64654B3E27D}"/>
               </a:ext>
             </a:extLst>
           </p:cNvPr>
@@ -5526,7 +5508,7 @@
           <p:cNvPr id="12" name="p11-detail-0">
             <a:extLst xmlns:a="http://schemas.openxmlformats.org/drawingml/2006/main">
               <a:ext uri="{FF2B5EF4-FFF2-40B4-BE49-F238E27FC236}">
-                <a16:creationId xmlns:a16="http://schemas.microsoft.com/office/drawing/2014/main" id="{1D6ACF10-1CD0-4478-AEE4-FFBA9D40EF5E}"/>
+                <a16:creationId xmlns:a16="http://schemas.microsoft.com/office/drawing/2014/main" id="{CCD06C63-E8CE-4E45-A7B0-E80355D19EAA}"/>
               </a:ext>
             </a:extLst>
           </p:cNvPr>
@@ -5611,7 +5593,7 @@
           <p:cNvPr id="13" name="p11-label-1">
             <a:extLst xmlns:a="http://schemas.openxmlformats.org/drawingml/2006/main">
               <a:ext uri="{FF2B5EF4-FFF2-40B4-BE49-F238E27FC236}">
-                <a16:creationId xmlns:a16="http://schemas.microsoft.com/office/drawing/2014/main" id="{41B8A68A-1DE1-48B1-8F2E-C84E668060EE}"/>
+                <a16:creationId xmlns:a16="http://schemas.microsoft.com/office/drawing/2014/main" id="{3AD9AF50-598E-414B-B6B1-398D4923C631}"/>
               </a:ext>
             </a:extLst>
           </p:cNvPr>
@@ -5668,7 +5650,7 @@
           <p:cNvPr id="14" name="p11-detail-1">
             <a:extLst xmlns:a="http://schemas.openxmlformats.org/drawingml/2006/main">
               <a:ext uri="{FF2B5EF4-FFF2-40B4-BE49-F238E27FC236}">
-                <a16:creationId xmlns:a16="http://schemas.microsoft.com/office/drawing/2014/main" id="{30B2D705-1DF4-4E42-8CFA-686979DE9F98}"/>
+                <a16:creationId xmlns:a16="http://schemas.microsoft.com/office/drawing/2014/main" id="{167CD543-FC91-4E81-88A1-4E54F0F20BFB}"/>
               </a:ext>
             </a:extLst>
           </p:cNvPr>
@@ -5753,7 +5735,7 @@
           <p:cNvPr id="15" name="p11-label-2">
             <a:extLst xmlns:a="http://schemas.openxmlformats.org/drawingml/2006/main">
               <a:ext uri="{FF2B5EF4-FFF2-40B4-BE49-F238E27FC236}">
-                <a16:creationId xmlns:a16="http://schemas.microsoft.com/office/drawing/2014/main" id="{AD54EAC6-EAC3-421C-9C6E-4E3E29CCFAAA}"/>
+                <a16:creationId xmlns:a16="http://schemas.microsoft.com/office/drawing/2014/main" id="{1D4B4A90-582D-4934-946F-9C4F5BE98896}"/>
               </a:ext>
             </a:extLst>
           </p:cNvPr>
@@ -5810,7 +5792,7 @@
           <p:cNvPr id="16" name="p11-detail-2">
             <a:extLst xmlns:a="http://schemas.openxmlformats.org/drawingml/2006/main">
               <a:ext uri="{FF2B5EF4-FFF2-40B4-BE49-F238E27FC236}">
-                <a16:creationId xmlns:a16="http://schemas.microsoft.com/office/drawing/2014/main" id="{B7D0256F-1F4F-4029-A00B-AA6300092F37}"/>
+                <a16:creationId xmlns:a16="http://schemas.microsoft.com/office/drawing/2014/main" id="{B5AD0EA9-6E7F-4914-A392-48FB3ABD2F2A}"/>
               </a:ext>
             </a:extLst>
           </p:cNvPr>
@@ -5919,7 +5901,7 @@
           <p:cNvPr id="17" name="p11-label-3">
             <a:extLst xmlns:a="http://schemas.openxmlformats.org/drawingml/2006/main">
               <a:ext uri="{FF2B5EF4-FFF2-40B4-BE49-F238E27FC236}">
-                <a16:creationId xmlns:a16="http://schemas.microsoft.com/office/drawing/2014/main" id="{308FF67E-BE0D-4130-9FB7-17412715F81D}"/>
+                <a16:creationId xmlns:a16="http://schemas.microsoft.com/office/drawing/2014/main" id="{3E13CF26-2AF9-439C-8896-D39B333C0D0D}"/>
               </a:ext>
             </a:extLst>
           </p:cNvPr>
@@ -5976,7 +5958,7 @@
           <p:cNvPr id="18" name="p11-detail-3">
             <a:extLst xmlns:a="http://schemas.openxmlformats.org/drawingml/2006/main">
               <a:ext uri="{FF2B5EF4-FFF2-40B4-BE49-F238E27FC236}">
-                <a16:creationId xmlns:a16="http://schemas.microsoft.com/office/drawing/2014/main" id="{8978E6AD-3592-4B75-BD3C-637EDC938B30}"/>
+                <a16:creationId xmlns:a16="http://schemas.microsoft.com/office/drawing/2014/main" id="{3D2829D0-1526-4510-81F5-9FE1C9D67BC7}"/>
               </a:ext>
             </a:extLst>
           </p:cNvPr>
@@ -6061,7 +6043,7 @@
           <p:cNvPr id="19" name="p11-label-4">
             <a:extLst xmlns:a="http://schemas.openxmlformats.org/drawingml/2006/main">
               <a:ext uri="{FF2B5EF4-FFF2-40B4-BE49-F238E27FC236}">
-                <a16:creationId xmlns:a16="http://schemas.microsoft.com/office/drawing/2014/main" id="{E41490EC-32B2-4CC5-BE4D-60918B89AEA9}"/>
+                <a16:creationId xmlns:a16="http://schemas.microsoft.com/office/drawing/2014/main" id="{FF14A3A0-25FB-4E67-AC6A-EB28B3A8FD40}"/>
               </a:ext>
             </a:extLst>
           </p:cNvPr>
@@ -6118,7 +6100,7 @@
           <p:cNvPr id="20" name="p11-detail-4">
             <a:extLst xmlns:a="http://schemas.openxmlformats.org/drawingml/2006/main">
               <a:ext uri="{FF2B5EF4-FFF2-40B4-BE49-F238E27FC236}">
-                <a16:creationId xmlns:a16="http://schemas.microsoft.com/office/drawing/2014/main" id="{1663FE64-57E5-4B09-8707-CE4A195B623E}"/>
+                <a16:creationId xmlns:a16="http://schemas.microsoft.com/office/drawing/2014/main" id="{E78FC20F-5CF6-4A82-8729-20BC81CFD152}"/>
               </a:ext>
             </a:extLst>
           </p:cNvPr>
@@ -6203,7 +6185,7 @@
           <p:cNvPr id="21" name="p11-label-5">
             <a:extLst xmlns:a="http://schemas.openxmlformats.org/drawingml/2006/main">
               <a:ext uri="{FF2B5EF4-FFF2-40B4-BE49-F238E27FC236}">
-                <a16:creationId xmlns:a16="http://schemas.microsoft.com/office/drawing/2014/main" id="{373E65BE-A934-4241-981F-6BCD531F3135}"/>
+                <a16:creationId xmlns:a16="http://schemas.microsoft.com/office/drawing/2014/main" id="{AD6C7390-8A31-4523-8283-5C113B2FFEC3}"/>
               </a:ext>
             </a:extLst>
           </p:cNvPr>
@@ -6260,7 +6242,7 @@
           <p:cNvPr id="22" name="p11-detail-5">
             <a:extLst xmlns:a="http://schemas.openxmlformats.org/drawingml/2006/main">
               <a:ext uri="{FF2B5EF4-FFF2-40B4-BE49-F238E27FC236}">
-                <a16:creationId xmlns:a16="http://schemas.microsoft.com/office/drawing/2014/main" id="{770D0328-FA9E-40AE-88CF-6C1FC12EAF28}"/>
+                <a16:creationId xmlns:a16="http://schemas.microsoft.com/office/drawing/2014/main" id="{964BA611-A05D-4633-9DED-EDF21DB53B33}"/>
               </a:ext>
             </a:extLst>
           </p:cNvPr>
@@ -6345,7 +6327,7 @@
           <p:cNvPr id="23" name="p11-def">
             <a:extLst xmlns:a="http://schemas.openxmlformats.org/drawingml/2006/main">
               <a:ext uri="{FF2B5EF4-FFF2-40B4-BE49-F238E27FC236}">
-                <a16:creationId xmlns:a16="http://schemas.microsoft.com/office/drawing/2014/main" id="{1F8041DF-D6F5-4DF8-A7C5-3E853D588D54}"/>
+                <a16:creationId xmlns:a16="http://schemas.microsoft.com/office/drawing/2014/main" id="{A8C3A765-24E4-4D04-AADF-90F42A363EB4}"/>
               </a:ext>
             </a:extLst>
           </p:cNvPr>
@@ -6400,7 +6382,7 @@
           <p:cNvPr id="24" name="p11-limit">
             <a:extLst xmlns:a="http://schemas.openxmlformats.org/drawingml/2006/main">
               <a:ext uri="{FF2B5EF4-FFF2-40B4-BE49-F238E27FC236}">
-                <a16:creationId xmlns:a16="http://schemas.microsoft.com/office/drawing/2014/main" id="{622F40DF-6DA8-4293-91F8-5CF9635EB904}"/>
+                <a16:creationId xmlns:a16="http://schemas.microsoft.com/office/drawing/2014/main" id="{CBC2FC3E-E18D-45ED-9257-15BEF88E277B}"/>
               </a:ext>
             </a:extLst>
           </p:cNvPr>
@@ -6549,7 +6531,7 @@
           <p:cNvPr id="6" name="p12-src-0">
             <a:extLst xmlns:a="http://schemas.openxmlformats.org/drawingml/2006/main">
               <a:ext uri="{FF2B5EF4-FFF2-40B4-BE49-F238E27FC236}">
-                <a16:creationId xmlns:a16="http://schemas.microsoft.com/office/drawing/2014/main" id="{1679FB45-CB57-4947-9233-C166EE27DF20}"/>
+                <a16:creationId xmlns:a16="http://schemas.microsoft.com/office/drawing/2014/main" id="{1E68ADF9-25F3-458C-91A4-03D2B88D38A7}"/>
               </a:ext>
             </a:extLst>
           </p:cNvPr>
@@ -6610,7 +6592,7 @@
           <p:cNvPr id="7" name="p12-src-1">
             <a:extLst xmlns:a="http://schemas.openxmlformats.org/drawingml/2006/main">
               <a:ext uri="{FF2B5EF4-FFF2-40B4-BE49-F238E27FC236}">
-                <a16:creationId xmlns:a16="http://schemas.microsoft.com/office/drawing/2014/main" id="{D6EA45F0-9D5E-480C-A0AC-CB849F8F6B56}"/>
+                <a16:creationId xmlns:a16="http://schemas.microsoft.com/office/drawing/2014/main" id="{EF317F2B-5329-49A9-AC83-B3EC6F85CC20}"/>
               </a:ext>
             </a:extLst>
           </p:cNvPr>
@@ -6671,7 +6653,7 @@
           <p:cNvPr id="8" name="p12-src-2">
             <a:extLst xmlns:a="http://schemas.openxmlformats.org/drawingml/2006/main">
               <a:ext uri="{FF2B5EF4-FFF2-40B4-BE49-F238E27FC236}">
-                <a16:creationId xmlns:a16="http://schemas.microsoft.com/office/drawing/2014/main" id="{22AC1F63-0A54-474C-A12B-3F534376225F}"/>
+                <a16:creationId xmlns:a16="http://schemas.microsoft.com/office/drawing/2014/main" id="{FD025659-B962-4FB4-94C7-19E8B29F5DD1}"/>
               </a:ext>
             </a:extLst>
           </p:cNvPr>
@@ -6732,7 +6714,7 @@
           <p:cNvPr id="9" name="p12-src-3">
             <a:extLst xmlns:a="http://schemas.openxmlformats.org/drawingml/2006/main">
               <a:ext uri="{FF2B5EF4-FFF2-40B4-BE49-F238E27FC236}">
-                <a16:creationId xmlns:a16="http://schemas.microsoft.com/office/drawing/2014/main" id="{79A7DC58-7482-4A2E-98BE-841B55FE4001}"/>
+                <a16:creationId xmlns:a16="http://schemas.microsoft.com/office/drawing/2014/main" id="{E35E3761-32C4-4E92-923B-E167BAF3B4B6}"/>
               </a:ext>
             </a:extLst>
           </p:cNvPr>
@@ -6793,7 +6775,7 @@
           <p:cNvPr id="10" name="p12-line-0">
             <a:extLst xmlns:a="http://schemas.openxmlformats.org/drawingml/2006/main">
               <a:ext uri="{FF2B5EF4-FFF2-40B4-BE49-F238E27FC236}">
-                <a16:creationId xmlns:a16="http://schemas.microsoft.com/office/drawing/2014/main" id="{38983E10-3122-4E4E-A71D-D290F782CE26}"/>
+                <a16:creationId xmlns:a16="http://schemas.microsoft.com/office/drawing/2014/main" id="{F06D53FF-F9D2-431C-95D4-40C04FE82986}"/>
               </a:ext>
             </a:extLst>
           </p:cNvPr>
@@ -6824,7 +6806,7 @@
           <p:cNvPr id="11" name="p12-line-1">
             <a:extLst xmlns:a="http://schemas.openxmlformats.org/drawingml/2006/main">
               <a:ext uri="{FF2B5EF4-FFF2-40B4-BE49-F238E27FC236}">
-                <a16:creationId xmlns:a16="http://schemas.microsoft.com/office/drawing/2014/main" id="{961D7DA8-EEA5-423D-9B34-E4D806887138}"/>
+                <a16:creationId xmlns:a16="http://schemas.microsoft.com/office/drawing/2014/main" id="{E5F358CE-0FCB-438F-A4E0-8438C066F956}"/>
               </a:ext>
             </a:extLst>
           </p:cNvPr>
@@ -6855,7 +6837,7 @@
           <p:cNvPr id="12" name="p12-line-2">
             <a:extLst xmlns:a="http://schemas.openxmlformats.org/drawingml/2006/main">
               <a:ext uri="{FF2B5EF4-FFF2-40B4-BE49-F238E27FC236}">
-                <a16:creationId xmlns:a16="http://schemas.microsoft.com/office/drawing/2014/main" id="{18E6BCA5-370D-4995-9F2F-2F0CBAA47EB0}"/>
+                <a16:creationId xmlns:a16="http://schemas.microsoft.com/office/drawing/2014/main" id="{FF6769F4-7DFC-4B9C-B09F-1A389245C0BB}"/>
               </a:ext>
             </a:extLst>
           </p:cNvPr>
@@ -6886,7 +6868,7 @@
           <p:cNvPr id="13" name="p12-line-3">
             <a:extLst xmlns:a="http://schemas.openxmlformats.org/drawingml/2006/main">
               <a:ext uri="{FF2B5EF4-FFF2-40B4-BE49-F238E27FC236}">
-                <a16:creationId xmlns:a16="http://schemas.microsoft.com/office/drawing/2014/main" id="{F8F35CFA-08E5-4735-935B-6890CAA3E839}"/>
+                <a16:creationId xmlns:a16="http://schemas.microsoft.com/office/drawing/2014/main" id="{E757561E-7425-420A-801B-6B58CEE62140}"/>
               </a:ext>
             </a:extLst>
           </p:cNvPr>
@@ -6917,7 +6899,7 @@
           <p:cNvPr id="14" name="p12-finding">
             <a:extLst xmlns:a="http://schemas.openxmlformats.org/drawingml/2006/main">
               <a:ext uri="{FF2B5EF4-FFF2-40B4-BE49-F238E27FC236}">
-                <a16:creationId xmlns:a16="http://schemas.microsoft.com/office/drawing/2014/main" id="{D4B2541D-5484-473B-88B0-875940321551}"/>
+                <a16:creationId xmlns:a16="http://schemas.microsoft.com/office/drawing/2014/main" id="{3D8A3737-093E-474B-8789-B91C1BFDCF5B}"/>
               </a:ext>
             </a:extLst>
           </p:cNvPr>
@@ -6972,7 +6954,7 @@
           <p:cNvPr id="15" name="p12-n-0">
             <a:extLst xmlns:a="http://schemas.openxmlformats.org/drawingml/2006/main">
               <a:ext uri="{FF2B5EF4-FFF2-40B4-BE49-F238E27FC236}">
-                <a16:creationId xmlns:a16="http://schemas.microsoft.com/office/drawing/2014/main" id="{A985027C-ACD8-43EB-8E19-AABCD6D5DF47}"/>
+                <a16:creationId xmlns:a16="http://schemas.microsoft.com/office/drawing/2014/main" id="{8272FDF7-8941-49C0-BE13-A05803037AAA}"/>
               </a:ext>
             </a:extLst>
           </p:cNvPr>
@@ -7029,7 +7011,7 @@
           <p:cNvPr id="16" name="p12-s-0">
             <a:extLst xmlns:a="http://schemas.openxmlformats.org/drawingml/2006/main">
               <a:ext uri="{FF2B5EF4-FFF2-40B4-BE49-F238E27FC236}">
-                <a16:creationId xmlns:a16="http://schemas.microsoft.com/office/drawing/2014/main" id="{EF903436-902F-45BD-ACFE-C791193C60A8}"/>
+                <a16:creationId xmlns:a16="http://schemas.microsoft.com/office/drawing/2014/main" id="{B4CFDC41-C4C6-4F33-833C-541F2E5145D2}"/>
               </a:ext>
             </a:extLst>
           </p:cNvPr>
@@ -7084,7 +7066,7 @@
           <p:cNvPr id="17" name="p12-n-1">
             <a:extLst xmlns:a="http://schemas.openxmlformats.org/drawingml/2006/main">
               <a:ext uri="{FF2B5EF4-FFF2-40B4-BE49-F238E27FC236}">
-                <a16:creationId xmlns:a16="http://schemas.microsoft.com/office/drawing/2014/main" id="{93D774BB-108C-47B1-AFBD-2E4F3DFF5689}"/>
+                <a16:creationId xmlns:a16="http://schemas.microsoft.com/office/drawing/2014/main" id="{270C20A0-F3D9-4111-A7FD-777DF3FD461E}"/>
               </a:ext>
             </a:extLst>
           </p:cNvPr>
@@ -7141,7 +7123,7 @@
           <p:cNvPr id="18" name="p12-s-1">
             <a:extLst xmlns:a="http://schemas.openxmlformats.org/drawingml/2006/main">
               <a:ext uri="{FF2B5EF4-FFF2-40B4-BE49-F238E27FC236}">
-                <a16:creationId xmlns:a16="http://schemas.microsoft.com/office/drawing/2014/main" id="{128CC042-F149-486E-A0D9-2ADF12E92F3B}"/>
+                <a16:creationId xmlns:a16="http://schemas.microsoft.com/office/drawing/2014/main" id="{559AC533-F347-48FD-B476-317F17128444}"/>
               </a:ext>
             </a:extLst>
           </p:cNvPr>
@@ -7196,7 +7178,7 @@
           <p:cNvPr id="19" name="p12-n-2">
             <a:extLst xmlns:a="http://schemas.openxmlformats.org/drawingml/2006/main">
               <a:ext uri="{FF2B5EF4-FFF2-40B4-BE49-F238E27FC236}">
-                <a16:creationId xmlns:a16="http://schemas.microsoft.com/office/drawing/2014/main" id="{07430CCD-590E-4C8E-8E7C-973448408F95}"/>
+                <a16:creationId xmlns:a16="http://schemas.microsoft.com/office/drawing/2014/main" id="{132DB8D3-4280-482F-8859-081F1F692DE0}"/>
               </a:ext>
             </a:extLst>
           </p:cNvPr>
@@ -7253,7 +7235,7 @@
           <p:cNvPr id="20" name="p12-s-2">
             <a:extLst xmlns:a="http://schemas.openxmlformats.org/drawingml/2006/main">
               <a:ext uri="{FF2B5EF4-FFF2-40B4-BE49-F238E27FC236}">
-                <a16:creationId xmlns:a16="http://schemas.microsoft.com/office/drawing/2014/main" id="{BA373A60-2483-4D89-AC72-10F09A62D69B}"/>
+                <a16:creationId xmlns:a16="http://schemas.microsoft.com/office/drawing/2014/main" id="{4B1F51C7-5D88-4FDF-9AD0-8F4CFF62B4B7}"/>
               </a:ext>
             </a:extLst>
           </p:cNvPr>
@@ -7308,7 +7290,7 @@
           <p:cNvPr id="21" name="p12-n-3">
             <a:extLst xmlns:a="http://schemas.openxmlformats.org/drawingml/2006/main">
               <a:ext uri="{FF2B5EF4-FFF2-40B4-BE49-F238E27FC236}">
-                <a16:creationId xmlns:a16="http://schemas.microsoft.com/office/drawing/2014/main" id="{5E7C365C-D6E8-459B-86E0-EE0018276C05}"/>
+                <a16:creationId xmlns:a16="http://schemas.microsoft.com/office/drawing/2014/main" id="{5295536C-A36A-401F-980C-94872E1CBABE}"/>
               </a:ext>
             </a:extLst>
           </p:cNvPr>
@@ -7365,7 +7347,7 @@
           <p:cNvPr id="22" name="p12-s-3">
             <a:extLst xmlns:a="http://schemas.openxmlformats.org/drawingml/2006/main">
               <a:ext uri="{FF2B5EF4-FFF2-40B4-BE49-F238E27FC236}">
-                <a16:creationId xmlns:a16="http://schemas.microsoft.com/office/drawing/2014/main" id="{E643874D-EACD-42D9-8530-17C1171533C3}"/>
+                <a16:creationId xmlns:a16="http://schemas.microsoft.com/office/drawing/2014/main" id="{674342A7-A968-4BAC-8961-18D2CC2ECA21}"/>
               </a:ext>
             </a:extLst>
           </p:cNvPr>
@@ -7420,7 +7402,7 @@
           <p:cNvPr id="23" name="p12-bottom">
             <a:extLst xmlns:a="http://schemas.openxmlformats.org/drawingml/2006/main">
               <a:ext uri="{FF2B5EF4-FFF2-40B4-BE49-F238E27FC236}">
-                <a16:creationId xmlns:a16="http://schemas.microsoft.com/office/drawing/2014/main" id="{AE74D19D-AD92-4EA2-B7B4-1058A10F8407}"/>
+                <a16:creationId xmlns:a16="http://schemas.microsoft.com/office/drawing/2014/main" id="{4257CBA7-5EB8-4F52-9717-DB374251F4AA}"/>
               </a:ext>
             </a:extLst>
           </p:cNvPr>
@@ -7567,7 +7549,7 @@
           <p:cNvPr id="6" name="p13-l-0">
             <a:extLst xmlns:a="http://schemas.openxmlformats.org/drawingml/2006/main">
               <a:ext uri="{FF2B5EF4-FFF2-40B4-BE49-F238E27FC236}">
-                <a16:creationId xmlns:a16="http://schemas.microsoft.com/office/drawing/2014/main" id="{17AB5A89-A854-412A-95A8-036A713E4E38}"/>
+                <a16:creationId xmlns:a16="http://schemas.microsoft.com/office/drawing/2014/main" id="{40FA6961-8A80-4F5B-A110-4A7A2FD4209B}"/>
               </a:ext>
             </a:extLst>
           </p:cNvPr>
@@ -7624,7 +7606,7 @@
           <p:cNvPr id="7" name="p13-d-0">
             <a:extLst xmlns:a="http://schemas.openxmlformats.org/drawingml/2006/main">
               <a:ext uri="{FF2B5EF4-FFF2-40B4-BE49-F238E27FC236}">
-                <a16:creationId xmlns:a16="http://schemas.microsoft.com/office/drawing/2014/main" id="{D1FAF18F-23C7-4C5E-9791-16B8226C64C6}"/>
+                <a16:creationId xmlns:a16="http://schemas.microsoft.com/office/drawing/2014/main" id="{A7068EB0-0754-4D52-A9B8-3D1DCDCA3AC0}"/>
               </a:ext>
             </a:extLst>
           </p:cNvPr>
@@ -7714,7 +7696,7 @@
           <p:cNvPr id="8" name="p13-l-1">
             <a:extLst xmlns:a="http://schemas.openxmlformats.org/drawingml/2006/main">
               <a:ext uri="{FF2B5EF4-FFF2-40B4-BE49-F238E27FC236}">
-                <a16:creationId xmlns:a16="http://schemas.microsoft.com/office/drawing/2014/main" id="{283C9041-1586-4727-95B4-B16819356C94}"/>
+                <a16:creationId xmlns:a16="http://schemas.microsoft.com/office/drawing/2014/main" id="{0117505A-AF24-42A6-8B88-FCEE5B2715ED}"/>
               </a:ext>
             </a:extLst>
           </p:cNvPr>
@@ -7771,7 +7753,7 @@
           <p:cNvPr id="9" name="p13-d-1">
             <a:extLst xmlns:a="http://schemas.openxmlformats.org/drawingml/2006/main">
               <a:ext uri="{FF2B5EF4-FFF2-40B4-BE49-F238E27FC236}">
-                <a16:creationId xmlns:a16="http://schemas.microsoft.com/office/drawing/2014/main" id="{2AB4FD55-71ED-4652-8A49-D1DA008B212C}"/>
+                <a16:creationId xmlns:a16="http://schemas.microsoft.com/office/drawing/2014/main" id="{4EBE2401-FB6F-43AC-8083-EC7174AB256B}"/>
               </a:ext>
             </a:extLst>
           </p:cNvPr>
@@ -7861,7 +7843,7 @@
           <p:cNvPr id="10" name="p13-l-2">
             <a:extLst xmlns:a="http://schemas.openxmlformats.org/drawingml/2006/main">
               <a:ext uri="{FF2B5EF4-FFF2-40B4-BE49-F238E27FC236}">
-                <a16:creationId xmlns:a16="http://schemas.microsoft.com/office/drawing/2014/main" id="{9253B4C0-94FF-4962-8629-2326AB83261A}"/>
+                <a16:creationId xmlns:a16="http://schemas.microsoft.com/office/drawing/2014/main" id="{3F11C4B4-D29E-4BB6-A954-8ECFE1DFA49B}"/>
               </a:ext>
             </a:extLst>
           </p:cNvPr>
@@ -7918,7 +7900,7 @@
           <p:cNvPr id="11" name="p13-d-2">
             <a:extLst xmlns:a="http://schemas.openxmlformats.org/drawingml/2006/main">
               <a:ext uri="{FF2B5EF4-FFF2-40B4-BE49-F238E27FC236}">
-                <a16:creationId xmlns:a16="http://schemas.microsoft.com/office/drawing/2014/main" id="{D4805376-3293-4162-974E-868E29906D8F}"/>
+                <a16:creationId xmlns:a16="http://schemas.microsoft.com/office/drawing/2014/main" id="{80351889-E22F-4292-B900-D95414AA39E8}"/>
               </a:ext>
             </a:extLst>
           </p:cNvPr>
@@ -8008,7 +7990,7 @@
           <p:cNvPr id="12" name="p13-arrow-1">
             <a:extLst xmlns:a="http://schemas.openxmlformats.org/drawingml/2006/main">
               <a:ext uri="{FF2B5EF4-FFF2-40B4-BE49-F238E27FC236}">
-                <a16:creationId xmlns:a16="http://schemas.microsoft.com/office/drawing/2014/main" id="{A59F4B0B-72D5-4B6E-9D6A-7C685C4C93E7}"/>
+                <a16:creationId xmlns:a16="http://schemas.microsoft.com/office/drawing/2014/main" id="{9470EDA6-B6E8-4FA4-AA32-DDBA833B89B2}"/>
               </a:ext>
             </a:extLst>
           </p:cNvPr>
@@ -8039,7 +8021,7 @@
           <p:cNvPr id="13" name="p13-arrow-2">
             <a:extLst xmlns:a="http://schemas.openxmlformats.org/drawingml/2006/main">
               <a:ext uri="{FF2B5EF4-FFF2-40B4-BE49-F238E27FC236}">
-                <a16:creationId xmlns:a16="http://schemas.microsoft.com/office/drawing/2014/main" id="{0EC1B5F5-18BE-4085-ACAE-8DD18A9F2515}"/>
+                <a16:creationId xmlns:a16="http://schemas.microsoft.com/office/drawing/2014/main" id="{176F4FE2-135F-437D-A0DF-6C79D86CEC05}"/>
               </a:ext>
             </a:extLst>
           </p:cNvPr>
@@ -8070,7 +8052,7 @@
           <p:cNvPr id="14" name="p13-higher">
             <a:extLst xmlns:a="http://schemas.openxmlformats.org/drawingml/2006/main">
               <a:ext uri="{FF2B5EF4-FFF2-40B4-BE49-F238E27FC236}">
-                <a16:creationId xmlns:a16="http://schemas.microsoft.com/office/drawing/2014/main" id="{CBD97CFB-7B50-4AC0-A022-9762D41497F0}"/>
+                <a16:creationId xmlns:a16="http://schemas.microsoft.com/office/drawing/2014/main" id="{5DA24BB1-9746-4CAE-B07A-B6E2950F6ADB}"/>
               </a:ext>
             </a:extLst>
           </p:cNvPr>
@@ -8125,7 +8107,7 @@
           <p:cNvPr id="15" name="p13-bottom">
             <a:extLst xmlns:a="http://schemas.openxmlformats.org/drawingml/2006/main">
               <a:ext uri="{FF2B5EF4-FFF2-40B4-BE49-F238E27FC236}">
-                <a16:creationId xmlns:a16="http://schemas.microsoft.com/office/drawing/2014/main" id="{D85021AD-1355-4D26-BC36-4A9D1975593E}"/>
+                <a16:creationId xmlns:a16="http://schemas.microsoft.com/office/drawing/2014/main" id="{21DEEA0F-60F1-488A-8BA0-D139C996FD88}"/>
               </a:ext>
             </a:extLst>
           </p:cNvPr>
@@ -8272,7 +8254,7 @@
           <p:cNvPr id="6" name="p14-map-h-0">
             <a:extLst xmlns:a="http://schemas.openxmlformats.org/drawingml/2006/main">
               <a:ext uri="{FF2B5EF4-FFF2-40B4-BE49-F238E27FC236}">
-                <a16:creationId xmlns:a16="http://schemas.microsoft.com/office/drawing/2014/main" id="{3F2530EE-A01F-422B-A884-416638354F32}"/>
+                <a16:creationId xmlns:a16="http://schemas.microsoft.com/office/drawing/2014/main" id="{124DBDF8-C0AF-4A15-85E3-04E5A3590D66}"/>
               </a:ext>
             </a:extLst>
           </p:cNvPr>
@@ -8327,7 +8309,7 @@
           <p:cNvPr id="7" name="p14-map-h-1">
             <a:extLst xmlns:a="http://schemas.openxmlformats.org/drawingml/2006/main">
               <a:ext uri="{FF2B5EF4-FFF2-40B4-BE49-F238E27FC236}">
-                <a16:creationId xmlns:a16="http://schemas.microsoft.com/office/drawing/2014/main" id="{93E5BCCD-DEB8-4571-A950-1F09F86ACA50}"/>
+                <a16:creationId xmlns:a16="http://schemas.microsoft.com/office/drawing/2014/main" id="{4466476B-E13B-495E-8F53-D3ED622BAE7C}"/>
               </a:ext>
             </a:extLst>
           </p:cNvPr>
@@ -8382,7 +8364,7 @@
           <p:cNvPr id="8" name="p14-map-h-2">
             <a:extLst xmlns:a="http://schemas.openxmlformats.org/drawingml/2006/main">
               <a:ext uri="{FF2B5EF4-FFF2-40B4-BE49-F238E27FC236}">
-                <a16:creationId xmlns:a16="http://schemas.microsoft.com/office/drawing/2014/main" id="{7B277FD0-FD67-4277-804B-1479FD156CE7}"/>
+                <a16:creationId xmlns:a16="http://schemas.microsoft.com/office/drawing/2014/main" id="{250A5558-B3EC-480C-BD2D-166AE736C537}"/>
               </a:ext>
             </a:extLst>
           </p:cNvPr>
@@ -8437,7 +8419,7 @@
           <p:cNvPr id="9" name="p14-map-r0-0">
             <a:extLst xmlns:a="http://schemas.openxmlformats.org/drawingml/2006/main">
               <a:ext uri="{FF2B5EF4-FFF2-40B4-BE49-F238E27FC236}">
-                <a16:creationId xmlns:a16="http://schemas.microsoft.com/office/drawing/2014/main" id="{8A64D547-4D1B-482A-BDB4-9A27A0B51B76}"/>
+                <a16:creationId xmlns:a16="http://schemas.microsoft.com/office/drawing/2014/main" id="{DAC8CD10-C81D-4C3E-85CA-E16EFD024091}"/>
               </a:ext>
             </a:extLst>
           </p:cNvPr>
@@ -8498,7 +8480,7 @@
           <p:cNvPr id="10" name="p14-map-r0-1">
             <a:extLst xmlns:a="http://schemas.openxmlformats.org/drawingml/2006/main">
               <a:ext uri="{FF2B5EF4-FFF2-40B4-BE49-F238E27FC236}">
-                <a16:creationId xmlns:a16="http://schemas.microsoft.com/office/drawing/2014/main" id="{9C3B8688-945C-432F-8E68-CEC4A70BDAFA}"/>
+                <a16:creationId xmlns:a16="http://schemas.microsoft.com/office/drawing/2014/main" id="{1810EBEB-0CF3-4CA9-9477-FA2BC0EFEC24}"/>
               </a:ext>
             </a:extLst>
           </p:cNvPr>
@@ -8559,7 +8541,7 @@
           <p:cNvPr id="11" name="p14-map-r0-2">
             <a:extLst xmlns:a="http://schemas.openxmlformats.org/drawingml/2006/main">
               <a:ext uri="{FF2B5EF4-FFF2-40B4-BE49-F238E27FC236}">
-                <a16:creationId xmlns:a16="http://schemas.microsoft.com/office/drawing/2014/main" id="{21241981-0C6F-4572-BC7B-8C60365D9A8A}"/>
+                <a16:creationId xmlns:a16="http://schemas.microsoft.com/office/drawing/2014/main" id="{C80EF6C8-AD8A-4C82-BA08-7A2D38C0A1B7}"/>
               </a:ext>
             </a:extLst>
           </p:cNvPr>
@@ -8620,7 +8602,7 @@
           <p:cNvPr id="12" name="p14-map-r1-0">
             <a:extLst xmlns:a="http://schemas.openxmlformats.org/drawingml/2006/main">
               <a:ext uri="{FF2B5EF4-FFF2-40B4-BE49-F238E27FC236}">
-                <a16:creationId xmlns:a16="http://schemas.microsoft.com/office/drawing/2014/main" id="{19721F14-004A-472A-A09C-A759CA5FFF9B}"/>
+                <a16:creationId xmlns:a16="http://schemas.microsoft.com/office/drawing/2014/main" id="{D34641FA-891C-4C8C-91B6-DD93716A5291}"/>
               </a:ext>
             </a:extLst>
           </p:cNvPr>
@@ -8681,7 +8663,7 @@
           <p:cNvPr id="13" name="p14-map-r1-1">
             <a:extLst xmlns:a="http://schemas.openxmlformats.org/drawingml/2006/main">
               <a:ext uri="{FF2B5EF4-FFF2-40B4-BE49-F238E27FC236}">
-                <a16:creationId xmlns:a16="http://schemas.microsoft.com/office/drawing/2014/main" id="{85FE1411-B4D5-409D-832B-EED65010CBB3}"/>
+                <a16:creationId xmlns:a16="http://schemas.microsoft.com/office/drawing/2014/main" id="{69DDB529-5478-4A3E-A18D-AF8531F9E090}"/>
               </a:ext>
             </a:extLst>
           </p:cNvPr>
@@ -8742,7 +8724,7 @@
           <p:cNvPr id="14" name="p14-map-r1-2">
             <a:extLst xmlns:a="http://schemas.openxmlformats.org/drawingml/2006/main">
               <a:ext uri="{FF2B5EF4-FFF2-40B4-BE49-F238E27FC236}">
-                <a16:creationId xmlns:a16="http://schemas.microsoft.com/office/drawing/2014/main" id="{5D91277E-F4E8-44CE-A332-188257B4DE9E}"/>
+                <a16:creationId xmlns:a16="http://schemas.microsoft.com/office/drawing/2014/main" id="{D2AFF443-9036-4567-8C37-B2C691879A28}"/>
               </a:ext>
             </a:extLst>
           </p:cNvPr>
@@ -8803,7 +8785,7 @@
           <p:cNvPr id="15" name="p14-map-r2-0">
             <a:extLst xmlns:a="http://schemas.openxmlformats.org/drawingml/2006/main">
               <a:ext uri="{FF2B5EF4-FFF2-40B4-BE49-F238E27FC236}">
-                <a16:creationId xmlns:a16="http://schemas.microsoft.com/office/drawing/2014/main" id="{1ABCCE81-0C43-4F5D-B6E4-448C8F1FD5F7}"/>
+                <a16:creationId xmlns:a16="http://schemas.microsoft.com/office/drawing/2014/main" id="{405DB0A2-9B4E-4FCB-862A-96C96A1691E6}"/>
               </a:ext>
             </a:extLst>
           </p:cNvPr>
@@ -8864,7 +8846,7 @@
           <p:cNvPr id="16" name="p14-map-r2-1">
             <a:extLst xmlns:a="http://schemas.openxmlformats.org/drawingml/2006/main">
               <a:ext uri="{FF2B5EF4-FFF2-40B4-BE49-F238E27FC236}">
-                <a16:creationId xmlns:a16="http://schemas.microsoft.com/office/drawing/2014/main" id="{023EE682-2F68-4D98-87DA-F0AF69386C4C}"/>
+                <a16:creationId xmlns:a16="http://schemas.microsoft.com/office/drawing/2014/main" id="{AE97B38E-BE72-40C6-BD05-38AE1B60D86D}"/>
               </a:ext>
             </a:extLst>
           </p:cNvPr>
@@ -8925,7 +8907,7 @@
           <p:cNvPr id="17" name="p14-map-r2-2">
             <a:extLst xmlns:a="http://schemas.openxmlformats.org/drawingml/2006/main">
               <a:ext uri="{FF2B5EF4-FFF2-40B4-BE49-F238E27FC236}">
-                <a16:creationId xmlns:a16="http://schemas.microsoft.com/office/drawing/2014/main" id="{F3D2CFAE-911E-4C80-9B1E-4A805CEB6A0E}"/>
+                <a16:creationId xmlns:a16="http://schemas.microsoft.com/office/drawing/2014/main" id="{7DB3E509-0ED4-41F4-AED0-945E1D0F77A6}"/>
               </a:ext>
             </a:extLst>
           </p:cNvPr>
@@ -8986,7 +8968,7 @@
           <p:cNvPr id="18" name="p14-map-r3-0">
             <a:extLst xmlns:a="http://schemas.openxmlformats.org/drawingml/2006/main">
               <a:ext uri="{FF2B5EF4-FFF2-40B4-BE49-F238E27FC236}">
-                <a16:creationId xmlns:a16="http://schemas.microsoft.com/office/drawing/2014/main" id="{7DC1491F-6F1D-4B30-A4FB-3B48F924C7DE}"/>
+                <a16:creationId xmlns:a16="http://schemas.microsoft.com/office/drawing/2014/main" id="{9BA3674E-362C-489B-90A5-553F10D1C6D3}"/>
               </a:ext>
             </a:extLst>
           </p:cNvPr>
@@ -9047,7 +9029,7 @@
           <p:cNvPr id="19" name="p14-map-r3-1">
             <a:extLst xmlns:a="http://schemas.openxmlformats.org/drawingml/2006/main">
               <a:ext uri="{FF2B5EF4-FFF2-40B4-BE49-F238E27FC236}">
-                <a16:creationId xmlns:a16="http://schemas.microsoft.com/office/drawing/2014/main" id="{A1768933-2363-4F4E-99A8-2EC641BC925E}"/>
+                <a16:creationId xmlns:a16="http://schemas.microsoft.com/office/drawing/2014/main" id="{B7212264-0993-4B9F-9607-9FFEE2EA3C91}"/>
               </a:ext>
             </a:extLst>
           </p:cNvPr>
@@ -9108,7 +9090,7 @@
           <p:cNvPr id="20" name="p14-map-r3-2">
             <a:extLst xmlns:a="http://schemas.openxmlformats.org/drawingml/2006/main">
               <a:ext uri="{FF2B5EF4-FFF2-40B4-BE49-F238E27FC236}">
-                <a16:creationId xmlns:a16="http://schemas.microsoft.com/office/drawing/2014/main" id="{81C8767C-CFA6-4CE7-9437-BC7AEC5081B3}"/>
+                <a16:creationId xmlns:a16="http://schemas.microsoft.com/office/drawing/2014/main" id="{BA48C07B-09B3-4E58-9FA5-D5B994876D64}"/>
               </a:ext>
             </a:extLst>
           </p:cNvPr>
@@ -9169,7 +9151,7 @@
           <p:cNvPr id="21" name="p14-new-title">
             <a:extLst xmlns:a="http://schemas.openxmlformats.org/drawingml/2006/main">
               <a:ext uri="{FF2B5EF4-FFF2-40B4-BE49-F238E27FC236}">
-                <a16:creationId xmlns:a16="http://schemas.microsoft.com/office/drawing/2014/main" id="{A465C6F6-7479-4731-A29E-59C834683791}"/>
+                <a16:creationId xmlns:a16="http://schemas.microsoft.com/office/drawing/2014/main" id="{822BD56F-5B1E-4C58-BA6D-705CD933E426}"/>
               </a:ext>
             </a:extLst>
           </p:cNvPr>
@@ -9222,7 +9204,7 @@
           <p:cNvPr id="22" name="p14-new">
             <a:extLst xmlns:a="http://schemas.openxmlformats.org/drawingml/2006/main">
               <a:ext uri="{FF2B5EF4-FFF2-40B4-BE49-F238E27FC236}">
-                <a16:creationId xmlns:a16="http://schemas.microsoft.com/office/drawing/2014/main" id="{E275F0C0-E4C3-4DDA-BA38-373297DE2BF3}"/>
+                <a16:creationId xmlns:a16="http://schemas.microsoft.com/office/drawing/2014/main" id="{F89C5141-3BC5-4EB0-B965-0F256D8A6DB7}"/>
               </a:ext>
             </a:extLst>
           </p:cNvPr>
@@ -9277,7 +9259,7 @@
           <p:cNvPr id="23" name="p14-bottom">
             <a:extLst xmlns:a="http://schemas.openxmlformats.org/drawingml/2006/main">
               <a:ext uri="{FF2B5EF4-FFF2-40B4-BE49-F238E27FC236}">
-                <a16:creationId xmlns:a16="http://schemas.microsoft.com/office/drawing/2014/main" id="{86536815-86F8-4141-821B-B9810F5EE4DF}"/>
+                <a16:creationId xmlns:a16="http://schemas.microsoft.com/office/drawing/2014/main" id="{31C2306B-8EC8-437E-94F3-F6E5BD683A60}"/>
               </a:ext>
             </a:extLst>
           </p:cNvPr>
@@ -9424,7 +9406,7 @@
           <p:cNvPr id="6" name="p15-n-0">
             <a:extLst xmlns:a="http://schemas.openxmlformats.org/drawingml/2006/main">
               <a:ext uri="{FF2B5EF4-FFF2-40B4-BE49-F238E27FC236}">
-                <a16:creationId xmlns:a16="http://schemas.microsoft.com/office/drawing/2014/main" id="{7E875042-5F86-45EE-9B69-FFE4E06069D6}"/>
+                <a16:creationId xmlns:a16="http://schemas.microsoft.com/office/drawing/2014/main" id="{B006C9FE-9A3C-4FC0-BF7C-14C80DE5A28D}"/>
               </a:ext>
             </a:extLst>
           </p:cNvPr>
@@ -9481,7 +9463,7 @@
           <p:cNvPr id="7" name="p15-g-0">
             <a:extLst xmlns:a="http://schemas.openxmlformats.org/drawingml/2006/main">
               <a:ext uri="{FF2B5EF4-FFF2-40B4-BE49-F238E27FC236}">
-                <a16:creationId xmlns:a16="http://schemas.microsoft.com/office/drawing/2014/main" id="{7591E100-0CED-4873-9DD6-6DF3115917A9}"/>
+                <a16:creationId xmlns:a16="http://schemas.microsoft.com/office/drawing/2014/main" id="{77D5067D-C3AF-48C0-84DB-D844FF199CE2}"/>
               </a:ext>
             </a:extLst>
           </p:cNvPr>
@@ -9540,7 +9522,7 @@
           <p:cNvPr id="8" name="p15-n-1">
             <a:extLst xmlns:a="http://schemas.openxmlformats.org/drawingml/2006/main">
               <a:ext uri="{FF2B5EF4-FFF2-40B4-BE49-F238E27FC236}">
-                <a16:creationId xmlns:a16="http://schemas.microsoft.com/office/drawing/2014/main" id="{201148DB-C491-4443-9A77-E6CAC0A27EE2}"/>
+                <a16:creationId xmlns:a16="http://schemas.microsoft.com/office/drawing/2014/main" id="{FAD7FC9A-EE70-45A0-B6D0-3632131480FC}"/>
               </a:ext>
             </a:extLst>
           </p:cNvPr>
@@ -9597,7 +9579,7 @@
           <p:cNvPr id="9" name="p15-g-1">
             <a:extLst xmlns:a="http://schemas.openxmlformats.org/drawingml/2006/main">
               <a:ext uri="{FF2B5EF4-FFF2-40B4-BE49-F238E27FC236}">
-                <a16:creationId xmlns:a16="http://schemas.microsoft.com/office/drawing/2014/main" id="{EDB7E98E-1585-4979-8DCE-F94F4D8E0626}"/>
+                <a16:creationId xmlns:a16="http://schemas.microsoft.com/office/drawing/2014/main" id="{E8960F3F-0856-45F2-BB15-C3BDE0E4FED7}"/>
               </a:ext>
             </a:extLst>
           </p:cNvPr>
@@ -9656,7 +9638,7 @@
           <p:cNvPr id="10" name="p15-n-2">
             <a:extLst xmlns:a="http://schemas.openxmlformats.org/drawingml/2006/main">
               <a:ext uri="{FF2B5EF4-FFF2-40B4-BE49-F238E27FC236}">
-                <a16:creationId xmlns:a16="http://schemas.microsoft.com/office/drawing/2014/main" id="{B9EA6223-57FB-4D1F-9B44-E55D9B18DCEF}"/>
+                <a16:creationId xmlns:a16="http://schemas.microsoft.com/office/drawing/2014/main" id="{1D2F507E-028B-413B-9FBE-75D0A6E86445}"/>
               </a:ext>
             </a:extLst>
           </p:cNvPr>
@@ -9713,7 +9695,7 @@
           <p:cNvPr id="11" name="p15-g-2">
             <a:extLst xmlns:a="http://schemas.openxmlformats.org/drawingml/2006/main">
               <a:ext uri="{FF2B5EF4-FFF2-40B4-BE49-F238E27FC236}">
-                <a16:creationId xmlns:a16="http://schemas.microsoft.com/office/drawing/2014/main" id="{90A1F1E9-6979-44A2-A288-6726F1AAD0EE}"/>
+                <a16:creationId xmlns:a16="http://schemas.microsoft.com/office/drawing/2014/main" id="{78859733-D09E-4BE5-A25A-CB653D65BB1D}"/>
               </a:ext>
             </a:extLst>
           </p:cNvPr>
@@ -9772,7 +9754,7 @@
           <p:cNvPr id="12" name="p15-n-3">
             <a:extLst xmlns:a="http://schemas.openxmlformats.org/drawingml/2006/main">
               <a:ext uri="{FF2B5EF4-FFF2-40B4-BE49-F238E27FC236}">
-                <a16:creationId xmlns:a16="http://schemas.microsoft.com/office/drawing/2014/main" id="{599FD449-0836-4B75-8615-01EC4CFDF518}"/>
+                <a16:creationId xmlns:a16="http://schemas.microsoft.com/office/drawing/2014/main" id="{1D783194-49EB-4FF7-B940-AFB8A3DA4056}"/>
               </a:ext>
             </a:extLst>
           </p:cNvPr>
@@ -9829,7 +9811,7 @@
           <p:cNvPr id="13" name="p15-g-3">
             <a:extLst xmlns:a="http://schemas.openxmlformats.org/drawingml/2006/main">
               <a:ext uri="{FF2B5EF4-FFF2-40B4-BE49-F238E27FC236}">
-                <a16:creationId xmlns:a16="http://schemas.microsoft.com/office/drawing/2014/main" id="{94F2A8C1-E13C-414A-9A70-3E3250910E8D}"/>
+                <a16:creationId xmlns:a16="http://schemas.microsoft.com/office/drawing/2014/main" id="{6A534D9A-7BAB-4DF7-97D2-F58302B47FBD}"/>
               </a:ext>
             </a:extLst>
           </p:cNvPr>
@@ -9888,7 +9870,7 @@
           <p:cNvPr id="14" name="p15-n-4">
             <a:extLst xmlns:a="http://schemas.openxmlformats.org/drawingml/2006/main">
               <a:ext uri="{FF2B5EF4-FFF2-40B4-BE49-F238E27FC236}">
-                <a16:creationId xmlns:a16="http://schemas.microsoft.com/office/drawing/2014/main" id="{3CD8291D-A949-4D33-B4C6-5E0A12A95C2A}"/>
+                <a16:creationId xmlns:a16="http://schemas.microsoft.com/office/drawing/2014/main" id="{D50AFC43-991F-4973-98F8-462028B0138E}"/>
               </a:ext>
             </a:extLst>
           </p:cNvPr>
@@ -9945,7 +9927,7 @@
           <p:cNvPr id="15" name="p15-g-4">
             <a:extLst xmlns:a="http://schemas.openxmlformats.org/drawingml/2006/main">
               <a:ext uri="{FF2B5EF4-FFF2-40B4-BE49-F238E27FC236}">
-                <a16:creationId xmlns:a16="http://schemas.microsoft.com/office/drawing/2014/main" id="{E5252B74-598A-496A-95FB-2C1BC91239FD}"/>
+                <a16:creationId xmlns:a16="http://schemas.microsoft.com/office/drawing/2014/main" id="{6441199C-4885-4007-B6A5-68798C4A73BF}"/>
               </a:ext>
             </a:extLst>
           </p:cNvPr>
@@ -10004,7 +9986,7 @@
           <p:cNvPr id="16" name="p15-n-5">
             <a:extLst xmlns:a="http://schemas.openxmlformats.org/drawingml/2006/main">
               <a:ext uri="{FF2B5EF4-FFF2-40B4-BE49-F238E27FC236}">
-                <a16:creationId xmlns:a16="http://schemas.microsoft.com/office/drawing/2014/main" id="{824918DC-54FC-4605-A5C1-F01019B81990}"/>
+                <a16:creationId xmlns:a16="http://schemas.microsoft.com/office/drawing/2014/main" id="{FC6983C6-1A59-4BCD-A656-F8AF0E93EE99}"/>
               </a:ext>
             </a:extLst>
           </p:cNvPr>
@@ -10061,7 +10043,7 @@
           <p:cNvPr id="17" name="p15-g-5">
             <a:extLst xmlns:a="http://schemas.openxmlformats.org/drawingml/2006/main">
               <a:ext uri="{FF2B5EF4-FFF2-40B4-BE49-F238E27FC236}">
-                <a16:creationId xmlns:a16="http://schemas.microsoft.com/office/drawing/2014/main" id="{0F55299B-D614-4706-953F-D4E53D0DB69A}"/>
+                <a16:creationId xmlns:a16="http://schemas.microsoft.com/office/drawing/2014/main" id="{D8918B99-41ED-4B86-A715-127D34638816}"/>
               </a:ext>
             </a:extLst>
           </p:cNvPr>
@@ -10120,7 +10102,7 @@
           <p:cNvPr id="18" name="p15-n-6">
             <a:extLst xmlns:a="http://schemas.openxmlformats.org/drawingml/2006/main">
               <a:ext uri="{FF2B5EF4-FFF2-40B4-BE49-F238E27FC236}">
-                <a16:creationId xmlns:a16="http://schemas.microsoft.com/office/drawing/2014/main" id="{837EE9A0-9569-403A-8709-D75B723A07D2}"/>
+                <a16:creationId xmlns:a16="http://schemas.microsoft.com/office/drawing/2014/main" id="{283D5E2E-1720-403F-8AB9-E479C956B744}"/>
               </a:ext>
             </a:extLst>
           </p:cNvPr>
@@ -10177,7 +10159,7 @@
           <p:cNvPr id="19" name="p15-g-6">
             <a:extLst xmlns:a="http://schemas.openxmlformats.org/drawingml/2006/main">
               <a:ext uri="{FF2B5EF4-FFF2-40B4-BE49-F238E27FC236}">
-                <a16:creationId xmlns:a16="http://schemas.microsoft.com/office/drawing/2014/main" id="{ED566B1A-1A66-4552-BB08-286FA4B090BD}"/>
+                <a16:creationId xmlns:a16="http://schemas.microsoft.com/office/drawing/2014/main" id="{1B67A40F-6A5B-49F4-901F-CFDA94872A65}"/>
               </a:ext>
             </a:extLst>
           </p:cNvPr>
@@ -10236,7 +10218,7 @@
           <p:cNvPr id="20" name="p15-n-7">
             <a:extLst xmlns:a="http://schemas.openxmlformats.org/drawingml/2006/main">
               <a:ext uri="{FF2B5EF4-FFF2-40B4-BE49-F238E27FC236}">
-                <a16:creationId xmlns:a16="http://schemas.microsoft.com/office/drawing/2014/main" id="{FCE25BD8-CDF3-4631-A412-4808592F1E2A}"/>
+                <a16:creationId xmlns:a16="http://schemas.microsoft.com/office/drawing/2014/main" id="{7DD84E59-A6E7-4970-9937-F39D434AF9DC}"/>
               </a:ext>
             </a:extLst>
           </p:cNvPr>
@@ -10293,7 +10275,7 @@
           <p:cNvPr id="21" name="p15-g-7">
             <a:extLst xmlns:a="http://schemas.openxmlformats.org/drawingml/2006/main">
               <a:ext uri="{FF2B5EF4-FFF2-40B4-BE49-F238E27FC236}">
-                <a16:creationId xmlns:a16="http://schemas.microsoft.com/office/drawing/2014/main" id="{61D68D2C-C34D-4E2A-BB2E-2A94B71A0927}"/>
+                <a16:creationId xmlns:a16="http://schemas.microsoft.com/office/drawing/2014/main" id="{33BE81B4-C4D9-4C25-9C98-2EC52FFB8B66}"/>
               </a:ext>
             </a:extLst>
           </p:cNvPr>
@@ -10352,7 +10334,7 @@
           <p:cNvPr id="22" name="p15-scope">
             <a:extLst xmlns:a="http://schemas.openxmlformats.org/drawingml/2006/main">
               <a:ext uri="{FF2B5EF4-FFF2-40B4-BE49-F238E27FC236}">
-                <a16:creationId xmlns:a16="http://schemas.microsoft.com/office/drawing/2014/main" id="{281B9E2F-0077-44F3-A596-2780D9030930}"/>
+                <a16:creationId xmlns:a16="http://schemas.microsoft.com/office/drawing/2014/main" id="{709B23C2-9EBF-4C4C-A90F-CE0C48D80C2D}"/>
               </a:ext>
             </a:extLst>
           </p:cNvPr>
@@ -10501,7 +10483,7 @@
           <p:cNvPr id="6" name="p16-j2-title">
             <a:extLst xmlns:a="http://schemas.openxmlformats.org/drawingml/2006/main">
               <a:ext uri="{FF2B5EF4-FFF2-40B4-BE49-F238E27FC236}">
-                <a16:creationId xmlns:a16="http://schemas.microsoft.com/office/drawing/2014/main" id="{D9B14429-C6FE-4ACC-8711-BDD18F18DF1B}"/>
+                <a16:creationId xmlns:a16="http://schemas.microsoft.com/office/drawing/2014/main" id="{0B007FC0-996B-4E8B-8CD4-3F074D838CA3}"/>
               </a:ext>
             </a:extLst>
           </p:cNvPr>
@@ -10554,7 +10536,7 @@
           <p:cNvPr id="7" name="p16-j2-h-0">
             <a:extLst xmlns:a="http://schemas.openxmlformats.org/drawingml/2006/main">
               <a:ext uri="{FF2B5EF4-FFF2-40B4-BE49-F238E27FC236}">
-                <a16:creationId xmlns:a16="http://schemas.microsoft.com/office/drawing/2014/main" id="{728CC9BF-DAB8-4DA4-BAFA-C88BBB632029}"/>
+                <a16:creationId xmlns:a16="http://schemas.microsoft.com/office/drawing/2014/main" id="{812CF822-8976-4AA7-872A-4CD787F847C0}"/>
               </a:ext>
             </a:extLst>
           </p:cNvPr>
@@ -10609,7 +10591,7 @@
           <p:cNvPr id="8" name="p16-j2-h-1">
             <a:extLst xmlns:a="http://schemas.openxmlformats.org/drawingml/2006/main">
               <a:ext uri="{FF2B5EF4-FFF2-40B4-BE49-F238E27FC236}">
-                <a16:creationId xmlns:a16="http://schemas.microsoft.com/office/drawing/2014/main" id="{D7B757A1-68C1-4E1A-88A7-3A4B2AEC0EB6}"/>
+                <a16:creationId xmlns:a16="http://schemas.microsoft.com/office/drawing/2014/main" id="{937C36A6-0450-4BD9-BBFA-351624991F6B}"/>
               </a:ext>
             </a:extLst>
           </p:cNvPr>
@@ -10664,7 +10646,7 @@
           <p:cNvPr id="9" name="p16-j2-r0-0">
             <a:extLst xmlns:a="http://schemas.openxmlformats.org/drawingml/2006/main">
               <a:ext uri="{FF2B5EF4-FFF2-40B4-BE49-F238E27FC236}">
-                <a16:creationId xmlns:a16="http://schemas.microsoft.com/office/drawing/2014/main" id="{223AD9EB-9A3C-4D91-B951-0701AC080935}"/>
+                <a16:creationId xmlns:a16="http://schemas.microsoft.com/office/drawing/2014/main" id="{8EF1CAC9-9C37-49D0-B427-5AF3C6D53810}"/>
               </a:ext>
             </a:extLst>
           </p:cNvPr>
@@ -10725,7 +10707,7 @@
           <p:cNvPr id="10" name="p16-j2-r0-1">
             <a:extLst xmlns:a="http://schemas.openxmlformats.org/drawingml/2006/main">
               <a:ext uri="{FF2B5EF4-FFF2-40B4-BE49-F238E27FC236}">
-                <a16:creationId xmlns:a16="http://schemas.microsoft.com/office/drawing/2014/main" id="{B8A07EC6-AF01-4FDB-8B08-5433FB4CBE2D}"/>
+                <a16:creationId xmlns:a16="http://schemas.microsoft.com/office/drawing/2014/main" id="{63E780C2-AC1F-4804-8BBF-07899FC0940F}"/>
               </a:ext>
             </a:extLst>
           </p:cNvPr>
@@ -10786,7 +10768,7 @@
           <p:cNvPr id="11" name="p16-j2-r1-0">
             <a:extLst xmlns:a="http://schemas.openxmlformats.org/drawingml/2006/main">
               <a:ext uri="{FF2B5EF4-FFF2-40B4-BE49-F238E27FC236}">
-                <a16:creationId xmlns:a16="http://schemas.microsoft.com/office/drawing/2014/main" id="{022545AF-5A86-4C36-A836-FF9F004BD791}"/>
+                <a16:creationId xmlns:a16="http://schemas.microsoft.com/office/drawing/2014/main" id="{D2B60103-699A-4992-ADFD-F809A3856DAD}"/>
               </a:ext>
             </a:extLst>
           </p:cNvPr>
@@ -10847,7 +10829,7 @@
           <p:cNvPr id="12" name="p16-j2-r1-1">
             <a:extLst xmlns:a="http://schemas.openxmlformats.org/drawingml/2006/main">
               <a:ext uri="{FF2B5EF4-FFF2-40B4-BE49-F238E27FC236}">
-                <a16:creationId xmlns:a16="http://schemas.microsoft.com/office/drawing/2014/main" id="{5203B42E-B844-4BAA-872D-89AD3E845453}"/>
+                <a16:creationId xmlns:a16="http://schemas.microsoft.com/office/drawing/2014/main" id="{A6E20997-F301-4565-BE6D-9E0E7AC54DBE}"/>
               </a:ext>
             </a:extLst>
           </p:cNvPr>
@@ -10908,7 +10890,7 @@
           <p:cNvPr id="13" name="p16-j2-r2-0">
             <a:extLst xmlns:a="http://schemas.openxmlformats.org/drawingml/2006/main">
               <a:ext uri="{FF2B5EF4-FFF2-40B4-BE49-F238E27FC236}">
-                <a16:creationId xmlns:a16="http://schemas.microsoft.com/office/drawing/2014/main" id="{13EB585A-00BE-4763-8D69-E8ED788C97DB}"/>
+                <a16:creationId xmlns:a16="http://schemas.microsoft.com/office/drawing/2014/main" id="{E3A876ED-FB24-4727-8B5A-D5238E82E915}"/>
               </a:ext>
             </a:extLst>
           </p:cNvPr>
@@ -10969,7 +10951,7 @@
           <p:cNvPr id="14" name="p16-j2-r2-1">
             <a:extLst xmlns:a="http://schemas.openxmlformats.org/drawingml/2006/main">
               <a:ext uri="{FF2B5EF4-FFF2-40B4-BE49-F238E27FC236}">
-                <a16:creationId xmlns:a16="http://schemas.microsoft.com/office/drawing/2014/main" id="{B14092E0-829D-4C88-A7B5-C0464EDCCA04}"/>
+                <a16:creationId xmlns:a16="http://schemas.microsoft.com/office/drawing/2014/main" id="{C6D44DA1-9318-4023-92DE-7ABD24D153CC}"/>
               </a:ext>
             </a:extLst>
           </p:cNvPr>
@@ -11030,7 +11012,7 @@
           <p:cNvPr id="15" name="p16-j2-r3-0">
             <a:extLst xmlns:a="http://schemas.openxmlformats.org/drawingml/2006/main">
               <a:ext uri="{FF2B5EF4-FFF2-40B4-BE49-F238E27FC236}">
-                <a16:creationId xmlns:a16="http://schemas.microsoft.com/office/drawing/2014/main" id="{CF61474F-8BE0-452E-A07F-4D963F0AE565}"/>
+                <a16:creationId xmlns:a16="http://schemas.microsoft.com/office/drawing/2014/main" id="{CA49ABDB-4809-4E99-808E-2E2E40721782}"/>
               </a:ext>
             </a:extLst>
           </p:cNvPr>
@@ -11091,7 +11073,7 @@
           <p:cNvPr id="16" name="p16-j2-r3-1">
             <a:extLst xmlns:a="http://schemas.openxmlformats.org/drawingml/2006/main">
               <a:ext uri="{FF2B5EF4-FFF2-40B4-BE49-F238E27FC236}">
-                <a16:creationId xmlns:a16="http://schemas.microsoft.com/office/drawing/2014/main" id="{696BD5C1-7E8A-433A-83B8-EF0D226003F0}"/>
+                <a16:creationId xmlns:a16="http://schemas.microsoft.com/office/drawing/2014/main" id="{DC65B38D-7282-4BC2-BA03-C85990EFB8DB}"/>
               </a:ext>
             </a:extLst>
           </p:cNvPr>
@@ -11152,7 +11134,7 @@
           <p:cNvPr id="17" name="p16-j2-r4-0">
             <a:extLst xmlns:a="http://schemas.openxmlformats.org/drawingml/2006/main">
               <a:ext uri="{FF2B5EF4-FFF2-40B4-BE49-F238E27FC236}">
-                <a16:creationId xmlns:a16="http://schemas.microsoft.com/office/drawing/2014/main" id="{00AF2C7B-3E4E-4F7D-9C37-56E51BE27A41}"/>
+                <a16:creationId xmlns:a16="http://schemas.microsoft.com/office/drawing/2014/main" id="{33686817-7FA5-42B5-964F-14BF5DA5CFB9}"/>
               </a:ext>
             </a:extLst>
           </p:cNvPr>
@@ -11213,7 +11195,7 @@
           <p:cNvPr id="18" name="p16-j2-r4-1">
             <a:extLst xmlns:a="http://schemas.openxmlformats.org/drawingml/2006/main">
               <a:ext uri="{FF2B5EF4-FFF2-40B4-BE49-F238E27FC236}">
-                <a16:creationId xmlns:a16="http://schemas.microsoft.com/office/drawing/2014/main" id="{1977F2AF-A4EF-4AB7-8887-68D9FA91A667}"/>
+                <a16:creationId xmlns:a16="http://schemas.microsoft.com/office/drawing/2014/main" id="{0821AAE2-92BB-498F-9D49-EBEEFFCD65CA}"/>
               </a:ext>
             </a:extLst>
           </p:cNvPr>
@@ -11274,7 +11256,7 @@
           <p:cNvPr id="19" name="p16-peer-title">
             <a:extLst xmlns:a="http://schemas.openxmlformats.org/drawingml/2006/main">
               <a:ext uri="{FF2B5EF4-FFF2-40B4-BE49-F238E27FC236}">
-                <a16:creationId xmlns:a16="http://schemas.microsoft.com/office/drawing/2014/main" id="{322BB108-2B46-429C-9424-04FADA59ECB7}"/>
+                <a16:creationId xmlns:a16="http://schemas.microsoft.com/office/drawing/2014/main" id="{2C12E0C7-02D4-4BF8-B024-0988C41246F7}"/>
               </a:ext>
             </a:extLst>
           </p:cNvPr>
@@ -11327,7 +11309,7 @@
           <p:cNvPr id="20" name="p16-f-0">
             <a:extLst xmlns:a="http://schemas.openxmlformats.org/drawingml/2006/main">
               <a:ext uri="{FF2B5EF4-FFF2-40B4-BE49-F238E27FC236}">
-                <a16:creationId xmlns:a16="http://schemas.microsoft.com/office/drawing/2014/main" id="{8EDCD461-9414-4ABB-985D-0B0BB2D48A55}"/>
+                <a16:creationId xmlns:a16="http://schemas.microsoft.com/office/drawing/2014/main" id="{30F7574D-2441-4086-865B-5552580E6EE2}"/>
               </a:ext>
             </a:extLst>
           </p:cNvPr>
@@ -11382,7 +11364,7 @@
           <p:cNvPr id="21" name="p16-s-0">
             <a:extLst xmlns:a="http://schemas.openxmlformats.org/drawingml/2006/main">
               <a:ext uri="{FF2B5EF4-FFF2-40B4-BE49-F238E27FC236}">
-                <a16:creationId xmlns:a16="http://schemas.microsoft.com/office/drawing/2014/main" id="{A698B4A5-9B97-4C84-A4EF-E29D8CB56AF8}"/>
+                <a16:creationId xmlns:a16="http://schemas.microsoft.com/office/drawing/2014/main" id="{BE710896-6847-4B2C-8EB1-E6C6BC064694}"/>
               </a:ext>
             </a:extLst>
           </p:cNvPr>
@@ -11437,7 +11419,7 @@
           <p:cNvPr id="22" name="p16-f-1">
             <a:extLst xmlns:a="http://schemas.openxmlformats.org/drawingml/2006/main">
               <a:ext uri="{FF2B5EF4-FFF2-40B4-BE49-F238E27FC236}">
-                <a16:creationId xmlns:a16="http://schemas.microsoft.com/office/drawing/2014/main" id="{969D0B59-A51B-4B7E-A438-3CA93C566D3F}"/>
+                <a16:creationId xmlns:a16="http://schemas.microsoft.com/office/drawing/2014/main" id="{8A21B209-B142-4543-B27F-8BACA32656F1}"/>
               </a:ext>
             </a:extLst>
           </p:cNvPr>
@@ -11492,7 +11474,7 @@
           <p:cNvPr id="23" name="p16-s-1">
             <a:extLst xmlns:a="http://schemas.openxmlformats.org/drawingml/2006/main">
               <a:ext uri="{FF2B5EF4-FFF2-40B4-BE49-F238E27FC236}">
-                <a16:creationId xmlns:a16="http://schemas.microsoft.com/office/drawing/2014/main" id="{F25D56EC-E80B-4BD4-9B23-AF0A23427771}"/>
+                <a16:creationId xmlns:a16="http://schemas.microsoft.com/office/drawing/2014/main" id="{614C977D-F364-47B2-A969-634AA7C084B5}"/>
               </a:ext>
             </a:extLst>
           </p:cNvPr>
@@ -11547,7 +11529,7 @@
           <p:cNvPr id="24" name="p16-f-2">
             <a:extLst xmlns:a="http://schemas.openxmlformats.org/drawingml/2006/main">
               <a:ext uri="{FF2B5EF4-FFF2-40B4-BE49-F238E27FC236}">
-                <a16:creationId xmlns:a16="http://schemas.microsoft.com/office/drawing/2014/main" id="{C191AAE8-5D84-41C6-B0E3-4AC8F9C95D20}"/>
+                <a16:creationId xmlns:a16="http://schemas.microsoft.com/office/drawing/2014/main" id="{9EBA48E3-7578-406E-B6E2-78BAD74390C2}"/>
               </a:ext>
             </a:extLst>
           </p:cNvPr>
@@ -11602,7 +11584,7 @@
           <p:cNvPr id="25" name="p16-s-2">
             <a:extLst xmlns:a="http://schemas.openxmlformats.org/drawingml/2006/main">
               <a:ext uri="{FF2B5EF4-FFF2-40B4-BE49-F238E27FC236}">
-                <a16:creationId xmlns:a16="http://schemas.microsoft.com/office/drawing/2014/main" id="{4BFD1856-9FB1-4E7B-86C4-E893A790306C}"/>
+                <a16:creationId xmlns:a16="http://schemas.microsoft.com/office/drawing/2014/main" id="{DC02AF76-41B0-47C3-BDEE-EDCA91999A36}"/>
               </a:ext>
             </a:extLst>
           </p:cNvPr>
@@ -11657,7 +11639,7 @@
           <p:cNvPr id="26" name="p16-bottom">
             <a:extLst xmlns:a="http://schemas.openxmlformats.org/drawingml/2006/main">
               <a:ext uri="{FF2B5EF4-FFF2-40B4-BE49-F238E27FC236}">
-                <a16:creationId xmlns:a16="http://schemas.microsoft.com/office/drawing/2014/main" id="{F92ECA8E-609F-40BB-A71F-0CCC9313119E}"/>
+                <a16:creationId xmlns:a16="http://schemas.microsoft.com/office/drawing/2014/main" id="{1F10E7B5-7D44-4251-B1F7-4A148D845F6A}"/>
               </a:ext>
             </a:extLst>
           </p:cNvPr>
@@ -11806,7 +11788,7 @@
           <p:cNvPr id="6" name="p17-time">
             <a:extLst xmlns:a="http://schemas.openxmlformats.org/drawingml/2006/main">
               <a:ext uri="{FF2B5EF4-FFF2-40B4-BE49-F238E27FC236}">
-                <a16:creationId xmlns:a16="http://schemas.microsoft.com/office/drawing/2014/main" id="{4E507AB8-E404-49A1-A930-1E37EAB3E31F}"/>
+                <a16:creationId xmlns:a16="http://schemas.microsoft.com/office/drawing/2014/main" id="{7DBEF395-A9BE-4574-BB03-A508B53D1EA0}"/>
               </a:ext>
             </a:extLst>
           </p:cNvPr>
@@ -11859,7 +11841,7 @@
           <p:cNvPr id="7" name="p17-n-0">
             <a:extLst xmlns:a="http://schemas.openxmlformats.org/drawingml/2006/main">
               <a:ext uri="{FF2B5EF4-FFF2-40B4-BE49-F238E27FC236}">
-                <a16:creationId xmlns:a16="http://schemas.microsoft.com/office/drawing/2014/main" id="{E44F1852-D969-4A16-BB74-EBEEE51D9A14}"/>
+                <a16:creationId xmlns:a16="http://schemas.microsoft.com/office/drawing/2014/main" id="{DEAC408B-251D-4CDC-BAD7-8374034FA0D7}"/>
               </a:ext>
             </a:extLst>
           </p:cNvPr>
@@ -11916,7 +11898,7 @@
           <p:cNvPr id="8" name="p17-t-0">
             <a:extLst xmlns:a="http://schemas.openxmlformats.org/drawingml/2006/main">
               <a:ext uri="{FF2B5EF4-FFF2-40B4-BE49-F238E27FC236}">
-                <a16:creationId xmlns:a16="http://schemas.microsoft.com/office/drawing/2014/main" id="{A80CC5AB-4647-497C-AC6B-58366B3B9951}"/>
+                <a16:creationId xmlns:a16="http://schemas.microsoft.com/office/drawing/2014/main" id="{D33A6133-B940-408D-8DB5-7C860984C983}"/>
               </a:ext>
             </a:extLst>
           </p:cNvPr>
@@ -11971,7 +11953,7 @@
           <p:cNvPr id="9" name="p17-n-1">
             <a:extLst xmlns:a="http://schemas.openxmlformats.org/drawingml/2006/main">
               <a:ext uri="{FF2B5EF4-FFF2-40B4-BE49-F238E27FC236}">
-                <a16:creationId xmlns:a16="http://schemas.microsoft.com/office/drawing/2014/main" id="{C57021BF-128A-48BB-86BA-48CD29A61716}"/>
+                <a16:creationId xmlns:a16="http://schemas.microsoft.com/office/drawing/2014/main" id="{BFF79DFB-F37D-4773-9A0F-1746811E27C8}"/>
               </a:ext>
             </a:extLst>
           </p:cNvPr>
@@ -12028,7 +12010,7 @@
           <p:cNvPr id="10" name="p17-t-1">
             <a:extLst xmlns:a="http://schemas.openxmlformats.org/drawingml/2006/main">
               <a:ext uri="{FF2B5EF4-FFF2-40B4-BE49-F238E27FC236}">
-                <a16:creationId xmlns:a16="http://schemas.microsoft.com/office/drawing/2014/main" id="{7F1EA745-B4FE-4DDB-91B6-AEC07E735F55}"/>
+                <a16:creationId xmlns:a16="http://schemas.microsoft.com/office/drawing/2014/main" id="{52EEE28D-F0C5-4971-A600-F83C8D0F3F23}"/>
               </a:ext>
             </a:extLst>
           </p:cNvPr>
@@ -12083,7 +12065,7 @@
           <p:cNvPr id="11" name="p17-n-2">
             <a:extLst xmlns:a="http://schemas.openxmlformats.org/drawingml/2006/main">
               <a:ext uri="{FF2B5EF4-FFF2-40B4-BE49-F238E27FC236}">
-                <a16:creationId xmlns:a16="http://schemas.microsoft.com/office/drawing/2014/main" id="{E5AC59A4-3A75-4F4A-8F2B-FAB25A4B637E}"/>
+                <a16:creationId xmlns:a16="http://schemas.microsoft.com/office/drawing/2014/main" id="{7E87405E-9AA3-4D12-92F0-891B597860B6}"/>
               </a:ext>
             </a:extLst>
           </p:cNvPr>
@@ -12140,7 +12122,7 @@
           <p:cNvPr id="12" name="p17-t-2">
             <a:extLst xmlns:a="http://schemas.openxmlformats.org/drawingml/2006/main">
               <a:ext uri="{FF2B5EF4-FFF2-40B4-BE49-F238E27FC236}">
-                <a16:creationId xmlns:a16="http://schemas.microsoft.com/office/drawing/2014/main" id="{15EAEBD9-0CDC-462E-BCF2-9ADB8C677956}"/>
+                <a16:creationId xmlns:a16="http://schemas.microsoft.com/office/drawing/2014/main" id="{E73581B9-5F8C-420E-92D1-8743B0F98DE7}"/>
               </a:ext>
             </a:extLst>
           </p:cNvPr>
@@ -12195,7 +12177,7 @@
           <p:cNvPr id="13" name="p17-n-3">
             <a:extLst xmlns:a="http://schemas.openxmlformats.org/drawingml/2006/main">
               <a:ext uri="{FF2B5EF4-FFF2-40B4-BE49-F238E27FC236}">
-                <a16:creationId xmlns:a16="http://schemas.microsoft.com/office/drawing/2014/main" id="{5C2CD8A7-2324-4B3E-9384-D5C052A89097}"/>
+                <a16:creationId xmlns:a16="http://schemas.microsoft.com/office/drawing/2014/main" id="{B6FAC3F9-8AF9-4810-B39E-9C25A9DB29BC}"/>
               </a:ext>
             </a:extLst>
           </p:cNvPr>
@@ -12252,7 +12234,7 @@
           <p:cNvPr id="14" name="p17-t-3">
             <a:extLst xmlns:a="http://schemas.openxmlformats.org/drawingml/2006/main">
               <a:ext uri="{FF2B5EF4-FFF2-40B4-BE49-F238E27FC236}">
-                <a16:creationId xmlns:a16="http://schemas.microsoft.com/office/drawing/2014/main" id="{65BFBBBE-A1BC-45C1-B157-A2B07CA7AF4B}"/>
+                <a16:creationId xmlns:a16="http://schemas.microsoft.com/office/drawing/2014/main" id="{66BD5A0D-28D2-47D3-B2AF-93B62D9CB5F9}"/>
               </a:ext>
             </a:extLst>
           </p:cNvPr>
@@ -12307,7 +12289,7 @@
           <p:cNvPr id="15" name="p17-n-4">
             <a:extLst xmlns:a="http://schemas.openxmlformats.org/drawingml/2006/main">
               <a:ext uri="{FF2B5EF4-FFF2-40B4-BE49-F238E27FC236}">
-                <a16:creationId xmlns:a16="http://schemas.microsoft.com/office/drawing/2014/main" id="{0BF4A136-975C-44B1-A80F-7D23AF950602}"/>
+                <a16:creationId xmlns:a16="http://schemas.microsoft.com/office/drawing/2014/main" id="{555EA258-89D2-43FC-B892-42441E883A5F}"/>
               </a:ext>
             </a:extLst>
           </p:cNvPr>
@@ -12364,7 +12346,7 @@
           <p:cNvPr id="16" name="p17-t-4">
             <a:extLst xmlns:a="http://schemas.openxmlformats.org/drawingml/2006/main">
               <a:ext uri="{FF2B5EF4-FFF2-40B4-BE49-F238E27FC236}">
-                <a16:creationId xmlns:a16="http://schemas.microsoft.com/office/drawing/2014/main" id="{FE9DBEE4-42EA-42D4-998E-05DF8329D066}"/>
+                <a16:creationId xmlns:a16="http://schemas.microsoft.com/office/drawing/2014/main" id="{FB4AF0C2-AEEF-442C-95E8-38B5D96CD345}"/>
               </a:ext>
             </a:extLst>
           </p:cNvPr>
@@ -12419,7 +12401,7 @@
           <p:cNvPr id="17" name="p17-n-5">
             <a:extLst xmlns:a="http://schemas.openxmlformats.org/drawingml/2006/main">
               <a:ext uri="{FF2B5EF4-FFF2-40B4-BE49-F238E27FC236}">
-                <a16:creationId xmlns:a16="http://schemas.microsoft.com/office/drawing/2014/main" id="{C01711CD-3A26-4D1F-9BD8-A40DD78A5DEF}"/>
+                <a16:creationId xmlns:a16="http://schemas.microsoft.com/office/drawing/2014/main" id="{56632C23-67BC-474D-AEC3-D877ACE861CF}"/>
               </a:ext>
             </a:extLst>
           </p:cNvPr>
@@ -12476,7 +12458,7 @@
           <p:cNvPr id="18" name="p17-t-5">
             <a:extLst xmlns:a="http://schemas.openxmlformats.org/drawingml/2006/main">
               <a:ext uri="{FF2B5EF4-FFF2-40B4-BE49-F238E27FC236}">
-                <a16:creationId xmlns:a16="http://schemas.microsoft.com/office/drawing/2014/main" id="{2C03B49D-7953-43D2-B565-D15C0084AD91}"/>
+                <a16:creationId xmlns:a16="http://schemas.microsoft.com/office/drawing/2014/main" id="{2F201781-888C-4C01-A964-D46E668F5A52}"/>
               </a:ext>
             </a:extLst>
           </p:cNvPr>
@@ -12531,7 +12513,7 @@
           <p:cNvPr id="19" name="p17-n-6">
             <a:extLst xmlns:a="http://schemas.openxmlformats.org/drawingml/2006/main">
               <a:ext uri="{FF2B5EF4-FFF2-40B4-BE49-F238E27FC236}">
-                <a16:creationId xmlns:a16="http://schemas.microsoft.com/office/drawing/2014/main" id="{EAB25094-2023-459E-8D99-7C885406E863}"/>
+                <a16:creationId xmlns:a16="http://schemas.microsoft.com/office/drawing/2014/main" id="{E837E1D4-AEA6-47AC-AF74-2FF17604ADB6}"/>
               </a:ext>
             </a:extLst>
           </p:cNvPr>
@@ -12588,7 +12570,7 @@
           <p:cNvPr id="20" name="p17-t-6">
             <a:extLst xmlns:a="http://schemas.openxmlformats.org/drawingml/2006/main">
               <a:ext uri="{FF2B5EF4-FFF2-40B4-BE49-F238E27FC236}">
-                <a16:creationId xmlns:a16="http://schemas.microsoft.com/office/drawing/2014/main" id="{5B35D9D6-4C5F-4E45-880E-F6043130244C}"/>
+                <a16:creationId xmlns:a16="http://schemas.microsoft.com/office/drawing/2014/main" id="{DC15CF26-339E-418F-8671-3769E66B1B33}"/>
               </a:ext>
             </a:extLst>
           </p:cNvPr>
@@ -12643,7 +12625,7 @@
           <p:cNvPr id="21" name="p17-n-7">
             <a:extLst xmlns:a="http://schemas.openxmlformats.org/drawingml/2006/main">
               <a:ext uri="{FF2B5EF4-FFF2-40B4-BE49-F238E27FC236}">
-                <a16:creationId xmlns:a16="http://schemas.microsoft.com/office/drawing/2014/main" id="{772BA560-0FE7-4024-A3B1-45520AFD604C}"/>
+                <a16:creationId xmlns:a16="http://schemas.microsoft.com/office/drawing/2014/main" id="{EE0BFB5D-A583-45FE-89E7-68206A674A72}"/>
               </a:ext>
             </a:extLst>
           </p:cNvPr>
@@ -12700,7 +12682,7 @@
           <p:cNvPr id="22" name="p17-t-7">
             <a:extLst xmlns:a="http://schemas.openxmlformats.org/drawingml/2006/main">
               <a:ext uri="{FF2B5EF4-FFF2-40B4-BE49-F238E27FC236}">
-                <a16:creationId xmlns:a16="http://schemas.microsoft.com/office/drawing/2014/main" id="{663569BC-24B4-4C72-83E9-0D76AF445607}"/>
+                <a16:creationId xmlns:a16="http://schemas.microsoft.com/office/drawing/2014/main" id="{44CCDD22-137A-4E20-ACE7-E9B5049D35CF}"/>
               </a:ext>
             </a:extLst>
           </p:cNvPr>
@@ -12755,7 +12737,7 @@
           <p:cNvPr id="23" name="p17-path">
             <a:extLst xmlns:a="http://schemas.openxmlformats.org/drawingml/2006/main">
               <a:ext uri="{FF2B5EF4-FFF2-40B4-BE49-F238E27FC236}">
-                <a16:creationId xmlns:a16="http://schemas.microsoft.com/office/drawing/2014/main" id="{D50314ED-7102-40B7-8584-BDDFCB5E46FC}"/>
+                <a16:creationId xmlns:a16="http://schemas.microsoft.com/office/drawing/2014/main" id="{FC6BED60-5C05-4BAB-83F5-8CC7B966B1C3}"/>
               </a:ext>
             </a:extLst>
           </p:cNvPr>
@@ -12810,7 +12792,7 @@
           <p:cNvPr id="24" name="p17-files">
             <a:extLst xmlns:a="http://schemas.openxmlformats.org/drawingml/2006/main">
               <a:ext uri="{FF2B5EF4-FFF2-40B4-BE49-F238E27FC236}">
-                <a16:creationId xmlns:a16="http://schemas.microsoft.com/office/drawing/2014/main" id="{59C528B4-94C1-4E2B-8CC3-E5E37BE5ECC8}"/>
+                <a16:creationId xmlns:a16="http://schemas.microsoft.com/office/drawing/2014/main" id="{6E5C44B3-2695-4F50-80F0-4F11A0F8F496}"/>
               </a:ext>
             </a:extLst>
           </p:cNvPr>
@@ -12893,7 +12875,7 @@
           <p:cNvPr id="25" name="p17-fallback">
             <a:extLst xmlns:a="http://schemas.openxmlformats.org/drawingml/2006/main">
               <a:ext uri="{FF2B5EF4-FFF2-40B4-BE49-F238E27FC236}">
-                <a16:creationId xmlns:a16="http://schemas.microsoft.com/office/drawing/2014/main" id="{97AC2F09-D353-4271-881D-05ADF4EE8222}"/>
+                <a16:creationId xmlns:a16="http://schemas.microsoft.com/office/drawing/2014/main" id="{92CB6817-FEF0-44A7-AD4C-D7FEF77A1DFD}"/>
               </a:ext>
             </a:extLst>
           </p:cNvPr>
@@ -13040,7 +13022,7 @@
           <p:cNvPr id="6" name="p18-time">
             <a:extLst xmlns:a="http://schemas.openxmlformats.org/drawingml/2006/main">
               <a:ext uri="{FF2B5EF4-FFF2-40B4-BE49-F238E27FC236}">
-                <a16:creationId xmlns:a16="http://schemas.microsoft.com/office/drawing/2014/main" id="{41B7BA43-C96B-4636-8499-E2E73857325A}"/>
+                <a16:creationId xmlns:a16="http://schemas.microsoft.com/office/drawing/2014/main" id="{37116290-D714-4427-95A8-70DD7C224B58}"/>
               </a:ext>
             </a:extLst>
           </p:cNvPr>
@@ -13093,7 +13075,7 @@
           <p:cNvPr id="7" name="p18-check-title">
             <a:extLst xmlns:a="http://schemas.openxmlformats.org/drawingml/2006/main">
               <a:ext uri="{FF2B5EF4-FFF2-40B4-BE49-F238E27FC236}">
-                <a16:creationId xmlns:a16="http://schemas.microsoft.com/office/drawing/2014/main" id="{D1308D87-D5B3-4900-9ED0-CC6DBAAD1A35}"/>
+                <a16:creationId xmlns:a16="http://schemas.microsoft.com/office/drawing/2014/main" id="{3136DA3C-FF70-43ED-ACC0-96D6D3D517F2}"/>
               </a:ext>
             </a:extLst>
           </p:cNvPr>
@@ -13146,7 +13128,7 @@
           <p:cNvPr id="8" name="p18-c-0">
             <a:extLst xmlns:a="http://schemas.openxmlformats.org/drawingml/2006/main">
               <a:ext uri="{FF2B5EF4-FFF2-40B4-BE49-F238E27FC236}">
-                <a16:creationId xmlns:a16="http://schemas.microsoft.com/office/drawing/2014/main" id="{DCAF7152-799E-4275-9D9F-2BC7F1DD03DC}"/>
+                <a16:creationId xmlns:a16="http://schemas.microsoft.com/office/drawing/2014/main" id="{2B0EBC3E-93AE-4CE0-9F41-78AECA4149FA}"/>
               </a:ext>
             </a:extLst>
           </p:cNvPr>
@@ -13203,7 +13185,7 @@
           <p:cNvPr id="9" name="p18-t-0">
             <a:extLst xmlns:a="http://schemas.openxmlformats.org/drawingml/2006/main">
               <a:ext uri="{FF2B5EF4-FFF2-40B4-BE49-F238E27FC236}">
-                <a16:creationId xmlns:a16="http://schemas.microsoft.com/office/drawing/2014/main" id="{4B6B3AE2-1596-462C-8052-9E4DD98778CD}"/>
+                <a16:creationId xmlns:a16="http://schemas.microsoft.com/office/drawing/2014/main" id="{05AA306A-48BA-421F-B0A9-28517D8B1CA1}"/>
               </a:ext>
             </a:extLst>
           </p:cNvPr>
@@ -13258,7 +13240,7 @@
           <p:cNvPr id="10" name="p18-c-1">
             <a:extLst xmlns:a="http://schemas.openxmlformats.org/drawingml/2006/main">
               <a:ext uri="{FF2B5EF4-FFF2-40B4-BE49-F238E27FC236}">
-                <a16:creationId xmlns:a16="http://schemas.microsoft.com/office/drawing/2014/main" id="{E7316CEB-8624-4BEB-9D35-B73936636591}"/>
+                <a16:creationId xmlns:a16="http://schemas.microsoft.com/office/drawing/2014/main" id="{8C3883FC-1297-4FCC-9B5B-FFA2A529BE54}"/>
               </a:ext>
             </a:extLst>
           </p:cNvPr>
@@ -13315,7 +13297,7 @@
           <p:cNvPr id="11" name="p18-t-1">
             <a:extLst xmlns:a="http://schemas.openxmlformats.org/drawingml/2006/main">
               <a:ext uri="{FF2B5EF4-FFF2-40B4-BE49-F238E27FC236}">
-                <a16:creationId xmlns:a16="http://schemas.microsoft.com/office/drawing/2014/main" id="{A390B4B0-F4A3-4AF2-94DF-F295FABF78AD}"/>
+                <a16:creationId xmlns:a16="http://schemas.microsoft.com/office/drawing/2014/main" id="{3D8B3B39-845E-44E1-BB40-B61F698B3138}"/>
               </a:ext>
             </a:extLst>
           </p:cNvPr>
@@ -13370,7 +13352,7 @@
           <p:cNvPr id="12" name="p18-c-2">
             <a:extLst xmlns:a="http://schemas.openxmlformats.org/drawingml/2006/main">
               <a:ext uri="{FF2B5EF4-FFF2-40B4-BE49-F238E27FC236}">
-                <a16:creationId xmlns:a16="http://schemas.microsoft.com/office/drawing/2014/main" id="{D1372FF2-8690-46EC-9A4D-CA45F9D00B09}"/>
+                <a16:creationId xmlns:a16="http://schemas.microsoft.com/office/drawing/2014/main" id="{1C8FF6C5-8E6F-42F5-A16D-2AF836C943A9}"/>
               </a:ext>
             </a:extLst>
           </p:cNvPr>
@@ -13427,7 +13409,7 @@
           <p:cNvPr id="13" name="p18-t-2">
             <a:extLst xmlns:a="http://schemas.openxmlformats.org/drawingml/2006/main">
               <a:ext uri="{FF2B5EF4-FFF2-40B4-BE49-F238E27FC236}">
-                <a16:creationId xmlns:a16="http://schemas.microsoft.com/office/drawing/2014/main" id="{1F778CBD-58E5-4AC0-8725-052EE7067C92}"/>
+                <a16:creationId xmlns:a16="http://schemas.microsoft.com/office/drawing/2014/main" id="{F294B73B-2E55-4071-9A70-33D2E74C2E2C}"/>
               </a:ext>
             </a:extLst>
           </p:cNvPr>
@@ -13482,7 +13464,7 @@
           <p:cNvPr id="14" name="p18-c-3">
             <a:extLst xmlns:a="http://schemas.openxmlformats.org/drawingml/2006/main">
               <a:ext uri="{FF2B5EF4-FFF2-40B4-BE49-F238E27FC236}">
-                <a16:creationId xmlns:a16="http://schemas.microsoft.com/office/drawing/2014/main" id="{BABA5FC3-1C16-485B-969A-DDE4E56E1E6E}"/>
+                <a16:creationId xmlns:a16="http://schemas.microsoft.com/office/drawing/2014/main" id="{1ACFF010-5248-4254-9847-C4E51688E920}"/>
               </a:ext>
             </a:extLst>
           </p:cNvPr>
@@ -13539,7 +13521,7 @@
           <p:cNvPr id="15" name="p18-t-3">
             <a:extLst xmlns:a="http://schemas.openxmlformats.org/drawingml/2006/main">
               <a:ext uri="{FF2B5EF4-FFF2-40B4-BE49-F238E27FC236}">
-                <a16:creationId xmlns:a16="http://schemas.microsoft.com/office/drawing/2014/main" id="{23AA5DEF-69DB-4C8E-93B9-D178B8547E52}"/>
+                <a16:creationId xmlns:a16="http://schemas.microsoft.com/office/drawing/2014/main" id="{32CD1C81-2123-4CEA-93BF-DF109C7950EF}"/>
               </a:ext>
             </a:extLst>
           </p:cNvPr>
@@ -13594,7 +13576,7 @@
           <p:cNvPr id="16" name="p18-c-4">
             <a:extLst xmlns:a="http://schemas.openxmlformats.org/drawingml/2006/main">
               <a:ext uri="{FF2B5EF4-FFF2-40B4-BE49-F238E27FC236}">
-                <a16:creationId xmlns:a16="http://schemas.microsoft.com/office/drawing/2014/main" id="{DAFADE7E-F94B-4DDB-9CBE-D5946AC724DE}"/>
+                <a16:creationId xmlns:a16="http://schemas.microsoft.com/office/drawing/2014/main" id="{636BA6A3-6C2B-49D5-99E4-FCBE39A08FFD}"/>
               </a:ext>
             </a:extLst>
           </p:cNvPr>
@@ -13651,7 +13633,7 @@
           <p:cNvPr id="17" name="p18-t-4">
             <a:extLst xmlns:a="http://schemas.openxmlformats.org/drawingml/2006/main">
               <a:ext uri="{FF2B5EF4-FFF2-40B4-BE49-F238E27FC236}">
-                <a16:creationId xmlns:a16="http://schemas.microsoft.com/office/drawing/2014/main" id="{94C50D58-0B82-439B-9205-A1F659B75464}"/>
+                <a16:creationId xmlns:a16="http://schemas.microsoft.com/office/drawing/2014/main" id="{0C1E034D-6849-47AA-B020-C11C4039B622}"/>
               </a:ext>
             </a:extLst>
           </p:cNvPr>
@@ -13706,7 +13688,7 @@
           <p:cNvPr id="18" name="p18-tree-title">
             <a:extLst xmlns:a="http://schemas.openxmlformats.org/drawingml/2006/main">
               <a:ext uri="{FF2B5EF4-FFF2-40B4-BE49-F238E27FC236}">
-                <a16:creationId xmlns:a16="http://schemas.microsoft.com/office/drawing/2014/main" id="{31B1758C-D631-4AA3-B2F5-654F369C4F0C}"/>
+                <a16:creationId xmlns:a16="http://schemas.microsoft.com/office/drawing/2014/main" id="{84993C59-A7FA-4CC9-8ADC-872B11B55800}"/>
               </a:ext>
             </a:extLst>
           </p:cNvPr>
@@ -13759,7 +13741,7 @@
           <p:cNvPr id="19" name="p18-tree">
             <a:extLst xmlns:a="http://schemas.openxmlformats.org/drawingml/2006/main">
               <a:ext uri="{FF2B5EF4-FFF2-40B4-BE49-F238E27FC236}">
-                <a16:creationId xmlns:a16="http://schemas.microsoft.com/office/drawing/2014/main" id="{C056CD68-E585-4775-9950-0EDEACFF9EB2}"/>
+                <a16:creationId xmlns:a16="http://schemas.microsoft.com/office/drawing/2014/main" id="{8B92F3B1-567E-4809-95DE-DB94307A70E1}"/>
               </a:ext>
             </a:extLst>
           </p:cNvPr>
@@ -14062,7 +14044,7 @@
           <p:cNvPr id="20" name="p18-bottom">
             <a:extLst xmlns:a="http://schemas.openxmlformats.org/drawingml/2006/main">
               <a:ext uri="{FF2B5EF4-FFF2-40B4-BE49-F238E27FC236}">
-                <a16:creationId xmlns:a16="http://schemas.microsoft.com/office/drawing/2014/main" id="{85BFFC04-6A9B-4673-992F-380157C304B3}"/>
+                <a16:creationId xmlns:a16="http://schemas.microsoft.com/office/drawing/2014/main" id="{BC0A3081-7EED-4C08-AF53-2A4253204891}"/>
               </a:ext>
             </a:extLst>
           </p:cNvPr>
@@ -14211,7 +14193,7 @@
           <p:cNvPr id="6" name="p19-time">
             <a:extLst xmlns:a="http://schemas.openxmlformats.org/drawingml/2006/main">
               <a:ext uri="{FF2B5EF4-FFF2-40B4-BE49-F238E27FC236}">
-                <a16:creationId xmlns:a16="http://schemas.microsoft.com/office/drawing/2014/main" id="{80AA0EF1-E8D9-49E9-8FA6-7F66854FD4CA}"/>
+                <a16:creationId xmlns:a16="http://schemas.microsoft.com/office/drawing/2014/main" id="{A3D50E6F-08CA-4C56-AD34-08A1E11F8ADD}"/>
               </a:ext>
             </a:extLst>
           </p:cNvPr>
@@ -14264,7 +14246,7 @@
           <p:cNvPr id="7" name="p19-n-0">
             <a:extLst xmlns:a="http://schemas.openxmlformats.org/drawingml/2006/main">
               <a:ext uri="{FF2B5EF4-FFF2-40B4-BE49-F238E27FC236}">
-                <a16:creationId xmlns:a16="http://schemas.microsoft.com/office/drawing/2014/main" id="{5EEA6BBE-EF64-4496-8280-143893C9737F}"/>
+                <a16:creationId xmlns:a16="http://schemas.microsoft.com/office/drawing/2014/main" id="{65DC097F-5C74-4F4B-A812-E1D3C6D86B0A}"/>
               </a:ext>
             </a:extLst>
           </p:cNvPr>
@@ -14321,7 +14303,7 @@
           <p:cNvPr id="8" name="p19-q-0">
             <a:extLst xmlns:a="http://schemas.openxmlformats.org/drawingml/2006/main">
               <a:ext uri="{FF2B5EF4-FFF2-40B4-BE49-F238E27FC236}">
-                <a16:creationId xmlns:a16="http://schemas.microsoft.com/office/drawing/2014/main" id="{C2B1BC4E-F239-4F59-A520-91507FD44E7B}"/>
+                <a16:creationId xmlns:a16="http://schemas.microsoft.com/office/drawing/2014/main" id="{10AD68DA-9A06-43BF-B556-56A3B9B9DF1E}"/>
               </a:ext>
             </a:extLst>
           </p:cNvPr>
@@ -14376,7 +14358,7 @@
           <p:cNvPr id="9" name="p19-n-1">
             <a:extLst xmlns:a="http://schemas.openxmlformats.org/drawingml/2006/main">
               <a:ext uri="{FF2B5EF4-FFF2-40B4-BE49-F238E27FC236}">
-                <a16:creationId xmlns:a16="http://schemas.microsoft.com/office/drawing/2014/main" id="{8E344B58-C4F0-4C1F-B1EC-26C0D6E00C96}"/>
+                <a16:creationId xmlns:a16="http://schemas.microsoft.com/office/drawing/2014/main" id="{A94F0B3D-375D-43A9-982E-FC0A780E6B61}"/>
               </a:ext>
             </a:extLst>
           </p:cNvPr>
@@ -14433,7 +14415,7 @@
           <p:cNvPr id="10" name="p19-q-1">
             <a:extLst xmlns:a="http://schemas.openxmlformats.org/drawingml/2006/main">
               <a:ext uri="{FF2B5EF4-FFF2-40B4-BE49-F238E27FC236}">
-                <a16:creationId xmlns:a16="http://schemas.microsoft.com/office/drawing/2014/main" id="{E0B02935-ADBB-4005-8F86-7FF5A4299E37}"/>
+                <a16:creationId xmlns:a16="http://schemas.microsoft.com/office/drawing/2014/main" id="{9DA65B4E-FCAA-4213-A5F9-38018FD415A6}"/>
               </a:ext>
             </a:extLst>
           </p:cNvPr>
@@ -14488,7 +14470,7 @@
           <p:cNvPr id="11" name="p19-n-2">
             <a:extLst xmlns:a="http://schemas.openxmlformats.org/drawingml/2006/main">
               <a:ext uri="{FF2B5EF4-FFF2-40B4-BE49-F238E27FC236}">
-                <a16:creationId xmlns:a16="http://schemas.microsoft.com/office/drawing/2014/main" id="{66058F24-3BD9-4154-864F-15CF67108CCB}"/>
+                <a16:creationId xmlns:a16="http://schemas.microsoft.com/office/drawing/2014/main" id="{5467CB02-A4BE-4409-ACF3-49371D4CC164}"/>
               </a:ext>
             </a:extLst>
           </p:cNvPr>
@@ -14545,7 +14527,7 @@
           <p:cNvPr id="12" name="p19-q-2">
             <a:extLst xmlns:a="http://schemas.openxmlformats.org/drawingml/2006/main">
               <a:ext uri="{FF2B5EF4-FFF2-40B4-BE49-F238E27FC236}">
-                <a16:creationId xmlns:a16="http://schemas.microsoft.com/office/drawing/2014/main" id="{6B9CCA46-6ADA-4064-8781-F95722D6E401}"/>
+                <a16:creationId xmlns:a16="http://schemas.microsoft.com/office/drawing/2014/main" id="{2BF69308-A820-4FD0-A043-63ACF290C39C}"/>
               </a:ext>
             </a:extLst>
           </p:cNvPr>
@@ -14600,7 +14582,7 @@
           <p:cNvPr id="13" name="p19-n-3">
             <a:extLst xmlns:a="http://schemas.openxmlformats.org/drawingml/2006/main">
               <a:ext uri="{FF2B5EF4-FFF2-40B4-BE49-F238E27FC236}">
-                <a16:creationId xmlns:a16="http://schemas.microsoft.com/office/drawing/2014/main" id="{D2B87BA0-195E-46B9-9D78-674675B9EB01}"/>
+                <a16:creationId xmlns:a16="http://schemas.microsoft.com/office/drawing/2014/main" id="{5097AB66-C732-4A39-9CC4-AF3929E3E485}"/>
               </a:ext>
             </a:extLst>
           </p:cNvPr>
@@ -14657,7 +14639,7 @@
           <p:cNvPr id="14" name="p19-q-3">
             <a:extLst xmlns:a="http://schemas.openxmlformats.org/drawingml/2006/main">
               <a:ext uri="{FF2B5EF4-FFF2-40B4-BE49-F238E27FC236}">
-                <a16:creationId xmlns:a16="http://schemas.microsoft.com/office/drawing/2014/main" id="{532B4327-D712-43B6-9DEB-383825FEEFC8}"/>
+                <a16:creationId xmlns:a16="http://schemas.microsoft.com/office/drawing/2014/main" id="{27B27D7E-4B6E-4DE7-84A7-620C3FC0D29C}"/>
               </a:ext>
             </a:extLst>
           </p:cNvPr>
@@ -14712,7 +14694,7 @@
           <p:cNvPr id="15" name="p19-n-4">
             <a:extLst xmlns:a="http://schemas.openxmlformats.org/drawingml/2006/main">
               <a:ext uri="{FF2B5EF4-FFF2-40B4-BE49-F238E27FC236}">
-                <a16:creationId xmlns:a16="http://schemas.microsoft.com/office/drawing/2014/main" id="{F5582850-2ABA-45EE-8557-7E91E6E47012}"/>
+                <a16:creationId xmlns:a16="http://schemas.microsoft.com/office/drawing/2014/main" id="{D43AA7DE-5DD7-4756-B5F3-065CEC4E106B}"/>
               </a:ext>
             </a:extLst>
           </p:cNvPr>
@@ -14769,7 +14751,7 @@
           <p:cNvPr id="16" name="p19-q-4">
             <a:extLst xmlns:a="http://schemas.openxmlformats.org/drawingml/2006/main">
               <a:ext uri="{FF2B5EF4-FFF2-40B4-BE49-F238E27FC236}">
-                <a16:creationId xmlns:a16="http://schemas.microsoft.com/office/drawing/2014/main" id="{327CEE49-C5DE-4865-87BA-AD6AF10C7A65}"/>
+                <a16:creationId xmlns:a16="http://schemas.microsoft.com/office/drawing/2014/main" id="{A3932610-6D1F-4D48-B37B-854909CD6A77}"/>
               </a:ext>
             </a:extLst>
           </p:cNvPr>
@@ -14824,7 +14806,7 @@
           <p:cNvPr id="17" name="p19-n-5">
             <a:extLst xmlns:a="http://schemas.openxmlformats.org/drawingml/2006/main">
               <a:ext uri="{FF2B5EF4-FFF2-40B4-BE49-F238E27FC236}">
-                <a16:creationId xmlns:a16="http://schemas.microsoft.com/office/drawing/2014/main" id="{8680C665-D2C4-459B-A97B-F94B89A3CF79}"/>
+                <a16:creationId xmlns:a16="http://schemas.microsoft.com/office/drawing/2014/main" id="{7C2C953B-02CE-40DE-AD91-ED987A610DC3}"/>
               </a:ext>
             </a:extLst>
           </p:cNvPr>
@@ -14881,7 +14863,7 @@
           <p:cNvPr id="18" name="p19-q-5">
             <a:extLst xmlns:a="http://schemas.openxmlformats.org/drawingml/2006/main">
               <a:ext uri="{FF2B5EF4-FFF2-40B4-BE49-F238E27FC236}">
-                <a16:creationId xmlns:a16="http://schemas.microsoft.com/office/drawing/2014/main" id="{9BBEA5F7-F154-4539-80B1-906AFDC7E28F}"/>
+                <a16:creationId xmlns:a16="http://schemas.microsoft.com/office/drawing/2014/main" id="{155D11B9-354A-4757-B2FA-5E1F8C8E25F7}"/>
               </a:ext>
             </a:extLst>
           </p:cNvPr>
@@ -14936,7 +14918,7 @@
           <p:cNvPr id="19" name="p19-n-6">
             <a:extLst xmlns:a="http://schemas.openxmlformats.org/drawingml/2006/main">
               <a:ext uri="{FF2B5EF4-FFF2-40B4-BE49-F238E27FC236}">
-                <a16:creationId xmlns:a16="http://schemas.microsoft.com/office/drawing/2014/main" id="{AFAFC975-26A4-4881-882A-BF406F0C7333}"/>
+                <a16:creationId xmlns:a16="http://schemas.microsoft.com/office/drawing/2014/main" id="{549F63D9-EDAF-4726-9A10-5F4EAF683C0D}"/>
               </a:ext>
             </a:extLst>
           </p:cNvPr>
@@ -14993,7 +14975,7 @@
           <p:cNvPr id="20" name="p19-q-6">
             <a:extLst xmlns:a="http://schemas.openxmlformats.org/drawingml/2006/main">
               <a:ext uri="{FF2B5EF4-FFF2-40B4-BE49-F238E27FC236}">
-                <a16:creationId xmlns:a16="http://schemas.microsoft.com/office/drawing/2014/main" id="{E42CD99A-F4C0-4AC5-9098-CA659FC5A42D}"/>
+                <a16:creationId xmlns:a16="http://schemas.microsoft.com/office/drawing/2014/main" id="{96703D48-634D-4DCE-9BF6-ED5CB45426FB}"/>
               </a:ext>
             </a:extLst>
           </p:cNvPr>
@@ -15048,7 +15030,7 @@
           <p:cNvPr id="21" name="p19-n-7">
             <a:extLst xmlns:a="http://schemas.openxmlformats.org/drawingml/2006/main">
               <a:ext uri="{FF2B5EF4-FFF2-40B4-BE49-F238E27FC236}">
-                <a16:creationId xmlns:a16="http://schemas.microsoft.com/office/drawing/2014/main" id="{F251B03E-BD55-4D2B-8CA4-163E1C1776CD}"/>
+                <a16:creationId xmlns:a16="http://schemas.microsoft.com/office/drawing/2014/main" id="{111FFAFA-52C5-46B6-A071-AC0F3B581B63}"/>
               </a:ext>
             </a:extLst>
           </p:cNvPr>
@@ -15105,7 +15087,7 @@
           <p:cNvPr id="22" name="p19-q-7">
             <a:extLst xmlns:a="http://schemas.openxmlformats.org/drawingml/2006/main">
               <a:ext uri="{FF2B5EF4-FFF2-40B4-BE49-F238E27FC236}">
-                <a16:creationId xmlns:a16="http://schemas.microsoft.com/office/drawing/2014/main" id="{89FA864A-0693-4CF6-A469-0D9D0C46B1D3}"/>
+                <a16:creationId xmlns:a16="http://schemas.microsoft.com/office/drawing/2014/main" id="{CAAE4093-BC5F-4AF0-9AB6-BD32A6B2F377}"/>
               </a:ext>
             </a:extLst>
           </p:cNvPr>
@@ -15160,7 +15142,7 @@
           <p:cNvPr id="23" name="p19-author">
             <a:extLst xmlns:a="http://schemas.openxmlformats.org/drawingml/2006/main">
               <a:ext uri="{FF2B5EF4-FFF2-40B4-BE49-F238E27FC236}">
-                <a16:creationId xmlns:a16="http://schemas.microsoft.com/office/drawing/2014/main" id="{CC3F9FFD-4F87-40D3-9E80-80C003804D29}"/>
+                <a16:creationId xmlns:a16="http://schemas.microsoft.com/office/drawing/2014/main" id="{76CD8538-F94F-4D50-AE81-1DAAA8798238}"/>
               </a:ext>
             </a:extLst>
           </p:cNvPr>
@@ -15215,7 +15197,7 @@
           <p:cNvPr id="24" name="p19-rule">
             <a:extLst xmlns:a="http://schemas.openxmlformats.org/drawingml/2006/main">
               <a:ext uri="{FF2B5EF4-FFF2-40B4-BE49-F238E27FC236}">
-                <a16:creationId xmlns:a16="http://schemas.microsoft.com/office/drawing/2014/main" id="{E10DDAC9-7F57-41B6-8A66-5B20CDCA851C}"/>
+                <a16:creationId xmlns:a16="http://schemas.microsoft.com/office/drawing/2014/main" id="{9616B017-A1A2-48FC-90D7-43535E6BDBDC}"/>
               </a:ext>
             </a:extLst>
           </p:cNvPr>
@@ -15270,7 +15252,7 @@
           <p:cNvPr id="25" name="p19-format">
             <a:extLst xmlns:a="http://schemas.openxmlformats.org/drawingml/2006/main">
               <a:ext uri="{FF2B5EF4-FFF2-40B4-BE49-F238E27FC236}">
-                <a16:creationId xmlns:a16="http://schemas.microsoft.com/office/drawing/2014/main" id="{5268AFC8-EEBB-4806-A300-02374A830497}"/>
+                <a16:creationId xmlns:a16="http://schemas.microsoft.com/office/drawing/2014/main" id="{975661A0-C7B6-47D7-B903-2D7190E79FBE}"/>
               </a:ext>
             </a:extLst>
           </p:cNvPr>
@@ -15417,7 +15399,7 @@
           <p:cNvPr id="6" name="p02-left-title">
             <a:extLst xmlns:a="http://schemas.openxmlformats.org/drawingml/2006/main">
               <a:ext uri="{FF2B5EF4-FFF2-40B4-BE49-F238E27FC236}">
-                <a16:creationId xmlns:a16="http://schemas.microsoft.com/office/drawing/2014/main" id="{1A6C9F8F-9377-48DB-847E-80656D02C0E5}"/>
+                <a16:creationId xmlns:a16="http://schemas.microsoft.com/office/drawing/2014/main" id="{8E565074-9FDC-4D4E-AE9A-C29314016321}"/>
               </a:ext>
             </a:extLst>
           </p:cNvPr>
@@ -15470,7 +15452,7 @@
           <p:cNvPr id="7" name="p02-l-0">
             <a:extLst xmlns:a="http://schemas.openxmlformats.org/drawingml/2006/main">
               <a:ext uri="{FF2B5EF4-FFF2-40B4-BE49-F238E27FC236}">
-                <a16:creationId xmlns:a16="http://schemas.microsoft.com/office/drawing/2014/main" id="{A5697036-A951-4636-871D-BD11BB41B821}"/>
+                <a16:creationId xmlns:a16="http://schemas.microsoft.com/office/drawing/2014/main" id="{ED74DB10-6D51-4004-9389-3FE8DF42661D}"/>
               </a:ext>
             </a:extLst>
           </p:cNvPr>
@@ -15555,7 +15537,7 @@
           <p:cNvPr id="8" name="p02-l-1">
             <a:extLst xmlns:a="http://schemas.openxmlformats.org/drawingml/2006/main">
               <a:ext uri="{FF2B5EF4-FFF2-40B4-BE49-F238E27FC236}">
-                <a16:creationId xmlns:a16="http://schemas.microsoft.com/office/drawing/2014/main" id="{5DC5B8C1-F8C8-4643-BE31-191C05C95A16}"/>
+                <a16:creationId xmlns:a16="http://schemas.microsoft.com/office/drawing/2014/main" id="{0A72F89C-D6B5-4ECC-9419-8C02FA42415F}"/>
               </a:ext>
             </a:extLst>
           </p:cNvPr>
@@ -15640,7 +15622,7 @@
           <p:cNvPr id="9" name="p02-l-2">
             <a:extLst xmlns:a="http://schemas.openxmlformats.org/drawingml/2006/main">
               <a:ext uri="{FF2B5EF4-FFF2-40B4-BE49-F238E27FC236}">
-                <a16:creationId xmlns:a16="http://schemas.microsoft.com/office/drawing/2014/main" id="{EF00F88D-96A4-48A0-82CB-996F328F339E}"/>
+                <a16:creationId xmlns:a16="http://schemas.microsoft.com/office/drawing/2014/main" id="{04EDD0AD-03CB-4878-AC0A-6B8328B4FCFB}"/>
               </a:ext>
             </a:extLst>
           </p:cNvPr>
@@ -15725,7 +15707,7 @@
           <p:cNvPr id="10" name="p02-l-3">
             <a:extLst xmlns:a="http://schemas.openxmlformats.org/drawingml/2006/main">
               <a:ext uri="{FF2B5EF4-FFF2-40B4-BE49-F238E27FC236}">
-                <a16:creationId xmlns:a16="http://schemas.microsoft.com/office/drawing/2014/main" id="{5D48105F-DED2-4A0D-92D1-9A2281AD78F4}"/>
+                <a16:creationId xmlns:a16="http://schemas.microsoft.com/office/drawing/2014/main" id="{624681EE-A028-4D4B-A9A0-7215C86DD649}"/>
               </a:ext>
             </a:extLst>
           </p:cNvPr>
@@ -15810,7 +15792,7 @@
           <p:cNvPr id="11" name="p02-mid">
             <a:extLst xmlns:a="http://schemas.openxmlformats.org/drawingml/2006/main">
               <a:ext uri="{FF2B5EF4-FFF2-40B4-BE49-F238E27FC236}">
-                <a16:creationId xmlns:a16="http://schemas.microsoft.com/office/drawing/2014/main" id="{BB8B98D9-DD7E-4323-BF47-2D340DB9C5C8}"/>
+                <a16:creationId xmlns:a16="http://schemas.microsoft.com/office/drawing/2014/main" id="{262A5F36-FFCB-441F-B72F-B4E3DC5AF39A}"/>
               </a:ext>
             </a:extLst>
           </p:cNvPr>
@@ -15841,7 +15823,7 @@
           <p:cNvPr id="12" name="p02-arrow">
             <a:extLst xmlns:a="http://schemas.openxmlformats.org/drawingml/2006/main">
               <a:ext uri="{FF2B5EF4-FFF2-40B4-BE49-F238E27FC236}">
-                <a16:creationId xmlns:a16="http://schemas.microsoft.com/office/drawing/2014/main" id="{F915BE0E-5716-4E9C-8DC6-B8EDB2F7BD12}"/>
+                <a16:creationId xmlns:a16="http://schemas.microsoft.com/office/drawing/2014/main" id="{87C6CEE4-3010-4ED5-9CF4-4047C014E636}"/>
               </a:ext>
             </a:extLst>
           </p:cNvPr>
@@ -15898,7 +15880,7 @@
           <p:cNvPr id="13" name="p02-right-title">
             <a:extLst xmlns:a="http://schemas.openxmlformats.org/drawingml/2006/main">
               <a:ext uri="{FF2B5EF4-FFF2-40B4-BE49-F238E27FC236}">
-                <a16:creationId xmlns:a16="http://schemas.microsoft.com/office/drawing/2014/main" id="{AB13F838-832B-439B-87F2-94BE5662174B}"/>
+                <a16:creationId xmlns:a16="http://schemas.microsoft.com/office/drawing/2014/main" id="{772EBA43-8AE5-458D-AD25-DA379CC90F5C}"/>
               </a:ext>
             </a:extLst>
           </p:cNvPr>
@@ -15951,7 +15933,7 @@
           <p:cNvPr id="14" name="p02-n-0">
             <a:extLst xmlns:a="http://schemas.openxmlformats.org/drawingml/2006/main">
               <a:ext uri="{FF2B5EF4-FFF2-40B4-BE49-F238E27FC236}">
-                <a16:creationId xmlns:a16="http://schemas.microsoft.com/office/drawing/2014/main" id="{4603244B-3694-4CFB-AED8-8CB29B04C463}"/>
+                <a16:creationId xmlns:a16="http://schemas.microsoft.com/office/drawing/2014/main" id="{435DE951-9559-4F36-A678-C762F106A14C}"/>
               </a:ext>
             </a:extLst>
           </p:cNvPr>
@@ -16008,7 +15990,7 @@
           <p:cNvPr id="15" name="p02-r-0">
             <a:extLst xmlns:a="http://schemas.openxmlformats.org/drawingml/2006/main">
               <a:ext uri="{FF2B5EF4-FFF2-40B4-BE49-F238E27FC236}">
-                <a16:creationId xmlns:a16="http://schemas.microsoft.com/office/drawing/2014/main" id="{1BFEE184-247E-4488-B847-F455282F4A54}"/>
+                <a16:creationId xmlns:a16="http://schemas.microsoft.com/office/drawing/2014/main" id="{EE6F91F8-FFDB-4FFD-A833-F3908E5D2922}"/>
               </a:ext>
             </a:extLst>
           </p:cNvPr>
@@ -16063,7 +16045,7 @@
           <p:cNvPr id="16" name="p02-n-1">
             <a:extLst xmlns:a="http://schemas.openxmlformats.org/drawingml/2006/main">
               <a:ext uri="{FF2B5EF4-FFF2-40B4-BE49-F238E27FC236}">
-                <a16:creationId xmlns:a16="http://schemas.microsoft.com/office/drawing/2014/main" id="{8359A68B-4C11-48B9-8286-7CF7C7F3A49E}"/>
+                <a16:creationId xmlns:a16="http://schemas.microsoft.com/office/drawing/2014/main" id="{5B2CC9ED-A053-4E57-B51E-AEC9627B0FAC}"/>
               </a:ext>
             </a:extLst>
           </p:cNvPr>
@@ -16120,7 +16102,7 @@
           <p:cNvPr id="17" name="p02-r-1">
             <a:extLst xmlns:a="http://schemas.openxmlformats.org/drawingml/2006/main">
               <a:ext uri="{FF2B5EF4-FFF2-40B4-BE49-F238E27FC236}">
-                <a16:creationId xmlns:a16="http://schemas.microsoft.com/office/drawing/2014/main" id="{52F977A0-ED6E-45C3-B8E0-234BF37A28BC}"/>
+                <a16:creationId xmlns:a16="http://schemas.microsoft.com/office/drawing/2014/main" id="{2A348D9E-1089-42C7-858C-0C06D64B7005}"/>
               </a:ext>
             </a:extLst>
           </p:cNvPr>
@@ -16175,7 +16157,7 @@
           <p:cNvPr id="18" name="p02-n-2">
             <a:extLst xmlns:a="http://schemas.openxmlformats.org/drawingml/2006/main">
               <a:ext uri="{FF2B5EF4-FFF2-40B4-BE49-F238E27FC236}">
-                <a16:creationId xmlns:a16="http://schemas.microsoft.com/office/drawing/2014/main" id="{5F5446D2-CDD5-49E8-9DD1-8FBBEE72A33B}"/>
+                <a16:creationId xmlns:a16="http://schemas.microsoft.com/office/drawing/2014/main" id="{F73F79F9-0712-413D-AC94-F5E47B03C4DF}"/>
               </a:ext>
             </a:extLst>
           </p:cNvPr>
@@ -16232,7 +16214,7 @@
           <p:cNvPr id="19" name="p02-r-2">
             <a:extLst xmlns:a="http://schemas.openxmlformats.org/drawingml/2006/main">
               <a:ext uri="{FF2B5EF4-FFF2-40B4-BE49-F238E27FC236}">
-                <a16:creationId xmlns:a16="http://schemas.microsoft.com/office/drawing/2014/main" id="{D564BAF4-7F9B-42CE-8BF8-29481399E296}"/>
+                <a16:creationId xmlns:a16="http://schemas.microsoft.com/office/drawing/2014/main" id="{A2A4349C-C1E7-4772-B8F8-A31BF250E2C6}"/>
               </a:ext>
             </a:extLst>
           </p:cNvPr>
@@ -16287,7 +16269,7 @@
           <p:cNvPr id="20" name="p02-n-3">
             <a:extLst xmlns:a="http://schemas.openxmlformats.org/drawingml/2006/main">
               <a:ext uri="{FF2B5EF4-FFF2-40B4-BE49-F238E27FC236}">
-                <a16:creationId xmlns:a16="http://schemas.microsoft.com/office/drawing/2014/main" id="{054AA6A1-B595-474F-912A-D60672D10301}"/>
+                <a16:creationId xmlns:a16="http://schemas.microsoft.com/office/drawing/2014/main" id="{DD1B72CD-5551-47EC-85FA-B70DC68427CA}"/>
               </a:ext>
             </a:extLst>
           </p:cNvPr>
@@ -16344,7 +16326,7 @@
           <p:cNvPr id="21" name="p02-r-3">
             <a:extLst xmlns:a="http://schemas.openxmlformats.org/drawingml/2006/main">
               <a:ext uri="{FF2B5EF4-FFF2-40B4-BE49-F238E27FC236}">
-                <a16:creationId xmlns:a16="http://schemas.microsoft.com/office/drawing/2014/main" id="{E19E78E2-861E-4F14-A66A-A2863401141F}"/>
+                <a16:creationId xmlns:a16="http://schemas.microsoft.com/office/drawing/2014/main" id="{0044921D-EF08-4746-97D0-661AECB8F9B9}"/>
               </a:ext>
             </a:extLst>
           </p:cNvPr>
@@ -16399,7 +16381,7 @@
           <p:cNvPr id="22" name="p02-n-4">
             <a:extLst xmlns:a="http://schemas.openxmlformats.org/drawingml/2006/main">
               <a:ext uri="{FF2B5EF4-FFF2-40B4-BE49-F238E27FC236}">
-                <a16:creationId xmlns:a16="http://schemas.microsoft.com/office/drawing/2014/main" id="{70964233-9E6C-426B-9B8C-D89F15A0EB7A}"/>
+                <a16:creationId xmlns:a16="http://schemas.microsoft.com/office/drawing/2014/main" id="{928FB153-29A1-426E-BB34-9BD37997FFF3}"/>
               </a:ext>
             </a:extLst>
           </p:cNvPr>
@@ -16456,7 +16438,7 @@
           <p:cNvPr id="23" name="p02-r-4">
             <a:extLst xmlns:a="http://schemas.openxmlformats.org/drawingml/2006/main">
               <a:ext uri="{FF2B5EF4-FFF2-40B4-BE49-F238E27FC236}">
-                <a16:creationId xmlns:a16="http://schemas.microsoft.com/office/drawing/2014/main" id="{C562A95C-FD14-4EB0-AB06-CCC900F03654}"/>
+                <a16:creationId xmlns:a16="http://schemas.microsoft.com/office/drawing/2014/main" id="{F6792B37-5AFB-4B9F-9434-2396DC413897}"/>
               </a:ext>
             </a:extLst>
           </p:cNvPr>
@@ -16511,7 +16493,7 @@
           <p:cNvPr id="24" name="p02-n-5">
             <a:extLst xmlns:a="http://schemas.openxmlformats.org/drawingml/2006/main">
               <a:ext uri="{FF2B5EF4-FFF2-40B4-BE49-F238E27FC236}">
-                <a16:creationId xmlns:a16="http://schemas.microsoft.com/office/drawing/2014/main" id="{EB9E82AC-04B0-42DD-96DA-8642BA73BE71}"/>
+                <a16:creationId xmlns:a16="http://schemas.microsoft.com/office/drawing/2014/main" id="{84E8CB20-6A7E-49BA-A596-BC2E77CC531B}"/>
               </a:ext>
             </a:extLst>
           </p:cNvPr>
@@ -16568,7 +16550,7 @@
           <p:cNvPr id="25" name="p02-r-5">
             <a:extLst xmlns:a="http://schemas.openxmlformats.org/drawingml/2006/main">
               <a:ext uri="{FF2B5EF4-FFF2-40B4-BE49-F238E27FC236}">
-                <a16:creationId xmlns:a16="http://schemas.microsoft.com/office/drawing/2014/main" id="{82D7AC51-9221-4633-8470-BAE98597AD40}"/>
+                <a16:creationId xmlns:a16="http://schemas.microsoft.com/office/drawing/2014/main" id="{B5C336BF-9ED9-475D-8F21-0C5E3F40616B}"/>
               </a:ext>
             </a:extLst>
           </p:cNvPr>
@@ -16623,7 +16605,7 @@
           <p:cNvPr id="26" name="p02-bottom">
             <a:extLst xmlns:a="http://schemas.openxmlformats.org/drawingml/2006/main">
               <a:ext uri="{FF2B5EF4-FFF2-40B4-BE49-F238E27FC236}">
-                <a16:creationId xmlns:a16="http://schemas.microsoft.com/office/drawing/2014/main" id="{0B40E41E-7037-4F55-B18E-1BDCBCA1B4BD}"/>
+                <a16:creationId xmlns:a16="http://schemas.microsoft.com/office/drawing/2014/main" id="{6C844554-6F84-41B9-A6F0-71F162A3FF78}"/>
               </a:ext>
             </a:extLst>
           </p:cNvPr>
@@ -16733,7 +16715,7 @@
                 <a:ea typeface="Microsoft YaHei"/>
                 <a:cs typeface="Microsoft YaHei"/>
               </a:rPr>
-              <a:t>提交当前项目版本，并把规格交给第 10 课</a:t>
+              <a:t>本讲知识点总结</a:t>
             </a:r>
             <a:endParaRPr/>
           </a:p>
@@ -16769,10 +16751,869 @@
       </p:sp>
       <p:sp>
         <p:nvSpPr>
+          <p:cNvPr id="6" name="p20-sn0">
+            <a:extLst xmlns:a="http://schemas.openxmlformats.org/drawingml/2006/main">
+              <a:ext uri="{FF2B5EF4-FFF2-40B4-BE49-F238E27FC236}">
+                <a16:creationId xmlns:a16="http://schemas.microsoft.com/office/drawing/2014/main" id="{28ED987D-31D7-4560-AED2-EDC3684777BF}"/>
+              </a:ext>
+            </a:extLst>
+          </p:cNvPr>
+          <p:cNvSpPr>
+            <a:spLocks xmlns:a="http://schemas.openxmlformats.org/drawingml/2006/main" noGrp="1"/>
+          </p:cNvSpPr>
+          <p:nvPr/>
+        </p:nvSpPr>
+        <p:spPr>
+          <a:xfrm xmlns:a="http://schemas.openxmlformats.org/drawingml/2006/main">
+            <a:off x="495300" y="1123950"/>
+            <a:ext cx="476250" cy="476250"/>
+          </a:xfrm>
+          <a:prstGeom xmlns:a="http://schemas.openxmlformats.org/drawingml/2006/main" prst="roundRect">
+            <a:avLst>
+              <a:gd name="adj" fmla="val 16000"/>
+            </a:avLst>
+          </a:prstGeom>
+          <a:solidFill xmlns:a="http://schemas.openxmlformats.org/drawingml/2006/main">
+            <a:srgbClr val="18354E"/>
+          </a:solidFill>
+          <a:ln xmlns:a="http://schemas.openxmlformats.org/drawingml/2006/main" w="0">
+            <a:noFill/>
+            <a:prstDash val="solid"/>
+          </a:ln>
+        </p:spPr>
+        <p:txBody>
+          <a:bodyPr xmlns:a="http://schemas.openxmlformats.org/drawingml/2006/main" lIns="76200" tIns="38100" rIns="76200" bIns="38100" anchor="ctr"/>
+          <a:lstStyle xmlns:a="http://schemas.openxmlformats.org/drawingml/2006/main"/>
+          <a:p xmlns:a="http://schemas.openxmlformats.org/drawingml/2006/main">
+            <a:pPr algn="ctr">
+              <a:defRPr sz="1500" b="1">
+                <a:solidFill>
+                  <a:srgbClr val="FFFFFF"/>
+                </a:solidFill>
+              </a:defRPr>
+            </a:pPr>
+            <a:r>
+              <a:rPr sz="1500" b="1">
+                <a:solidFill>
+                  <a:srgbClr val="FFFFFF"/>
+                </a:solidFill>
+                <a:latin typeface="Arial"/>
+                <a:ea typeface="Arial"/>
+                <a:cs typeface="Arial"/>
+              </a:rPr>
+              <a:t>1</a:t>
+            </a:r>
+          </a:p>
+        </p:txBody>
+      </p:sp>
+      <p:sp>
+        <p:nvSpPr>
+          <p:cNvPr id="7" name="p20-sh0">
+            <a:extLst xmlns:a="http://schemas.openxmlformats.org/drawingml/2006/main">
+              <a:ext uri="{FF2B5EF4-FFF2-40B4-BE49-F238E27FC236}">
+                <a16:creationId xmlns:a16="http://schemas.microsoft.com/office/drawing/2014/main" id="{DACD38F1-DB16-42A7-B669-48283283AF7A}"/>
+              </a:ext>
+            </a:extLst>
+          </p:cNvPr>
+          <p:cNvSpPr>
+            <a:spLocks xmlns:a="http://schemas.openxmlformats.org/drawingml/2006/main" noGrp="1"/>
+          </p:cNvSpPr>
+          <p:nvPr/>
+        </p:nvSpPr>
+        <p:spPr>
+          <a:xfrm xmlns:a="http://schemas.openxmlformats.org/drawingml/2006/main">
+            <a:off x="1066800" y="1066800"/>
+            <a:ext cx="2047875" cy="552450"/>
+          </a:xfrm>
+          <a:prstGeom xmlns:a="http://schemas.openxmlformats.org/drawingml/2006/main" prst="roundRect">
+            <a:avLst>
+              <a:gd name="adj" fmla="val 13793"/>
+            </a:avLst>
+          </a:prstGeom>
+          <a:solidFill xmlns:a="http://schemas.openxmlformats.org/drawingml/2006/main">
+            <a:srgbClr val="E8F0F6"/>
+          </a:solidFill>
+          <a:ln xmlns:a="http://schemas.openxmlformats.org/drawingml/2006/main" w="0">
+            <a:noFill/>
+            <a:prstDash val="solid"/>
+          </a:ln>
+        </p:spPr>
+        <p:txBody>
+          <a:bodyPr xmlns:a="http://schemas.openxmlformats.org/drawingml/2006/main" lIns="76200" tIns="38100" rIns="76200" bIns="38100" anchor="ctr"/>
+          <a:lstStyle xmlns:a="http://schemas.openxmlformats.org/drawingml/2006/main"/>
+          <a:p xmlns:a="http://schemas.openxmlformats.org/drawingml/2006/main">
+            <a:pPr algn="ctr">
+              <a:defRPr sz="1650" b="1">
+                <a:solidFill>
+                  <a:srgbClr val="18354E"/>
+                </a:solidFill>
+              </a:defRPr>
+            </a:pPr>
+            <a:r>
+              <a:rPr sz="1650" b="1">
+                <a:solidFill>
+                  <a:srgbClr val="18354E"/>
+                </a:solidFill>
+                <a:latin typeface="Microsoft YaHei"/>
+                <a:ea typeface="Microsoft YaHei"/>
+                <a:cs typeface="Microsoft YaHei"/>
+              </a:rPr>
+              <a:t>公平 baseline</a:t>
+            </a:r>
+          </a:p>
+        </p:txBody>
+      </p:sp>
+      <p:sp>
+        <p:nvSpPr>
+          <p:cNvPr id="8" name="p20-sd0">
+            <a:extLst xmlns:a="http://schemas.openxmlformats.org/drawingml/2006/main">
+              <a:ext uri="{FF2B5EF4-FFF2-40B4-BE49-F238E27FC236}">
+                <a16:creationId xmlns:a16="http://schemas.microsoft.com/office/drawing/2014/main" id="{6DDB9F47-EDED-4843-84D2-BB60F963F664}"/>
+              </a:ext>
+            </a:extLst>
+          </p:cNvPr>
+          <p:cNvSpPr>
+            <a:spLocks xmlns:a="http://schemas.openxmlformats.org/drawingml/2006/main" noGrp="1"/>
+          </p:cNvSpPr>
+          <p:nvPr/>
+        </p:nvSpPr>
+        <p:spPr>
+          <a:xfrm xmlns:a="http://schemas.openxmlformats.org/drawingml/2006/main">
+            <a:off x="495300" y="1952625"/>
+            <a:ext cx="2638425" cy="1524000"/>
+          </a:xfrm>
+          <a:prstGeom xmlns:a="http://schemas.openxmlformats.org/drawingml/2006/main" prst="roundRect">
+            <a:avLst>
+              <a:gd name="adj" fmla="val 5000"/>
+            </a:avLst>
+          </a:prstGeom>
+          <a:solidFill xmlns:a="http://schemas.openxmlformats.org/drawingml/2006/main">
+            <a:srgbClr val="FFFFFF"/>
+          </a:solidFill>
+          <a:ln xmlns:a="http://schemas.openxmlformats.org/drawingml/2006/main" w="9525">
+            <a:solidFill>
+              <a:srgbClr val="D6DDE2"/>
+            </a:solidFill>
+            <a:prstDash val="solid"/>
+          </a:ln>
+        </p:spPr>
+        <p:txBody>
+          <a:bodyPr xmlns:a="http://schemas.openxmlformats.org/drawingml/2006/main" lIns="76200" tIns="38100" rIns="76200" bIns="38100" anchor="ctr"/>
+          <a:lstStyle xmlns:a="http://schemas.openxmlformats.org/drawingml/2006/main"/>
+          <a:p xmlns:a="http://schemas.openxmlformats.org/drawingml/2006/main">
+            <a:pPr algn="ctr">
+              <a:lnSpc>
+                <a:spcPct val="114000"/>
+              </a:lnSpc>
+              <a:buNone/>
+              <a:defRPr sz="1425" b="1">
+                <a:solidFill>
+                  <a:srgbClr val="263746"/>
+                </a:solidFill>
+              </a:defRPr>
+            </a:pPr>
+            <a:r>
+              <a:rPr sz="1425" b="1">
+                <a:solidFill>
+                  <a:srgbClr val="263746"/>
+                </a:solidFill>
+                <a:latin typeface="Microsoft YaHei"/>
+                <a:ea typeface="Microsoft YaHei"/>
+                <a:cs typeface="Microsoft YaHei"/>
+              </a:rPr>
+              <a:t>比较对象与预算必须可解释</a:t>
+            </a:r>
+          </a:p>
+        </p:txBody>
+      </p:sp>
+      <p:sp>
+        <p:nvSpPr>
+          <p:cNvPr id="9" name="p20-sn1">
+            <a:extLst xmlns:a="http://schemas.openxmlformats.org/drawingml/2006/main">
+              <a:ext uri="{FF2B5EF4-FFF2-40B4-BE49-F238E27FC236}">
+                <a16:creationId xmlns:a16="http://schemas.microsoft.com/office/drawing/2014/main" id="{71768FC9-BED0-4604-AE5C-968C66971D14}"/>
+              </a:ext>
+            </a:extLst>
+          </p:cNvPr>
+          <p:cNvSpPr>
+            <a:spLocks xmlns:a="http://schemas.openxmlformats.org/drawingml/2006/main" noGrp="1"/>
+          </p:cNvSpPr>
+          <p:nvPr/>
+        </p:nvSpPr>
+        <p:spPr>
+          <a:xfrm xmlns:a="http://schemas.openxmlformats.org/drawingml/2006/main">
+            <a:off x="3419475" y="1123950"/>
+            <a:ext cx="476250" cy="476250"/>
+          </a:xfrm>
+          <a:prstGeom xmlns:a="http://schemas.openxmlformats.org/drawingml/2006/main" prst="roundRect">
+            <a:avLst>
+              <a:gd name="adj" fmla="val 16000"/>
+            </a:avLst>
+          </a:prstGeom>
+          <a:solidFill xmlns:a="http://schemas.openxmlformats.org/drawingml/2006/main">
+            <a:srgbClr val="2F638A"/>
+          </a:solidFill>
+          <a:ln xmlns:a="http://schemas.openxmlformats.org/drawingml/2006/main" w="0">
+            <a:noFill/>
+            <a:prstDash val="solid"/>
+          </a:ln>
+        </p:spPr>
+        <p:txBody>
+          <a:bodyPr xmlns:a="http://schemas.openxmlformats.org/drawingml/2006/main" lIns="76200" tIns="38100" rIns="76200" bIns="38100" anchor="ctr"/>
+          <a:lstStyle xmlns:a="http://schemas.openxmlformats.org/drawingml/2006/main"/>
+          <a:p xmlns:a="http://schemas.openxmlformats.org/drawingml/2006/main">
+            <a:pPr algn="ctr">
+              <a:defRPr sz="1500" b="1">
+                <a:solidFill>
+                  <a:srgbClr val="FFFFFF"/>
+                </a:solidFill>
+              </a:defRPr>
+            </a:pPr>
+            <a:r>
+              <a:rPr sz="1500" b="1">
+                <a:solidFill>
+                  <a:srgbClr val="FFFFFF"/>
+                </a:solidFill>
+                <a:latin typeface="Arial"/>
+                <a:ea typeface="Arial"/>
+                <a:cs typeface="Arial"/>
+              </a:rPr>
+              <a:t>2</a:t>
+            </a:r>
+          </a:p>
+        </p:txBody>
+      </p:sp>
+      <p:sp>
+        <p:nvSpPr>
+          <p:cNvPr id="10" name="p20-sh1">
+            <a:extLst xmlns:a="http://schemas.openxmlformats.org/drawingml/2006/main">
+              <a:ext uri="{FF2B5EF4-FFF2-40B4-BE49-F238E27FC236}">
+                <a16:creationId xmlns:a16="http://schemas.microsoft.com/office/drawing/2014/main" id="{28349343-3D55-417A-8125-D64BFBC434B8}"/>
+              </a:ext>
+            </a:extLst>
+          </p:cNvPr>
+          <p:cNvSpPr>
+            <a:spLocks xmlns:a="http://schemas.openxmlformats.org/drawingml/2006/main" noGrp="1"/>
+          </p:cNvSpPr>
+          <p:nvPr/>
+        </p:nvSpPr>
+        <p:spPr>
+          <a:xfrm xmlns:a="http://schemas.openxmlformats.org/drawingml/2006/main">
+            <a:off x="3990975" y="1066800"/>
+            <a:ext cx="2047875" cy="552450"/>
+          </a:xfrm>
+          <a:prstGeom xmlns:a="http://schemas.openxmlformats.org/drawingml/2006/main" prst="roundRect">
+            <a:avLst>
+              <a:gd name="adj" fmla="val 13793"/>
+            </a:avLst>
+          </a:prstGeom>
+          <a:solidFill xmlns:a="http://schemas.openxmlformats.org/drawingml/2006/main">
+            <a:srgbClr val="E8F0F6"/>
+          </a:solidFill>
+          <a:ln xmlns:a="http://schemas.openxmlformats.org/drawingml/2006/main" w="0">
+            <a:noFill/>
+            <a:prstDash val="solid"/>
+          </a:ln>
+        </p:spPr>
+        <p:txBody>
+          <a:bodyPr xmlns:a="http://schemas.openxmlformats.org/drawingml/2006/main" lIns="76200" tIns="38100" rIns="76200" bIns="38100" anchor="ctr"/>
+          <a:lstStyle xmlns:a="http://schemas.openxmlformats.org/drawingml/2006/main"/>
+          <a:p xmlns:a="http://schemas.openxmlformats.org/drawingml/2006/main">
+            <a:pPr algn="ctr">
+              <a:defRPr sz="1650" b="1">
+                <a:solidFill>
+                  <a:srgbClr val="2F638A"/>
+                </a:solidFill>
+              </a:defRPr>
+            </a:pPr>
+            <a:r>
+              <a:rPr sz="1650" b="1">
+                <a:solidFill>
+                  <a:srgbClr val="2F638A"/>
+                </a:solidFill>
+                <a:latin typeface="Microsoft YaHei"/>
+                <a:ea typeface="Microsoft YaHei"/>
+                <a:cs typeface="Microsoft YaHei"/>
+              </a:rPr>
+              <a:t>实验规格</a:t>
+            </a:r>
+          </a:p>
+        </p:txBody>
+      </p:sp>
+      <p:sp>
+        <p:nvSpPr>
+          <p:cNvPr id="11" name="p20-sd1">
+            <a:extLst xmlns:a="http://schemas.openxmlformats.org/drawingml/2006/main">
+              <a:ext uri="{FF2B5EF4-FFF2-40B4-BE49-F238E27FC236}">
+                <a16:creationId xmlns:a16="http://schemas.microsoft.com/office/drawing/2014/main" id="{DCC7DF99-A9A8-48BE-9185-8B32AF8C6644}"/>
+              </a:ext>
+            </a:extLst>
+          </p:cNvPr>
+          <p:cNvSpPr>
+            <a:spLocks xmlns:a="http://schemas.openxmlformats.org/drawingml/2006/main" noGrp="1"/>
+          </p:cNvSpPr>
+          <p:nvPr/>
+        </p:nvSpPr>
+        <p:spPr>
+          <a:xfrm xmlns:a="http://schemas.openxmlformats.org/drawingml/2006/main">
+            <a:off x="3419475" y="1952625"/>
+            <a:ext cx="2638425" cy="1524000"/>
+          </a:xfrm>
+          <a:prstGeom xmlns:a="http://schemas.openxmlformats.org/drawingml/2006/main" prst="roundRect">
+            <a:avLst>
+              <a:gd name="adj" fmla="val 5000"/>
+            </a:avLst>
+          </a:prstGeom>
+          <a:solidFill xmlns:a="http://schemas.openxmlformats.org/drawingml/2006/main">
+            <a:srgbClr val="FFFFFF"/>
+          </a:solidFill>
+          <a:ln xmlns:a="http://schemas.openxmlformats.org/drawingml/2006/main" w="9525">
+            <a:solidFill>
+              <a:srgbClr val="D6DDE2"/>
+            </a:solidFill>
+            <a:prstDash val="solid"/>
+          </a:ln>
+        </p:spPr>
+        <p:txBody>
+          <a:bodyPr xmlns:a="http://schemas.openxmlformats.org/drawingml/2006/main" lIns="76200" tIns="38100" rIns="76200" bIns="38100" anchor="ctr"/>
+          <a:lstStyle xmlns:a="http://schemas.openxmlformats.org/drawingml/2006/main"/>
+          <a:p xmlns:a="http://schemas.openxmlformats.org/drawingml/2006/main">
+            <a:pPr algn="ctr">
+              <a:lnSpc>
+                <a:spcPct val="114000"/>
+              </a:lnSpc>
+              <a:buNone/>
+              <a:defRPr sz="1425" b="1">
+                <a:solidFill>
+                  <a:srgbClr val="263746"/>
+                </a:solidFill>
+              </a:defRPr>
+            </a:pPr>
+            <a:r>
+              <a:rPr sz="1425" b="1">
+                <a:solidFill>
+                  <a:srgbClr val="263746"/>
+                </a:solidFill>
+                <a:latin typeface="Microsoft YaHei"/>
+                <a:ea typeface="Microsoft YaHei"/>
+                <a:cs typeface="Microsoft YaHei"/>
+              </a:rPr>
+              <a:t>假设、变量、指标、对照与停止条件齐全</a:t>
+            </a:r>
+          </a:p>
+        </p:txBody>
+      </p:sp>
+      <p:sp>
+        <p:nvSpPr>
+          <p:cNvPr id="12" name="p20-sn2">
+            <a:extLst xmlns:a="http://schemas.openxmlformats.org/drawingml/2006/main">
+              <a:ext uri="{FF2B5EF4-FFF2-40B4-BE49-F238E27FC236}">
+                <a16:creationId xmlns:a16="http://schemas.microsoft.com/office/drawing/2014/main" id="{C50F7EAC-4B3B-4767-8471-6F2FB3B6B05E}"/>
+              </a:ext>
+            </a:extLst>
+          </p:cNvPr>
+          <p:cNvSpPr>
+            <a:spLocks xmlns:a="http://schemas.openxmlformats.org/drawingml/2006/main" noGrp="1"/>
+          </p:cNvSpPr>
+          <p:nvPr/>
+        </p:nvSpPr>
+        <p:spPr>
+          <a:xfrm xmlns:a="http://schemas.openxmlformats.org/drawingml/2006/main">
+            <a:off x="6343650" y="1123950"/>
+            <a:ext cx="476250" cy="476250"/>
+          </a:xfrm>
+          <a:prstGeom xmlns:a="http://schemas.openxmlformats.org/drawingml/2006/main" prst="roundRect">
+            <a:avLst>
+              <a:gd name="adj" fmla="val 16000"/>
+            </a:avLst>
+          </a:prstGeom>
+          <a:solidFill xmlns:a="http://schemas.openxmlformats.org/drawingml/2006/main">
+            <a:srgbClr val="28745A"/>
+          </a:solidFill>
+          <a:ln xmlns:a="http://schemas.openxmlformats.org/drawingml/2006/main" w="0">
+            <a:noFill/>
+            <a:prstDash val="solid"/>
+          </a:ln>
+        </p:spPr>
+        <p:txBody>
+          <a:bodyPr xmlns:a="http://schemas.openxmlformats.org/drawingml/2006/main" lIns="76200" tIns="38100" rIns="76200" bIns="38100" anchor="ctr"/>
+          <a:lstStyle xmlns:a="http://schemas.openxmlformats.org/drawingml/2006/main"/>
+          <a:p xmlns:a="http://schemas.openxmlformats.org/drawingml/2006/main">
+            <a:pPr algn="ctr">
+              <a:defRPr sz="1500" b="1">
+                <a:solidFill>
+                  <a:srgbClr val="FFFFFF"/>
+                </a:solidFill>
+              </a:defRPr>
+            </a:pPr>
+            <a:r>
+              <a:rPr sz="1500" b="1">
+                <a:solidFill>
+                  <a:srgbClr val="FFFFFF"/>
+                </a:solidFill>
+                <a:latin typeface="Arial"/>
+                <a:ea typeface="Arial"/>
+                <a:cs typeface="Arial"/>
+              </a:rPr>
+              <a:t>3</a:t>
+            </a:r>
+          </a:p>
+        </p:txBody>
+      </p:sp>
+      <p:sp>
+        <p:nvSpPr>
+          <p:cNvPr id="13" name="p20-sh2">
+            <a:extLst xmlns:a="http://schemas.openxmlformats.org/drawingml/2006/main">
+              <a:ext uri="{FF2B5EF4-FFF2-40B4-BE49-F238E27FC236}">
+                <a16:creationId xmlns:a16="http://schemas.microsoft.com/office/drawing/2014/main" id="{129961C4-CB7E-441B-9345-6872D7FF216E}"/>
+              </a:ext>
+            </a:extLst>
+          </p:cNvPr>
+          <p:cNvSpPr>
+            <a:spLocks xmlns:a="http://schemas.openxmlformats.org/drawingml/2006/main" noGrp="1"/>
+          </p:cNvSpPr>
+          <p:nvPr/>
+        </p:nvSpPr>
+        <p:spPr>
+          <a:xfrm xmlns:a="http://schemas.openxmlformats.org/drawingml/2006/main">
+            <a:off x="6915150" y="1066800"/>
+            <a:ext cx="2047875" cy="552450"/>
+          </a:xfrm>
+          <a:prstGeom xmlns:a="http://schemas.openxmlformats.org/drawingml/2006/main" prst="roundRect">
+            <a:avLst>
+              <a:gd name="adj" fmla="val 13793"/>
+            </a:avLst>
+          </a:prstGeom>
+          <a:solidFill xmlns:a="http://schemas.openxmlformats.org/drawingml/2006/main">
+            <a:srgbClr val="E7F2ED"/>
+          </a:solidFill>
+          <a:ln xmlns:a="http://schemas.openxmlformats.org/drawingml/2006/main" w="0">
+            <a:noFill/>
+            <a:prstDash val="solid"/>
+          </a:ln>
+        </p:spPr>
+        <p:txBody>
+          <a:bodyPr xmlns:a="http://schemas.openxmlformats.org/drawingml/2006/main" lIns="76200" tIns="38100" rIns="76200" bIns="38100" anchor="ctr"/>
+          <a:lstStyle xmlns:a="http://schemas.openxmlformats.org/drawingml/2006/main"/>
+          <a:p xmlns:a="http://schemas.openxmlformats.org/drawingml/2006/main">
+            <a:pPr algn="ctr">
+              <a:defRPr sz="1650" b="1">
+                <a:solidFill>
+                  <a:srgbClr val="28745A"/>
+                </a:solidFill>
+              </a:defRPr>
+            </a:pPr>
+            <a:r>
+              <a:rPr sz="1650" b="1">
+                <a:solidFill>
+                  <a:srgbClr val="28745A"/>
+                </a:solidFill>
+                <a:latin typeface="Microsoft YaHei"/>
+                <a:ea typeface="Microsoft YaHei"/>
+                <a:cs typeface="Microsoft YaHei"/>
+              </a:rPr>
+              <a:t>复现记录</a:t>
+            </a:r>
+          </a:p>
+        </p:txBody>
+      </p:sp>
+      <p:sp>
+        <p:nvSpPr>
+          <p:cNvPr id="14" name="p20-sd2">
+            <a:extLst xmlns:a="http://schemas.openxmlformats.org/drawingml/2006/main">
+              <a:ext uri="{FF2B5EF4-FFF2-40B4-BE49-F238E27FC236}">
+                <a16:creationId xmlns:a16="http://schemas.microsoft.com/office/drawing/2014/main" id="{71903AFE-8E31-4A61-A1B1-23932EE00542}"/>
+              </a:ext>
+            </a:extLst>
+          </p:cNvPr>
+          <p:cNvSpPr>
+            <a:spLocks xmlns:a="http://schemas.openxmlformats.org/drawingml/2006/main" noGrp="1"/>
+          </p:cNvSpPr>
+          <p:nvPr/>
+        </p:nvSpPr>
+        <p:spPr>
+          <a:xfrm xmlns:a="http://schemas.openxmlformats.org/drawingml/2006/main">
+            <a:off x="6343650" y="1952625"/>
+            <a:ext cx="2638425" cy="1524000"/>
+          </a:xfrm>
+          <a:prstGeom xmlns:a="http://schemas.openxmlformats.org/drawingml/2006/main" prst="roundRect">
+            <a:avLst>
+              <a:gd name="adj" fmla="val 5000"/>
+            </a:avLst>
+          </a:prstGeom>
+          <a:solidFill xmlns:a="http://schemas.openxmlformats.org/drawingml/2006/main">
+            <a:srgbClr val="FFFFFF"/>
+          </a:solidFill>
+          <a:ln xmlns:a="http://schemas.openxmlformats.org/drawingml/2006/main" w="9525">
+            <a:solidFill>
+              <a:srgbClr val="D6DDE2"/>
+            </a:solidFill>
+            <a:prstDash val="solid"/>
+          </a:ln>
+        </p:spPr>
+        <p:txBody>
+          <a:bodyPr xmlns:a="http://schemas.openxmlformats.org/drawingml/2006/main" lIns="76200" tIns="38100" rIns="76200" bIns="38100" anchor="ctr"/>
+          <a:lstStyle xmlns:a="http://schemas.openxmlformats.org/drawingml/2006/main"/>
+          <a:p xmlns:a="http://schemas.openxmlformats.org/drawingml/2006/main">
+            <a:pPr algn="ctr">
+              <a:lnSpc>
+                <a:spcPct val="114000"/>
+              </a:lnSpc>
+              <a:buNone/>
+              <a:defRPr sz="1425" b="1">
+                <a:solidFill>
+                  <a:srgbClr val="263746"/>
+                </a:solidFill>
+              </a:defRPr>
+            </a:pPr>
+            <a:r>
+              <a:rPr sz="1425" b="1">
+                <a:solidFill>
+                  <a:srgbClr val="263746"/>
+                </a:solidFill>
+                <a:latin typeface="Microsoft YaHei"/>
+                <a:ea typeface="Microsoft YaHei"/>
+                <a:cs typeface="Microsoft YaHei"/>
+              </a:rPr>
+              <a:t>环境、配置、随机种子与数据可追溯</a:t>
+            </a:r>
+          </a:p>
+        </p:txBody>
+      </p:sp>
+      <p:sp>
+        <p:nvSpPr>
+          <p:cNvPr id="15" name="p20-sn3">
+            <a:extLst xmlns:a="http://schemas.openxmlformats.org/drawingml/2006/main">
+              <a:ext uri="{FF2B5EF4-FFF2-40B4-BE49-F238E27FC236}">
+                <a16:creationId xmlns:a16="http://schemas.microsoft.com/office/drawing/2014/main" id="{8EBBD08D-5FDD-4CC6-84BF-BD4EBD9EB89A}"/>
+              </a:ext>
+            </a:extLst>
+          </p:cNvPr>
+          <p:cNvSpPr>
+            <a:spLocks xmlns:a="http://schemas.openxmlformats.org/drawingml/2006/main" noGrp="1"/>
+          </p:cNvSpPr>
+          <p:nvPr/>
+        </p:nvSpPr>
+        <p:spPr>
+          <a:xfrm xmlns:a="http://schemas.openxmlformats.org/drawingml/2006/main">
+            <a:off x="9267825" y="1123950"/>
+            <a:ext cx="476250" cy="476250"/>
+          </a:xfrm>
+          <a:prstGeom xmlns:a="http://schemas.openxmlformats.org/drawingml/2006/main" prst="roundRect">
+            <a:avLst>
+              <a:gd name="adj" fmla="val 16000"/>
+            </a:avLst>
+          </a:prstGeom>
+          <a:solidFill xmlns:a="http://schemas.openxmlformats.org/drawingml/2006/main">
+            <a:srgbClr val="C8161E"/>
+          </a:solidFill>
+          <a:ln xmlns:a="http://schemas.openxmlformats.org/drawingml/2006/main" w="0">
+            <a:noFill/>
+            <a:prstDash val="solid"/>
+          </a:ln>
+        </p:spPr>
+        <p:txBody>
+          <a:bodyPr xmlns:a="http://schemas.openxmlformats.org/drawingml/2006/main" lIns="76200" tIns="38100" rIns="76200" bIns="38100" anchor="ctr"/>
+          <a:lstStyle xmlns:a="http://schemas.openxmlformats.org/drawingml/2006/main"/>
+          <a:p xmlns:a="http://schemas.openxmlformats.org/drawingml/2006/main">
+            <a:pPr algn="ctr">
+              <a:defRPr sz="1500" b="1">
+                <a:solidFill>
+                  <a:srgbClr val="FFFFFF"/>
+                </a:solidFill>
+              </a:defRPr>
+            </a:pPr>
+            <a:r>
+              <a:rPr sz="1500" b="1">
+                <a:solidFill>
+                  <a:srgbClr val="FFFFFF"/>
+                </a:solidFill>
+                <a:latin typeface="Arial"/>
+                <a:ea typeface="Arial"/>
+                <a:cs typeface="Arial"/>
+              </a:rPr>
+              <a:t>4</a:t>
+            </a:r>
+          </a:p>
+        </p:txBody>
+      </p:sp>
+      <p:sp>
+        <p:nvSpPr>
+          <p:cNvPr id="16" name="p20-sh3">
+            <a:extLst xmlns:a="http://schemas.openxmlformats.org/drawingml/2006/main">
+              <a:ext uri="{FF2B5EF4-FFF2-40B4-BE49-F238E27FC236}">
+                <a16:creationId xmlns:a16="http://schemas.microsoft.com/office/drawing/2014/main" id="{D6FD2B61-C4A0-410C-AF41-D28A9B3D0A60}"/>
+              </a:ext>
+            </a:extLst>
+          </p:cNvPr>
+          <p:cNvSpPr>
+            <a:spLocks xmlns:a="http://schemas.openxmlformats.org/drawingml/2006/main" noGrp="1"/>
+          </p:cNvSpPr>
+          <p:nvPr/>
+        </p:nvSpPr>
+        <p:spPr>
+          <a:xfrm xmlns:a="http://schemas.openxmlformats.org/drawingml/2006/main">
+            <a:off x="9839325" y="1066800"/>
+            <a:ext cx="2047875" cy="552450"/>
+          </a:xfrm>
+          <a:prstGeom xmlns:a="http://schemas.openxmlformats.org/drawingml/2006/main" prst="roundRect">
+            <a:avLst>
+              <a:gd name="adj" fmla="val 13793"/>
+            </a:avLst>
+          </a:prstGeom>
+          <a:solidFill xmlns:a="http://schemas.openxmlformats.org/drawingml/2006/main">
+            <a:srgbClr val="F8E9EA"/>
+          </a:solidFill>
+          <a:ln xmlns:a="http://schemas.openxmlformats.org/drawingml/2006/main" w="0">
+            <a:noFill/>
+            <a:prstDash val="solid"/>
+          </a:ln>
+        </p:spPr>
+        <p:txBody>
+          <a:bodyPr xmlns:a="http://schemas.openxmlformats.org/drawingml/2006/main" lIns="76200" tIns="38100" rIns="76200" bIns="38100" anchor="ctr"/>
+          <a:lstStyle xmlns:a="http://schemas.openxmlformats.org/drawingml/2006/main"/>
+          <a:p xmlns:a="http://schemas.openxmlformats.org/drawingml/2006/main">
+            <a:pPr algn="ctr">
+              <a:defRPr sz="1650" b="1">
+                <a:solidFill>
+                  <a:srgbClr val="C8161E"/>
+                </a:solidFill>
+              </a:defRPr>
+            </a:pPr>
+            <a:r>
+              <a:rPr sz="1650" b="1">
+                <a:solidFill>
+                  <a:srgbClr val="C8161E"/>
+                </a:solidFill>
+                <a:latin typeface="Microsoft YaHei"/>
+                <a:ea typeface="Microsoft YaHei"/>
+                <a:cs typeface="Microsoft YaHei"/>
+              </a:rPr>
+              <a:t>判断门</a:t>
+            </a:r>
+          </a:p>
+        </p:txBody>
+      </p:sp>
+      <p:sp>
+        <p:nvSpPr>
+          <p:cNvPr id="17" name="p20-sd3">
+            <a:extLst xmlns:a="http://schemas.openxmlformats.org/drawingml/2006/main">
+              <a:ext uri="{FF2B5EF4-FFF2-40B4-BE49-F238E27FC236}">
+                <a16:creationId xmlns:a16="http://schemas.microsoft.com/office/drawing/2014/main" id="{7A5C92D0-2FC7-48A6-B209-CC7A3DF8F120}"/>
+              </a:ext>
+            </a:extLst>
+          </p:cNvPr>
+          <p:cNvSpPr>
+            <a:spLocks xmlns:a="http://schemas.openxmlformats.org/drawingml/2006/main" noGrp="1"/>
+          </p:cNvSpPr>
+          <p:nvPr/>
+        </p:nvSpPr>
+        <p:spPr>
+          <a:xfrm xmlns:a="http://schemas.openxmlformats.org/drawingml/2006/main">
+            <a:off x="9267825" y="1952625"/>
+            <a:ext cx="2638425" cy="1524000"/>
+          </a:xfrm>
+          <a:prstGeom xmlns:a="http://schemas.openxmlformats.org/drawingml/2006/main" prst="roundRect">
+            <a:avLst>
+              <a:gd name="adj" fmla="val 5000"/>
+            </a:avLst>
+          </a:prstGeom>
+          <a:solidFill xmlns:a="http://schemas.openxmlformats.org/drawingml/2006/main">
+            <a:srgbClr val="FFFFFF"/>
+          </a:solidFill>
+          <a:ln xmlns:a="http://schemas.openxmlformats.org/drawingml/2006/main" w="9525">
+            <a:solidFill>
+              <a:srgbClr val="D6DDE2"/>
+            </a:solidFill>
+            <a:prstDash val="solid"/>
+          </a:ln>
+        </p:spPr>
+        <p:txBody>
+          <a:bodyPr xmlns:a="http://schemas.openxmlformats.org/drawingml/2006/main" lIns="76200" tIns="38100" rIns="76200" bIns="38100" anchor="ctr"/>
+          <a:lstStyle xmlns:a="http://schemas.openxmlformats.org/drawingml/2006/main"/>
+          <a:p xmlns:a="http://schemas.openxmlformats.org/drawingml/2006/main">
+            <a:pPr algn="ctr">
+              <a:lnSpc>
+                <a:spcPct val="114000"/>
+              </a:lnSpc>
+              <a:buNone/>
+              <a:defRPr sz="1425" b="1">
+                <a:solidFill>
+                  <a:srgbClr val="263746"/>
+                </a:solidFill>
+              </a:defRPr>
+            </a:pPr>
+            <a:r>
+              <a:rPr sz="1425" b="1">
+                <a:solidFill>
+                  <a:srgbClr val="263746"/>
+                </a:solidFill>
+                <a:latin typeface="Microsoft YaHei"/>
+                <a:ea typeface="Microsoft YaHei"/>
+                <a:cs typeface="Microsoft YaHei"/>
+              </a:rPr>
+              <a:t>把规格、判断、反馈与风险绑定到当前版本</a:t>
+            </a:r>
+          </a:p>
+        </p:txBody>
+      </p:sp>
+      <p:sp>
+        <p:nvSpPr>
+          <p:cNvPr id="18" name="p20-boundary">
+            <a:extLst xmlns:a="http://schemas.openxmlformats.org/drawingml/2006/main">
+              <a:ext uri="{FF2B5EF4-FFF2-40B4-BE49-F238E27FC236}">
+                <a16:creationId xmlns:a16="http://schemas.microsoft.com/office/drawing/2014/main" id="{09C72B66-D7F3-4DA8-8746-15B5C3D1164A}"/>
+              </a:ext>
+            </a:extLst>
+          </p:cNvPr>
+          <p:cNvSpPr>
+            <a:spLocks xmlns:a="http://schemas.openxmlformats.org/drawingml/2006/main" noGrp="1"/>
+          </p:cNvSpPr>
+          <p:nvPr/>
+        </p:nvSpPr>
+        <p:spPr>
+          <a:xfrm xmlns:a="http://schemas.openxmlformats.org/drawingml/2006/main">
+            <a:off x="1571625" y="4238625"/>
+            <a:ext cx="9048750" cy="781050"/>
+          </a:xfrm>
+          <a:prstGeom xmlns:a="http://schemas.openxmlformats.org/drawingml/2006/main" prst="roundRect">
+            <a:avLst>
+              <a:gd name="adj" fmla="val 9756"/>
+            </a:avLst>
+          </a:prstGeom>
+          <a:solidFill xmlns:a="http://schemas.openxmlformats.org/drawingml/2006/main">
+            <a:srgbClr val="F8E9EA"/>
+          </a:solidFill>
+          <a:ln xmlns:a="http://schemas.openxmlformats.org/drawingml/2006/main" w="0">
+            <a:noFill/>
+            <a:prstDash val="solid"/>
+          </a:ln>
+        </p:spPr>
+        <p:txBody>
+          <a:bodyPr xmlns:a="http://schemas.openxmlformats.org/drawingml/2006/main" lIns="76200" tIns="38100" rIns="76200" bIns="38100" anchor="ctr"/>
+          <a:lstStyle xmlns:a="http://schemas.openxmlformats.org/drawingml/2006/main"/>
+          <a:p xmlns:a="http://schemas.openxmlformats.org/drawingml/2006/main">
+            <a:pPr algn="ctr">
+              <a:defRPr sz="1950" b="1">
+                <a:solidFill>
+                  <a:srgbClr val="C8161E"/>
+                </a:solidFill>
+              </a:defRPr>
+            </a:pPr>
+            <a:r>
+              <a:rPr sz="1950" b="1">
+                <a:solidFill>
+                  <a:srgbClr val="C8161E"/>
+                </a:solidFill>
+                <a:latin typeface="Microsoft YaHei"/>
+                <a:ea typeface="Microsoft YaHei"/>
+                <a:cs typeface="Microsoft YaHei"/>
+              </a:rPr>
+              <a:t>关键边界：能运行不等于公平、可复现或足以支持研究判断。</a:t>
+            </a:r>
+          </a:p>
+        </p:txBody>
+      </p:sp>
+    </p:spTree>
+    <p:extLst>
+      <p:ext uri="{BB962C8B-B14F-4D97-AF65-F5344CB8AC3E}">
+        <p14:creationId xmlns:p14="http://schemas.microsoft.com/office/powerpoint/2010/main" val="1443728403"/>
+      </p:ext>
+    </p:extLst>
+  </p:cSld>
+</p:sld>
+</file>
+
+<file path=ppt/slides/slide21.xml><?xml version="1.0" encoding="utf-8"?>
+<p:sld xmlns:p="http://schemas.openxmlformats.org/presentationml/2006/main">
+  <p:cSld>
+    <p:spTree>
+      <p:nvGrpSpPr>
+        <p:cNvPr id="1" name=""/>
+        <p:cNvGrpSpPr/>
+        <p:nvPr/>
+      </p:nvGrpSpPr>
+      <p:grpSpPr>
+        <a:xfrm xmlns:a="http://schemas.openxmlformats.org/drawingml/2006/main"/>
+      </p:grpSpPr>
+      <p:sp>
+        <p:nvSpPr>
+          <p:cNvPr id="4" name="Text Placeholder 3">
+            <a:extLst xmlns:a="http://schemas.openxmlformats.org/drawingml/2006/main">
+              <a:ext uri="{FF2B5EF4-FFF2-40B4-BE49-F238E27FC236}">
+                <a16:creationId xmlns:a16="http://schemas.microsoft.com/office/drawing/2014/main" id="{4D941B40-7A0A-534E-3563-CA11753C8E3F}"/>
+              </a:ext>
+            </a:extLst>
+          </p:cNvPr>
+          <p:cNvSpPr>
+            <a:spLocks xmlns:a="http://schemas.openxmlformats.org/drawingml/2006/main" noGrp="1"/>
+          </p:cNvSpPr>
+          <p:nvPr>
+            <p:ph type="body" idx="14"/>
+          </p:nvPr>
+        </p:nvSpPr>
+        <p:spPr>
+          <a:xfrm xmlns:a="http://schemas.openxmlformats.org/drawingml/2006/main">
+            <a:off x="1028700" y="28575"/>
+            <a:ext cx="10668000" cy="628650"/>
+          </a:xfrm>
+        </p:spPr>
+        <p:txBody>
+          <a:bodyPr xmlns:a="http://schemas.openxmlformats.org/drawingml/2006/main" lIns="76200" tIns="0" rIns="76200" bIns="0" anchor="ctr"/>
+          <a:lstStyle xmlns:a="http://schemas.openxmlformats.org/drawingml/2006/main"/>
+          <a:p xmlns:a="http://schemas.openxmlformats.org/drawingml/2006/main">
+            <a:pPr algn="l">
+              <a:buNone/>
+            </a:pPr>
+            <a:r>
+              <a:rPr sz="2250" b="1">
+                <a:solidFill>
+                  <a:srgbClr val="FFFFFF"/>
+                </a:solidFill>
+                <a:latin typeface="Microsoft YaHei"/>
+                <a:ea typeface="Microsoft YaHei"/>
+                <a:cs typeface="Microsoft YaHei"/>
+              </a:rPr>
+              <a:t>提交当前项目版本，并把规格交给第 10 课</a:t>
+            </a:r>
+            <a:endParaRPr/>
+          </a:p>
+        </p:txBody>
+      </p:sp>
+      <p:sp>
+        <p:nvSpPr>
+          <p:cNvPr id="5" name="Slide Number Placeholder 4">
+            <a:extLst xmlns:a="http://schemas.openxmlformats.org/drawingml/2006/main">
+              <a:ext uri="{FF2B5EF4-FFF2-40B4-BE49-F238E27FC236}">
+                <a16:creationId xmlns:a16="http://schemas.microsoft.com/office/drawing/2014/main" id="{EBA5909F-738E-F60C-BE8C-B3F1D94548E5}"/>
+              </a:ext>
+            </a:extLst>
+          </p:cNvPr>
+          <p:cNvSpPr>
+            <a:spLocks xmlns:a="http://schemas.openxmlformats.org/drawingml/2006/main" noGrp="1"/>
+          </p:cNvSpPr>
+          <p:nvPr>
+            <p:ph type="sldNum" idx="10"/>
+          </p:nvPr>
+        </p:nvSpPr>
+        <p:spPr/>
+        <p:txBody>
+          <a:bodyPr xmlns:a="http://schemas.openxmlformats.org/drawingml/2006/main"/>
+          <a:lstStyle xmlns:a="http://schemas.openxmlformats.org/drawingml/2006/main"/>
+          <a:p xmlns:a="http://schemas.openxmlformats.org/drawingml/2006/main">
+            <a:fld id="{F6DF2BE2-2DFA-1C03-677D-BDC2260D6D92}" type="slidenum">
+              <a:t>21</a:t>
+            </a:fld>
+            <a:endParaRPr/>
+          </a:p>
+        </p:txBody>
+      </p:sp>
+      <p:sp>
+        <p:nvSpPr>
           <p:cNvPr id="6" name="p20-submit-title">
             <a:extLst xmlns:a="http://schemas.openxmlformats.org/drawingml/2006/main">
               <a:ext uri="{FF2B5EF4-FFF2-40B4-BE49-F238E27FC236}">
-                <a16:creationId xmlns:a16="http://schemas.microsoft.com/office/drawing/2014/main" id="{780C45E9-A0DC-491D-9352-D2299286EEE7}"/>
+                <a16:creationId xmlns:a16="http://schemas.microsoft.com/office/drawing/2014/main" id="{58EAF929-064C-4EDF-82D1-5B6808513D93}"/>
               </a:ext>
             </a:extLst>
           </p:cNvPr>
@@ -16825,7 +17666,7 @@
           <p:cNvPr id="7" name="p20-submit">
             <a:extLst xmlns:a="http://schemas.openxmlformats.org/drawingml/2006/main">
               <a:ext uri="{FF2B5EF4-FFF2-40B4-BE49-F238E27FC236}">
-                <a16:creationId xmlns:a16="http://schemas.microsoft.com/office/drawing/2014/main" id="{D24424FA-B13B-4260-8CD6-346894CCFE4E}"/>
+                <a16:creationId xmlns:a16="http://schemas.microsoft.com/office/drawing/2014/main" id="{6F05DDFD-F0C1-4C9D-AEB1-8F1E27E4F1B2}"/>
               </a:ext>
             </a:extLst>
           </p:cNvPr>
@@ -16915,7 +17756,7 @@
           <p:cNvPr id="8" name="p20-back-title">
             <a:extLst xmlns:a="http://schemas.openxmlformats.org/drawingml/2006/main">
               <a:ext uri="{FF2B5EF4-FFF2-40B4-BE49-F238E27FC236}">
-                <a16:creationId xmlns:a16="http://schemas.microsoft.com/office/drawing/2014/main" id="{90104CD3-0DA2-4DED-821B-CD837EAAC858}"/>
+                <a16:creationId xmlns:a16="http://schemas.microsoft.com/office/drawing/2014/main" id="{E6A70CA9-369E-4581-8A7D-A0AB3FF89441}"/>
               </a:ext>
             </a:extLst>
           </p:cNvPr>
@@ -16968,7 +17809,7 @@
           <p:cNvPr id="9" name="p20-back">
             <a:extLst xmlns:a="http://schemas.openxmlformats.org/drawingml/2006/main">
               <a:ext uri="{FF2B5EF4-FFF2-40B4-BE49-F238E27FC236}">
-                <a16:creationId xmlns:a16="http://schemas.microsoft.com/office/drawing/2014/main" id="{964CDFB7-D546-448D-AABC-E1C0965BCC73}"/>
+                <a16:creationId xmlns:a16="http://schemas.microsoft.com/office/drawing/2014/main" id="{C18CD464-54C6-4142-BFAD-C3156A8CF2A9}"/>
               </a:ext>
             </a:extLst>
           </p:cNvPr>
@@ -17147,7 +17988,7 @@
           <p:cNvPr id="10" name="p20-next-title">
             <a:extLst xmlns:a="http://schemas.openxmlformats.org/drawingml/2006/main">
               <a:ext uri="{FF2B5EF4-FFF2-40B4-BE49-F238E27FC236}">
-                <a16:creationId xmlns:a16="http://schemas.microsoft.com/office/drawing/2014/main" id="{B9D6BBBE-E26A-4766-8984-4F4D81CFDABE}"/>
+                <a16:creationId xmlns:a16="http://schemas.microsoft.com/office/drawing/2014/main" id="{0AD13980-6175-419F-806A-40B3BBE9A96D}"/>
               </a:ext>
             </a:extLst>
           </p:cNvPr>
@@ -17200,7 +18041,7 @@
           <p:cNvPr id="11" name="p20-l1">
             <a:extLst xmlns:a="http://schemas.openxmlformats.org/drawingml/2006/main">
               <a:ext uri="{FF2B5EF4-FFF2-40B4-BE49-F238E27FC236}">
-                <a16:creationId xmlns:a16="http://schemas.microsoft.com/office/drawing/2014/main" id="{28E71B77-A959-46DB-A139-93A2BD0A89F7}"/>
+                <a16:creationId xmlns:a16="http://schemas.microsoft.com/office/drawing/2014/main" id="{F7C2988E-563D-4CC2-AB21-FD84856F500B}"/>
               </a:ext>
             </a:extLst>
           </p:cNvPr>
@@ -17231,7 +18072,7 @@
           <p:cNvPr id="12" name="p20-l2">
             <a:extLst xmlns:a="http://schemas.openxmlformats.org/drawingml/2006/main">
               <a:ext uri="{FF2B5EF4-FFF2-40B4-BE49-F238E27FC236}">
-                <a16:creationId xmlns:a16="http://schemas.microsoft.com/office/drawing/2014/main" id="{76FF8E22-EEDB-4B81-A07B-D024D6FECEAF}"/>
+                <a16:creationId xmlns:a16="http://schemas.microsoft.com/office/drawing/2014/main" id="{29177F11-9928-4E5D-831B-897733834A94}"/>
               </a:ext>
             </a:extLst>
           </p:cNvPr>
@@ -17262,7 +18103,7 @@
           <p:cNvPr id="13" name="p20-a">
             <a:extLst xmlns:a="http://schemas.openxmlformats.org/drawingml/2006/main">
               <a:ext uri="{FF2B5EF4-FFF2-40B4-BE49-F238E27FC236}">
-                <a16:creationId xmlns:a16="http://schemas.microsoft.com/office/drawing/2014/main" id="{B78E1A35-AE7D-4683-9B4A-8D6A36A7A8DE}"/>
+                <a16:creationId xmlns:a16="http://schemas.microsoft.com/office/drawing/2014/main" id="{521B7F4A-390A-49FF-8F9C-3AE375DD182C}"/>
               </a:ext>
             </a:extLst>
           </p:cNvPr>
@@ -17347,7 +18188,7 @@
           <p:cNvPr id="14" name="p20-b">
             <a:extLst xmlns:a="http://schemas.openxmlformats.org/drawingml/2006/main">
               <a:ext uri="{FF2B5EF4-FFF2-40B4-BE49-F238E27FC236}">
-                <a16:creationId xmlns:a16="http://schemas.microsoft.com/office/drawing/2014/main" id="{A845F660-384B-480E-B48E-60295D550AC0}"/>
+                <a16:creationId xmlns:a16="http://schemas.microsoft.com/office/drawing/2014/main" id="{99470900-6061-4667-AEC2-E2EC336FB3C7}"/>
               </a:ext>
             </a:extLst>
           </p:cNvPr>
@@ -17432,7 +18273,7 @@
           <p:cNvPr id="15" name="p20-c">
             <a:extLst xmlns:a="http://schemas.openxmlformats.org/drawingml/2006/main">
               <a:ext uri="{FF2B5EF4-FFF2-40B4-BE49-F238E27FC236}">
-                <a16:creationId xmlns:a16="http://schemas.microsoft.com/office/drawing/2014/main" id="{42DD95C1-26BD-4E11-95A5-DCC220815B73}"/>
+                <a16:creationId xmlns:a16="http://schemas.microsoft.com/office/drawing/2014/main" id="{025ACAC8-1BC3-4565-B127-CC3D3AEF2829}"/>
               </a:ext>
             </a:extLst>
           </p:cNvPr>
@@ -17517,7 +18358,7 @@
           <p:cNvPr id="16" name="p20-bottom">
             <a:extLst xmlns:a="http://schemas.openxmlformats.org/drawingml/2006/main">
               <a:ext uri="{FF2B5EF4-FFF2-40B4-BE49-F238E27FC236}">
-                <a16:creationId xmlns:a16="http://schemas.microsoft.com/office/drawing/2014/main" id="{BD7ED5D6-9085-4926-A091-51996FAFA603}"/>
+                <a16:creationId xmlns:a16="http://schemas.microsoft.com/office/drawing/2014/main" id="{EDA2D03D-4532-4B51-8B87-9EBC05F06DEA}"/>
               </a:ext>
             </a:extLst>
           </p:cNvPr>
@@ -17664,7 +18505,7 @@
           <p:cNvPr id="6" name="p03-n-0">
             <a:extLst xmlns:a="http://schemas.openxmlformats.org/drawingml/2006/main">
               <a:ext uri="{FF2B5EF4-FFF2-40B4-BE49-F238E27FC236}">
-                <a16:creationId xmlns:a16="http://schemas.microsoft.com/office/drawing/2014/main" id="{990310C2-9E65-4B17-A1BC-6C66F07D994C}"/>
+                <a16:creationId xmlns:a16="http://schemas.microsoft.com/office/drawing/2014/main" id="{7B7B3705-CA36-44B1-BDEA-A0D356F893D2}"/>
               </a:ext>
             </a:extLst>
           </p:cNvPr>
@@ -17721,7 +18562,7 @@
           <p:cNvPr id="7" name="p03-g-0">
             <a:extLst xmlns:a="http://schemas.openxmlformats.org/drawingml/2006/main">
               <a:ext uri="{FF2B5EF4-FFF2-40B4-BE49-F238E27FC236}">
-                <a16:creationId xmlns:a16="http://schemas.microsoft.com/office/drawing/2014/main" id="{0F354A95-2ADA-42B0-BA90-F9F7F346F646}"/>
+                <a16:creationId xmlns:a16="http://schemas.microsoft.com/office/drawing/2014/main" id="{AB454581-AAC2-46B1-B408-2EA3F45617F0}"/>
               </a:ext>
             </a:extLst>
           </p:cNvPr>
@@ -17776,7 +18617,7 @@
           <p:cNvPr id="8" name="p03-n-1">
             <a:extLst xmlns:a="http://schemas.openxmlformats.org/drawingml/2006/main">
               <a:ext uri="{FF2B5EF4-FFF2-40B4-BE49-F238E27FC236}">
-                <a16:creationId xmlns:a16="http://schemas.microsoft.com/office/drawing/2014/main" id="{98FE3881-D9B8-479C-818A-5FFA35BAE1BC}"/>
+                <a16:creationId xmlns:a16="http://schemas.microsoft.com/office/drawing/2014/main" id="{C40FB344-184C-4214-B583-CBE5811AC382}"/>
               </a:ext>
             </a:extLst>
           </p:cNvPr>
@@ -17833,7 +18674,7 @@
           <p:cNvPr id="9" name="p03-g-1">
             <a:extLst xmlns:a="http://schemas.openxmlformats.org/drawingml/2006/main">
               <a:ext uri="{FF2B5EF4-FFF2-40B4-BE49-F238E27FC236}">
-                <a16:creationId xmlns:a16="http://schemas.microsoft.com/office/drawing/2014/main" id="{CC0C9BDE-7665-4945-B01A-A37828E9EC49}"/>
+                <a16:creationId xmlns:a16="http://schemas.microsoft.com/office/drawing/2014/main" id="{849F2763-4C48-4B67-8445-5FCFD2C8C18D}"/>
               </a:ext>
             </a:extLst>
           </p:cNvPr>
@@ -17888,7 +18729,7 @@
           <p:cNvPr id="10" name="p03-n-2">
             <a:extLst xmlns:a="http://schemas.openxmlformats.org/drawingml/2006/main">
               <a:ext uri="{FF2B5EF4-FFF2-40B4-BE49-F238E27FC236}">
-                <a16:creationId xmlns:a16="http://schemas.microsoft.com/office/drawing/2014/main" id="{1EE7C3C1-05E2-4973-805B-082053C5D1B4}"/>
+                <a16:creationId xmlns:a16="http://schemas.microsoft.com/office/drawing/2014/main" id="{296030FE-8054-4387-AE34-5B3326CCA183}"/>
               </a:ext>
             </a:extLst>
           </p:cNvPr>
@@ -17945,7 +18786,7 @@
           <p:cNvPr id="11" name="p03-g-2">
             <a:extLst xmlns:a="http://schemas.openxmlformats.org/drawingml/2006/main">
               <a:ext uri="{FF2B5EF4-FFF2-40B4-BE49-F238E27FC236}">
-                <a16:creationId xmlns:a16="http://schemas.microsoft.com/office/drawing/2014/main" id="{85E21569-A545-4419-A60E-BA719FA7A7FD}"/>
+                <a16:creationId xmlns:a16="http://schemas.microsoft.com/office/drawing/2014/main" id="{3ABD7028-36D6-4CC5-9175-F4619981F30E}"/>
               </a:ext>
             </a:extLst>
           </p:cNvPr>
@@ -18000,7 +18841,7 @@
           <p:cNvPr id="12" name="p03-n-3">
             <a:extLst xmlns:a="http://schemas.openxmlformats.org/drawingml/2006/main">
               <a:ext uri="{FF2B5EF4-FFF2-40B4-BE49-F238E27FC236}">
-                <a16:creationId xmlns:a16="http://schemas.microsoft.com/office/drawing/2014/main" id="{C95E3E27-3314-4673-A745-EC8DE6B21AEE}"/>
+                <a16:creationId xmlns:a16="http://schemas.microsoft.com/office/drawing/2014/main" id="{C56D90D3-DF2C-4F32-B8CB-466564F0F57F}"/>
               </a:ext>
             </a:extLst>
           </p:cNvPr>
@@ -18057,7 +18898,7 @@
           <p:cNvPr id="13" name="p03-g-3">
             <a:extLst xmlns:a="http://schemas.openxmlformats.org/drawingml/2006/main">
               <a:ext uri="{FF2B5EF4-FFF2-40B4-BE49-F238E27FC236}">
-                <a16:creationId xmlns:a16="http://schemas.microsoft.com/office/drawing/2014/main" id="{45276444-CDBC-43EF-AE88-47962AD75E55}"/>
+                <a16:creationId xmlns:a16="http://schemas.microsoft.com/office/drawing/2014/main" id="{0497B5E6-5DE8-4468-A4B4-57712B8376D0}"/>
               </a:ext>
             </a:extLst>
           </p:cNvPr>
@@ -18112,7 +18953,7 @@
           <p:cNvPr id="14" name="p03-n-4">
             <a:extLst xmlns:a="http://schemas.openxmlformats.org/drawingml/2006/main">
               <a:ext uri="{FF2B5EF4-FFF2-40B4-BE49-F238E27FC236}">
-                <a16:creationId xmlns:a16="http://schemas.microsoft.com/office/drawing/2014/main" id="{4DC4327F-452C-40B2-97EB-DB637FE90D7E}"/>
+                <a16:creationId xmlns:a16="http://schemas.microsoft.com/office/drawing/2014/main" id="{D729D5E8-8F4C-4A07-87D7-BE9DD0CA66E7}"/>
               </a:ext>
             </a:extLst>
           </p:cNvPr>
@@ -18169,7 +19010,7 @@
           <p:cNvPr id="15" name="p03-g-4">
             <a:extLst xmlns:a="http://schemas.openxmlformats.org/drawingml/2006/main">
               <a:ext uri="{FF2B5EF4-FFF2-40B4-BE49-F238E27FC236}">
-                <a16:creationId xmlns:a16="http://schemas.microsoft.com/office/drawing/2014/main" id="{E94C70ED-131B-4B0D-91CE-ADCEAAD9AED7}"/>
+                <a16:creationId xmlns:a16="http://schemas.microsoft.com/office/drawing/2014/main" id="{9B4DEDDC-5F0D-4BCA-95BF-FAFBF1C42E37}"/>
               </a:ext>
             </a:extLst>
           </p:cNvPr>
@@ -18224,7 +19065,7 @@
           <p:cNvPr id="16" name="p03-n-5">
             <a:extLst xmlns:a="http://schemas.openxmlformats.org/drawingml/2006/main">
               <a:ext uri="{FF2B5EF4-FFF2-40B4-BE49-F238E27FC236}">
-                <a16:creationId xmlns:a16="http://schemas.microsoft.com/office/drawing/2014/main" id="{7E02309C-EA13-4E6A-AFF1-BC01F6BA763A}"/>
+                <a16:creationId xmlns:a16="http://schemas.microsoft.com/office/drawing/2014/main" id="{342EB615-58F1-4559-A46B-F235F3818BD6}"/>
               </a:ext>
             </a:extLst>
           </p:cNvPr>
@@ -18281,7 +19122,7 @@
           <p:cNvPr id="17" name="p03-g-5">
             <a:extLst xmlns:a="http://schemas.openxmlformats.org/drawingml/2006/main">
               <a:ext uri="{FF2B5EF4-FFF2-40B4-BE49-F238E27FC236}">
-                <a16:creationId xmlns:a16="http://schemas.microsoft.com/office/drawing/2014/main" id="{FBA4354C-D4F7-4BDE-9273-F949FB397C10}"/>
+                <a16:creationId xmlns:a16="http://schemas.microsoft.com/office/drawing/2014/main" id="{5EF94B14-2B14-4D86-80FD-C1A8C852FA94}"/>
               </a:ext>
             </a:extLst>
           </p:cNvPr>
@@ -18336,7 +19177,7 @@
           <p:cNvPr id="18" name="p03-n-6">
             <a:extLst xmlns:a="http://schemas.openxmlformats.org/drawingml/2006/main">
               <a:ext uri="{FF2B5EF4-FFF2-40B4-BE49-F238E27FC236}">
-                <a16:creationId xmlns:a16="http://schemas.microsoft.com/office/drawing/2014/main" id="{132C5362-4835-4763-8693-558DDCAFC2F7}"/>
+                <a16:creationId xmlns:a16="http://schemas.microsoft.com/office/drawing/2014/main" id="{9B4F68F7-B664-40E3-83CB-69B2EEE0C56B}"/>
               </a:ext>
             </a:extLst>
           </p:cNvPr>
@@ -18393,7 +19234,7 @@
           <p:cNvPr id="19" name="p03-g-6">
             <a:extLst xmlns:a="http://schemas.openxmlformats.org/drawingml/2006/main">
               <a:ext uri="{FF2B5EF4-FFF2-40B4-BE49-F238E27FC236}">
-                <a16:creationId xmlns:a16="http://schemas.microsoft.com/office/drawing/2014/main" id="{05F042F0-94E5-4D6F-BE52-80451728D39F}"/>
+                <a16:creationId xmlns:a16="http://schemas.microsoft.com/office/drawing/2014/main" id="{EE8ACF44-50E7-4578-A79C-E1F2DC264F5D}"/>
               </a:ext>
             </a:extLst>
           </p:cNvPr>
@@ -18448,7 +19289,7 @@
           <p:cNvPr id="20" name="p03-sep">
             <a:extLst xmlns:a="http://schemas.openxmlformats.org/drawingml/2006/main">
               <a:ext uri="{FF2B5EF4-FFF2-40B4-BE49-F238E27FC236}">
-                <a16:creationId xmlns:a16="http://schemas.microsoft.com/office/drawing/2014/main" id="{ADA1659C-174B-4B48-87F7-4C7C4F292C59}"/>
+                <a16:creationId xmlns:a16="http://schemas.microsoft.com/office/drawing/2014/main" id="{501104C5-EBFC-451F-9794-20BC502E7DC5}"/>
               </a:ext>
             </a:extLst>
           </p:cNvPr>
@@ -18479,7 +19320,7 @@
           <p:cNvPr id="21" name="p03-out-title">
             <a:extLst xmlns:a="http://schemas.openxmlformats.org/drawingml/2006/main">
               <a:ext uri="{FF2B5EF4-FFF2-40B4-BE49-F238E27FC236}">
-                <a16:creationId xmlns:a16="http://schemas.microsoft.com/office/drawing/2014/main" id="{4DAF74BB-EF61-4D46-B0C3-2A72EDE2582E}"/>
+                <a16:creationId xmlns:a16="http://schemas.microsoft.com/office/drawing/2014/main" id="{87CE3F82-6EF0-42CA-BC88-E271587E0920}"/>
               </a:ext>
             </a:extLst>
           </p:cNvPr>
@@ -18532,7 +19373,7 @@
           <p:cNvPr id="22" name="p03-out">
             <a:extLst xmlns:a="http://schemas.openxmlformats.org/drawingml/2006/main">
               <a:ext uri="{FF2B5EF4-FFF2-40B4-BE49-F238E27FC236}">
-                <a16:creationId xmlns:a16="http://schemas.microsoft.com/office/drawing/2014/main" id="{79FDE32F-7C9A-4782-9D1C-A96557591C83}"/>
+                <a16:creationId xmlns:a16="http://schemas.microsoft.com/office/drawing/2014/main" id="{C518E744-D9BD-4766-B0AA-781DFA86BEA5}"/>
               </a:ext>
             </a:extLst>
           </p:cNvPr>
@@ -18725,7 +19566,7 @@
           <p:cNvPr id="23" name="p03-bottom">
             <a:extLst xmlns:a="http://schemas.openxmlformats.org/drawingml/2006/main">
               <a:ext uri="{FF2B5EF4-FFF2-40B4-BE49-F238E27FC236}">
-                <a16:creationId xmlns:a16="http://schemas.microsoft.com/office/drawing/2014/main" id="{B9102CE3-F7A3-4830-9743-5F66E2427D8B}"/>
+                <a16:creationId xmlns:a16="http://schemas.microsoft.com/office/drawing/2014/main" id="{58FABD77-E978-4670-BB8A-906ADB66936D}"/>
               </a:ext>
             </a:extLst>
           </p:cNvPr>
@@ -18872,7 +19713,7 @@
           <p:cNvPr id="6" name="p04-def">
             <a:extLst xmlns:a="http://schemas.openxmlformats.org/drawingml/2006/main">
               <a:ext uri="{FF2B5EF4-FFF2-40B4-BE49-F238E27FC236}">
-                <a16:creationId xmlns:a16="http://schemas.microsoft.com/office/drawing/2014/main" id="{82B13EF5-5D6F-4AB9-9898-BA317F8DC51C}"/>
+                <a16:creationId xmlns:a16="http://schemas.microsoft.com/office/drawing/2014/main" id="{63965064-FFB8-4134-AD63-6A3883B98597}"/>
               </a:ext>
             </a:extLst>
           </p:cNvPr>
@@ -18927,7 +19768,7 @@
           <p:cNvPr id="7" name="p04-l-0">
             <a:extLst xmlns:a="http://schemas.openxmlformats.org/drawingml/2006/main">
               <a:ext uri="{FF2B5EF4-FFF2-40B4-BE49-F238E27FC236}">
-                <a16:creationId xmlns:a16="http://schemas.microsoft.com/office/drawing/2014/main" id="{4F234D6E-FB89-47B1-ABDA-936F88EBDC14}"/>
+                <a16:creationId xmlns:a16="http://schemas.microsoft.com/office/drawing/2014/main" id="{25E269D9-9242-4E5C-89DE-30A2BD045F5C}"/>
               </a:ext>
             </a:extLst>
           </p:cNvPr>
@@ -18984,7 +19825,7 @@
           <p:cNvPr id="8" name="p04-t-0">
             <a:extLst xmlns:a="http://schemas.openxmlformats.org/drawingml/2006/main">
               <a:ext uri="{FF2B5EF4-FFF2-40B4-BE49-F238E27FC236}">
-                <a16:creationId xmlns:a16="http://schemas.microsoft.com/office/drawing/2014/main" id="{D5FB3891-A8BA-41BB-B8E9-B5B87E546C2E}"/>
+                <a16:creationId xmlns:a16="http://schemas.microsoft.com/office/drawing/2014/main" id="{FA4B1034-6FF0-4A48-ABF9-0C3C51431963}"/>
               </a:ext>
             </a:extLst>
           </p:cNvPr>
@@ -19074,7 +19915,7 @@
           <p:cNvPr id="9" name="p04-l-1">
             <a:extLst xmlns:a="http://schemas.openxmlformats.org/drawingml/2006/main">
               <a:ext uri="{FF2B5EF4-FFF2-40B4-BE49-F238E27FC236}">
-                <a16:creationId xmlns:a16="http://schemas.microsoft.com/office/drawing/2014/main" id="{3AD18C9C-1ECC-4180-85F8-54B51FF3CB9E}"/>
+                <a16:creationId xmlns:a16="http://schemas.microsoft.com/office/drawing/2014/main" id="{7EFB866C-FCC0-403A-BD2A-EE0314EB3513}"/>
               </a:ext>
             </a:extLst>
           </p:cNvPr>
@@ -19131,7 +19972,7 @@
           <p:cNvPr id="10" name="p04-t-1">
             <a:extLst xmlns:a="http://schemas.openxmlformats.org/drawingml/2006/main">
               <a:ext uri="{FF2B5EF4-FFF2-40B4-BE49-F238E27FC236}">
-                <a16:creationId xmlns:a16="http://schemas.microsoft.com/office/drawing/2014/main" id="{A638C11F-53C5-4A8C-8339-191128FC2719}"/>
+                <a16:creationId xmlns:a16="http://schemas.microsoft.com/office/drawing/2014/main" id="{476FB04C-B0B2-47F1-9E38-A872B4739FDC}"/>
               </a:ext>
             </a:extLst>
           </p:cNvPr>
@@ -19221,7 +20062,7 @@
           <p:cNvPr id="11" name="p04-l-2">
             <a:extLst xmlns:a="http://schemas.openxmlformats.org/drawingml/2006/main">
               <a:ext uri="{FF2B5EF4-FFF2-40B4-BE49-F238E27FC236}">
-                <a16:creationId xmlns:a16="http://schemas.microsoft.com/office/drawing/2014/main" id="{015E979E-943E-4EB0-AB99-D7F407A07601}"/>
+                <a16:creationId xmlns:a16="http://schemas.microsoft.com/office/drawing/2014/main" id="{8050421B-82D4-4E96-ABF1-C5F0F6566713}"/>
               </a:ext>
             </a:extLst>
           </p:cNvPr>
@@ -19278,7 +20119,7 @@
           <p:cNvPr id="12" name="p04-t-2">
             <a:extLst xmlns:a="http://schemas.openxmlformats.org/drawingml/2006/main">
               <a:ext uri="{FF2B5EF4-FFF2-40B4-BE49-F238E27FC236}">
-                <a16:creationId xmlns:a16="http://schemas.microsoft.com/office/drawing/2014/main" id="{AA2FB49A-BE3B-4C91-B4D9-0C218365FF64}"/>
+                <a16:creationId xmlns:a16="http://schemas.microsoft.com/office/drawing/2014/main" id="{7295EA98-4895-478B-9EB3-AE4B4CF6305D}"/>
               </a:ext>
             </a:extLst>
           </p:cNvPr>
@@ -19368,7 +20209,7 @@
           <p:cNvPr id="13" name="p04-bottom">
             <a:extLst xmlns:a="http://schemas.openxmlformats.org/drawingml/2006/main">
               <a:ext uri="{FF2B5EF4-FFF2-40B4-BE49-F238E27FC236}">
-                <a16:creationId xmlns:a16="http://schemas.microsoft.com/office/drawing/2014/main" id="{3506B52A-947B-4F5A-8BC9-92005F515E79}"/>
+                <a16:creationId xmlns:a16="http://schemas.microsoft.com/office/drawing/2014/main" id="{CE2D0DE1-3034-488D-A59F-5AD8E542AEB9}"/>
               </a:ext>
             </a:extLst>
           </p:cNvPr>
@@ -19517,7 +20358,7 @@
           <p:cNvPr id="6" name="p05-n-0">
             <a:extLst xmlns:a="http://schemas.openxmlformats.org/drawingml/2006/main">
               <a:ext uri="{FF2B5EF4-FFF2-40B4-BE49-F238E27FC236}">
-                <a16:creationId xmlns:a16="http://schemas.microsoft.com/office/drawing/2014/main" id="{D35425B7-6606-4E0C-A8F2-BCB7CB5D8DBB}"/>
+                <a16:creationId xmlns:a16="http://schemas.microsoft.com/office/drawing/2014/main" id="{96A3A6FF-AC5D-4338-B039-153B1E7721C1}"/>
               </a:ext>
             </a:extLst>
           </p:cNvPr>
@@ -19574,7 +20415,7 @@
           <p:cNvPr id="7" name="p05-main-0">
             <a:extLst xmlns:a="http://schemas.openxmlformats.org/drawingml/2006/main">
               <a:ext uri="{FF2B5EF4-FFF2-40B4-BE49-F238E27FC236}">
-                <a16:creationId xmlns:a16="http://schemas.microsoft.com/office/drawing/2014/main" id="{34BA12B2-51A7-4F6A-A02A-EEAAC8F75AB9}"/>
+                <a16:creationId xmlns:a16="http://schemas.microsoft.com/office/drawing/2014/main" id="{1FB0AFCE-6E8A-4A5A-82C6-3C6FF6E50214}"/>
               </a:ext>
             </a:extLst>
           </p:cNvPr>
@@ -19629,7 +20470,7 @@
           <p:cNvPr id="8" name="p05-why-0">
             <a:extLst xmlns:a="http://schemas.openxmlformats.org/drawingml/2006/main">
               <a:ext uri="{FF2B5EF4-FFF2-40B4-BE49-F238E27FC236}">
-                <a16:creationId xmlns:a16="http://schemas.microsoft.com/office/drawing/2014/main" id="{3D20078A-E430-4EFF-8DD4-BAAD64C4A7FE}"/>
+                <a16:creationId xmlns:a16="http://schemas.microsoft.com/office/drawing/2014/main" id="{7741617C-01C9-44CE-9D4D-6C50271B01DC}"/>
               </a:ext>
             </a:extLst>
           </p:cNvPr>
@@ -19686,7 +20527,7 @@
           <p:cNvPr id="9" name="p05-n-1">
             <a:extLst xmlns:a="http://schemas.openxmlformats.org/drawingml/2006/main">
               <a:ext uri="{FF2B5EF4-FFF2-40B4-BE49-F238E27FC236}">
-                <a16:creationId xmlns:a16="http://schemas.microsoft.com/office/drawing/2014/main" id="{B0E1ADA2-8CE0-4335-B4A1-DAA239BA9672}"/>
+                <a16:creationId xmlns:a16="http://schemas.microsoft.com/office/drawing/2014/main" id="{E60D7B5C-B064-45BD-B87D-50BF0975A658}"/>
               </a:ext>
             </a:extLst>
           </p:cNvPr>
@@ -19743,7 +20584,7 @@
           <p:cNvPr id="10" name="p05-main-1">
             <a:extLst xmlns:a="http://schemas.openxmlformats.org/drawingml/2006/main">
               <a:ext uri="{FF2B5EF4-FFF2-40B4-BE49-F238E27FC236}">
-                <a16:creationId xmlns:a16="http://schemas.microsoft.com/office/drawing/2014/main" id="{D0D7B4FE-14A2-4A2F-B1BD-56C82F9BAD4D}"/>
+                <a16:creationId xmlns:a16="http://schemas.microsoft.com/office/drawing/2014/main" id="{BF7CA254-14BB-4EC0-917E-208A6C8893F5}"/>
               </a:ext>
             </a:extLst>
           </p:cNvPr>
@@ -19798,7 +20639,7 @@
           <p:cNvPr id="11" name="p05-why-1">
             <a:extLst xmlns:a="http://schemas.openxmlformats.org/drawingml/2006/main">
               <a:ext uri="{FF2B5EF4-FFF2-40B4-BE49-F238E27FC236}">
-                <a16:creationId xmlns:a16="http://schemas.microsoft.com/office/drawing/2014/main" id="{FCFF69ED-8B01-4AE4-AA88-8D5DF48A712D}"/>
+                <a16:creationId xmlns:a16="http://schemas.microsoft.com/office/drawing/2014/main" id="{F9825687-DFAC-4580-B59C-824CBD8D85BE}"/>
               </a:ext>
             </a:extLst>
           </p:cNvPr>
@@ -19855,7 +20696,7 @@
           <p:cNvPr id="12" name="p05-n-2">
             <a:extLst xmlns:a="http://schemas.openxmlformats.org/drawingml/2006/main">
               <a:ext uri="{FF2B5EF4-FFF2-40B4-BE49-F238E27FC236}">
-                <a16:creationId xmlns:a16="http://schemas.microsoft.com/office/drawing/2014/main" id="{C9C778CF-E573-40A1-B40A-292A4060BC5A}"/>
+                <a16:creationId xmlns:a16="http://schemas.microsoft.com/office/drawing/2014/main" id="{7A305979-4305-4010-ADA8-EA223C1F35E1}"/>
               </a:ext>
             </a:extLst>
           </p:cNvPr>
@@ -19912,7 +20753,7 @@
           <p:cNvPr id="13" name="p05-main-2">
             <a:extLst xmlns:a="http://schemas.openxmlformats.org/drawingml/2006/main">
               <a:ext uri="{FF2B5EF4-FFF2-40B4-BE49-F238E27FC236}">
-                <a16:creationId xmlns:a16="http://schemas.microsoft.com/office/drawing/2014/main" id="{031AB1BD-BBF2-48EF-AAEE-4AD1DFD46DE8}"/>
+                <a16:creationId xmlns:a16="http://schemas.microsoft.com/office/drawing/2014/main" id="{E2B0410C-3421-4C83-957A-07E7DA770CCC}"/>
               </a:ext>
             </a:extLst>
           </p:cNvPr>
@@ -19967,7 +20808,7 @@
           <p:cNvPr id="14" name="p05-why-2">
             <a:extLst xmlns:a="http://schemas.openxmlformats.org/drawingml/2006/main">
               <a:ext uri="{FF2B5EF4-FFF2-40B4-BE49-F238E27FC236}">
-                <a16:creationId xmlns:a16="http://schemas.microsoft.com/office/drawing/2014/main" id="{88C7B4D3-2274-491E-B55A-1A7BA8C31FF5}"/>
+                <a16:creationId xmlns:a16="http://schemas.microsoft.com/office/drawing/2014/main" id="{5C06E732-2F65-4897-8B0D-92647F104442}"/>
               </a:ext>
             </a:extLst>
           </p:cNvPr>
@@ -20024,7 +20865,7 @@
           <p:cNvPr id="15" name="p05-n-3">
             <a:extLst xmlns:a="http://schemas.openxmlformats.org/drawingml/2006/main">
               <a:ext uri="{FF2B5EF4-FFF2-40B4-BE49-F238E27FC236}">
-                <a16:creationId xmlns:a16="http://schemas.microsoft.com/office/drawing/2014/main" id="{E307D272-D6D5-4B18-A4E5-DC2974B65718}"/>
+                <a16:creationId xmlns:a16="http://schemas.microsoft.com/office/drawing/2014/main" id="{79734CFE-95B5-4A25-A695-9AE4AE4F75A1}"/>
               </a:ext>
             </a:extLst>
           </p:cNvPr>
@@ -20081,7 +20922,7 @@
           <p:cNvPr id="16" name="p05-main-3">
             <a:extLst xmlns:a="http://schemas.openxmlformats.org/drawingml/2006/main">
               <a:ext uri="{FF2B5EF4-FFF2-40B4-BE49-F238E27FC236}">
-                <a16:creationId xmlns:a16="http://schemas.microsoft.com/office/drawing/2014/main" id="{8F78DF74-FA50-4437-BDBB-33CFCD94DA7F}"/>
+                <a16:creationId xmlns:a16="http://schemas.microsoft.com/office/drawing/2014/main" id="{F01C0F4E-C5E1-4CBA-80DE-7388C17A6211}"/>
               </a:ext>
             </a:extLst>
           </p:cNvPr>
@@ -20136,7 +20977,7 @@
           <p:cNvPr id="17" name="p05-why-3">
             <a:extLst xmlns:a="http://schemas.openxmlformats.org/drawingml/2006/main">
               <a:ext uri="{FF2B5EF4-FFF2-40B4-BE49-F238E27FC236}">
-                <a16:creationId xmlns:a16="http://schemas.microsoft.com/office/drawing/2014/main" id="{29E73D5A-C59C-46A9-BAAE-B3EE3A2B866C}"/>
+                <a16:creationId xmlns:a16="http://schemas.microsoft.com/office/drawing/2014/main" id="{E487D9A9-3764-4830-9A68-D2324D272E1B}"/>
               </a:ext>
             </a:extLst>
           </p:cNvPr>
@@ -20193,7 +21034,7 @@
           <p:cNvPr id="18" name="p05-n-4">
             <a:extLst xmlns:a="http://schemas.openxmlformats.org/drawingml/2006/main">
               <a:ext uri="{FF2B5EF4-FFF2-40B4-BE49-F238E27FC236}">
-                <a16:creationId xmlns:a16="http://schemas.microsoft.com/office/drawing/2014/main" id="{19B591A5-AFCC-4EFE-9826-22DEB58B921E}"/>
+                <a16:creationId xmlns:a16="http://schemas.microsoft.com/office/drawing/2014/main" id="{1CA7B1CA-9DAC-49FD-8FB3-F9264B1643F1}"/>
               </a:ext>
             </a:extLst>
           </p:cNvPr>
@@ -20250,7 +21091,7 @@
           <p:cNvPr id="19" name="p05-main-4">
             <a:extLst xmlns:a="http://schemas.openxmlformats.org/drawingml/2006/main">
               <a:ext uri="{FF2B5EF4-FFF2-40B4-BE49-F238E27FC236}">
-                <a16:creationId xmlns:a16="http://schemas.microsoft.com/office/drawing/2014/main" id="{9CC63FEF-526C-44D6-A8F1-E15E969CC112}"/>
+                <a16:creationId xmlns:a16="http://schemas.microsoft.com/office/drawing/2014/main" id="{95FE5B7A-FC3B-4279-9A7C-7827D4A3F75D}"/>
               </a:ext>
             </a:extLst>
           </p:cNvPr>
@@ -20305,7 +21146,7 @@
           <p:cNvPr id="20" name="p05-why-4">
             <a:extLst xmlns:a="http://schemas.openxmlformats.org/drawingml/2006/main">
               <a:ext uri="{FF2B5EF4-FFF2-40B4-BE49-F238E27FC236}">
-                <a16:creationId xmlns:a16="http://schemas.microsoft.com/office/drawing/2014/main" id="{06CA5B73-2863-4448-9F41-916B86EC2C9B}"/>
+                <a16:creationId xmlns:a16="http://schemas.microsoft.com/office/drawing/2014/main" id="{0FEE630E-C810-4B8A-A0F2-94976ACB17F7}"/>
               </a:ext>
             </a:extLst>
           </p:cNvPr>
@@ -20362,7 +21203,7 @@
           <p:cNvPr id="21" name="p05-bottom">
             <a:extLst xmlns:a="http://schemas.openxmlformats.org/drawingml/2006/main">
               <a:ext uri="{FF2B5EF4-FFF2-40B4-BE49-F238E27FC236}">
-                <a16:creationId xmlns:a16="http://schemas.microsoft.com/office/drawing/2014/main" id="{6D4AB84F-2D25-4FA0-B7F6-F5AE076F7388}"/>
+                <a16:creationId xmlns:a16="http://schemas.microsoft.com/office/drawing/2014/main" id="{7905B9F9-88A9-42EA-BB94-47BFC4270AC3}"/>
               </a:ext>
             </a:extLst>
           </p:cNvPr>
@@ -20509,7 +21350,7 @@
           <p:cNvPr id="6" name="p06-table-h-0">
             <a:extLst xmlns:a="http://schemas.openxmlformats.org/drawingml/2006/main">
               <a:ext uri="{FF2B5EF4-FFF2-40B4-BE49-F238E27FC236}">
-                <a16:creationId xmlns:a16="http://schemas.microsoft.com/office/drawing/2014/main" id="{675D1066-5F41-46BE-A304-1E4F99A24690}"/>
+                <a16:creationId xmlns:a16="http://schemas.microsoft.com/office/drawing/2014/main" id="{C027FE04-6795-4B1D-A74D-E93B4D238D0D}"/>
               </a:ext>
             </a:extLst>
           </p:cNvPr>
@@ -20564,7 +21405,7 @@
           <p:cNvPr id="7" name="p06-table-h-1">
             <a:extLst xmlns:a="http://schemas.openxmlformats.org/drawingml/2006/main">
               <a:ext uri="{FF2B5EF4-FFF2-40B4-BE49-F238E27FC236}">
-                <a16:creationId xmlns:a16="http://schemas.microsoft.com/office/drawing/2014/main" id="{6CD92C31-7F25-4991-9474-CE3007C68286}"/>
+                <a16:creationId xmlns:a16="http://schemas.microsoft.com/office/drawing/2014/main" id="{4C640871-72F6-43E3-AA56-B8E2CC516A98}"/>
               </a:ext>
             </a:extLst>
           </p:cNvPr>
@@ -20619,7 +21460,7 @@
           <p:cNvPr id="8" name="p06-table-h-2">
             <a:extLst xmlns:a="http://schemas.openxmlformats.org/drawingml/2006/main">
               <a:ext uri="{FF2B5EF4-FFF2-40B4-BE49-F238E27FC236}">
-                <a16:creationId xmlns:a16="http://schemas.microsoft.com/office/drawing/2014/main" id="{505BAE0D-88E6-4E1D-ADDD-EA4B34FBD67B}"/>
+                <a16:creationId xmlns:a16="http://schemas.microsoft.com/office/drawing/2014/main" id="{54FBAB27-9B7E-48D5-A7DE-C78772C93267}"/>
               </a:ext>
             </a:extLst>
           </p:cNvPr>
@@ -20674,7 +21515,7 @@
           <p:cNvPr id="9" name="p06-table-r0-0">
             <a:extLst xmlns:a="http://schemas.openxmlformats.org/drawingml/2006/main">
               <a:ext uri="{FF2B5EF4-FFF2-40B4-BE49-F238E27FC236}">
-                <a16:creationId xmlns:a16="http://schemas.microsoft.com/office/drawing/2014/main" id="{BA0A83E9-4841-4735-8678-C29229A19747}"/>
+                <a16:creationId xmlns:a16="http://schemas.microsoft.com/office/drawing/2014/main" id="{53A5618E-D9F2-4C7F-AC44-65F14D9FFC31}"/>
               </a:ext>
             </a:extLst>
           </p:cNvPr>
@@ -20735,7 +21576,7 @@
           <p:cNvPr id="10" name="p06-table-r0-1">
             <a:extLst xmlns:a="http://schemas.openxmlformats.org/drawingml/2006/main">
               <a:ext uri="{FF2B5EF4-FFF2-40B4-BE49-F238E27FC236}">
-                <a16:creationId xmlns:a16="http://schemas.microsoft.com/office/drawing/2014/main" id="{BCACF3E2-C437-448A-B711-F4E7D3B31F5D}"/>
+                <a16:creationId xmlns:a16="http://schemas.microsoft.com/office/drawing/2014/main" id="{60A65376-0CB8-463B-BC45-0C3E1D2CB906}"/>
               </a:ext>
             </a:extLst>
           </p:cNvPr>
@@ -20796,7 +21637,7 @@
           <p:cNvPr id="11" name="p06-table-r0-2">
             <a:extLst xmlns:a="http://schemas.openxmlformats.org/drawingml/2006/main">
               <a:ext uri="{FF2B5EF4-FFF2-40B4-BE49-F238E27FC236}">
-                <a16:creationId xmlns:a16="http://schemas.microsoft.com/office/drawing/2014/main" id="{25155667-64C6-46E2-88B2-ABF19A508955}"/>
+                <a16:creationId xmlns:a16="http://schemas.microsoft.com/office/drawing/2014/main" id="{5BEC54CE-057F-4DBA-A4D6-A930CD4C119E}"/>
               </a:ext>
             </a:extLst>
           </p:cNvPr>
@@ -20857,7 +21698,7 @@
           <p:cNvPr id="12" name="p06-table-r1-0">
             <a:extLst xmlns:a="http://schemas.openxmlformats.org/drawingml/2006/main">
               <a:ext uri="{FF2B5EF4-FFF2-40B4-BE49-F238E27FC236}">
-                <a16:creationId xmlns:a16="http://schemas.microsoft.com/office/drawing/2014/main" id="{8DB9A505-308E-4877-A2D0-2CBB995A7256}"/>
+                <a16:creationId xmlns:a16="http://schemas.microsoft.com/office/drawing/2014/main" id="{0430C8C2-C748-4DC4-BB19-0AF1EA91C510}"/>
               </a:ext>
             </a:extLst>
           </p:cNvPr>
@@ -20918,7 +21759,7 @@
           <p:cNvPr id="13" name="p06-table-r1-1">
             <a:extLst xmlns:a="http://schemas.openxmlformats.org/drawingml/2006/main">
               <a:ext uri="{FF2B5EF4-FFF2-40B4-BE49-F238E27FC236}">
-                <a16:creationId xmlns:a16="http://schemas.microsoft.com/office/drawing/2014/main" id="{6D3C2B7F-F94C-41A9-949B-04537E062C9F}"/>
+                <a16:creationId xmlns:a16="http://schemas.microsoft.com/office/drawing/2014/main" id="{76674344-5726-4798-A865-9482FAA11DD0}"/>
               </a:ext>
             </a:extLst>
           </p:cNvPr>
@@ -20979,7 +21820,7 @@
           <p:cNvPr id="14" name="p06-table-r1-2">
             <a:extLst xmlns:a="http://schemas.openxmlformats.org/drawingml/2006/main">
               <a:ext uri="{FF2B5EF4-FFF2-40B4-BE49-F238E27FC236}">
-                <a16:creationId xmlns:a16="http://schemas.microsoft.com/office/drawing/2014/main" id="{1EF15142-C37C-41E1-8676-173E182E1EE0}"/>
+                <a16:creationId xmlns:a16="http://schemas.microsoft.com/office/drawing/2014/main" id="{8D735027-621A-4987-A268-35E09E8E2391}"/>
               </a:ext>
             </a:extLst>
           </p:cNvPr>
@@ -21040,7 +21881,7 @@
           <p:cNvPr id="15" name="p06-table-r2-0">
             <a:extLst xmlns:a="http://schemas.openxmlformats.org/drawingml/2006/main">
               <a:ext uri="{FF2B5EF4-FFF2-40B4-BE49-F238E27FC236}">
-                <a16:creationId xmlns:a16="http://schemas.microsoft.com/office/drawing/2014/main" id="{DEC8002D-5DC0-4A61-AB69-045D43BBBB20}"/>
+                <a16:creationId xmlns:a16="http://schemas.microsoft.com/office/drawing/2014/main" id="{797B33F0-1C2F-47DF-AF04-C56F3FB56022}"/>
               </a:ext>
             </a:extLst>
           </p:cNvPr>
@@ -21101,7 +21942,7 @@
           <p:cNvPr id="16" name="p06-table-r2-1">
             <a:extLst xmlns:a="http://schemas.openxmlformats.org/drawingml/2006/main">
               <a:ext uri="{FF2B5EF4-FFF2-40B4-BE49-F238E27FC236}">
-                <a16:creationId xmlns:a16="http://schemas.microsoft.com/office/drawing/2014/main" id="{F3B93E20-21D7-4406-9D3B-27C1C420ABB4}"/>
+                <a16:creationId xmlns:a16="http://schemas.microsoft.com/office/drawing/2014/main" id="{FC3D014E-48B0-45F2-9730-68A6A7AFC249}"/>
               </a:ext>
             </a:extLst>
           </p:cNvPr>
@@ -21162,7 +22003,7 @@
           <p:cNvPr id="17" name="p06-table-r2-2">
             <a:extLst xmlns:a="http://schemas.openxmlformats.org/drawingml/2006/main">
               <a:ext uri="{FF2B5EF4-FFF2-40B4-BE49-F238E27FC236}">
-                <a16:creationId xmlns:a16="http://schemas.microsoft.com/office/drawing/2014/main" id="{BA466560-CF34-430D-9712-71EFAEC28A59}"/>
+                <a16:creationId xmlns:a16="http://schemas.microsoft.com/office/drawing/2014/main" id="{3C64C9D5-446B-4BE4-9369-CD69DD24A9DC}"/>
               </a:ext>
             </a:extLst>
           </p:cNvPr>
@@ -21223,7 +22064,7 @@
           <p:cNvPr id="18" name="p06-table-r3-0">
             <a:extLst xmlns:a="http://schemas.openxmlformats.org/drawingml/2006/main">
               <a:ext uri="{FF2B5EF4-FFF2-40B4-BE49-F238E27FC236}">
-                <a16:creationId xmlns:a16="http://schemas.microsoft.com/office/drawing/2014/main" id="{09E0095B-15B3-4804-8855-7410E767043D}"/>
+                <a16:creationId xmlns:a16="http://schemas.microsoft.com/office/drawing/2014/main" id="{DA18C45B-8C9F-4FF2-9491-ABFB9BEE7E26}"/>
               </a:ext>
             </a:extLst>
           </p:cNvPr>
@@ -21284,7 +22125,7 @@
           <p:cNvPr id="19" name="p06-table-r3-1">
             <a:extLst xmlns:a="http://schemas.openxmlformats.org/drawingml/2006/main">
               <a:ext uri="{FF2B5EF4-FFF2-40B4-BE49-F238E27FC236}">
-                <a16:creationId xmlns:a16="http://schemas.microsoft.com/office/drawing/2014/main" id="{57468FAD-2858-4C61-8CF6-F51A49EEFDCA}"/>
+                <a16:creationId xmlns:a16="http://schemas.microsoft.com/office/drawing/2014/main" id="{799ADA21-ADDE-48F8-BBB6-59DF0F8F883A}"/>
               </a:ext>
             </a:extLst>
           </p:cNvPr>
@@ -21345,7 +22186,7 @@
           <p:cNvPr id="20" name="p06-table-r3-2">
             <a:extLst xmlns:a="http://schemas.openxmlformats.org/drawingml/2006/main">
               <a:ext uri="{FF2B5EF4-FFF2-40B4-BE49-F238E27FC236}">
-                <a16:creationId xmlns:a16="http://schemas.microsoft.com/office/drawing/2014/main" id="{0A202907-5377-4F6F-93EF-AD9ECD0C196A}"/>
+                <a16:creationId xmlns:a16="http://schemas.microsoft.com/office/drawing/2014/main" id="{3BC071DD-49C6-4F8A-B8B4-791135CEB2EA}"/>
               </a:ext>
             </a:extLst>
           </p:cNvPr>
@@ -21406,7 +22247,7 @@
           <p:cNvPr id="21" name="p06-table-r4-0">
             <a:extLst xmlns:a="http://schemas.openxmlformats.org/drawingml/2006/main">
               <a:ext uri="{FF2B5EF4-FFF2-40B4-BE49-F238E27FC236}">
-                <a16:creationId xmlns:a16="http://schemas.microsoft.com/office/drawing/2014/main" id="{F1C6A195-50BF-4B00-8978-B7AFBBE09198}"/>
+                <a16:creationId xmlns:a16="http://schemas.microsoft.com/office/drawing/2014/main" id="{BF0E2CFA-901C-468C-80FF-D7623B834A18}"/>
               </a:ext>
             </a:extLst>
           </p:cNvPr>
@@ -21467,7 +22308,7 @@
           <p:cNvPr id="22" name="p06-table-r4-1">
             <a:extLst xmlns:a="http://schemas.openxmlformats.org/drawingml/2006/main">
               <a:ext uri="{FF2B5EF4-FFF2-40B4-BE49-F238E27FC236}">
-                <a16:creationId xmlns:a16="http://schemas.microsoft.com/office/drawing/2014/main" id="{32DC0C3A-EB34-4881-8A96-B45EA6E3797D}"/>
+                <a16:creationId xmlns:a16="http://schemas.microsoft.com/office/drawing/2014/main" id="{020E500B-5697-486F-8ABE-5E63978D9D42}"/>
               </a:ext>
             </a:extLst>
           </p:cNvPr>
@@ -21528,7 +22369,7 @@
           <p:cNvPr id="23" name="p06-table-r4-2">
             <a:extLst xmlns:a="http://schemas.openxmlformats.org/drawingml/2006/main">
               <a:ext uri="{FF2B5EF4-FFF2-40B4-BE49-F238E27FC236}">
-                <a16:creationId xmlns:a16="http://schemas.microsoft.com/office/drawing/2014/main" id="{B27F7246-3760-4F1C-9F6D-68C0CF5C71FF}"/>
+                <a16:creationId xmlns:a16="http://schemas.microsoft.com/office/drawing/2014/main" id="{725A9F75-3E61-47CB-820F-61D4A4A57280}"/>
               </a:ext>
             </a:extLst>
           </p:cNvPr>
@@ -21589,7 +22430,7 @@
           <p:cNvPr id="24" name="p06-bottom">
             <a:extLst xmlns:a="http://schemas.openxmlformats.org/drawingml/2006/main">
               <a:ext uri="{FF2B5EF4-FFF2-40B4-BE49-F238E27FC236}">
-                <a16:creationId xmlns:a16="http://schemas.microsoft.com/office/drawing/2014/main" id="{3E264FD3-8314-461E-91B7-F5D677C4B800}"/>
+                <a16:creationId xmlns:a16="http://schemas.microsoft.com/office/drawing/2014/main" id="{2C4BB1F3-C770-410D-8444-280FC38CE8DA}"/>
               </a:ext>
             </a:extLst>
           </p:cNvPr>
@@ -21738,7 +22579,7 @@
           <p:cNvPr id="6" name="p07-watermark">
             <a:extLst xmlns:a="http://schemas.openxmlformats.org/drawingml/2006/main">
               <a:ext uri="{FF2B5EF4-FFF2-40B4-BE49-F238E27FC236}">
-                <a16:creationId xmlns:a16="http://schemas.microsoft.com/office/drawing/2014/main" id="{C1331B18-5E05-4852-AFF1-BB00A96D7D3F}"/>
+                <a16:creationId xmlns:a16="http://schemas.microsoft.com/office/drawing/2014/main" id="{E85B761D-129A-4623-A6CD-D283A4555B3F}"/>
               </a:ext>
             </a:extLst>
           </p:cNvPr>
@@ -21791,7 +22632,7 @@
           <p:cNvPr id="7" name="p07-claim">
             <a:extLst xmlns:a="http://schemas.openxmlformats.org/drawingml/2006/main">
               <a:ext uri="{FF2B5EF4-FFF2-40B4-BE49-F238E27FC236}">
-                <a16:creationId xmlns:a16="http://schemas.microsoft.com/office/drawing/2014/main" id="{D47E0A9F-340E-420D-A681-D1400A9F3780}"/>
+                <a16:creationId xmlns:a16="http://schemas.microsoft.com/office/drawing/2014/main" id="{295F55E2-598B-429F-818D-15479FB9EC30}"/>
               </a:ext>
             </a:extLst>
           </p:cNvPr>
@@ -21852,7 +22693,7 @@
           <p:cNvPr id="8" name="p07-question">
             <a:extLst xmlns:a="http://schemas.openxmlformats.org/drawingml/2006/main">
               <a:ext uri="{FF2B5EF4-FFF2-40B4-BE49-F238E27FC236}">
-                <a16:creationId xmlns:a16="http://schemas.microsoft.com/office/drawing/2014/main" id="{B8E93CFC-A9ED-4E7B-947A-77CB6ACA79C3}"/>
+                <a16:creationId xmlns:a16="http://schemas.microsoft.com/office/drawing/2014/main" id="{B4CCDD16-C83A-4ECC-9575-6E6CB58DF86D}"/>
               </a:ext>
             </a:extLst>
           </p:cNvPr>
@@ -21905,7 +22746,7 @@
           <p:cNvPr id="9" name="p07-judgment">
             <a:extLst xmlns:a="http://schemas.openxmlformats.org/drawingml/2006/main">
               <a:ext uri="{FF2B5EF4-FFF2-40B4-BE49-F238E27FC236}">
-                <a16:creationId xmlns:a16="http://schemas.microsoft.com/office/drawing/2014/main" id="{8C3254B5-A091-4106-B406-725DB8BF1F0D}"/>
+                <a16:creationId xmlns:a16="http://schemas.microsoft.com/office/drawing/2014/main" id="{54E1A9A4-CE49-4F24-9FB4-7EB758230499}"/>
               </a:ext>
             </a:extLst>
           </p:cNvPr>
@@ -21960,7 +22801,7 @@
           <p:cNvPr id="10" name="p07-n-0">
             <a:extLst xmlns:a="http://schemas.openxmlformats.org/drawingml/2006/main">
               <a:ext uri="{FF2B5EF4-FFF2-40B4-BE49-F238E27FC236}">
-                <a16:creationId xmlns:a16="http://schemas.microsoft.com/office/drawing/2014/main" id="{907E3005-2465-4416-A4FA-035DAF272EDF}"/>
+                <a16:creationId xmlns:a16="http://schemas.microsoft.com/office/drawing/2014/main" id="{8AAA7CF0-011A-4810-8253-39753156CF70}"/>
               </a:ext>
             </a:extLst>
           </p:cNvPr>
@@ -22017,7 +22858,7 @@
           <p:cNvPr id="11" name="p07-m-0">
             <a:extLst xmlns:a="http://schemas.openxmlformats.org/drawingml/2006/main">
               <a:ext uri="{FF2B5EF4-FFF2-40B4-BE49-F238E27FC236}">
-                <a16:creationId xmlns:a16="http://schemas.microsoft.com/office/drawing/2014/main" id="{794AFECF-4599-4B04-B62E-9358969C84DD}"/>
+                <a16:creationId xmlns:a16="http://schemas.microsoft.com/office/drawing/2014/main" id="{0F633CD0-96F0-4AAB-8D09-A553D4578BDC}"/>
               </a:ext>
             </a:extLst>
           </p:cNvPr>
@@ -22072,7 +22913,7 @@
           <p:cNvPr id="12" name="p07-n-1">
             <a:extLst xmlns:a="http://schemas.openxmlformats.org/drawingml/2006/main">
               <a:ext uri="{FF2B5EF4-FFF2-40B4-BE49-F238E27FC236}">
-                <a16:creationId xmlns:a16="http://schemas.microsoft.com/office/drawing/2014/main" id="{01C11D9B-5B73-44DD-89A4-40335D0CAC18}"/>
+                <a16:creationId xmlns:a16="http://schemas.microsoft.com/office/drawing/2014/main" id="{15D366FA-23D5-415D-A457-0A503B3D4CCE}"/>
               </a:ext>
             </a:extLst>
           </p:cNvPr>
@@ -22129,7 +22970,7 @@
           <p:cNvPr id="13" name="p07-m-1">
             <a:extLst xmlns:a="http://schemas.openxmlformats.org/drawingml/2006/main">
               <a:ext uri="{FF2B5EF4-FFF2-40B4-BE49-F238E27FC236}">
-                <a16:creationId xmlns:a16="http://schemas.microsoft.com/office/drawing/2014/main" id="{E562DE7B-D963-4B0B-BC67-8DE20450A325}"/>
+                <a16:creationId xmlns:a16="http://schemas.microsoft.com/office/drawing/2014/main" id="{A0401979-263C-4188-9D64-4F616DEB8909}"/>
               </a:ext>
             </a:extLst>
           </p:cNvPr>
@@ -22184,7 +23025,7 @@
           <p:cNvPr id="14" name="p07-n-2">
             <a:extLst xmlns:a="http://schemas.openxmlformats.org/drawingml/2006/main">
               <a:ext uri="{FF2B5EF4-FFF2-40B4-BE49-F238E27FC236}">
-                <a16:creationId xmlns:a16="http://schemas.microsoft.com/office/drawing/2014/main" id="{E1C0A4EC-0AD0-465A-8762-15D774B8A5E2}"/>
+                <a16:creationId xmlns:a16="http://schemas.microsoft.com/office/drawing/2014/main" id="{104929DD-61C3-4E66-BAAC-DE449C0CAA64}"/>
               </a:ext>
             </a:extLst>
           </p:cNvPr>
@@ -22241,7 +23082,7 @@
           <p:cNvPr id="15" name="p07-m-2">
             <a:extLst xmlns:a="http://schemas.openxmlformats.org/drawingml/2006/main">
               <a:ext uri="{FF2B5EF4-FFF2-40B4-BE49-F238E27FC236}">
-                <a16:creationId xmlns:a16="http://schemas.microsoft.com/office/drawing/2014/main" id="{D5AEDC31-F8CB-4DE6-9A65-BBB97F11847D}"/>
+                <a16:creationId xmlns:a16="http://schemas.microsoft.com/office/drawing/2014/main" id="{224E2378-28B0-4EF3-9B45-907B42B8B8FF}"/>
               </a:ext>
             </a:extLst>
           </p:cNvPr>
@@ -22296,7 +23137,7 @@
           <p:cNvPr id="16" name="p07-n-3">
             <a:extLst xmlns:a="http://schemas.openxmlformats.org/drawingml/2006/main">
               <a:ext uri="{FF2B5EF4-FFF2-40B4-BE49-F238E27FC236}">
-                <a16:creationId xmlns:a16="http://schemas.microsoft.com/office/drawing/2014/main" id="{EC5446E6-C508-4F07-B5D1-30BBA5BBFD87}"/>
+                <a16:creationId xmlns:a16="http://schemas.microsoft.com/office/drawing/2014/main" id="{545E03EC-63B9-4CBB-8015-9F5D0D1F1850}"/>
               </a:ext>
             </a:extLst>
           </p:cNvPr>
@@ -22353,7 +23194,7 @@
           <p:cNvPr id="17" name="p07-m-3">
             <a:extLst xmlns:a="http://schemas.openxmlformats.org/drawingml/2006/main">
               <a:ext uri="{FF2B5EF4-FFF2-40B4-BE49-F238E27FC236}">
-                <a16:creationId xmlns:a16="http://schemas.microsoft.com/office/drawing/2014/main" id="{1B59A632-F9EA-4B27-B5BB-21F47D8967E5}"/>
+                <a16:creationId xmlns:a16="http://schemas.microsoft.com/office/drawing/2014/main" id="{3F37D714-C796-4E2B-B949-0F013CACA198}"/>
               </a:ext>
             </a:extLst>
           </p:cNvPr>
@@ -22408,7 +23249,7 @@
           <p:cNvPr id="18" name="p07-n-4">
             <a:extLst xmlns:a="http://schemas.openxmlformats.org/drawingml/2006/main">
               <a:ext uri="{FF2B5EF4-FFF2-40B4-BE49-F238E27FC236}">
-                <a16:creationId xmlns:a16="http://schemas.microsoft.com/office/drawing/2014/main" id="{3E91F92A-F8B8-43E0-9702-0C5DF2E820DB}"/>
+                <a16:creationId xmlns:a16="http://schemas.microsoft.com/office/drawing/2014/main" id="{01B95EF6-B81C-4A91-8C49-D11863A96787}"/>
               </a:ext>
             </a:extLst>
           </p:cNvPr>
@@ -22465,7 +23306,7 @@
           <p:cNvPr id="19" name="p07-m-4">
             <a:extLst xmlns:a="http://schemas.openxmlformats.org/drawingml/2006/main">
               <a:ext uri="{FF2B5EF4-FFF2-40B4-BE49-F238E27FC236}">
-                <a16:creationId xmlns:a16="http://schemas.microsoft.com/office/drawing/2014/main" id="{B3CB04DE-6C90-47F8-B663-1E12C2E48627}"/>
+                <a16:creationId xmlns:a16="http://schemas.microsoft.com/office/drawing/2014/main" id="{FEE1177B-CFD0-429C-AC36-04575BE31062}"/>
               </a:ext>
             </a:extLst>
           </p:cNvPr>
@@ -22520,7 +23361,7 @@
           <p:cNvPr id="20" name="p07-n-5">
             <a:extLst xmlns:a="http://schemas.openxmlformats.org/drawingml/2006/main">
               <a:ext uri="{FF2B5EF4-FFF2-40B4-BE49-F238E27FC236}">
-                <a16:creationId xmlns:a16="http://schemas.microsoft.com/office/drawing/2014/main" id="{376E08D8-7129-4ACF-979F-4BC7654BBD33}"/>
+                <a16:creationId xmlns:a16="http://schemas.microsoft.com/office/drawing/2014/main" id="{E65C74CE-72FF-4B21-82A0-B40A1A6C0A7E}"/>
               </a:ext>
             </a:extLst>
           </p:cNvPr>
@@ -22577,7 +23418,7 @@
           <p:cNvPr id="21" name="p07-m-5">
             <a:extLst xmlns:a="http://schemas.openxmlformats.org/drawingml/2006/main">
               <a:ext uri="{FF2B5EF4-FFF2-40B4-BE49-F238E27FC236}">
-                <a16:creationId xmlns:a16="http://schemas.microsoft.com/office/drawing/2014/main" id="{A8E52AAA-B64B-4392-BE7E-C9CDA0B97E70}"/>
+                <a16:creationId xmlns:a16="http://schemas.microsoft.com/office/drawing/2014/main" id="{B8B7D866-682D-42EF-8E25-E75099A7336A}"/>
               </a:ext>
             </a:extLst>
           </p:cNvPr>
@@ -22632,7 +23473,7 @@
           <p:cNvPr id="22" name="p07-n-6">
             <a:extLst xmlns:a="http://schemas.openxmlformats.org/drawingml/2006/main">
               <a:ext uri="{FF2B5EF4-FFF2-40B4-BE49-F238E27FC236}">
-                <a16:creationId xmlns:a16="http://schemas.microsoft.com/office/drawing/2014/main" id="{83254B64-89B7-4822-914D-63125A243A29}"/>
+                <a16:creationId xmlns:a16="http://schemas.microsoft.com/office/drawing/2014/main" id="{F873309D-86BA-4813-8B8F-324EECD83DB7}"/>
               </a:ext>
             </a:extLst>
           </p:cNvPr>
@@ -22689,7 +23530,7 @@
           <p:cNvPr id="23" name="p07-m-6">
             <a:extLst xmlns:a="http://schemas.openxmlformats.org/drawingml/2006/main">
               <a:ext uri="{FF2B5EF4-FFF2-40B4-BE49-F238E27FC236}">
-                <a16:creationId xmlns:a16="http://schemas.microsoft.com/office/drawing/2014/main" id="{DFD244BE-99B7-4F00-890C-4FD2A2AE0E9B}"/>
+                <a16:creationId xmlns:a16="http://schemas.microsoft.com/office/drawing/2014/main" id="{4F48AB8F-3241-4BE9-BCD3-07AD4714ADD7}"/>
               </a:ext>
             </a:extLst>
           </p:cNvPr>
@@ -22744,7 +23585,7 @@
           <p:cNvPr id="24" name="p07-bottom">
             <a:extLst xmlns:a="http://schemas.openxmlformats.org/drawingml/2006/main">
               <a:ext uri="{FF2B5EF4-FFF2-40B4-BE49-F238E27FC236}">
-                <a16:creationId xmlns:a16="http://schemas.microsoft.com/office/drawing/2014/main" id="{28D95A17-7ED6-49F0-8532-09113615200E}"/>
+                <a16:creationId xmlns:a16="http://schemas.microsoft.com/office/drawing/2014/main" id="{31B38EB3-DA8F-4611-B1F9-6B0191939E41}"/>
               </a:ext>
             </a:extLst>
           </p:cNvPr>
@@ -22891,7 +23732,7 @@
           <p:cNvPr id="6" name="p08-table-h-0">
             <a:extLst xmlns:a="http://schemas.openxmlformats.org/drawingml/2006/main">
               <a:ext uri="{FF2B5EF4-FFF2-40B4-BE49-F238E27FC236}">
-                <a16:creationId xmlns:a16="http://schemas.microsoft.com/office/drawing/2014/main" id="{BA781C06-51B5-4CC7-81FF-D6605EB77131}"/>
+                <a16:creationId xmlns:a16="http://schemas.microsoft.com/office/drawing/2014/main" id="{A2BE6434-DE06-4378-A3C4-A1B527C70A63}"/>
               </a:ext>
             </a:extLst>
           </p:cNvPr>
@@ -22946,7 +23787,7 @@
           <p:cNvPr id="7" name="p08-table-h-1">
             <a:extLst xmlns:a="http://schemas.openxmlformats.org/drawingml/2006/main">
               <a:ext uri="{FF2B5EF4-FFF2-40B4-BE49-F238E27FC236}">
-                <a16:creationId xmlns:a16="http://schemas.microsoft.com/office/drawing/2014/main" id="{5B88325E-89EA-4391-B19F-D9A3B9CCF04B}"/>
+                <a16:creationId xmlns:a16="http://schemas.microsoft.com/office/drawing/2014/main" id="{DA17B26E-7983-491D-8F3A-BD3DD9C3FA93}"/>
               </a:ext>
             </a:extLst>
           </p:cNvPr>
@@ -23001,7 +23842,7 @@
           <p:cNvPr id="8" name="p08-table-r0-0">
             <a:extLst xmlns:a="http://schemas.openxmlformats.org/drawingml/2006/main">
               <a:ext uri="{FF2B5EF4-FFF2-40B4-BE49-F238E27FC236}">
-                <a16:creationId xmlns:a16="http://schemas.microsoft.com/office/drawing/2014/main" id="{C36364A1-14A9-4BF5-8424-483758063744}"/>
+                <a16:creationId xmlns:a16="http://schemas.microsoft.com/office/drawing/2014/main" id="{B4AB6834-9F48-4EC2-8565-F5875FA03250}"/>
               </a:ext>
             </a:extLst>
           </p:cNvPr>
@@ -23062,7 +23903,7 @@
           <p:cNvPr id="9" name="p08-table-r0-1">
             <a:extLst xmlns:a="http://schemas.openxmlformats.org/drawingml/2006/main">
               <a:ext uri="{FF2B5EF4-FFF2-40B4-BE49-F238E27FC236}">
-                <a16:creationId xmlns:a16="http://schemas.microsoft.com/office/drawing/2014/main" id="{17CD3342-1CDB-48AA-9E73-51E85E969788}"/>
+                <a16:creationId xmlns:a16="http://schemas.microsoft.com/office/drawing/2014/main" id="{EAC39DF0-D97C-4CE9-8A53-6D666A87F692}"/>
               </a:ext>
             </a:extLst>
           </p:cNvPr>
@@ -23123,7 +23964,7 @@
           <p:cNvPr id="10" name="p08-table-r1-0">
             <a:extLst xmlns:a="http://schemas.openxmlformats.org/drawingml/2006/main">
               <a:ext uri="{FF2B5EF4-FFF2-40B4-BE49-F238E27FC236}">
-                <a16:creationId xmlns:a16="http://schemas.microsoft.com/office/drawing/2014/main" id="{4E26E419-88F7-47D8-9D2D-FFF88F4C30C1}"/>
+                <a16:creationId xmlns:a16="http://schemas.microsoft.com/office/drawing/2014/main" id="{7381359A-A3E0-458F-A500-B5ECA05B2029}"/>
               </a:ext>
             </a:extLst>
           </p:cNvPr>
@@ -23184,7 +24025,7 @@
           <p:cNvPr id="11" name="p08-table-r1-1">
             <a:extLst xmlns:a="http://schemas.openxmlformats.org/drawingml/2006/main">
               <a:ext uri="{FF2B5EF4-FFF2-40B4-BE49-F238E27FC236}">
-                <a16:creationId xmlns:a16="http://schemas.microsoft.com/office/drawing/2014/main" id="{FBF3F12D-3876-4C84-84AC-EBF5F56E2D48}"/>
+                <a16:creationId xmlns:a16="http://schemas.microsoft.com/office/drawing/2014/main" id="{BE5E21CC-CEFB-4441-A6C0-3536F1E98EB8}"/>
               </a:ext>
             </a:extLst>
           </p:cNvPr>
@@ -23245,7 +24086,7 @@
           <p:cNvPr id="12" name="p08-table-r2-0">
             <a:extLst xmlns:a="http://schemas.openxmlformats.org/drawingml/2006/main">
               <a:ext uri="{FF2B5EF4-FFF2-40B4-BE49-F238E27FC236}">
-                <a16:creationId xmlns:a16="http://schemas.microsoft.com/office/drawing/2014/main" id="{EDFCCC34-C8A6-4314-9637-8CEF2FB5AC29}"/>
+                <a16:creationId xmlns:a16="http://schemas.microsoft.com/office/drawing/2014/main" id="{46E960A7-37AE-43A2-9791-9AC8A8E4B713}"/>
               </a:ext>
             </a:extLst>
           </p:cNvPr>
@@ -23306,7 +24147,7 @@
           <p:cNvPr id="13" name="p08-table-r2-1">
             <a:extLst xmlns:a="http://schemas.openxmlformats.org/drawingml/2006/main">
               <a:ext uri="{FF2B5EF4-FFF2-40B4-BE49-F238E27FC236}">
-                <a16:creationId xmlns:a16="http://schemas.microsoft.com/office/drawing/2014/main" id="{CC467191-740B-42F2-861C-048852E5DF1F}"/>
+                <a16:creationId xmlns:a16="http://schemas.microsoft.com/office/drawing/2014/main" id="{7AE9FB4E-6813-4D49-BE2D-E6343FD7FC7B}"/>
               </a:ext>
             </a:extLst>
           </p:cNvPr>
@@ -23367,7 +24208,7 @@
           <p:cNvPr id="14" name="p08-table-r3-0">
             <a:extLst xmlns:a="http://schemas.openxmlformats.org/drawingml/2006/main">
               <a:ext uri="{FF2B5EF4-FFF2-40B4-BE49-F238E27FC236}">
-                <a16:creationId xmlns:a16="http://schemas.microsoft.com/office/drawing/2014/main" id="{0A8933E1-4F2E-4924-80C8-421954473F5A}"/>
+                <a16:creationId xmlns:a16="http://schemas.microsoft.com/office/drawing/2014/main" id="{9F22E383-7C8F-4108-824D-62BA3598CC32}"/>
               </a:ext>
             </a:extLst>
           </p:cNvPr>
@@ -23428,7 +24269,7 @@
           <p:cNvPr id="15" name="p08-table-r3-1">
             <a:extLst xmlns:a="http://schemas.openxmlformats.org/drawingml/2006/main">
               <a:ext uri="{FF2B5EF4-FFF2-40B4-BE49-F238E27FC236}">
-                <a16:creationId xmlns:a16="http://schemas.microsoft.com/office/drawing/2014/main" id="{5E2F8D6B-D476-48CF-B314-76DBCCEFB62A}"/>
+                <a16:creationId xmlns:a16="http://schemas.microsoft.com/office/drawing/2014/main" id="{D77822ED-72B5-4C4D-8D74-8136AF82479D}"/>
               </a:ext>
             </a:extLst>
           </p:cNvPr>
@@ -23489,7 +24330,7 @@
           <p:cNvPr id="16" name="p08-table-r4-0">
             <a:extLst xmlns:a="http://schemas.openxmlformats.org/drawingml/2006/main">
               <a:ext uri="{FF2B5EF4-FFF2-40B4-BE49-F238E27FC236}">
-                <a16:creationId xmlns:a16="http://schemas.microsoft.com/office/drawing/2014/main" id="{2E24A04B-99F5-48FD-8C1C-E9450DAE8224}"/>
+                <a16:creationId xmlns:a16="http://schemas.microsoft.com/office/drawing/2014/main" id="{4D13C8FA-6E31-4FA6-9FBE-DC97125BF6CF}"/>
               </a:ext>
             </a:extLst>
           </p:cNvPr>
@@ -23550,7 +24391,7 @@
           <p:cNvPr id="17" name="p08-table-r4-1">
             <a:extLst xmlns:a="http://schemas.openxmlformats.org/drawingml/2006/main">
               <a:ext uri="{FF2B5EF4-FFF2-40B4-BE49-F238E27FC236}">
-                <a16:creationId xmlns:a16="http://schemas.microsoft.com/office/drawing/2014/main" id="{0CF764A4-22F9-46A9-8DCF-3E4542941CF0}"/>
+                <a16:creationId xmlns:a16="http://schemas.microsoft.com/office/drawing/2014/main" id="{E9995A05-1603-487B-8900-81497D0CFE1B}"/>
               </a:ext>
             </a:extLst>
           </p:cNvPr>
@@ -23611,7 +24452,7 @@
           <p:cNvPr id="18" name="p08-table-r5-0">
             <a:extLst xmlns:a="http://schemas.openxmlformats.org/drawingml/2006/main">
               <a:ext uri="{FF2B5EF4-FFF2-40B4-BE49-F238E27FC236}">
-                <a16:creationId xmlns:a16="http://schemas.microsoft.com/office/drawing/2014/main" id="{2E6812A4-1C71-4C4E-AC69-8F98009C497D}"/>
+                <a16:creationId xmlns:a16="http://schemas.microsoft.com/office/drawing/2014/main" id="{0886348D-3B05-40F9-AFE9-DD15942E2319}"/>
               </a:ext>
             </a:extLst>
           </p:cNvPr>
@@ -23672,7 +24513,7 @@
           <p:cNvPr id="19" name="p08-table-r5-1">
             <a:extLst xmlns:a="http://schemas.openxmlformats.org/drawingml/2006/main">
               <a:ext uri="{FF2B5EF4-FFF2-40B4-BE49-F238E27FC236}">
-                <a16:creationId xmlns:a16="http://schemas.microsoft.com/office/drawing/2014/main" id="{72CA9ED3-27B3-4515-8A78-AE98761F21FF}"/>
+                <a16:creationId xmlns:a16="http://schemas.microsoft.com/office/drawing/2014/main" id="{36B0914B-9834-42A0-82A3-B079D98BBCBF}"/>
               </a:ext>
             </a:extLst>
           </p:cNvPr>
@@ -23733,7 +24574,7 @@
           <p:cNvPr id="20" name="p08-table-r6-0">
             <a:extLst xmlns:a="http://schemas.openxmlformats.org/drawingml/2006/main">
               <a:ext uri="{FF2B5EF4-FFF2-40B4-BE49-F238E27FC236}">
-                <a16:creationId xmlns:a16="http://schemas.microsoft.com/office/drawing/2014/main" id="{D915C28E-002D-491F-94AB-BDE29CCCF040}"/>
+                <a16:creationId xmlns:a16="http://schemas.microsoft.com/office/drawing/2014/main" id="{B1768FC5-451C-4842-9252-CF846730097C}"/>
               </a:ext>
             </a:extLst>
           </p:cNvPr>
@@ -23794,7 +24635,7 @@
           <p:cNvPr id="21" name="p08-table-r6-1">
             <a:extLst xmlns:a="http://schemas.openxmlformats.org/drawingml/2006/main">
               <a:ext uri="{FF2B5EF4-FFF2-40B4-BE49-F238E27FC236}">
-                <a16:creationId xmlns:a16="http://schemas.microsoft.com/office/drawing/2014/main" id="{07B4E0F5-F7C3-407D-8E6C-D846B59DF35A}"/>
+                <a16:creationId xmlns:a16="http://schemas.microsoft.com/office/drawing/2014/main" id="{CAAE6BDD-9FA4-4CA1-8A12-A6842F8500C9}"/>
               </a:ext>
             </a:extLst>
           </p:cNvPr>
@@ -23855,7 +24696,7 @@
           <p:cNvPr id="22" name="p08-bottom">
             <a:extLst xmlns:a="http://schemas.openxmlformats.org/drawingml/2006/main">
               <a:ext uri="{FF2B5EF4-FFF2-40B4-BE49-F238E27FC236}">
-                <a16:creationId xmlns:a16="http://schemas.microsoft.com/office/drawing/2014/main" id="{0763C646-A44F-47E4-BFFF-99BE717F2733}"/>
+                <a16:creationId xmlns:a16="http://schemas.microsoft.com/office/drawing/2014/main" id="{79392AB6-6B10-4733-8559-E25F54CE826D}"/>
               </a:ext>
             </a:extLst>
           </p:cNvPr>
@@ -24002,7 +24843,7 @@
           <p:cNvPr id="6" name="p09-stop-title">
             <a:extLst xmlns:a="http://schemas.openxmlformats.org/drawingml/2006/main">
               <a:ext uri="{FF2B5EF4-FFF2-40B4-BE49-F238E27FC236}">
-                <a16:creationId xmlns:a16="http://schemas.microsoft.com/office/drawing/2014/main" id="{6632A25F-F5E6-495D-8AA0-E81C40D455AB}"/>
+                <a16:creationId xmlns:a16="http://schemas.microsoft.com/office/drawing/2014/main" id="{C42CF4CA-061B-47ED-B7C2-33523A5D0C17}"/>
               </a:ext>
             </a:extLst>
           </p:cNvPr>
@@ -24055,7 +24896,7 @@
           <p:cNvPr id="7" name="p09-stop">
             <a:extLst xmlns:a="http://schemas.openxmlformats.org/drawingml/2006/main">
               <a:ext uri="{FF2B5EF4-FFF2-40B4-BE49-F238E27FC236}">
-                <a16:creationId xmlns:a16="http://schemas.microsoft.com/office/drawing/2014/main" id="{10063846-9590-4F35-ADEF-659F1E791E69}"/>
+                <a16:creationId xmlns:a16="http://schemas.microsoft.com/office/drawing/2014/main" id="{9F298F8F-4E67-4B0A-8428-EF85397C2848}"/>
               </a:ext>
             </a:extLst>
           </p:cNvPr>
@@ -24169,7 +25010,7 @@
           <p:cNvPr id="8" name="p09-fail-title">
             <a:extLst xmlns:a="http://schemas.openxmlformats.org/drawingml/2006/main">
               <a:ext uri="{FF2B5EF4-FFF2-40B4-BE49-F238E27FC236}">
-                <a16:creationId xmlns:a16="http://schemas.microsoft.com/office/drawing/2014/main" id="{C8B25B7D-F11A-4C39-A6ED-96F7460AE336}"/>
+                <a16:creationId xmlns:a16="http://schemas.microsoft.com/office/drawing/2014/main" id="{7710107D-F655-420E-AE9F-F273EEC51C36}"/>
               </a:ext>
             </a:extLst>
           </p:cNvPr>
@@ -24222,7 +25063,7 @@
           <p:cNvPr id="9" name="p09-i-0">
             <a:extLst xmlns:a="http://schemas.openxmlformats.org/drawingml/2006/main">
               <a:ext uri="{FF2B5EF4-FFF2-40B4-BE49-F238E27FC236}">
-                <a16:creationId xmlns:a16="http://schemas.microsoft.com/office/drawing/2014/main" id="{5EFD0915-AE04-463C-A8FC-E9E97D212E78}"/>
+                <a16:creationId xmlns:a16="http://schemas.microsoft.com/office/drawing/2014/main" id="{F2CEC635-D43F-4BFE-84F5-A522C4B68990}"/>
               </a:ext>
             </a:extLst>
           </p:cNvPr>
@@ -24279,7 +25120,7 @@
           <p:cNvPr id="10" name="p09-p-0">
             <a:extLst xmlns:a="http://schemas.openxmlformats.org/drawingml/2006/main">
               <a:ext uri="{FF2B5EF4-FFF2-40B4-BE49-F238E27FC236}">
-                <a16:creationId xmlns:a16="http://schemas.microsoft.com/office/drawing/2014/main" id="{F64E4E72-6C77-4362-A9A9-C8E472CB2DAD}"/>
+                <a16:creationId xmlns:a16="http://schemas.microsoft.com/office/drawing/2014/main" id="{BC0A7F75-E386-41C3-9233-81F2FF724AEE}"/>
               </a:ext>
             </a:extLst>
           </p:cNvPr>
@@ -24334,7 +25175,7 @@
           <p:cNvPr id="11" name="p09-i-1">
             <a:extLst xmlns:a="http://schemas.openxmlformats.org/drawingml/2006/main">
               <a:ext uri="{FF2B5EF4-FFF2-40B4-BE49-F238E27FC236}">
-                <a16:creationId xmlns:a16="http://schemas.microsoft.com/office/drawing/2014/main" id="{6073FB61-B906-4887-B8E4-25AE7FB501E8}"/>
+                <a16:creationId xmlns:a16="http://schemas.microsoft.com/office/drawing/2014/main" id="{B33E6472-67B7-464A-A137-88300BC8CBC2}"/>
               </a:ext>
             </a:extLst>
           </p:cNvPr>
@@ -24391,7 +25232,7 @@
           <p:cNvPr id="12" name="p09-p-1">
             <a:extLst xmlns:a="http://schemas.openxmlformats.org/drawingml/2006/main">
               <a:ext uri="{FF2B5EF4-FFF2-40B4-BE49-F238E27FC236}">
-                <a16:creationId xmlns:a16="http://schemas.microsoft.com/office/drawing/2014/main" id="{A8EE072B-90F5-45A3-8D8A-DAEA64E2A602}"/>
+                <a16:creationId xmlns:a16="http://schemas.microsoft.com/office/drawing/2014/main" id="{1F7540A3-5918-48E6-9BAA-54BB6309E4B4}"/>
               </a:ext>
             </a:extLst>
           </p:cNvPr>
@@ -24446,7 +25287,7 @@
           <p:cNvPr id="13" name="p09-i-2">
             <a:extLst xmlns:a="http://schemas.openxmlformats.org/drawingml/2006/main">
               <a:ext uri="{FF2B5EF4-FFF2-40B4-BE49-F238E27FC236}">
-                <a16:creationId xmlns:a16="http://schemas.microsoft.com/office/drawing/2014/main" id="{3A5E2F8A-7B9A-466C-BABF-DCA33786134B}"/>
+                <a16:creationId xmlns:a16="http://schemas.microsoft.com/office/drawing/2014/main" id="{1EF46D25-D318-4B78-9677-0151162BF4D1}"/>
               </a:ext>
             </a:extLst>
           </p:cNvPr>
@@ -24503,7 +25344,7 @@
           <p:cNvPr id="14" name="p09-p-2">
             <a:extLst xmlns:a="http://schemas.openxmlformats.org/drawingml/2006/main">
               <a:ext uri="{FF2B5EF4-FFF2-40B4-BE49-F238E27FC236}">
-                <a16:creationId xmlns:a16="http://schemas.microsoft.com/office/drawing/2014/main" id="{67177C63-5FFD-4343-80DB-BEBD63C21134}"/>
+                <a16:creationId xmlns:a16="http://schemas.microsoft.com/office/drawing/2014/main" id="{1F7162E0-4265-4DE6-830F-63AA64A7F900}"/>
               </a:ext>
             </a:extLst>
           </p:cNvPr>
@@ -24558,7 +25399,7 @@
           <p:cNvPr id="15" name="p09-i-3">
             <a:extLst xmlns:a="http://schemas.openxmlformats.org/drawingml/2006/main">
               <a:ext uri="{FF2B5EF4-FFF2-40B4-BE49-F238E27FC236}">
-                <a16:creationId xmlns:a16="http://schemas.microsoft.com/office/drawing/2014/main" id="{7F752A57-0E63-4EA8-BC13-BC447B782971}"/>
+                <a16:creationId xmlns:a16="http://schemas.microsoft.com/office/drawing/2014/main" id="{B9EB92D6-2E8C-4BA7-A17D-DD7C94B5A955}"/>
               </a:ext>
             </a:extLst>
           </p:cNvPr>
@@ -24615,7 +25456,7 @@
           <p:cNvPr id="16" name="p09-p-3">
             <a:extLst xmlns:a="http://schemas.openxmlformats.org/drawingml/2006/main">
               <a:ext uri="{FF2B5EF4-FFF2-40B4-BE49-F238E27FC236}">
-                <a16:creationId xmlns:a16="http://schemas.microsoft.com/office/drawing/2014/main" id="{C9F52F5D-3537-4A06-AA83-3BC4A7D44385}"/>
+                <a16:creationId xmlns:a16="http://schemas.microsoft.com/office/drawing/2014/main" id="{1B1D76F1-F3F2-40BE-800A-5FB23E86BD72}"/>
               </a:ext>
             </a:extLst>
           </p:cNvPr>
@@ -24670,7 +25511,7 @@
           <p:cNvPr id="17" name="p09-bottom">
             <a:extLst xmlns:a="http://schemas.openxmlformats.org/drawingml/2006/main">
               <a:ext uri="{FF2B5EF4-FFF2-40B4-BE49-F238E27FC236}">
-                <a16:creationId xmlns:a16="http://schemas.microsoft.com/office/drawing/2014/main" id="{4624AAF6-9113-45A7-B751-146B3DDDB1E1}"/>
+                <a16:creationId xmlns:a16="http://schemas.microsoft.com/office/drawing/2014/main" id="{A98E7721-79DE-448E-9A8B-A4253BF76263}"/>
               </a:ext>
             </a:extLst>
           </p:cNvPr>

--- a/lessons/lesson-09/slides.pptx
+++ b/lessons/lesson-09/slides.pptx
@@ -2,33 +2,33 @@
 <file path=ppt/presentation.xml><?xml version="1.0" encoding="utf-8"?>
 <p:presentation xmlns:p="http://schemas.openxmlformats.org/presentationml/2006/main">
   <p:sldMasterIdLst>
-    <p:sldMasterId xmlns:r="http://schemas.openxmlformats.org/officeDocument/2006/relationships" id="2147483648" r:id="Re8a5e84f76b14b8c"/>
+    <p:sldMasterId xmlns:r="http://schemas.openxmlformats.org/officeDocument/2006/relationships" id="2147483648" r:id="R07d53b00a5e84254"/>
   </p:sldMasterIdLst>
   <p:notesMasterIdLst>
-    <p:notesMasterId xmlns:r="http://schemas.openxmlformats.org/officeDocument/2006/relationships" r:id="R54abf4cf57ec4e95"/>
+    <p:notesMasterId xmlns:r="http://schemas.openxmlformats.org/officeDocument/2006/relationships" r:id="R73309d55a76742ff"/>
   </p:notesMasterIdLst>
   <p:sldIdLst>
-    <p:sldId xmlns:r="http://schemas.openxmlformats.org/officeDocument/2006/relationships" id="256" r:id="Ra49e8489cea248a0"/>
-    <p:sldId xmlns:r="http://schemas.openxmlformats.org/officeDocument/2006/relationships" id="257" r:id="R29ff6bf559904bdb"/>
-    <p:sldId xmlns:r="http://schemas.openxmlformats.org/officeDocument/2006/relationships" id="258" r:id="Rfa4c91c99c104cdd"/>
-    <p:sldId xmlns:r="http://schemas.openxmlformats.org/officeDocument/2006/relationships" id="259" r:id="R2b8680b319b44021"/>
-    <p:sldId xmlns:r="http://schemas.openxmlformats.org/officeDocument/2006/relationships" id="260" r:id="R0a430bbdb72042d6"/>
-    <p:sldId xmlns:r="http://schemas.openxmlformats.org/officeDocument/2006/relationships" id="261" r:id="Rb3f6f07decb04b06"/>
-    <p:sldId xmlns:r="http://schemas.openxmlformats.org/officeDocument/2006/relationships" id="262" r:id="Rf0b36331d2aa4bd3"/>
-    <p:sldId xmlns:r="http://schemas.openxmlformats.org/officeDocument/2006/relationships" id="263" r:id="R31c01f36b74c4d22"/>
-    <p:sldId xmlns:r="http://schemas.openxmlformats.org/officeDocument/2006/relationships" id="264" r:id="R36a185a101ee4b8f"/>
-    <p:sldId xmlns:r="http://schemas.openxmlformats.org/officeDocument/2006/relationships" id="265" r:id="Rd74e167a57764de7"/>
-    <p:sldId xmlns:r="http://schemas.openxmlformats.org/officeDocument/2006/relationships" id="266" r:id="Rf6827104fd3d4833"/>
-    <p:sldId xmlns:r="http://schemas.openxmlformats.org/officeDocument/2006/relationships" id="267" r:id="R8dd98d0e9122483b"/>
-    <p:sldId xmlns:r="http://schemas.openxmlformats.org/officeDocument/2006/relationships" id="268" r:id="R47d5f54f32924833"/>
-    <p:sldId xmlns:r="http://schemas.openxmlformats.org/officeDocument/2006/relationships" id="269" r:id="Ree19133dd52a432f"/>
-    <p:sldId xmlns:r="http://schemas.openxmlformats.org/officeDocument/2006/relationships" id="270" r:id="Rd68d6729513e422a"/>
-    <p:sldId xmlns:r="http://schemas.openxmlformats.org/officeDocument/2006/relationships" id="271" r:id="Rf488a791df814160"/>
-    <p:sldId xmlns:r="http://schemas.openxmlformats.org/officeDocument/2006/relationships" id="272" r:id="R59d74361bce74d86"/>
-    <p:sldId xmlns:r="http://schemas.openxmlformats.org/officeDocument/2006/relationships" id="273" r:id="R875884c6a28f4361"/>
-    <p:sldId xmlns:r="http://schemas.openxmlformats.org/officeDocument/2006/relationships" id="274" r:id="R9a8dd1cd1ddb459a"/>
-    <p:sldId xmlns:r="http://schemas.openxmlformats.org/officeDocument/2006/relationships" id="275" r:id="Rd503cef46d574eed"/>
-    <p:sldId xmlns:r="http://schemas.openxmlformats.org/officeDocument/2006/relationships" id="276" r:id="R7bf24dcb40964c16"/>
+    <p:sldId xmlns:r="http://schemas.openxmlformats.org/officeDocument/2006/relationships" id="256" r:id="R0ba1befc89914ca4"/>
+    <p:sldId xmlns:r="http://schemas.openxmlformats.org/officeDocument/2006/relationships" id="257" r:id="Rce4e62869852491c"/>
+    <p:sldId xmlns:r="http://schemas.openxmlformats.org/officeDocument/2006/relationships" id="258" r:id="Rab8e4797bbbc4b13"/>
+    <p:sldId xmlns:r="http://schemas.openxmlformats.org/officeDocument/2006/relationships" id="259" r:id="Ra211966645e44593"/>
+    <p:sldId xmlns:r="http://schemas.openxmlformats.org/officeDocument/2006/relationships" id="260" r:id="Rc975349d789c40ec"/>
+    <p:sldId xmlns:r="http://schemas.openxmlformats.org/officeDocument/2006/relationships" id="261" r:id="Rf3a367b00cfe4599"/>
+    <p:sldId xmlns:r="http://schemas.openxmlformats.org/officeDocument/2006/relationships" id="262" r:id="R2ce50eeff1b64950"/>
+    <p:sldId xmlns:r="http://schemas.openxmlformats.org/officeDocument/2006/relationships" id="263" r:id="R3c0afec2a1af406c"/>
+    <p:sldId xmlns:r="http://schemas.openxmlformats.org/officeDocument/2006/relationships" id="264" r:id="R4d0a34e9cc6a4e72"/>
+    <p:sldId xmlns:r="http://schemas.openxmlformats.org/officeDocument/2006/relationships" id="265" r:id="Rbc21ceda481b4d3f"/>
+    <p:sldId xmlns:r="http://schemas.openxmlformats.org/officeDocument/2006/relationships" id="266" r:id="R4e9ad449664b4121"/>
+    <p:sldId xmlns:r="http://schemas.openxmlformats.org/officeDocument/2006/relationships" id="267" r:id="R9870678566e84e93"/>
+    <p:sldId xmlns:r="http://schemas.openxmlformats.org/officeDocument/2006/relationships" id="268" r:id="R476a9048c7f44d82"/>
+    <p:sldId xmlns:r="http://schemas.openxmlformats.org/officeDocument/2006/relationships" id="269" r:id="R7272a125fc784660"/>
+    <p:sldId xmlns:r="http://schemas.openxmlformats.org/officeDocument/2006/relationships" id="270" r:id="R80ef6a2a56c04066"/>
+    <p:sldId xmlns:r="http://schemas.openxmlformats.org/officeDocument/2006/relationships" id="271" r:id="R152f6755c2b549a7"/>
+    <p:sldId xmlns:r="http://schemas.openxmlformats.org/officeDocument/2006/relationships" id="272" r:id="Ra71218013db84bfe"/>
+    <p:sldId xmlns:r="http://schemas.openxmlformats.org/officeDocument/2006/relationships" id="273" r:id="R0a40ee2222b04187"/>
+    <p:sldId xmlns:r="http://schemas.openxmlformats.org/officeDocument/2006/relationships" id="274" r:id="R1a770984b8564e96"/>
+    <p:sldId xmlns:r="http://schemas.openxmlformats.org/officeDocument/2006/relationships" id="275" r:id="Rd7f66243ac62452c"/>
+    <p:sldId xmlns:r="http://schemas.openxmlformats.org/officeDocument/2006/relationships" id="276" r:id="Rb89ae8b3648d478a"/>
   </p:sldIdLst>
   <p:sldSz cx="12192000" cy="6858000"/>
   <p:notesSz cx="6858000" cy="9144000"/>
@@ -1013,7 +1013,7 @@
           <a:lstStyle xmlns:a="http://schemas.openxmlformats.org/drawingml/2006/main"/>
           <a:p xmlns:a="http://schemas.openxmlformats.org/drawingml/2006/main">
             <a:r>
-              <a:t>八项必须与 assignments.md Checkpoint 2 一一对应；判断门检查当前项目版本。</a:t>
+              <a:t>九项必须与 assignments.md Checkpoint 2 一一对应。第 8 项记录已经发生的失败或已放弃备选，不能由第 7 项前瞻预案替代。</a:t>
             </a:r>
           </a:p>
           <a:p xmlns:a="http://schemas.openxmlformats.org/drawingml/2006/main">
@@ -2489,7 +2489,7 @@
           <p:nvPr/>
         </p:nvPicPr>
         <p:blipFill>
-          <a:blip xmlns:r="http://schemas.openxmlformats.org/officeDocument/2006/relationships" xmlns:a="http://schemas.openxmlformats.org/drawingml/2006/main" r:embed="R5e96b929a18b4e75">
+          <a:blip xmlns:r="http://schemas.openxmlformats.org/officeDocument/2006/relationships" xmlns:a="http://schemas.openxmlformats.org/drawingml/2006/main" r:embed="Rb1b2dcde5a6e41df">
             <a:duotone>
               <a:prstClr val="black"/>
               <a:schemeClr val="accent1">
@@ -2667,7 +2667,7 @@
           <p:nvPr/>
         </p:nvPicPr>
         <p:blipFill rotWithShape="1">
-          <a:blip xmlns:r="http://schemas.openxmlformats.org/officeDocument/2006/relationships" xmlns:a="http://schemas.openxmlformats.org/drawingml/2006/main" r:embed="R461abbd44cfa4ee4"/>
+          <a:blip xmlns:r="http://schemas.openxmlformats.org/officeDocument/2006/relationships" xmlns:a="http://schemas.openxmlformats.org/drawingml/2006/main" r:embed="Rda1f84f571b846a6"/>
           <a:srcRect xmlns:a="http://schemas.openxmlformats.org/drawingml/2006/main" l="74359" t="0" r="1346" b="0"/>
           <a:stretch xmlns:a="http://schemas.openxmlformats.org/drawingml/2006/main"/>
         </p:blipFill>
@@ -2690,7 +2690,7 @@
           <p:nvPr/>
         </p:nvPicPr>
         <p:blipFill rotWithShape="1">
-          <a:blip xmlns:r="http://schemas.openxmlformats.org/officeDocument/2006/relationships" xmlns:a="http://schemas.openxmlformats.org/drawingml/2006/main" r:embed="Rdd2efd9cf0ec494b">
+          <a:blip xmlns:r="http://schemas.openxmlformats.org/officeDocument/2006/relationships" xmlns:a="http://schemas.openxmlformats.org/drawingml/2006/main" r:embed="R03db6bdf35654c89">
             <a:alphaModFix amt="35000"/>
           </a:blip>
           <a:srcRect xmlns:a="http://schemas.openxmlformats.org/drawingml/2006/main" l="0" t="9831" r="0" b="36385"/>
@@ -2952,7 +2952,7 @@
           <p:nvPr/>
         </p:nvPicPr>
         <p:blipFill>
-          <a:blip xmlns:r="http://schemas.openxmlformats.org/officeDocument/2006/relationships" xmlns:a="http://schemas.openxmlformats.org/drawingml/2006/main" r:embed="R8702e19882304c42"/>
+          <a:blip xmlns:r="http://schemas.openxmlformats.org/officeDocument/2006/relationships" xmlns:a="http://schemas.openxmlformats.org/drawingml/2006/main" r:embed="Rcbabbd34c9d64de9"/>
           <a:srcRect xmlns:a="http://schemas.openxmlformats.org/drawingml/2006/main" l="0" t="0" r="54251" b="0"/>
           <a:stretch xmlns:a="http://schemas.openxmlformats.org/drawingml/2006/main"/>
         </p:blipFill>
@@ -3209,7 +3209,7 @@
           <p:nvPr/>
         </p:nvPicPr>
         <p:blipFill rotWithShape="1">
-          <a:blip xmlns:r="http://schemas.openxmlformats.org/officeDocument/2006/relationships" xmlns:a="http://schemas.openxmlformats.org/drawingml/2006/main" r:embed="R33e8767e7f0f47c8"/>
+          <a:blip xmlns:r="http://schemas.openxmlformats.org/officeDocument/2006/relationships" xmlns:a="http://schemas.openxmlformats.org/drawingml/2006/main" r:embed="R735918df2d2a44ef"/>
           <a:srcRect xmlns:a="http://schemas.openxmlformats.org/drawingml/2006/main" l="0" t="0" r="1346" b="0"/>
           <a:stretch xmlns:a="http://schemas.openxmlformats.org/drawingml/2006/main"/>
         </p:blipFill>
@@ -3392,7 +3392,7 @@
           <p:nvPr/>
         </p:nvPicPr>
         <p:blipFill>
-          <a:blip xmlns:r="http://schemas.openxmlformats.org/officeDocument/2006/relationships" xmlns:a="http://schemas.openxmlformats.org/drawingml/2006/main" r:embed="R5abcb320336143f7"/>
+          <a:blip xmlns:r="http://schemas.openxmlformats.org/officeDocument/2006/relationships" xmlns:a="http://schemas.openxmlformats.org/drawingml/2006/main" r:embed="R99b3785a0aaf4b11"/>
           <a:stretch xmlns:a="http://schemas.openxmlformats.org/drawingml/2006/main">
             <a:fillRect l="0" t="0" r="0" b="0"/>
           </a:stretch>
@@ -3488,7 +3488,7 @@
           <p:nvPr/>
         </p:nvPicPr>
         <p:blipFill>
-          <a:blip xmlns:r="http://schemas.openxmlformats.org/officeDocument/2006/relationships" xmlns:a="http://schemas.openxmlformats.org/drawingml/2006/main" r:embed="Rb5f3e1bac6f845c6">
+          <a:blip xmlns:r="http://schemas.openxmlformats.org/officeDocument/2006/relationships" xmlns:a="http://schemas.openxmlformats.org/drawingml/2006/main" r:embed="R5b5d92403f484c53">
             <a:duotone>
               <a:prstClr val="black"/>
               <a:schemeClr val="accent1">
@@ -3655,7 +3655,7 @@
           <p:nvPr/>
         </p:nvPicPr>
         <p:blipFill rotWithShape="1">
-          <a:blip xmlns:r="http://schemas.openxmlformats.org/officeDocument/2006/relationships" xmlns:a="http://schemas.openxmlformats.org/drawingml/2006/main" r:embed="Rd9444ec7ba7a4637">
+          <a:blip xmlns:r="http://schemas.openxmlformats.org/officeDocument/2006/relationships" xmlns:a="http://schemas.openxmlformats.org/drawingml/2006/main" r:embed="Rc9ca63c5dd4941e4">
             <a:alphaModFix amt="20000"/>
             <a:duotone>
               <a:schemeClr val="accent4">
@@ -3753,10 +3753,10 @@
   </p:cSld>
   <p:clrMap bg1="lt1" tx1="dk1" bg2="lt2" tx2="dk2" accent1="accent1" accent2="accent2" accent3="accent3" accent4="accent4" accent5="accent5" accent6="accent6" hlink="hlink" folHlink="folHlink"/>
   <p:sldLayoutIdLst>
-    <p:sldLayoutId xmlns:r="http://schemas.openxmlformats.org/officeDocument/2006/relationships" id="2147483649" r:id="R72683eadf71b4867"/>
-    <p:sldLayoutId xmlns:r="http://schemas.openxmlformats.org/officeDocument/2006/relationships" id="2147483650" r:id="R8b0893f5367d459a"/>
-    <p:sldLayoutId xmlns:r="http://schemas.openxmlformats.org/officeDocument/2006/relationships" id="2147483651" r:id="Ra306127b95314bdd"/>
-    <p:sldLayoutId xmlns:r="http://schemas.openxmlformats.org/officeDocument/2006/relationships" id="2147483652" r:id="R94857ddaca5c43c6"/>
+    <p:sldLayoutId xmlns:r="http://schemas.openxmlformats.org/officeDocument/2006/relationships" id="2147483649" r:id="Rfb38a24759714787"/>
+    <p:sldLayoutId xmlns:r="http://schemas.openxmlformats.org/officeDocument/2006/relationships" id="2147483650" r:id="R41ecd082dd614053"/>
+    <p:sldLayoutId xmlns:r="http://schemas.openxmlformats.org/officeDocument/2006/relationships" id="2147483651" r:id="R9f6e3566d9914259"/>
+    <p:sldLayoutId xmlns:r="http://schemas.openxmlformats.org/officeDocument/2006/relationships" id="2147483652" r:id="R43d1463fb0944a32"/>
   </p:sldLayoutIdLst>
   <p:hf hdr="0" ftr="0" dt="0"/>
   <p:txStyles>
@@ -4443,7 +4443,7 @@
           <p:cNvPr id="6" name="p10-l-0">
             <a:extLst xmlns:a="http://schemas.openxmlformats.org/drawingml/2006/main">
               <a:ext uri="{FF2B5EF4-FFF2-40B4-BE49-F238E27FC236}">
-                <a16:creationId xmlns:a16="http://schemas.microsoft.com/office/drawing/2014/main" id="{09B8B336-3151-493D-9D9F-95367DBC07C6}"/>
+                <a16:creationId xmlns:a16="http://schemas.microsoft.com/office/drawing/2014/main" id="{9A8A938C-3627-4BC1-BDD3-1842ECBA4E58}"/>
               </a:ext>
             </a:extLst>
           </p:cNvPr>
@@ -4500,7 +4500,7 @@
           <p:cNvPr id="7" name="p10-d-0">
             <a:extLst xmlns:a="http://schemas.openxmlformats.org/drawingml/2006/main">
               <a:ext uri="{FF2B5EF4-FFF2-40B4-BE49-F238E27FC236}">
-                <a16:creationId xmlns:a16="http://schemas.microsoft.com/office/drawing/2014/main" id="{251338FA-4F16-47F5-B164-A8A7C8C5CC85}"/>
+                <a16:creationId xmlns:a16="http://schemas.microsoft.com/office/drawing/2014/main" id="{72B01579-6330-4426-9884-4999021E2B77}"/>
               </a:ext>
             </a:extLst>
           </p:cNvPr>
@@ -4585,7 +4585,7 @@
           <p:cNvPr id="8" name="p10-l-1">
             <a:extLst xmlns:a="http://schemas.openxmlformats.org/drawingml/2006/main">
               <a:ext uri="{FF2B5EF4-FFF2-40B4-BE49-F238E27FC236}">
-                <a16:creationId xmlns:a16="http://schemas.microsoft.com/office/drawing/2014/main" id="{5F0AC9D2-5DFA-4295-85D2-8EEC71F2FB11}"/>
+                <a16:creationId xmlns:a16="http://schemas.microsoft.com/office/drawing/2014/main" id="{BF3DCF44-B0D2-475E-90C9-7286962A1A41}"/>
               </a:ext>
             </a:extLst>
           </p:cNvPr>
@@ -4642,7 +4642,7 @@
           <p:cNvPr id="9" name="p10-d-1">
             <a:extLst xmlns:a="http://schemas.openxmlformats.org/drawingml/2006/main">
               <a:ext uri="{FF2B5EF4-FFF2-40B4-BE49-F238E27FC236}">
-                <a16:creationId xmlns:a16="http://schemas.microsoft.com/office/drawing/2014/main" id="{D09C80F8-44EF-4655-9859-80A8D82BC56C}"/>
+                <a16:creationId xmlns:a16="http://schemas.microsoft.com/office/drawing/2014/main" id="{E3BA6CC8-8D41-436A-942E-C04BB4AE203B}"/>
               </a:ext>
             </a:extLst>
           </p:cNvPr>
@@ -4727,7 +4727,7 @@
           <p:cNvPr id="10" name="p10-l-2">
             <a:extLst xmlns:a="http://schemas.openxmlformats.org/drawingml/2006/main">
               <a:ext uri="{FF2B5EF4-FFF2-40B4-BE49-F238E27FC236}">
-                <a16:creationId xmlns:a16="http://schemas.microsoft.com/office/drawing/2014/main" id="{6C4E3183-52F5-41B3-9150-68C072BDF6B8}"/>
+                <a16:creationId xmlns:a16="http://schemas.microsoft.com/office/drawing/2014/main" id="{4B7CB5E9-F378-4675-9536-A58F20604616}"/>
               </a:ext>
             </a:extLst>
           </p:cNvPr>
@@ -4784,7 +4784,7 @@
           <p:cNvPr id="11" name="p10-d-2">
             <a:extLst xmlns:a="http://schemas.openxmlformats.org/drawingml/2006/main">
               <a:ext uri="{FF2B5EF4-FFF2-40B4-BE49-F238E27FC236}">
-                <a16:creationId xmlns:a16="http://schemas.microsoft.com/office/drawing/2014/main" id="{72048308-0DF2-4A37-8A44-719EBDEA3099}"/>
+                <a16:creationId xmlns:a16="http://schemas.microsoft.com/office/drawing/2014/main" id="{70427554-E7F6-4F3E-9ECB-5F53409E00EC}"/>
               </a:ext>
             </a:extLst>
           </p:cNvPr>
@@ -4869,7 +4869,7 @@
           <p:cNvPr id="12" name="p10-l-3">
             <a:extLst xmlns:a="http://schemas.openxmlformats.org/drawingml/2006/main">
               <a:ext uri="{FF2B5EF4-FFF2-40B4-BE49-F238E27FC236}">
-                <a16:creationId xmlns:a16="http://schemas.microsoft.com/office/drawing/2014/main" id="{DCFFA664-939C-4A78-86BA-242F58321750}"/>
+                <a16:creationId xmlns:a16="http://schemas.microsoft.com/office/drawing/2014/main" id="{6BF19F9C-6D83-459B-B55E-E2B22143CFE0}"/>
               </a:ext>
             </a:extLst>
           </p:cNvPr>
@@ -4926,7 +4926,7 @@
           <p:cNvPr id="13" name="p10-d-3">
             <a:extLst xmlns:a="http://schemas.openxmlformats.org/drawingml/2006/main">
               <a:ext uri="{FF2B5EF4-FFF2-40B4-BE49-F238E27FC236}">
-                <a16:creationId xmlns:a16="http://schemas.microsoft.com/office/drawing/2014/main" id="{6AAEA491-D69D-44EB-A19C-AEEDD95F31B8}"/>
+                <a16:creationId xmlns:a16="http://schemas.microsoft.com/office/drawing/2014/main" id="{AC6BAAB4-2B53-44D3-9290-5BBD71C4E003}"/>
               </a:ext>
             </a:extLst>
           </p:cNvPr>
@@ -5011,7 +5011,7 @@
           <p:cNvPr id="14" name="p10-case-title">
             <a:extLst xmlns:a="http://schemas.openxmlformats.org/drawingml/2006/main">
               <a:ext uri="{FF2B5EF4-FFF2-40B4-BE49-F238E27FC236}">
-                <a16:creationId xmlns:a16="http://schemas.microsoft.com/office/drawing/2014/main" id="{1D7A0777-1970-470E-B16C-58C18BC6293C}"/>
+                <a16:creationId xmlns:a16="http://schemas.microsoft.com/office/drawing/2014/main" id="{747B8FBF-EC33-4CC2-A4AD-290C3EF3B284}"/>
               </a:ext>
             </a:extLst>
           </p:cNvPr>
@@ -5064,7 +5064,7 @@
           <p:cNvPr id="15" name="p10-case">
             <a:extLst xmlns:a="http://schemas.openxmlformats.org/drawingml/2006/main">
               <a:ext uri="{FF2B5EF4-FFF2-40B4-BE49-F238E27FC236}">
-                <a16:creationId xmlns:a16="http://schemas.microsoft.com/office/drawing/2014/main" id="{B65188ED-D1DC-4A10-8BC4-37DCE64CA32F}"/>
+                <a16:creationId xmlns:a16="http://schemas.microsoft.com/office/drawing/2014/main" id="{7B6A76A5-8AC0-456E-AFA5-71AAAC9CBFCA}"/>
               </a:ext>
             </a:extLst>
           </p:cNvPr>
@@ -5147,7 +5147,7 @@
           <p:cNvPr id="16" name="p10-bottom">
             <a:extLst xmlns:a="http://schemas.openxmlformats.org/drawingml/2006/main">
               <a:ext uri="{FF2B5EF4-FFF2-40B4-BE49-F238E27FC236}">
-                <a16:creationId xmlns:a16="http://schemas.microsoft.com/office/drawing/2014/main" id="{2DEE5E5B-CF20-42F3-90B7-380FE39DA23C}"/>
+                <a16:creationId xmlns:a16="http://schemas.microsoft.com/office/drawing/2014/main" id="{047315CB-5DD2-4B3D-BB5D-C0006BA078C5}"/>
               </a:ext>
             </a:extLst>
           </p:cNvPr>
@@ -5296,7 +5296,7 @@
           <p:cNvPr id="6" name="p11-line-0">
             <a:extLst xmlns:a="http://schemas.openxmlformats.org/drawingml/2006/main">
               <a:ext uri="{FF2B5EF4-FFF2-40B4-BE49-F238E27FC236}">
-                <a16:creationId xmlns:a16="http://schemas.microsoft.com/office/drawing/2014/main" id="{A6C64F35-877D-4D10-93AD-F916186FB65A}"/>
+                <a16:creationId xmlns:a16="http://schemas.microsoft.com/office/drawing/2014/main" id="{687F0D33-772A-47EE-B18D-7AB30A95DF88}"/>
               </a:ext>
             </a:extLst>
           </p:cNvPr>
@@ -5327,7 +5327,7 @@
           <p:cNvPr id="7" name="p11-line-1">
             <a:extLst xmlns:a="http://schemas.openxmlformats.org/drawingml/2006/main">
               <a:ext uri="{FF2B5EF4-FFF2-40B4-BE49-F238E27FC236}">
-                <a16:creationId xmlns:a16="http://schemas.microsoft.com/office/drawing/2014/main" id="{BCC072A6-DE81-481C-BDDB-E4711742465E}"/>
+                <a16:creationId xmlns:a16="http://schemas.microsoft.com/office/drawing/2014/main" id="{8954E3F3-22E0-4944-B85A-39F0C4D4FF5F}"/>
               </a:ext>
             </a:extLst>
           </p:cNvPr>
@@ -5358,7 +5358,7 @@
           <p:cNvPr id="8" name="p11-line-2">
             <a:extLst xmlns:a="http://schemas.openxmlformats.org/drawingml/2006/main">
               <a:ext uri="{FF2B5EF4-FFF2-40B4-BE49-F238E27FC236}">
-                <a16:creationId xmlns:a16="http://schemas.microsoft.com/office/drawing/2014/main" id="{8D00B6F3-B141-44A5-96C0-BA03E7D00B6B}"/>
+                <a16:creationId xmlns:a16="http://schemas.microsoft.com/office/drawing/2014/main" id="{0EE389E8-5EC6-46A7-B4E0-FB37D5AFB19E}"/>
               </a:ext>
             </a:extLst>
           </p:cNvPr>
@@ -5389,7 +5389,7 @@
           <p:cNvPr id="9" name="p11-line-3">
             <a:extLst xmlns:a="http://schemas.openxmlformats.org/drawingml/2006/main">
               <a:ext uri="{FF2B5EF4-FFF2-40B4-BE49-F238E27FC236}">
-                <a16:creationId xmlns:a16="http://schemas.microsoft.com/office/drawing/2014/main" id="{DA617795-18A2-4349-8502-24F95EAA56A9}"/>
+                <a16:creationId xmlns:a16="http://schemas.microsoft.com/office/drawing/2014/main" id="{E63D2A71-F610-48A4-A1E0-AA8F35F65EDA}"/>
               </a:ext>
             </a:extLst>
           </p:cNvPr>
@@ -5420,7 +5420,7 @@
           <p:cNvPr id="10" name="p11-line-4">
             <a:extLst xmlns:a="http://schemas.openxmlformats.org/drawingml/2006/main">
               <a:ext uri="{FF2B5EF4-FFF2-40B4-BE49-F238E27FC236}">
-                <a16:creationId xmlns:a16="http://schemas.microsoft.com/office/drawing/2014/main" id="{68ED2E3D-0A5C-4EA1-9BAF-28BD478C84E9}"/>
+                <a16:creationId xmlns:a16="http://schemas.microsoft.com/office/drawing/2014/main" id="{EC742ACD-A89F-4998-BAE2-746DD5D1A350}"/>
               </a:ext>
             </a:extLst>
           </p:cNvPr>
@@ -5451,7 +5451,7 @@
           <p:cNvPr id="11" name="p11-label-0">
             <a:extLst xmlns:a="http://schemas.openxmlformats.org/drawingml/2006/main">
               <a:ext uri="{FF2B5EF4-FFF2-40B4-BE49-F238E27FC236}">
-                <a16:creationId xmlns:a16="http://schemas.microsoft.com/office/drawing/2014/main" id="{A4AB490A-5EE4-4187-B789-F64654B3E27D}"/>
+                <a16:creationId xmlns:a16="http://schemas.microsoft.com/office/drawing/2014/main" id="{70A51D99-67CE-4F82-A035-23A49282553C}"/>
               </a:ext>
             </a:extLst>
           </p:cNvPr>
@@ -5508,7 +5508,7 @@
           <p:cNvPr id="12" name="p11-detail-0">
             <a:extLst xmlns:a="http://schemas.openxmlformats.org/drawingml/2006/main">
               <a:ext uri="{FF2B5EF4-FFF2-40B4-BE49-F238E27FC236}">
-                <a16:creationId xmlns:a16="http://schemas.microsoft.com/office/drawing/2014/main" id="{CCD06C63-E8CE-4E45-A7B0-E80355D19EAA}"/>
+                <a16:creationId xmlns:a16="http://schemas.microsoft.com/office/drawing/2014/main" id="{55E98212-463C-41FD-9CB9-9A259016098F}"/>
               </a:ext>
             </a:extLst>
           </p:cNvPr>
@@ -5593,7 +5593,7 @@
           <p:cNvPr id="13" name="p11-label-1">
             <a:extLst xmlns:a="http://schemas.openxmlformats.org/drawingml/2006/main">
               <a:ext uri="{FF2B5EF4-FFF2-40B4-BE49-F238E27FC236}">
-                <a16:creationId xmlns:a16="http://schemas.microsoft.com/office/drawing/2014/main" id="{3AD9AF50-598E-414B-B6B1-398D4923C631}"/>
+                <a16:creationId xmlns:a16="http://schemas.microsoft.com/office/drawing/2014/main" id="{4617B98F-24D3-4B5C-86A1-F8D3562EBAF9}"/>
               </a:ext>
             </a:extLst>
           </p:cNvPr>
@@ -5650,7 +5650,7 @@
           <p:cNvPr id="14" name="p11-detail-1">
             <a:extLst xmlns:a="http://schemas.openxmlformats.org/drawingml/2006/main">
               <a:ext uri="{FF2B5EF4-FFF2-40B4-BE49-F238E27FC236}">
-                <a16:creationId xmlns:a16="http://schemas.microsoft.com/office/drawing/2014/main" id="{167CD543-FC91-4E81-88A1-4E54F0F20BFB}"/>
+                <a16:creationId xmlns:a16="http://schemas.microsoft.com/office/drawing/2014/main" id="{99C87C90-807B-4F51-9597-CD46D01D2BF5}"/>
               </a:ext>
             </a:extLst>
           </p:cNvPr>
@@ -5735,7 +5735,7 @@
           <p:cNvPr id="15" name="p11-label-2">
             <a:extLst xmlns:a="http://schemas.openxmlformats.org/drawingml/2006/main">
               <a:ext uri="{FF2B5EF4-FFF2-40B4-BE49-F238E27FC236}">
-                <a16:creationId xmlns:a16="http://schemas.microsoft.com/office/drawing/2014/main" id="{1D4B4A90-582D-4934-946F-9C4F5BE98896}"/>
+                <a16:creationId xmlns:a16="http://schemas.microsoft.com/office/drawing/2014/main" id="{86672B7E-7477-46E1-800B-AB81FD5EFD34}"/>
               </a:ext>
             </a:extLst>
           </p:cNvPr>
@@ -5792,7 +5792,7 @@
           <p:cNvPr id="16" name="p11-detail-2">
             <a:extLst xmlns:a="http://schemas.openxmlformats.org/drawingml/2006/main">
               <a:ext uri="{FF2B5EF4-FFF2-40B4-BE49-F238E27FC236}">
-                <a16:creationId xmlns:a16="http://schemas.microsoft.com/office/drawing/2014/main" id="{B5AD0EA9-6E7F-4914-A392-48FB3ABD2F2A}"/>
+                <a16:creationId xmlns:a16="http://schemas.microsoft.com/office/drawing/2014/main" id="{998A2F0A-7C9C-458E-8F59-D117A414707B}"/>
               </a:ext>
             </a:extLst>
           </p:cNvPr>
@@ -5901,7 +5901,7 @@
           <p:cNvPr id="17" name="p11-label-3">
             <a:extLst xmlns:a="http://schemas.openxmlformats.org/drawingml/2006/main">
               <a:ext uri="{FF2B5EF4-FFF2-40B4-BE49-F238E27FC236}">
-                <a16:creationId xmlns:a16="http://schemas.microsoft.com/office/drawing/2014/main" id="{3E13CF26-2AF9-439C-8896-D39B333C0D0D}"/>
+                <a16:creationId xmlns:a16="http://schemas.microsoft.com/office/drawing/2014/main" id="{B3E807D2-B786-4492-A980-38565651A900}"/>
               </a:ext>
             </a:extLst>
           </p:cNvPr>
@@ -5958,7 +5958,7 @@
           <p:cNvPr id="18" name="p11-detail-3">
             <a:extLst xmlns:a="http://schemas.openxmlformats.org/drawingml/2006/main">
               <a:ext uri="{FF2B5EF4-FFF2-40B4-BE49-F238E27FC236}">
-                <a16:creationId xmlns:a16="http://schemas.microsoft.com/office/drawing/2014/main" id="{3D2829D0-1526-4510-81F5-9FE1C9D67BC7}"/>
+                <a16:creationId xmlns:a16="http://schemas.microsoft.com/office/drawing/2014/main" id="{E40E0868-9D46-4FAD-A6D1-40ED759BE4D4}"/>
               </a:ext>
             </a:extLst>
           </p:cNvPr>
@@ -6043,7 +6043,7 @@
           <p:cNvPr id="19" name="p11-label-4">
             <a:extLst xmlns:a="http://schemas.openxmlformats.org/drawingml/2006/main">
               <a:ext uri="{FF2B5EF4-FFF2-40B4-BE49-F238E27FC236}">
-                <a16:creationId xmlns:a16="http://schemas.microsoft.com/office/drawing/2014/main" id="{FF14A3A0-25FB-4E67-AC6A-EB28B3A8FD40}"/>
+                <a16:creationId xmlns:a16="http://schemas.microsoft.com/office/drawing/2014/main" id="{71E3CBA1-C9AC-4B1C-9050-26FC9C22FB05}"/>
               </a:ext>
             </a:extLst>
           </p:cNvPr>
@@ -6100,7 +6100,7 @@
           <p:cNvPr id="20" name="p11-detail-4">
             <a:extLst xmlns:a="http://schemas.openxmlformats.org/drawingml/2006/main">
               <a:ext uri="{FF2B5EF4-FFF2-40B4-BE49-F238E27FC236}">
-                <a16:creationId xmlns:a16="http://schemas.microsoft.com/office/drawing/2014/main" id="{E78FC20F-5CF6-4A82-8729-20BC81CFD152}"/>
+                <a16:creationId xmlns:a16="http://schemas.microsoft.com/office/drawing/2014/main" id="{A2C02C0F-5972-409B-AA98-CFE7C934865C}"/>
               </a:ext>
             </a:extLst>
           </p:cNvPr>
@@ -6185,7 +6185,7 @@
           <p:cNvPr id="21" name="p11-label-5">
             <a:extLst xmlns:a="http://schemas.openxmlformats.org/drawingml/2006/main">
               <a:ext uri="{FF2B5EF4-FFF2-40B4-BE49-F238E27FC236}">
-                <a16:creationId xmlns:a16="http://schemas.microsoft.com/office/drawing/2014/main" id="{AD6C7390-8A31-4523-8283-5C113B2FFEC3}"/>
+                <a16:creationId xmlns:a16="http://schemas.microsoft.com/office/drawing/2014/main" id="{FC49390B-1533-4328-A942-72A70487F154}"/>
               </a:ext>
             </a:extLst>
           </p:cNvPr>
@@ -6242,7 +6242,7 @@
           <p:cNvPr id="22" name="p11-detail-5">
             <a:extLst xmlns:a="http://schemas.openxmlformats.org/drawingml/2006/main">
               <a:ext uri="{FF2B5EF4-FFF2-40B4-BE49-F238E27FC236}">
-                <a16:creationId xmlns:a16="http://schemas.microsoft.com/office/drawing/2014/main" id="{964BA611-A05D-4633-9DED-EDF21DB53B33}"/>
+                <a16:creationId xmlns:a16="http://schemas.microsoft.com/office/drawing/2014/main" id="{2BD121B4-7BF1-4E03-BD4D-44B9968D9A0D}"/>
               </a:ext>
             </a:extLst>
           </p:cNvPr>
@@ -6327,7 +6327,7 @@
           <p:cNvPr id="23" name="p11-def">
             <a:extLst xmlns:a="http://schemas.openxmlformats.org/drawingml/2006/main">
               <a:ext uri="{FF2B5EF4-FFF2-40B4-BE49-F238E27FC236}">
-                <a16:creationId xmlns:a16="http://schemas.microsoft.com/office/drawing/2014/main" id="{A8C3A765-24E4-4D04-AADF-90F42A363EB4}"/>
+                <a16:creationId xmlns:a16="http://schemas.microsoft.com/office/drawing/2014/main" id="{B79641F1-9A42-45B8-8551-5E91F3805B2B}"/>
               </a:ext>
             </a:extLst>
           </p:cNvPr>
@@ -6382,7 +6382,7 @@
           <p:cNvPr id="24" name="p11-limit">
             <a:extLst xmlns:a="http://schemas.openxmlformats.org/drawingml/2006/main">
               <a:ext uri="{FF2B5EF4-FFF2-40B4-BE49-F238E27FC236}">
-                <a16:creationId xmlns:a16="http://schemas.microsoft.com/office/drawing/2014/main" id="{CBC2FC3E-E18D-45ED-9257-15BEF88E277B}"/>
+                <a16:creationId xmlns:a16="http://schemas.microsoft.com/office/drawing/2014/main" id="{131C05EC-19AD-45ED-982F-7B509489FBAD}"/>
               </a:ext>
             </a:extLst>
           </p:cNvPr>
@@ -6531,7 +6531,7 @@
           <p:cNvPr id="6" name="p12-src-0">
             <a:extLst xmlns:a="http://schemas.openxmlformats.org/drawingml/2006/main">
               <a:ext uri="{FF2B5EF4-FFF2-40B4-BE49-F238E27FC236}">
-                <a16:creationId xmlns:a16="http://schemas.microsoft.com/office/drawing/2014/main" id="{1E68ADF9-25F3-458C-91A4-03D2B88D38A7}"/>
+                <a16:creationId xmlns:a16="http://schemas.microsoft.com/office/drawing/2014/main" id="{D690DBDD-0DE5-428B-8C7C-3F0563EBC874}"/>
               </a:ext>
             </a:extLst>
           </p:cNvPr>
@@ -6592,7 +6592,7 @@
           <p:cNvPr id="7" name="p12-src-1">
             <a:extLst xmlns:a="http://schemas.openxmlformats.org/drawingml/2006/main">
               <a:ext uri="{FF2B5EF4-FFF2-40B4-BE49-F238E27FC236}">
-                <a16:creationId xmlns:a16="http://schemas.microsoft.com/office/drawing/2014/main" id="{EF317F2B-5329-49A9-AC83-B3EC6F85CC20}"/>
+                <a16:creationId xmlns:a16="http://schemas.microsoft.com/office/drawing/2014/main" id="{48ADF00F-2160-46D8-A908-951398216DBA}"/>
               </a:ext>
             </a:extLst>
           </p:cNvPr>
@@ -6653,7 +6653,7 @@
           <p:cNvPr id="8" name="p12-src-2">
             <a:extLst xmlns:a="http://schemas.openxmlformats.org/drawingml/2006/main">
               <a:ext uri="{FF2B5EF4-FFF2-40B4-BE49-F238E27FC236}">
-                <a16:creationId xmlns:a16="http://schemas.microsoft.com/office/drawing/2014/main" id="{FD025659-B962-4FB4-94C7-19E8B29F5DD1}"/>
+                <a16:creationId xmlns:a16="http://schemas.microsoft.com/office/drawing/2014/main" id="{E6A39BA7-E6D4-4AE0-8883-DD28AADD62DC}"/>
               </a:ext>
             </a:extLst>
           </p:cNvPr>
@@ -6714,7 +6714,7 @@
           <p:cNvPr id="9" name="p12-src-3">
             <a:extLst xmlns:a="http://schemas.openxmlformats.org/drawingml/2006/main">
               <a:ext uri="{FF2B5EF4-FFF2-40B4-BE49-F238E27FC236}">
-                <a16:creationId xmlns:a16="http://schemas.microsoft.com/office/drawing/2014/main" id="{E35E3761-32C4-4E92-923B-E167BAF3B4B6}"/>
+                <a16:creationId xmlns:a16="http://schemas.microsoft.com/office/drawing/2014/main" id="{195E7006-1CBC-4F95-8D28-A5948F35E558}"/>
               </a:ext>
             </a:extLst>
           </p:cNvPr>
@@ -6775,7 +6775,7 @@
           <p:cNvPr id="10" name="p12-line-0">
             <a:extLst xmlns:a="http://schemas.openxmlformats.org/drawingml/2006/main">
               <a:ext uri="{FF2B5EF4-FFF2-40B4-BE49-F238E27FC236}">
-                <a16:creationId xmlns:a16="http://schemas.microsoft.com/office/drawing/2014/main" id="{F06D53FF-F9D2-431C-95D4-40C04FE82986}"/>
+                <a16:creationId xmlns:a16="http://schemas.microsoft.com/office/drawing/2014/main" id="{4F774CDA-8E8C-407F-9E6A-1B9FCE9B5AC5}"/>
               </a:ext>
             </a:extLst>
           </p:cNvPr>
@@ -6806,7 +6806,7 @@
           <p:cNvPr id="11" name="p12-line-1">
             <a:extLst xmlns:a="http://schemas.openxmlformats.org/drawingml/2006/main">
               <a:ext uri="{FF2B5EF4-FFF2-40B4-BE49-F238E27FC236}">
-                <a16:creationId xmlns:a16="http://schemas.microsoft.com/office/drawing/2014/main" id="{E5F358CE-0FCB-438F-A4E0-8438C066F956}"/>
+                <a16:creationId xmlns:a16="http://schemas.microsoft.com/office/drawing/2014/main" id="{6DE81C95-207C-4F1B-8D10-67B6426E9EC7}"/>
               </a:ext>
             </a:extLst>
           </p:cNvPr>
@@ -6837,7 +6837,7 @@
           <p:cNvPr id="12" name="p12-line-2">
             <a:extLst xmlns:a="http://schemas.openxmlformats.org/drawingml/2006/main">
               <a:ext uri="{FF2B5EF4-FFF2-40B4-BE49-F238E27FC236}">
-                <a16:creationId xmlns:a16="http://schemas.microsoft.com/office/drawing/2014/main" id="{FF6769F4-7DFC-4B9C-B09F-1A389245C0BB}"/>
+                <a16:creationId xmlns:a16="http://schemas.microsoft.com/office/drawing/2014/main" id="{9DC78928-1BD3-4224-8FEB-908C47902C43}"/>
               </a:ext>
             </a:extLst>
           </p:cNvPr>
@@ -6868,7 +6868,7 @@
           <p:cNvPr id="13" name="p12-line-3">
             <a:extLst xmlns:a="http://schemas.openxmlformats.org/drawingml/2006/main">
               <a:ext uri="{FF2B5EF4-FFF2-40B4-BE49-F238E27FC236}">
-                <a16:creationId xmlns:a16="http://schemas.microsoft.com/office/drawing/2014/main" id="{E757561E-7425-420A-801B-6B58CEE62140}"/>
+                <a16:creationId xmlns:a16="http://schemas.microsoft.com/office/drawing/2014/main" id="{AE2DC9B7-B707-4275-94AC-F519E533EF3E}"/>
               </a:ext>
             </a:extLst>
           </p:cNvPr>
@@ -6899,7 +6899,7 @@
           <p:cNvPr id="14" name="p12-finding">
             <a:extLst xmlns:a="http://schemas.openxmlformats.org/drawingml/2006/main">
               <a:ext uri="{FF2B5EF4-FFF2-40B4-BE49-F238E27FC236}">
-                <a16:creationId xmlns:a16="http://schemas.microsoft.com/office/drawing/2014/main" id="{3D8A3737-093E-474B-8789-B91C1BFDCF5B}"/>
+                <a16:creationId xmlns:a16="http://schemas.microsoft.com/office/drawing/2014/main" id="{F3016CB8-8C2D-4909-A93C-9A2F727F87F2}"/>
               </a:ext>
             </a:extLst>
           </p:cNvPr>
@@ -6954,7 +6954,7 @@
           <p:cNvPr id="15" name="p12-n-0">
             <a:extLst xmlns:a="http://schemas.openxmlformats.org/drawingml/2006/main">
               <a:ext uri="{FF2B5EF4-FFF2-40B4-BE49-F238E27FC236}">
-                <a16:creationId xmlns:a16="http://schemas.microsoft.com/office/drawing/2014/main" id="{8272FDF7-8941-49C0-BE13-A05803037AAA}"/>
+                <a16:creationId xmlns:a16="http://schemas.microsoft.com/office/drawing/2014/main" id="{5107E4C5-CDA0-4C44-A45B-54938BC99DFA}"/>
               </a:ext>
             </a:extLst>
           </p:cNvPr>
@@ -7011,7 +7011,7 @@
           <p:cNvPr id="16" name="p12-s-0">
             <a:extLst xmlns:a="http://schemas.openxmlformats.org/drawingml/2006/main">
               <a:ext uri="{FF2B5EF4-FFF2-40B4-BE49-F238E27FC236}">
-                <a16:creationId xmlns:a16="http://schemas.microsoft.com/office/drawing/2014/main" id="{B4CFDC41-C4C6-4F33-833C-541F2E5145D2}"/>
+                <a16:creationId xmlns:a16="http://schemas.microsoft.com/office/drawing/2014/main" id="{3B7AFDF6-D9FF-43E4-88F1-4A9760779D2E}"/>
               </a:ext>
             </a:extLst>
           </p:cNvPr>
@@ -7066,7 +7066,7 @@
           <p:cNvPr id="17" name="p12-n-1">
             <a:extLst xmlns:a="http://schemas.openxmlformats.org/drawingml/2006/main">
               <a:ext uri="{FF2B5EF4-FFF2-40B4-BE49-F238E27FC236}">
-                <a16:creationId xmlns:a16="http://schemas.microsoft.com/office/drawing/2014/main" id="{270C20A0-F3D9-4111-A7FD-777DF3FD461E}"/>
+                <a16:creationId xmlns:a16="http://schemas.microsoft.com/office/drawing/2014/main" id="{8B92B0C5-4CFF-4520-939B-9E0EC3125AB6}"/>
               </a:ext>
             </a:extLst>
           </p:cNvPr>
@@ -7123,7 +7123,7 @@
           <p:cNvPr id="18" name="p12-s-1">
             <a:extLst xmlns:a="http://schemas.openxmlformats.org/drawingml/2006/main">
               <a:ext uri="{FF2B5EF4-FFF2-40B4-BE49-F238E27FC236}">
-                <a16:creationId xmlns:a16="http://schemas.microsoft.com/office/drawing/2014/main" id="{559AC533-F347-48FD-B476-317F17128444}"/>
+                <a16:creationId xmlns:a16="http://schemas.microsoft.com/office/drawing/2014/main" id="{FD5F9F58-2E68-433F-8FE3-7D99A891E45A}"/>
               </a:ext>
             </a:extLst>
           </p:cNvPr>
@@ -7178,7 +7178,7 @@
           <p:cNvPr id="19" name="p12-n-2">
             <a:extLst xmlns:a="http://schemas.openxmlformats.org/drawingml/2006/main">
               <a:ext uri="{FF2B5EF4-FFF2-40B4-BE49-F238E27FC236}">
-                <a16:creationId xmlns:a16="http://schemas.microsoft.com/office/drawing/2014/main" id="{132DB8D3-4280-482F-8859-081F1F692DE0}"/>
+                <a16:creationId xmlns:a16="http://schemas.microsoft.com/office/drawing/2014/main" id="{BF04821E-FEB4-45C5-AD90-AE0B397AF47A}"/>
               </a:ext>
             </a:extLst>
           </p:cNvPr>
@@ -7235,7 +7235,7 @@
           <p:cNvPr id="20" name="p12-s-2">
             <a:extLst xmlns:a="http://schemas.openxmlformats.org/drawingml/2006/main">
               <a:ext uri="{FF2B5EF4-FFF2-40B4-BE49-F238E27FC236}">
-                <a16:creationId xmlns:a16="http://schemas.microsoft.com/office/drawing/2014/main" id="{4B1F51C7-5D88-4FDF-9AD0-8F4CFF62B4B7}"/>
+                <a16:creationId xmlns:a16="http://schemas.microsoft.com/office/drawing/2014/main" id="{32453B3B-125D-461A-899A-49C7F6727A00}"/>
               </a:ext>
             </a:extLst>
           </p:cNvPr>
@@ -7290,7 +7290,7 @@
           <p:cNvPr id="21" name="p12-n-3">
             <a:extLst xmlns:a="http://schemas.openxmlformats.org/drawingml/2006/main">
               <a:ext uri="{FF2B5EF4-FFF2-40B4-BE49-F238E27FC236}">
-                <a16:creationId xmlns:a16="http://schemas.microsoft.com/office/drawing/2014/main" id="{5295536C-A36A-401F-980C-94872E1CBABE}"/>
+                <a16:creationId xmlns:a16="http://schemas.microsoft.com/office/drawing/2014/main" id="{7D5E9746-3196-4057-8493-971D0B67A97A}"/>
               </a:ext>
             </a:extLst>
           </p:cNvPr>
@@ -7347,7 +7347,7 @@
           <p:cNvPr id="22" name="p12-s-3">
             <a:extLst xmlns:a="http://schemas.openxmlformats.org/drawingml/2006/main">
               <a:ext uri="{FF2B5EF4-FFF2-40B4-BE49-F238E27FC236}">
-                <a16:creationId xmlns:a16="http://schemas.microsoft.com/office/drawing/2014/main" id="{674342A7-A968-4BAC-8961-18D2CC2ECA21}"/>
+                <a16:creationId xmlns:a16="http://schemas.microsoft.com/office/drawing/2014/main" id="{28A495CC-80D4-4A16-B5FB-64EB2583B786}"/>
               </a:ext>
             </a:extLst>
           </p:cNvPr>
@@ -7402,7 +7402,7 @@
           <p:cNvPr id="23" name="p12-bottom">
             <a:extLst xmlns:a="http://schemas.openxmlformats.org/drawingml/2006/main">
               <a:ext uri="{FF2B5EF4-FFF2-40B4-BE49-F238E27FC236}">
-                <a16:creationId xmlns:a16="http://schemas.microsoft.com/office/drawing/2014/main" id="{4257CBA7-5EB8-4F52-9717-DB374251F4AA}"/>
+                <a16:creationId xmlns:a16="http://schemas.microsoft.com/office/drawing/2014/main" id="{87723B76-979E-4E51-BCCF-9C62DD965E30}"/>
               </a:ext>
             </a:extLst>
           </p:cNvPr>
@@ -7549,7 +7549,7 @@
           <p:cNvPr id="6" name="p13-l-0">
             <a:extLst xmlns:a="http://schemas.openxmlformats.org/drawingml/2006/main">
               <a:ext uri="{FF2B5EF4-FFF2-40B4-BE49-F238E27FC236}">
-                <a16:creationId xmlns:a16="http://schemas.microsoft.com/office/drawing/2014/main" id="{40FA6961-8A80-4F5B-A110-4A7A2FD4209B}"/>
+                <a16:creationId xmlns:a16="http://schemas.microsoft.com/office/drawing/2014/main" id="{53C3CCA1-F0D2-46F1-AEC4-E05A64BBF581}"/>
               </a:ext>
             </a:extLst>
           </p:cNvPr>
@@ -7606,7 +7606,7 @@
           <p:cNvPr id="7" name="p13-d-0">
             <a:extLst xmlns:a="http://schemas.openxmlformats.org/drawingml/2006/main">
               <a:ext uri="{FF2B5EF4-FFF2-40B4-BE49-F238E27FC236}">
-                <a16:creationId xmlns:a16="http://schemas.microsoft.com/office/drawing/2014/main" id="{A7068EB0-0754-4D52-A9B8-3D1DCDCA3AC0}"/>
+                <a16:creationId xmlns:a16="http://schemas.microsoft.com/office/drawing/2014/main" id="{5B4A4BE0-8C5B-4148-8BCA-19A9D3EC4168}"/>
               </a:ext>
             </a:extLst>
           </p:cNvPr>
@@ -7696,7 +7696,7 @@
           <p:cNvPr id="8" name="p13-l-1">
             <a:extLst xmlns:a="http://schemas.openxmlformats.org/drawingml/2006/main">
               <a:ext uri="{FF2B5EF4-FFF2-40B4-BE49-F238E27FC236}">
-                <a16:creationId xmlns:a16="http://schemas.microsoft.com/office/drawing/2014/main" id="{0117505A-AF24-42A6-8B88-FCEE5B2715ED}"/>
+                <a16:creationId xmlns:a16="http://schemas.microsoft.com/office/drawing/2014/main" id="{6BDE10CA-E332-4592-8F02-27886AC08E35}"/>
               </a:ext>
             </a:extLst>
           </p:cNvPr>
@@ -7753,7 +7753,7 @@
           <p:cNvPr id="9" name="p13-d-1">
             <a:extLst xmlns:a="http://schemas.openxmlformats.org/drawingml/2006/main">
               <a:ext uri="{FF2B5EF4-FFF2-40B4-BE49-F238E27FC236}">
-                <a16:creationId xmlns:a16="http://schemas.microsoft.com/office/drawing/2014/main" id="{4EBE2401-FB6F-43AC-8083-EC7174AB256B}"/>
+                <a16:creationId xmlns:a16="http://schemas.microsoft.com/office/drawing/2014/main" id="{3E39872F-A8FE-4A8E-A276-252412402A47}"/>
               </a:ext>
             </a:extLst>
           </p:cNvPr>
@@ -7843,7 +7843,7 @@
           <p:cNvPr id="10" name="p13-l-2">
             <a:extLst xmlns:a="http://schemas.openxmlformats.org/drawingml/2006/main">
               <a:ext uri="{FF2B5EF4-FFF2-40B4-BE49-F238E27FC236}">
-                <a16:creationId xmlns:a16="http://schemas.microsoft.com/office/drawing/2014/main" id="{3F11C4B4-D29E-4BB6-A954-8ECFE1DFA49B}"/>
+                <a16:creationId xmlns:a16="http://schemas.microsoft.com/office/drawing/2014/main" id="{39685A14-80FE-4ECD-BC7F-8CD4F6A60D49}"/>
               </a:ext>
             </a:extLst>
           </p:cNvPr>
@@ -7900,7 +7900,7 @@
           <p:cNvPr id="11" name="p13-d-2">
             <a:extLst xmlns:a="http://schemas.openxmlformats.org/drawingml/2006/main">
               <a:ext uri="{FF2B5EF4-FFF2-40B4-BE49-F238E27FC236}">
-                <a16:creationId xmlns:a16="http://schemas.microsoft.com/office/drawing/2014/main" id="{80351889-E22F-4292-B900-D95414AA39E8}"/>
+                <a16:creationId xmlns:a16="http://schemas.microsoft.com/office/drawing/2014/main" id="{CE8C82C8-FA5E-427F-B0AA-C8BF7B427BC4}"/>
               </a:ext>
             </a:extLst>
           </p:cNvPr>
@@ -7990,7 +7990,7 @@
           <p:cNvPr id="12" name="p13-arrow-1">
             <a:extLst xmlns:a="http://schemas.openxmlformats.org/drawingml/2006/main">
               <a:ext uri="{FF2B5EF4-FFF2-40B4-BE49-F238E27FC236}">
-                <a16:creationId xmlns:a16="http://schemas.microsoft.com/office/drawing/2014/main" id="{9470EDA6-B6E8-4FA4-AA32-DDBA833B89B2}"/>
+                <a16:creationId xmlns:a16="http://schemas.microsoft.com/office/drawing/2014/main" id="{18C118A0-315B-4238-BB28-A42E7A02B3D6}"/>
               </a:ext>
             </a:extLst>
           </p:cNvPr>
@@ -8021,7 +8021,7 @@
           <p:cNvPr id="13" name="p13-arrow-2">
             <a:extLst xmlns:a="http://schemas.openxmlformats.org/drawingml/2006/main">
               <a:ext uri="{FF2B5EF4-FFF2-40B4-BE49-F238E27FC236}">
-                <a16:creationId xmlns:a16="http://schemas.microsoft.com/office/drawing/2014/main" id="{176F4FE2-135F-437D-A0DF-6C79D86CEC05}"/>
+                <a16:creationId xmlns:a16="http://schemas.microsoft.com/office/drawing/2014/main" id="{F341536F-0718-441A-8079-C894A85324CF}"/>
               </a:ext>
             </a:extLst>
           </p:cNvPr>
@@ -8052,7 +8052,7 @@
           <p:cNvPr id="14" name="p13-higher">
             <a:extLst xmlns:a="http://schemas.openxmlformats.org/drawingml/2006/main">
               <a:ext uri="{FF2B5EF4-FFF2-40B4-BE49-F238E27FC236}">
-                <a16:creationId xmlns:a16="http://schemas.microsoft.com/office/drawing/2014/main" id="{5DA24BB1-9746-4CAE-B07A-B6E2950F6ADB}"/>
+                <a16:creationId xmlns:a16="http://schemas.microsoft.com/office/drawing/2014/main" id="{55B80AE4-83F8-49CA-BAF6-BE4347F07DAD}"/>
               </a:ext>
             </a:extLst>
           </p:cNvPr>
@@ -8107,7 +8107,7 @@
           <p:cNvPr id="15" name="p13-bottom">
             <a:extLst xmlns:a="http://schemas.openxmlformats.org/drawingml/2006/main">
               <a:ext uri="{FF2B5EF4-FFF2-40B4-BE49-F238E27FC236}">
-                <a16:creationId xmlns:a16="http://schemas.microsoft.com/office/drawing/2014/main" id="{21DEEA0F-60F1-488A-8BA0-D139C996FD88}"/>
+                <a16:creationId xmlns:a16="http://schemas.microsoft.com/office/drawing/2014/main" id="{6566CBC9-94B8-4494-B18A-B9AD5C7B9917}"/>
               </a:ext>
             </a:extLst>
           </p:cNvPr>
@@ -8254,7 +8254,7 @@
           <p:cNvPr id="6" name="p14-map-h-0">
             <a:extLst xmlns:a="http://schemas.openxmlformats.org/drawingml/2006/main">
               <a:ext uri="{FF2B5EF4-FFF2-40B4-BE49-F238E27FC236}">
-                <a16:creationId xmlns:a16="http://schemas.microsoft.com/office/drawing/2014/main" id="{124DBDF8-C0AF-4A15-85E3-04E5A3590D66}"/>
+                <a16:creationId xmlns:a16="http://schemas.microsoft.com/office/drawing/2014/main" id="{F0673508-E386-40C8-B6B2-90280B187961}"/>
               </a:ext>
             </a:extLst>
           </p:cNvPr>
@@ -8309,7 +8309,7 @@
           <p:cNvPr id="7" name="p14-map-h-1">
             <a:extLst xmlns:a="http://schemas.openxmlformats.org/drawingml/2006/main">
               <a:ext uri="{FF2B5EF4-FFF2-40B4-BE49-F238E27FC236}">
-                <a16:creationId xmlns:a16="http://schemas.microsoft.com/office/drawing/2014/main" id="{4466476B-E13B-495E-8F53-D3ED622BAE7C}"/>
+                <a16:creationId xmlns:a16="http://schemas.microsoft.com/office/drawing/2014/main" id="{7F2B7A7A-545A-4952-8E1F-3DD754C71C4E}"/>
               </a:ext>
             </a:extLst>
           </p:cNvPr>
@@ -8364,7 +8364,7 @@
           <p:cNvPr id="8" name="p14-map-h-2">
             <a:extLst xmlns:a="http://schemas.openxmlformats.org/drawingml/2006/main">
               <a:ext uri="{FF2B5EF4-FFF2-40B4-BE49-F238E27FC236}">
-                <a16:creationId xmlns:a16="http://schemas.microsoft.com/office/drawing/2014/main" id="{250A5558-B3EC-480C-BD2D-166AE736C537}"/>
+                <a16:creationId xmlns:a16="http://schemas.microsoft.com/office/drawing/2014/main" id="{CD713EB0-5E05-49A8-BC92-0BF28754C834}"/>
               </a:ext>
             </a:extLst>
           </p:cNvPr>
@@ -8419,7 +8419,7 @@
           <p:cNvPr id="9" name="p14-map-r0-0">
             <a:extLst xmlns:a="http://schemas.openxmlformats.org/drawingml/2006/main">
               <a:ext uri="{FF2B5EF4-FFF2-40B4-BE49-F238E27FC236}">
-                <a16:creationId xmlns:a16="http://schemas.microsoft.com/office/drawing/2014/main" id="{DAC8CD10-C81D-4C3E-85CA-E16EFD024091}"/>
+                <a16:creationId xmlns:a16="http://schemas.microsoft.com/office/drawing/2014/main" id="{B2069707-C16B-4A17-82EB-4F947A09D955}"/>
               </a:ext>
             </a:extLst>
           </p:cNvPr>
@@ -8480,7 +8480,7 @@
           <p:cNvPr id="10" name="p14-map-r0-1">
             <a:extLst xmlns:a="http://schemas.openxmlformats.org/drawingml/2006/main">
               <a:ext uri="{FF2B5EF4-FFF2-40B4-BE49-F238E27FC236}">
-                <a16:creationId xmlns:a16="http://schemas.microsoft.com/office/drawing/2014/main" id="{1810EBEB-0CF3-4CA9-9477-FA2BC0EFEC24}"/>
+                <a16:creationId xmlns:a16="http://schemas.microsoft.com/office/drawing/2014/main" id="{9FEA1D33-5C97-4CC1-A51E-4C6BE8F41C20}"/>
               </a:ext>
             </a:extLst>
           </p:cNvPr>
@@ -8541,7 +8541,7 @@
           <p:cNvPr id="11" name="p14-map-r0-2">
             <a:extLst xmlns:a="http://schemas.openxmlformats.org/drawingml/2006/main">
               <a:ext uri="{FF2B5EF4-FFF2-40B4-BE49-F238E27FC236}">
-                <a16:creationId xmlns:a16="http://schemas.microsoft.com/office/drawing/2014/main" id="{C80EF6C8-AD8A-4C82-BA08-7A2D38C0A1B7}"/>
+                <a16:creationId xmlns:a16="http://schemas.microsoft.com/office/drawing/2014/main" id="{2F35354B-6A77-4896-99A2-A29EE90AA12B}"/>
               </a:ext>
             </a:extLst>
           </p:cNvPr>
@@ -8602,7 +8602,7 @@
           <p:cNvPr id="12" name="p14-map-r1-0">
             <a:extLst xmlns:a="http://schemas.openxmlformats.org/drawingml/2006/main">
               <a:ext uri="{FF2B5EF4-FFF2-40B4-BE49-F238E27FC236}">
-                <a16:creationId xmlns:a16="http://schemas.microsoft.com/office/drawing/2014/main" id="{D34641FA-891C-4C8C-91B6-DD93716A5291}"/>
+                <a16:creationId xmlns:a16="http://schemas.microsoft.com/office/drawing/2014/main" id="{C4F3F823-7359-404D-A55E-D87D6A33465C}"/>
               </a:ext>
             </a:extLst>
           </p:cNvPr>
@@ -8663,7 +8663,7 @@
           <p:cNvPr id="13" name="p14-map-r1-1">
             <a:extLst xmlns:a="http://schemas.openxmlformats.org/drawingml/2006/main">
               <a:ext uri="{FF2B5EF4-FFF2-40B4-BE49-F238E27FC236}">
-                <a16:creationId xmlns:a16="http://schemas.microsoft.com/office/drawing/2014/main" id="{69DDB529-5478-4A3E-A18D-AF8531F9E090}"/>
+                <a16:creationId xmlns:a16="http://schemas.microsoft.com/office/drawing/2014/main" id="{51C60B33-29D2-476C-8359-B5CEF61CD171}"/>
               </a:ext>
             </a:extLst>
           </p:cNvPr>
@@ -8724,7 +8724,7 @@
           <p:cNvPr id="14" name="p14-map-r1-2">
             <a:extLst xmlns:a="http://schemas.openxmlformats.org/drawingml/2006/main">
               <a:ext uri="{FF2B5EF4-FFF2-40B4-BE49-F238E27FC236}">
-                <a16:creationId xmlns:a16="http://schemas.microsoft.com/office/drawing/2014/main" id="{D2AFF443-9036-4567-8C37-B2C691879A28}"/>
+                <a16:creationId xmlns:a16="http://schemas.microsoft.com/office/drawing/2014/main" id="{9C8079B8-A0D6-40F4-AB3E-DA94C2FB9E01}"/>
               </a:ext>
             </a:extLst>
           </p:cNvPr>
@@ -8785,7 +8785,7 @@
           <p:cNvPr id="15" name="p14-map-r2-0">
             <a:extLst xmlns:a="http://schemas.openxmlformats.org/drawingml/2006/main">
               <a:ext uri="{FF2B5EF4-FFF2-40B4-BE49-F238E27FC236}">
-                <a16:creationId xmlns:a16="http://schemas.microsoft.com/office/drawing/2014/main" id="{405DB0A2-9B4E-4FCB-862A-96C96A1691E6}"/>
+                <a16:creationId xmlns:a16="http://schemas.microsoft.com/office/drawing/2014/main" id="{8E5A346E-7A4B-41CA-982E-24FDB86642F9}"/>
               </a:ext>
             </a:extLst>
           </p:cNvPr>
@@ -8846,7 +8846,7 @@
           <p:cNvPr id="16" name="p14-map-r2-1">
             <a:extLst xmlns:a="http://schemas.openxmlformats.org/drawingml/2006/main">
               <a:ext uri="{FF2B5EF4-FFF2-40B4-BE49-F238E27FC236}">
-                <a16:creationId xmlns:a16="http://schemas.microsoft.com/office/drawing/2014/main" id="{AE97B38E-BE72-40C6-BD05-38AE1B60D86D}"/>
+                <a16:creationId xmlns:a16="http://schemas.microsoft.com/office/drawing/2014/main" id="{FF186D47-039A-45DF-94C6-73E725F52F0A}"/>
               </a:ext>
             </a:extLst>
           </p:cNvPr>
@@ -8907,7 +8907,7 @@
           <p:cNvPr id="17" name="p14-map-r2-2">
             <a:extLst xmlns:a="http://schemas.openxmlformats.org/drawingml/2006/main">
               <a:ext uri="{FF2B5EF4-FFF2-40B4-BE49-F238E27FC236}">
-                <a16:creationId xmlns:a16="http://schemas.microsoft.com/office/drawing/2014/main" id="{7DB3E509-0ED4-41F4-AED0-945E1D0F77A6}"/>
+                <a16:creationId xmlns:a16="http://schemas.microsoft.com/office/drawing/2014/main" id="{AFD4BEF9-C554-4DB3-80ED-D50E8BEF0385}"/>
               </a:ext>
             </a:extLst>
           </p:cNvPr>
@@ -8968,7 +8968,7 @@
           <p:cNvPr id="18" name="p14-map-r3-0">
             <a:extLst xmlns:a="http://schemas.openxmlformats.org/drawingml/2006/main">
               <a:ext uri="{FF2B5EF4-FFF2-40B4-BE49-F238E27FC236}">
-                <a16:creationId xmlns:a16="http://schemas.microsoft.com/office/drawing/2014/main" id="{9BA3674E-362C-489B-90A5-553F10D1C6D3}"/>
+                <a16:creationId xmlns:a16="http://schemas.microsoft.com/office/drawing/2014/main" id="{DD927CB2-9DA6-44BF-ACDB-BC7A9428B877}"/>
               </a:ext>
             </a:extLst>
           </p:cNvPr>
@@ -9029,7 +9029,7 @@
           <p:cNvPr id="19" name="p14-map-r3-1">
             <a:extLst xmlns:a="http://schemas.openxmlformats.org/drawingml/2006/main">
               <a:ext uri="{FF2B5EF4-FFF2-40B4-BE49-F238E27FC236}">
-                <a16:creationId xmlns:a16="http://schemas.microsoft.com/office/drawing/2014/main" id="{B7212264-0993-4B9F-9607-9FFEE2EA3C91}"/>
+                <a16:creationId xmlns:a16="http://schemas.microsoft.com/office/drawing/2014/main" id="{BBEC11F3-BC78-4070-8CBF-E16607AFA599}"/>
               </a:ext>
             </a:extLst>
           </p:cNvPr>
@@ -9090,7 +9090,7 @@
           <p:cNvPr id="20" name="p14-map-r3-2">
             <a:extLst xmlns:a="http://schemas.openxmlformats.org/drawingml/2006/main">
               <a:ext uri="{FF2B5EF4-FFF2-40B4-BE49-F238E27FC236}">
-                <a16:creationId xmlns:a16="http://schemas.microsoft.com/office/drawing/2014/main" id="{BA48C07B-09B3-4E58-9FA5-D5B994876D64}"/>
+                <a16:creationId xmlns:a16="http://schemas.microsoft.com/office/drawing/2014/main" id="{E3904653-B80F-4171-A1F8-93590BA894A0}"/>
               </a:ext>
             </a:extLst>
           </p:cNvPr>
@@ -9151,7 +9151,7 @@
           <p:cNvPr id="21" name="p14-new-title">
             <a:extLst xmlns:a="http://schemas.openxmlformats.org/drawingml/2006/main">
               <a:ext uri="{FF2B5EF4-FFF2-40B4-BE49-F238E27FC236}">
-                <a16:creationId xmlns:a16="http://schemas.microsoft.com/office/drawing/2014/main" id="{822BD56F-5B1E-4C58-BA6D-705CD933E426}"/>
+                <a16:creationId xmlns:a16="http://schemas.microsoft.com/office/drawing/2014/main" id="{758060E6-6951-47BF-A6E1-38741CDEC586}"/>
               </a:ext>
             </a:extLst>
           </p:cNvPr>
@@ -9204,7 +9204,7 @@
           <p:cNvPr id="22" name="p14-new">
             <a:extLst xmlns:a="http://schemas.openxmlformats.org/drawingml/2006/main">
               <a:ext uri="{FF2B5EF4-FFF2-40B4-BE49-F238E27FC236}">
-                <a16:creationId xmlns:a16="http://schemas.microsoft.com/office/drawing/2014/main" id="{F89C5141-3BC5-4EB0-B965-0F256D8A6DB7}"/>
+                <a16:creationId xmlns:a16="http://schemas.microsoft.com/office/drawing/2014/main" id="{398C3AC4-92E0-410B-9678-57DAD3617E87}"/>
               </a:ext>
             </a:extLst>
           </p:cNvPr>
@@ -9234,14 +9234,14 @@
           <a:lstStyle xmlns:a="http://schemas.openxmlformats.org/drawingml/2006/main"/>
           <a:p xmlns:a="http://schemas.openxmlformats.org/drawingml/2006/main">
             <a:pPr algn="ctr">
-              <a:defRPr sz="1500" b="1">
+              <a:defRPr sz="1425" b="1">
                 <a:solidFill>
                   <a:srgbClr val="18354E"/>
                 </a:solidFill>
               </a:defRPr>
             </a:pPr>
             <a:r>
-              <a:rPr sz="1500" b="1">
+              <a:rPr sz="1425" b="1">
                 <a:solidFill>
                   <a:srgbClr val="18354E"/>
                 </a:solidFill>
@@ -9249,7 +9249,7 @@
                 <a:ea typeface="Microsoft YaHei"/>
                 <a:cs typeface="Microsoft YaHei"/>
               </a:rPr>
-              <a:t>§4.2 baseline｜§4.6 七字段规格｜§5 至少两条研究判断｜§7 一行实验记录｜同伴反馈处理</a:t>
+              <a:t>§4.2 baseline｜§4.6 七字段规格｜§5 至少两条研究判断｜§7 实验记录｜failure-log.md｜同伴反馈处理</a:t>
             </a:r>
           </a:p>
         </p:txBody>
@@ -9259,7 +9259,7 @@
           <p:cNvPr id="23" name="p14-bottom">
             <a:extLst xmlns:a="http://schemas.openxmlformats.org/drawingml/2006/main">
               <a:ext uri="{FF2B5EF4-FFF2-40B4-BE49-F238E27FC236}">
-                <a16:creationId xmlns:a16="http://schemas.microsoft.com/office/drawing/2014/main" id="{31C2306B-8EC8-437E-94F3-F6E5BD683A60}"/>
+                <a16:creationId xmlns:a16="http://schemas.microsoft.com/office/drawing/2014/main" id="{899259F0-5F6E-4046-A6E2-830CD8D9689C}"/>
               </a:ext>
             </a:extLst>
           </p:cNvPr>
@@ -9367,7 +9367,7 @@
                 <a:ea typeface="Microsoft YaHei"/>
                 <a:cs typeface="Microsoft YaHei"/>
               </a:rPr>
-              <a:t>判断门检查当前个人项目版本的八项条件</a:t>
+              <a:t>判断门检查当前个人项目版本的九项条件</a:t>
             </a:r>
             <a:endParaRPr/>
           </a:p>
@@ -9406,23 +9406,23 @@
           <p:cNvPr id="6" name="p15-n-0">
             <a:extLst xmlns:a="http://schemas.openxmlformats.org/drawingml/2006/main">
               <a:ext uri="{FF2B5EF4-FFF2-40B4-BE49-F238E27FC236}">
-                <a16:creationId xmlns:a16="http://schemas.microsoft.com/office/drawing/2014/main" id="{B006C9FE-9A3C-4FC0-BF7C-14C80DE5A28D}"/>
-              </a:ext>
-            </a:extLst>
-          </p:cNvPr>
-          <p:cNvSpPr>
-            <a:spLocks xmlns:a="http://schemas.openxmlformats.org/drawingml/2006/main" noGrp="1"/>
-          </p:cNvSpPr>
-          <p:nvPr/>
-        </p:nvSpPr>
-        <p:spPr>
-          <a:xfrm xmlns:a="http://schemas.openxmlformats.org/drawingml/2006/main">
-            <a:off x="552450" y="1028700"/>
-            <a:ext cx="476250" cy="476250"/>
+                <a16:creationId xmlns:a16="http://schemas.microsoft.com/office/drawing/2014/main" id="{44C43246-0004-4B1E-A636-77E9E9656DD3}"/>
+              </a:ext>
+            </a:extLst>
+          </p:cNvPr>
+          <p:cNvSpPr>
+            <a:spLocks xmlns:a="http://schemas.openxmlformats.org/drawingml/2006/main" noGrp="1"/>
+          </p:cNvSpPr>
+          <p:nvPr/>
+        </p:nvSpPr>
+        <p:spPr>
+          <a:xfrm xmlns:a="http://schemas.openxmlformats.org/drawingml/2006/main">
+            <a:off x="438150" y="1143000"/>
+            <a:ext cx="457200" cy="457200"/>
           </a:xfrm>
           <a:prstGeom xmlns:a="http://schemas.openxmlformats.org/drawingml/2006/main" prst="roundRect">
             <a:avLst>
-              <a:gd name="adj" fmla="val 16000"/>
+              <a:gd name="adj" fmla="val 16667"/>
             </a:avLst>
           </a:prstGeom>
           <a:solidFill xmlns:a="http://schemas.openxmlformats.org/drawingml/2006/main">
@@ -9463,38 +9463,42 @@
           <p:cNvPr id="7" name="p15-g-0">
             <a:extLst xmlns:a="http://schemas.openxmlformats.org/drawingml/2006/main">
               <a:ext uri="{FF2B5EF4-FFF2-40B4-BE49-F238E27FC236}">
-                <a16:creationId xmlns:a16="http://schemas.microsoft.com/office/drawing/2014/main" id="{77D5067D-C3AF-48C0-84DB-D844FF199CE2}"/>
-              </a:ext>
-            </a:extLst>
-          </p:cNvPr>
-          <p:cNvSpPr>
-            <a:spLocks xmlns:a="http://schemas.openxmlformats.org/drawingml/2006/main" noGrp="1"/>
-          </p:cNvSpPr>
-          <p:nvPr/>
-        </p:nvSpPr>
-        <p:spPr>
-          <a:xfrm xmlns:a="http://schemas.openxmlformats.org/drawingml/2006/main">
-            <a:off x="1123950" y="990600"/>
-            <a:ext cx="4914900" cy="590550"/>
-          </a:xfrm>
-          <a:prstGeom xmlns:a="http://schemas.openxmlformats.org/drawingml/2006/main" prst="rect">
-            <a:avLst/>
+                <a16:creationId xmlns:a16="http://schemas.microsoft.com/office/drawing/2014/main" id="{FBEBCA71-49B8-4096-8192-B063778C7E51}"/>
+              </a:ext>
+            </a:extLst>
+          </p:cNvPr>
+          <p:cNvSpPr>
+            <a:spLocks xmlns:a="http://schemas.openxmlformats.org/drawingml/2006/main" noGrp="1"/>
+          </p:cNvSpPr>
+          <p:nvPr/>
+        </p:nvSpPr>
+        <p:spPr>
+          <a:xfrm xmlns:a="http://schemas.openxmlformats.org/drawingml/2006/main">
+            <a:off x="990600" y="1066800"/>
+            <a:ext cx="3238500" cy="647700"/>
+          </a:xfrm>
+          <a:prstGeom xmlns:a="http://schemas.openxmlformats.org/drawingml/2006/main" prst="roundRect">
+            <a:avLst>
+              <a:gd name="adj" fmla="val 11765"/>
+            </a:avLst>
           </a:prstGeom>
           <a:solidFill xmlns:a="http://schemas.openxmlformats.org/drawingml/2006/main">
             <a:srgbClr val="F8E9EA"/>
           </a:solidFill>
-          <a:ln xmlns:a="http://schemas.openxmlformats.org/drawingml/2006/main" w="0">
-            <a:noFill/>
-            <a:prstDash val="solid"/>
-          </a:ln>
-        </p:spPr>
-        <p:txBody>
-          <a:bodyPr xmlns:a="http://schemas.openxmlformats.org/drawingml/2006/main" lIns="76200" tIns="38100" rIns="76200" bIns="38100" anchor="ctr"/>
-          <a:lstStyle xmlns:a="http://schemas.openxmlformats.org/drawingml/2006/main"/>
-          <a:p xmlns:a="http://schemas.openxmlformats.org/drawingml/2006/main">
-            <a:pPr algn="l">
+          <a:ln xmlns:a="http://schemas.openxmlformats.org/drawingml/2006/main" w="9525">
+            <a:solidFill>
+              <a:srgbClr val="D6DDE2"/>
+            </a:solidFill>
+            <a:prstDash val="solid"/>
+          </a:ln>
+        </p:spPr>
+        <p:txBody>
+          <a:bodyPr xmlns:a="http://schemas.openxmlformats.org/drawingml/2006/main" lIns="76200" tIns="38100" rIns="76200" bIns="38100" anchor="ctr"/>
+          <a:lstStyle xmlns:a="http://schemas.openxmlformats.org/drawingml/2006/main"/>
+          <a:p xmlns:a="http://schemas.openxmlformats.org/drawingml/2006/main">
+            <a:pPr algn="ctr">
               <a:lnSpc>
-                <a:spcPct val="112000"/>
+                <a:spcPct val="108000"/>
               </a:lnSpc>
               <a:buNone/>
               <a:defRPr sz="1350" b="1">
@@ -9512,7 +9516,7 @@
                 <a:ea typeface="Microsoft YaHei"/>
                 <a:cs typeface="Microsoft YaHei"/>
               </a:rPr>
-              <a:t>可执行 baseline 或最小验证原型</a:t>
+              <a:t>可执行 baseline / 最小原型</a:t>
             </a:r>
           </a:p>
         </p:txBody>
@@ -9522,23 +9526,23 @@
           <p:cNvPr id="8" name="p15-n-1">
             <a:extLst xmlns:a="http://schemas.openxmlformats.org/drawingml/2006/main">
               <a:ext uri="{FF2B5EF4-FFF2-40B4-BE49-F238E27FC236}">
-                <a16:creationId xmlns:a16="http://schemas.microsoft.com/office/drawing/2014/main" id="{FAD7FC9A-EE70-45A0-B6D0-3632131480FC}"/>
-              </a:ext>
-            </a:extLst>
-          </p:cNvPr>
-          <p:cNvSpPr>
-            <a:spLocks xmlns:a="http://schemas.openxmlformats.org/drawingml/2006/main" noGrp="1"/>
-          </p:cNvSpPr>
-          <p:nvPr/>
-        </p:nvSpPr>
-        <p:spPr>
-          <a:xfrm xmlns:a="http://schemas.openxmlformats.org/drawingml/2006/main">
-            <a:off x="6362700" y="1028700"/>
-            <a:ext cx="476250" cy="476250"/>
+                <a16:creationId xmlns:a16="http://schemas.microsoft.com/office/drawing/2014/main" id="{8C8E0962-919A-45DE-8D2B-BAD0EAF2387B}"/>
+              </a:ext>
+            </a:extLst>
+          </p:cNvPr>
+          <p:cNvSpPr>
+            <a:spLocks xmlns:a="http://schemas.openxmlformats.org/drawingml/2006/main" noGrp="1"/>
+          </p:cNvSpPr>
+          <p:nvPr/>
+        </p:nvSpPr>
+        <p:spPr>
+          <a:xfrm xmlns:a="http://schemas.openxmlformats.org/drawingml/2006/main">
+            <a:off x="4381500" y="1143000"/>
+            <a:ext cx="457200" cy="457200"/>
           </a:xfrm>
           <a:prstGeom xmlns:a="http://schemas.openxmlformats.org/drawingml/2006/main" prst="roundRect">
             <a:avLst>
-              <a:gd name="adj" fmla="val 16000"/>
+              <a:gd name="adj" fmla="val 16667"/>
             </a:avLst>
           </a:prstGeom>
           <a:solidFill xmlns:a="http://schemas.openxmlformats.org/drawingml/2006/main">
@@ -9579,38 +9583,42 @@
           <p:cNvPr id="9" name="p15-g-1">
             <a:extLst xmlns:a="http://schemas.openxmlformats.org/drawingml/2006/main">
               <a:ext uri="{FF2B5EF4-FFF2-40B4-BE49-F238E27FC236}">
-                <a16:creationId xmlns:a16="http://schemas.microsoft.com/office/drawing/2014/main" id="{E8960F3F-0856-45F2-BB15-C3BDE0E4FED7}"/>
-              </a:ext>
-            </a:extLst>
-          </p:cNvPr>
-          <p:cNvSpPr>
-            <a:spLocks xmlns:a="http://schemas.openxmlformats.org/drawingml/2006/main" noGrp="1"/>
-          </p:cNvSpPr>
-          <p:nvPr/>
-        </p:nvSpPr>
-        <p:spPr>
-          <a:xfrm xmlns:a="http://schemas.openxmlformats.org/drawingml/2006/main">
-            <a:off x="6934200" y="990600"/>
-            <a:ext cx="4914900" cy="590550"/>
-          </a:xfrm>
-          <a:prstGeom xmlns:a="http://schemas.openxmlformats.org/drawingml/2006/main" prst="rect">
-            <a:avLst/>
+                <a16:creationId xmlns:a16="http://schemas.microsoft.com/office/drawing/2014/main" id="{430EEAC3-ABF2-47EE-9E8F-C1972F271B0E}"/>
+              </a:ext>
+            </a:extLst>
+          </p:cNvPr>
+          <p:cNvSpPr>
+            <a:spLocks xmlns:a="http://schemas.openxmlformats.org/drawingml/2006/main" noGrp="1"/>
+          </p:cNvSpPr>
+          <p:nvPr/>
+        </p:nvSpPr>
+        <p:spPr>
+          <a:xfrm xmlns:a="http://schemas.openxmlformats.org/drawingml/2006/main">
+            <a:off x="4933950" y="1066800"/>
+            <a:ext cx="3238500" cy="647700"/>
+          </a:xfrm>
+          <a:prstGeom xmlns:a="http://schemas.openxmlformats.org/drawingml/2006/main" prst="roundRect">
+            <a:avLst>
+              <a:gd name="adj" fmla="val 11765"/>
+            </a:avLst>
           </a:prstGeom>
           <a:solidFill xmlns:a="http://schemas.openxmlformats.org/drawingml/2006/main">
             <a:srgbClr val="F8E9EA"/>
           </a:solidFill>
-          <a:ln xmlns:a="http://schemas.openxmlformats.org/drawingml/2006/main" w="0">
-            <a:noFill/>
-            <a:prstDash val="solid"/>
-          </a:ln>
-        </p:spPr>
-        <p:txBody>
-          <a:bodyPr xmlns:a="http://schemas.openxmlformats.org/drawingml/2006/main" lIns="76200" tIns="38100" rIns="76200" bIns="38100" anchor="ctr"/>
-          <a:lstStyle xmlns:a="http://schemas.openxmlformats.org/drawingml/2006/main"/>
-          <a:p xmlns:a="http://schemas.openxmlformats.org/drawingml/2006/main">
-            <a:pPr algn="l">
+          <a:ln xmlns:a="http://schemas.openxmlformats.org/drawingml/2006/main" w="9525">
+            <a:solidFill>
+              <a:srgbClr val="D6DDE2"/>
+            </a:solidFill>
+            <a:prstDash val="solid"/>
+          </a:ln>
+        </p:spPr>
+        <p:txBody>
+          <a:bodyPr xmlns:a="http://schemas.openxmlformats.org/drawingml/2006/main" lIns="76200" tIns="38100" rIns="76200" bIns="38100" anchor="ctr"/>
+          <a:lstStyle xmlns:a="http://schemas.openxmlformats.org/drawingml/2006/main"/>
+          <a:p xmlns:a="http://schemas.openxmlformats.org/drawingml/2006/main">
+            <a:pPr algn="ctr">
               <a:lnSpc>
-                <a:spcPct val="112000"/>
+                <a:spcPct val="108000"/>
               </a:lnSpc>
               <a:buNone/>
               <a:defRPr sz="1350" b="1">
@@ -9628,7 +9636,7 @@
                 <a:ea typeface="Microsoft YaHei"/>
                 <a:cs typeface="Microsoft YaHei"/>
               </a:rPr>
-              <a:t>数据、材料、指标和使用限制</a:t>
+              <a:t>数据、指标与使用限制</a:t>
             </a:r>
           </a:p>
         </p:txBody>
@@ -9638,23 +9646,23 @@
           <p:cNvPr id="10" name="p15-n-2">
             <a:extLst xmlns:a="http://schemas.openxmlformats.org/drawingml/2006/main">
               <a:ext uri="{FF2B5EF4-FFF2-40B4-BE49-F238E27FC236}">
-                <a16:creationId xmlns:a16="http://schemas.microsoft.com/office/drawing/2014/main" id="{1D2F507E-028B-413B-9FBE-75D0A6E86445}"/>
-              </a:ext>
-            </a:extLst>
-          </p:cNvPr>
-          <p:cNvSpPr>
-            <a:spLocks xmlns:a="http://schemas.openxmlformats.org/drawingml/2006/main" noGrp="1"/>
-          </p:cNvSpPr>
-          <p:nvPr/>
-        </p:nvSpPr>
-        <p:spPr>
-          <a:xfrm xmlns:a="http://schemas.openxmlformats.org/drawingml/2006/main">
-            <a:off x="552450" y="2000250"/>
-            <a:ext cx="476250" cy="476250"/>
+                <a16:creationId xmlns:a16="http://schemas.microsoft.com/office/drawing/2014/main" id="{17B7B2EF-42DD-42C7-A1BB-47197633BBFC}"/>
+              </a:ext>
+            </a:extLst>
+          </p:cNvPr>
+          <p:cNvSpPr>
+            <a:spLocks xmlns:a="http://schemas.openxmlformats.org/drawingml/2006/main" noGrp="1"/>
+          </p:cNvSpPr>
+          <p:nvPr/>
+        </p:nvSpPr>
+        <p:spPr>
+          <a:xfrm xmlns:a="http://schemas.openxmlformats.org/drawingml/2006/main">
+            <a:off x="8324850" y="1143000"/>
+            <a:ext cx="457200" cy="457200"/>
           </a:xfrm>
           <a:prstGeom xmlns:a="http://schemas.openxmlformats.org/drawingml/2006/main" prst="roundRect">
             <a:avLst>
-              <a:gd name="adj" fmla="val 16000"/>
+              <a:gd name="adj" fmla="val 16667"/>
             </a:avLst>
           </a:prstGeom>
           <a:solidFill xmlns:a="http://schemas.openxmlformats.org/drawingml/2006/main">
@@ -9695,38 +9703,42 @@
           <p:cNvPr id="11" name="p15-g-2">
             <a:extLst xmlns:a="http://schemas.openxmlformats.org/drawingml/2006/main">
               <a:ext uri="{FF2B5EF4-FFF2-40B4-BE49-F238E27FC236}">
-                <a16:creationId xmlns:a16="http://schemas.microsoft.com/office/drawing/2014/main" id="{78859733-D09E-4BE5-A25A-CB653D65BB1D}"/>
-              </a:ext>
-            </a:extLst>
-          </p:cNvPr>
-          <p:cNvSpPr>
-            <a:spLocks xmlns:a="http://schemas.openxmlformats.org/drawingml/2006/main" noGrp="1"/>
-          </p:cNvSpPr>
-          <p:nvPr/>
-        </p:nvSpPr>
-        <p:spPr>
-          <a:xfrm xmlns:a="http://schemas.openxmlformats.org/drawingml/2006/main">
-            <a:off x="1123950" y="1962150"/>
-            <a:ext cx="4914900" cy="590550"/>
-          </a:xfrm>
-          <a:prstGeom xmlns:a="http://schemas.openxmlformats.org/drawingml/2006/main" prst="rect">
-            <a:avLst/>
+                <a16:creationId xmlns:a16="http://schemas.microsoft.com/office/drawing/2014/main" id="{3893C898-CB98-445D-868A-B3E1A875DA67}"/>
+              </a:ext>
+            </a:extLst>
+          </p:cNvPr>
+          <p:cNvSpPr>
+            <a:spLocks xmlns:a="http://schemas.openxmlformats.org/drawingml/2006/main" noGrp="1"/>
+          </p:cNvSpPr>
+          <p:nvPr/>
+        </p:nvSpPr>
+        <p:spPr>
+          <a:xfrm xmlns:a="http://schemas.openxmlformats.org/drawingml/2006/main">
+            <a:off x="8877300" y="1066800"/>
+            <a:ext cx="3238500" cy="647700"/>
+          </a:xfrm>
+          <a:prstGeom xmlns:a="http://schemas.openxmlformats.org/drawingml/2006/main" prst="roundRect">
+            <a:avLst>
+              <a:gd name="adj" fmla="val 11765"/>
+            </a:avLst>
           </a:prstGeom>
           <a:solidFill xmlns:a="http://schemas.openxmlformats.org/drawingml/2006/main">
             <a:srgbClr val="F8E9EA"/>
           </a:solidFill>
-          <a:ln xmlns:a="http://schemas.openxmlformats.org/drawingml/2006/main" w="0">
-            <a:noFill/>
-            <a:prstDash val="solid"/>
-          </a:ln>
-        </p:spPr>
-        <p:txBody>
-          <a:bodyPr xmlns:a="http://schemas.openxmlformats.org/drawingml/2006/main" lIns="76200" tIns="38100" rIns="76200" bIns="38100" anchor="ctr"/>
-          <a:lstStyle xmlns:a="http://schemas.openxmlformats.org/drawingml/2006/main"/>
-          <a:p xmlns:a="http://schemas.openxmlformats.org/drawingml/2006/main">
-            <a:pPr algn="l">
+          <a:ln xmlns:a="http://schemas.openxmlformats.org/drawingml/2006/main" w="9525">
+            <a:solidFill>
+              <a:srgbClr val="D6DDE2"/>
+            </a:solidFill>
+            <a:prstDash val="solid"/>
+          </a:ln>
+        </p:spPr>
+        <p:txBody>
+          <a:bodyPr xmlns:a="http://schemas.openxmlformats.org/drawingml/2006/main" lIns="76200" tIns="38100" rIns="76200" bIns="38100" anchor="ctr"/>
+          <a:lstStyle xmlns:a="http://schemas.openxmlformats.org/drawingml/2006/main"/>
+          <a:p xmlns:a="http://schemas.openxmlformats.org/drawingml/2006/main">
+            <a:pPr algn="ctr">
               <a:lnSpc>
-                <a:spcPct val="112000"/>
+                <a:spcPct val="108000"/>
               </a:lnSpc>
               <a:buNone/>
               <a:defRPr sz="1350" b="1">
@@ -9744,7 +9756,7 @@
                 <a:ea typeface="Microsoft YaHei"/>
                 <a:cs typeface="Microsoft YaHei"/>
               </a:rPr>
-              <a:t>环境、配置、种子或等价复现条件</a:t>
+              <a:t>环境、配置与复现条件</a:t>
             </a:r>
           </a:p>
         </p:txBody>
@@ -9754,23 +9766,23 @@
           <p:cNvPr id="12" name="p15-n-3">
             <a:extLst xmlns:a="http://schemas.openxmlformats.org/drawingml/2006/main">
               <a:ext uri="{FF2B5EF4-FFF2-40B4-BE49-F238E27FC236}">
-                <a16:creationId xmlns:a16="http://schemas.microsoft.com/office/drawing/2014/main" id="{1D783194-49EB-4FF7-B940-AFB8A3DA4056}"/>
-              </a:ext>
-            </a:extLst>
-          </p:cNvPr>
-          <p:cNvSpPr>
-            <a:spLocks xmlns:a="http://schemas.openxmlformats.org/drawingml/2006/main" noGrp="1"/>
-          </p:cNvSpPr>
-          <p:nvPr/>
-        </p:nvSpPr>
-        <p:spPr>
-          <a:xfrm xmlns:a="http://schemas.openxmlformats.org/drawingml/2006/main">
-            <a:off x="6362700" y="2000250"/>
-            <a:ext cx="476250" cy="476250"/>
+                <a16:creationId xmlns:a16="http://schemas.microsoft.com/office/drawing/2014/main" id="{980361F6-E677-4B6A-BB11-68D6F49B9BAB}"/>
+              </a:ext>
+            </a:extLst>
+          </p:cNvPr>
+          <p:cNvSpPr>
+            <a:spLocks xmlns:a="http://schemas.openxmlformats.org/drawingml/2006/main" noGrp="1"/>
+          </p:cNvSpPr>
+          <p:nvPr/>
+        </p:nvSpPr>
+        <p:spPr>
+          <a:xfrm xmlns:a="http://schemas.openxmlformats.org/drawingml/2006/main">
+            <a:off x="438150" y="2343150"/>
+            <a:ext cx="457200" cy="457200"/>
           </a:xfrm>
           <a:prstGeom xmlns:a="http://schemas.openxmlformats.org/drawingml/2006/main" prst="roundRect">
             <a:avLst>
-              <a:gd name="adj" fmla="val 16000"/>
+              <a:gd name="adj" fmla="val 16667"/>
             </a:avLst>
           </a:prstGeom>
           <a:solidFill xmlns:a="http://schemas.openxmlformats.org/drawingml/2006/main">
@@ -9811,38 +9823,42 @@
           <p:cNvPr id="13" name="p15-g-3">
             <a:extLst xmlns:a="http://schemas.openxmlformats.org/drawingml/2006/main">
               <a:ext uri="{FF2B5EF4-FFF2-40B4-BE49-F238E27FC236}">
-                <a16:creationId xmlns:a16="http://schemas.microsoft.com/office/drawing/2014/main" id="{6A534D9A-7BAB-4DF7-97D2-F58302B47FBD}"/>
-              </a:ext>
-            </a:extLst>
-          </p:cNvPr>
-          <p:cNvSpPr>
-            <a:spLocks xmlns:a="http://schemas.openxmlformats.org/drawingml/2006/main" noGrp="1"/>
-          </p:cNvSpPr>
-          <p:nvPr/>
-        </p:nvSpPr>
-        <p:spPr>
-          <a:xfrm xmlns:a="http://schemas.openxmlformats.org/drawingml/2006/main">
-            <a:off x="6934200" y="1962150"/>
-            <a:ext cx="4914900" cy="590550"/>
-          </a:xfrm>
-          <a:prstGeom xmlns:a="http://schemas.openxmlformats.org/drawingml/2006/main" prst="rect">
-            <a:avLst/>
+                <a16:creationId xmlns:a16="http://schemas.microsoft.com/office/drawing/2014/main" id="{0E966A7F-A463-475E-9528-995A0F797CD2}"/>
+              </a:ext>
+            </a:extLst>
+          </p:cNvPr>
+          <p:cNvSpPr>
+            <a:spLocks xmlns:a="http://schemas.openxmlformats.org/drawingml/2006/main" noGrp="1"/>
+          </p:cNvSpPr>
+          <p:nvPr/>
+        </p:nvSpPr>
+        <p:spPr>
+          <a:xfrm xmlns:a="http://schemas.openxmlformats.org/drawingml/2006/main">
+            <a:off x="990600" y="2266950"/>
+            <a:ext cx="3238500" cy="647700"/>
+          </a:xfrm>
+          <a:prstGeom xmlns:a="http://schemas.openxmlformats.org/drawingml/2006/main" prst="roundRect">
+            <a:avLst>
+              <a:gd name="adj" fmla="val 11765"/>
+            </a:avLst>
           </a:prstGeom>
           <a:solidFill xmlns:a="http://schemas.openxmlformats.org/drawingml/2006/main">
             <a:srgbClr val="F3F6F7"/>
           </a:solidFill>
-          <a:ln xmlns:a="http://schemas.openxmlformats.org/drawingml/2006/main" w="0">
-            <a:noFill/>
-            <a:prstDash val="solid"/>
-          </a:ln>
-        </p:spPr>
-        <p:txBody>
-          <a:bodyPr xmlns:a="http://schemas.openxmlformats.org/drawingml/2006/main" lIns="76200" tIns="38100" rIns="76200" bIns="38100" anchor="ctr"/>
-          <a:lstStyle xmlns:a="http://schemas.openxmlformats.org/drawingml/2006/main"/>
-          <a:p xmlns:a="http://schemas.openxmlformats.org/drawingml/2006/main">
-            <a:pPr algn="l">
+          <a:ln xmlns:a="http://schemas.openxmlformats.org/drawingml/2006/main" w="9525">
+            <a:solidFill>
+              <a:srgbClr val="D6DDE2"/>
+            </a:solidFill>
+            <a:prstDash val="solid"/>
+          </a:ln>
+        </p:spPr>
+        <p:txBody>
+          <a:bodyPr xmlns:a="http://schemas.openxmlformats.org/drawingml/2006/main" lIns="76200" tIns="38100" rIns="76200" bIns="38100" anchor="ctr"/>
+          <a:lstStyle xmlns:a="http://schemas.openxmlformats.org/drawingml/2006/main"/>
+          <a:p xmlns:a="http://schemas.openxmlformats.org/drawingml/2006/main">
+            <a:pPr algn="ctr">
               <a:lnSpc>
-                <a:spcPct val="112000"/>
+                <a:spcPct val="108000"/>
               </a:lnSpc>
               <a:buNone/>
               <a:defRPr sz="1350" b="1">
@@ -9860,7 +9876,7 @@
                 <a:ea typeface="Microsoft YaHei"/>
                 <a:cs typeface="Microsoft YaHei"/>
               </a:rPr>
-              <a:t>≥2 条六字段研究判断</a:t>
+              <a:t>≥2 条研究判断</a:t>
             </a:r>
           </a:p>
         </p:txBody>
@@ -9870,23 +9886,23 @@
           <p:cNvPr id="14" name="p15-n-4">
             <a:extLst xmlns:a="http://schemas.openxmlformats.org/drawingml/2006/main">
               <a:ext uri="{FF2B5EF4-FFF2-40B4-BE49-F238E27FC236}">
-                <a16:creationId xmlns:a16="http://schemas.microsoft.com/office/drawing/2014/main" id="{D50AFC43-991F-4973-98F8-462028B0138E}"/>
-              </a:ext>
-            </a:extLst>
-          </p:cNvPr>
-          <p:cNvSpPr>
-            <a:spLocks xmlns:a="http://schemas.openxmlformats.org/drawingml/2006/main" noGrp="1"/>
-          </p:cNvSpPr>
-          <p:nvPr/>
-        </p:nvSpPr>
-        <p:spPr>
-          <a:xfrm xmlns:a="http://schemas.openxmlformats.org/drawingml/2006/main">
-            <a:off x="552450" y="2971800"/>
-            <a:ext cx="476250" cy="476250"/>
+                <a16:creationId xmlns:a16="http://schemas.microsoft.com/office/drawing/2014/main" id="{9558B616-9CF5-41B4-9DC9-5D4EF0007C23}"/>
+              </a:ext>
+            </a:extLst>
+          </p:cNvPr>
+          <p:cNvSpPr>
+            <a:spLocks xmlns:a="http://schemas.openxmlformats.org/drawingml/2006/main" noGrp="1"/>
+          </p:cNvSpPr>
+          <p:nvPr/>
+        </p:nvSpPr>
+        <p:spPr>
+          <a:xfrm xmlns:a="http://schemas.openxmlformats.org/drawingml/2006/main">
+            <a:off x="4381500" y="2343150"/>
+            <a:ext cx="457200" cy="457200"/>
           </a:xfrm>
           <a:prstGeom xmlns:a="http://schemas.openxmlformats.org/drawingml/2006/main" prst="roundRect">
             <a:avLst>
-              <a:gd name="adj" fmla="val 16000"/>
+              <a:gd name="adj" fmla="val 16667"/>
             </a:avLst>
           </a:prstGeom>
           <a:solidFill xmlns:a="http://schemas.openxmlformats.org/drawingml/2006/main">
@@ -9927,38 +9943,42 @@
           <p:cNvPr id="15" name="p15-g-4">
             <a:extLst xmlns:a="http://schemas.openxmlformats.org/drawingml/2006/main">
               <a:ext uri="{FF2B5EF4-FFF2-40B4-BE49-F238E27FC236}">
-                <a16:creationId xmlns:a16="http://schemas.microsoft.com/office/drawing/2014/main" id="{6441199C-4885-4007-B6A5-68798C4A73BF}"/>
-              </a:ext>
-            </a:extLst>
-          </p:cNvPr>
-          <p:cNvSpPr>
-            <a:spLocks xmlns:a="http://schemas.openxmlformats.org/drawingml/2006/main" noGrp="1"/>
-          </p:cNvSpPr>
-          <p:nvPr/>
-        </p:nvSpPr>
-        <p:spPr>
-          <a:xfrm xmlns:a="http://schemas.openxmlformats.org/drawingml/2006/main">
-            <a:off x="1123950" y="2933700"/>
-            <a:ext cx="4914900" cy="590550"/>
-          </a:xfrm>
-          <a:prstGeom xmlns:a="http://schemas.openxmlformats.org/drawingml/2006/main" prst="rect">
-            <a:avLst/>
+                <a16:creationId xmlns:a16="http://schemas.microsoft.com/office/drawing/2014/main" id="{4DC9D173-F652-4B95-ABB4-DCE241E10C65}"/>
+              </a:ext>
+            </a:extLst>
+          </p:cNvPr>
+          <p:cNvSpPr>
+            <a:spLocks xmlns:a="http://schemas.openxmlformats.org/drawingml/2006/main" noGrp="1"/>
+          </p:cNvSpPr>
+          <p:nvPr/>
+        </p:nvSpPr>
+        <p:spPr>
+          <a:xfrm xmlns:a="http://schemas.openxmlformats.org/drawingml/2006/main">
+            <a:off x="4933950" y="2266950"/>
+            <a:ext cx="3238500" cy="647700"/>
+          </a:xfrm>
+          <a:prstGeom xmlns:a="http://schemas.openxmlformats.org/drawingml/2006/main" prst="roundRect">
+            <a:avLst>
+              <a:gd name="adj" fmla="val 11765"/>
+            </a:avLst>
           </a:prstGeom>
           <a:solidFill xmlns:a="http://schemas.openxmlformats.org/drawingml/2006/main">
             <a:srgbClr val="F8E9EA"/>
           </a:solidFill>
-          <a:ln xmlns:a="http://schemas.openxmlformats.org/drawingml/2006/main" w="0">
-            <a:noFill/>
-            <a:prstDash val="solid"/>
-          </a:ln>
-        </p:spPr>
-        <p:txBody>
-          <a:bodyPr xmlns:a="http://schemas.openxmlformats.org/drawingml/2006/main" lIns="76200" tIns="38100" rIns="76200" bIns="38100" anchor="ctr"/>
-          <a:lstStyle xmlns:a="http://schemas.openxmlformats.org/drawingml/2006/main"/>
-          <a:p xmlns:a="http://schemas.openxmlformats.org/drawingml/2006/main">
-            <a:pPr algn="l">
+          <a:ln xmlns:a="http://schemas.openxmlformats.org/drawingml/2006/main" w="9525">
+            <a:solidFill>
+              <a:srgbClr val="D6DDE2"/>
+            </a:solidFill>
+            <a:prstDash val="solid"/>
+          </a:ln>
+        </p:spPr>
+        <p:txBody>
+          <a:bodyPr xmlns:a="http://schemas.openxmlformats.org/drawingml/2006/main" lIns="76200" tIns="38100" rIns="76200" bIns="38100" anchor="ctr"/>
+          <a:lstStyle xmlns:a="http://schemas.openxmlformats.org/drawingml/2006/main"/>
+          <a:p xmlns:a="http://schemas.openxmlformats.org/drawingml/2006/main">
+            <a:pPr algn="ctr">
               <a:lnSpc>
-                <a:spcPct val="112000"/>
+                <a:spcPct val="108000"/>
               </a:lnSpc>
               <a:buNone/>
               <a:defRPr sz="1350" b="1">
@@ -9976,7 +9996,7 @@
                 <a:ea typeface="Microsoft YaHei"/>
                 <a:cs typeface="Microsoft YaHei"/>
               </a:rPr>
-              <a:t>完整实验规格：假设/变量/步骤/度量/对照/停止</a:t>
+              <a:t>完整实验规格</a:t>
             </a:r>
           </a:p>
         </p:txBody>
@@ -9986,23 +10006,23 @@
           <p:cNvPr id="16" name="p15-n-5">
             <a:extLst xmlns:a="http://schemas.openxmlformats.org/drawingml/2006/main">
               <a:ext uri="{FF2B5EF4-FFF2-40B4-BE49-F238E27FC236}">
-                <a16:creationId xmlns:a16="http://schemas.microsoft.com/office/drawing/2014/main" id="{FC6983C6-1A59-4BCD-A656-F8AF0E93EE99}"/>
-              </a:ext>
-            </a:extLst>
-          </p:cNvPr>
-          <p:cNvSpPr>
-            <a:spLocks xmlns:a="http://schemas.openxmlformats.org/drawingml/2006/main" noGrp="1"/>
-          </p:cNvSpPr>
-          <p:nvPr/>
-        </p:nvSpPr>
-        <p:spPr>
-          <a:xfrm xmlns:a="http://schemas.openxmlformats.org/drawingml/2006/main">
-            <a:off x="6362700" y="2971800"/>
-            <a:ext cx="476250" cy="476250"/>
+                <a16:creationId xmlns:a16="http://schemas.microsoft.com/office/drawing/2014/main" id="{CDAC6C2E-6ED8-4D45-9EB5-A2280633802A}"/>
+              </a:ext>
+            </a:extLst>
+          </p:cNvPr>
+          <p:cNvSpPr>
+            <a:spLocks xmlns:a="http://schemas.openxmlformats.org/drawingml/2006/main" noGrp="1"/>
+          </p:cNvSpPr>
+          <p:nvPr/>
+        </p:nvSpPr>
+        <p:spPr>
+          <a:xfrm xmlns:a="http://schemas.openxmlformats.org/drawingml/2006/main">
+            <a:off x="8324850" y="2343150"/>
+            <a:ext cx="457200" cy="457200"/>
           </a:xfrm>
           <a:prstGeom xmlns:a="http://schemas.openxmlformats.org/drawingml/2006/main" prst="roundRect">
             <a:avLst>
-              <a:gd name="adj" fmla="val 16000"/>
+              <a:gd name="adj" fmla="val 16667"/>
             </a:avLst>
           </a:prstGeom>
           <a:solidFill xmlns:a="http://schemas.openxmlformats.org/drawingml/2006/main">
@@ -10043,38 +10063,42 @@
           <p:cNvPr id="17" name="p15-g-5">
             <a:extLst xmlns:a="http://schemas.openxmlformats.org/drawingml/2006/main">
               <a:ext uri="{FF2B5EF4-FFF2-40B4-BE49-F238E27FC236}">
-                <a16:creationId xmlns:a16="http://schemas.microsoft.com/office/drawing/2014/main" id="{D8918B99-41ED-4B86-A715-127D34638816}"/>
-              </a:ext>
-            </a:extLst>
-          </p:cNvPr>
-          <p:cNvSpPr>
-            <a:spLocks xmlns:a="http://schemas.openxmlformats.org/drawingml/2006/main" noGrp="1"/>
-          </p:cNvSpPr>
-          <p:nvPr/>
-        </p:nvSpPr>
-        <p:spPr>
-          <a:xfrm xmlns:a="http://schemas.openxmlformats.org/drawingml/2006/main">
-            <a:off x="6934200" y="2933700"/>
-            <a:ext cx="4914900" cy="590550"/>
-          </a:xfrm>
-          <a:prstGeom xmlns:a="http://schemas.openxmlformats.org/drawingml/2006/main" prst="rect">
-            <a:avLst/>
+                <a16:creationId xmlns:a16="http://schemas.microsoft.com/office/drawing/2014/main" id="{9AC0A517-0B25-4DC5-829D-1BE0701CF576}"/>
+              </a:ext>
+            </a:extLst>
+          </p:cNvPr>
+          <p:cNvSpPr>
+            <a:spLocks xmlns:a="http://schemas.openxmlformats.org/drawingml/2006/main" noGrp="1"/>
+          </p:cNvSpPr>
+          <p:nvPr/>
+        </p:nvSpPr>
+        <p:spPr>
+          <a:xfrm xmlns:a="http://schemas.openxmlformats.org/drawingml/2006/main">
+            <a:off x="8877300" y="2266950"/>
+            <a:ext cx="3238500" cy="647700"/>
+          </a:xfrm>
+          <a:prstGeom xmlns:a="http://schemas.openxmlformats.org/drawingml/2006/main" prst="roundRect">
+            <a:avLst>
+              <a:gd name="adj" fmla="val 11765"/>
+            </a:avLst>
           </a:prstGeom>
           <a:solidFill xmlns:a="http://schemas.openxmlformats.org/drawingml/2006/main">
             <a:srgbClr val="F3F6F7"/>
           </a:solidFill>
-          <a:ln xmlns:a="http://schemas.openxmlformats.org/drawingml/2006/main" w="0">
-            <a:noFill/>
-            <a:prstDash val="solid"/>
-          </a:ln>
-        </p:spPr>
-        <p:txBody>
-          <a:bodyPr xmlns:a="http://schemas.openxmlformats.org/drawingml/2006/main" lIns="76200" tIns="38100" rIns="76200" bIns="38100" anchor="ctr"/>
-          <a:lstStyle xmlns:a="http://schemas.openxmlformats.org/drawingml/2006/main"/>
-          <a:p xmlns:a="http://schemas.openxmlformats.org/drawingml/2006/main">
-            <a:pPr algn="l">
+          <a:ln xmlns:a="http://schemas.openxmlformats.org/drawingml/2006/main" w="9525">
+            <a:solidFill>
+              <a:srgbClr val="D6DDE2"/>
+            </a:solidFill>
+            <a:prstDash val="solid"/>
+          </a:ln>
+        </p:spPr>
+        <p:txBody>
+          <a:bodyPr xmlns:a="http://schemas.openxmlformats.org/drawingml/2006/main" lIns="76200" tIns="38100" rIns="76200" bIns="38100" anchor="ctr"/>
+          <a:lstStyle xmlns:a="http://schemas.openxmlformats.org/drawingml/2006/main"/>
+          <a:p xmlns:a="http://schemas.openxmlformats.org/drawingml/2006/main">
+            <a:pPr algn="ctr">
               <a:lnSpc>
-                <a:spcPct val="112000"/>
+                <a:spcPct val="108000"/>
               </a:lnSpc>
               <a:buNone/>
               <a:defRPr sz="1350" b="1">
@@ -10092,7 +10116,7 @@
                 <a:ea typeface="Microsoft YaHei"/>
                 <a:cs typeface="Microsoft YaHei"/>
               </a:rPr>
-              <a:t>第 8 课同伴反馈处理记录</a:t>
+              <a:t>第 8 课反馈处理</a:t>
             </a:r>
           </a:p>
         </p:txBody>
@@ -10102,23 +10126,23 @@
           <p:cNvPr id="18" name="p15-n-6">
             <a:extLst xmlns:a="http://schemas.openxmlformats.org/drawingml/2006/main">
               <a:ext uri="{FF2B5EF4-FFF2-40B4-BE49-F238E27FC236}">
-                <a16:creationId xmlns:a16="http://schemas.microsoft.com/office/drawing/2014/main" id="{283D5E2E-1720-403F-8AB9-E479C956B744}"/>
-              </a:ext>
-            </a:extLst>
-          </p:cNvPr>
-          <p:cNvSpPr>
-            <a:spLocks xmlns:a="http://schemas.openxmlformats.org/drawingml/2006/main" noGrp="1"/>
-          </p:cNvSpPr>
-          <p:nvPr/>
-        </p:nvSpPr>
-        <p:spPr>
-          <a:xfrm xmlns:a="http://schemas.openxmlformats.org/drawingml/2006/main">
-            <a:off x="552450" y="3943350"/>
-            <a:ext cx="476250" cy="476250"/>
+                <a16:creationId xmlns:a16="http://schemas.microsoft.com/office/drawing/2014/main" id="{87EE75FC-F917-4984-8939-C919D75D189D}"/>
+              </a:ext>
+            </a:extLst>
+          </p:cNvPr>
+          <p:cNvSpPr>
+            <a:spLocks xmlns:a="http://schemas.openxmlformats.org/drawingml/2006/main" noGrp="1"/>
+          </p:cNvSpPr>
+          <p:nvPr/>
+        </p:nvSpPr>
+        <p:spPr>
+          <a:xfrm xmlns:a="http://schemas.openxmlformats.org/drawingml/2006/main">
+            <a:off x="438150" y="3543300"/>
+            <a:ext cx="457200" cy="457200"/>
           </a:xfrm>
           <a:prstGeom xmlns:a="http://schemas.openxmlformats.org/drawingml/2006/main" prst="roundRect">
             <a:avLst>
-              <a:gd name="adj" fmla="val 16000"/>
+              <a:gd name="adj" fmla="val 16667"/>
             </a:avLst>
           </a:prstGeom>
           <a:solidFill xmlns:a="http://schemas.openxmlformats.org/drawingml/2006/main">
@@ -10159,38 +10183,42 @@
           <p:cNvPr id="19" name="p15-g-6">
             <a:extLst xmlns:a="http://schemas.openxmlformats.org/drawingml/2006/main">
               <a:ext uri="{FF2B5EF4-FFF2-40B4-BE49-F238E27FC236}">
-                <a16:creationId xmlns:a16="http://schemas.microsoft.com/office/drawing/2014/main" id="{1B67A40F-6A5B-49F4-901F-CFDA94872A65}"/>
-              </a:ext>
-            </a:extLst>
-          </p:cNvPr>
-          <p:cNvSpPr>
-            <a:spLocks xmlns:a="http://schemas.openxmlformats.org/drawingml/2006/main" noGrp="1"/>
-          </p:cNvSpPr>
-          <p:nvPr/>
-        </p:nvSpPr>
-        <p:spPr>
-          <a:xfrm xmlns:a="http://schemas.openxmlformats.org/drawingml/2006/main">
-            <a:off x="1123950" y="3905250"/>
-            <a:ext cx="4914900" cy="590550"/>
-          </a:xfrm>
-          <a:prstGeom xmlns:a="http://schemas.openxmlformats.org/drawingml/2006/main" prst="rect">
-            <a:avLst/>
+                <a16:creationId xmlns:a16="http://schemas.microsoft.com/office/drawing/2014/main" id="{B3E5D441-240A-4B94-B5B9-7E140D78A91E}"/>
+              </a:ext>
+            </a:extLst>
+          </p:cNvPr>
+          <p:cNvSpPr>
+            <a:spLocks xmlns:a="http://schemas.openxmlformats.org/drawingml/2006/main" noGrp="1"/>
+          </p:cNvSpPr>
+          <p:nvPr/>
+        </p:nvSpPr>
+        <p:spPr>
+          <a:xfrm xmlns:a="http://schemas.openxmlformats.org/drawingml/2006/main">
+            <a:off x="990600" y="3467100"/>
+            <a:ext cx="3238500" cy="647700"/>
+          </a:xfrm>
+          <a:prstGeom xmlns:a="http://schemas.openxmlformats.org/drawingml/2006/main" prst="roundRect">
+            <a:avLst>
+              <a:gd name="adj" fmla="val 11765"/>
+            </a:avLst>
           </a:prstGeom>
           <a:solidFill xmlns:a="http://schemas.openxmlformats.org/drawingml/2006/main">
             <a:srgbClr val="F8E9EA"/>
           </a:solidFill>
-          <a:ln xmlns:a="http://schemas.openxmlformats.org/drawingml/2006/main" w="0">
-            <a:noFill/>
-            <a:prstDash val="solid"/>
-          </a:ln>
-        </p:spPr>
-        <p:txBody>
-          <a:bodyPr xmlns:a="http://schemas.openxmlformats.org/drawingml/2006/main" lIns="76200" tIns="38100" rIns="76200" bIns="38100" anchor="ctr"/>
-          <a:lstStyle xmlns:a="http://schemas.openxmlformats.org/drawingml/2006/main"/>
-          <a:p xmlns:a="http://schemas.openxmlformats.org/drawingml/2006/main">
-            <a:pPr algn="l">
+          <a:ln xmlns:a="http://schemas.openxmlformats.org/drawingml/2006/main" w="9525">
+            <a:solidFill>
+              <a:srgbClr val="D6DDE2"/>
+            </a:solidFill>
+            <a:prstDash val="solid"/>
+          </a:ln>
+        </p:spPr>
+        <p:txBody>
+          <a:bodyPr xmlns:a="http://schemas.openxmlformats.org/drawingml/2006/main" lIns="76200" tIns="38100" rIns="76200" bIns="38100" anchor="ctr"/>
+          <a:lstStyle xmlns:a="http://schemas.openxmlformats.org/drawingml/2006/main"/>
+          <a:p xmlns:a="http://schemas.openxmlformats.org/drawingml/2006/main">
+            <a:pPr algn="ctr">
               <a:lnSpc>
-                <a:spcPct val="112000"/>
+                <a:spcPct val="108000"/>
               </a:lnSpc>
               <a:buNone/>
               <a:defRPr sz="1350" b="1">
@@ -10208,7 +10236,7 @@
                 <a:ea typeface="Microsoft YaHei"/>
                 <a:cs typeface="Microsoft YaHei"/>
               </a:rPr>
-              <a:t>当前最大风险和失败预案</a:t>
+              <a:t>最大风险与失败预案</a:t>
             </a:r>
           </a:p>
         </p:txBody>
@@ -10218,27 +10246,27 @@
           <p:cNvPr id="20" name="p15-n-7">
             <a:extLst xmlns:a="http://schemas.openxmlformats.org/drawingml/2006/main">
               <a:ext uri="{FF2B5EF4-FFF2-40B4-BE49-F238E27FC236}">
-                <a16:creationId xmlns:a16="http://schemas.microsoft.com/office/drawing/2014/main" id="{7DD84E59-A6E7-4970-9937-F39D434AF9DC}"/>
-              </a:ext>
-            </a:extLst>
-          </p:cNvPr>
-          <p:cNvSpPr>
-            <a:spLocks xmlns:a="http://schemas.openxmlformats.org/drawingml/2006/main" noGrp="1"/>
-          </p:cNvSpPr>
-          <p:nvPr/>
-        </p:nvSpPr>
-        <p:spPr>
-          <a:xfrm xmlns:a="http://schemas.openxmlformats.org/drawingml/2006/main">
-            <a:off x="6362700" y="3943350"/>
-            <a:ext cx="476250" cy="476250"/>
+                <a16:creationId xmlns:a16="http://schemas.microsoft.com/office/drawing/2014/main" id="{3CB19479-8628-4C1B-B31E-BB5D0FF391A1}"/>
+              </a:ext>
+            </a:extLst>
+          </p:cNvPr>
+          <p:cNvSpPr>
+            <a:spLocks xmlns:a="http://schemas.openxmlformats.org/drawingml/2006/main" noGrp="1"/>
+          </p:cNvSpPr>
+          <p:nvPr/>
+        </p:nvSpPr>
+        <p:spPr>
+          <a:xfrm xmlns:a="http://schemas.openxmlformats.org/drawingml/2006/main">
+            <a:off x="4381500" y="3543300"/>
+            <a:ext cx="457200" cy="457200"/>
           </a:xfrm>
           <a:prstGeom xmlns:a="http://schemas.openxmlformats.org/drawingml/2006/main" prst="roundRect">
             <a:avLst>
-              <a:gd name="adj" fmla="val 16000"/>
+              <a:gd name="adj" fmla="val 16667"/>
             </a:avLst>
           </a:prstGeom>
           <a:solidFill xmlns:a="http://schemas.openxmlformats.org/drawingml/2006/main">
-            <a:srgbClr val="18354E"/>
+            <a:srgbClr val="C8161E"/>
           </a:solidFill>
           <a:ln xmlns:a="http://schemas.openxmlformats.org/drawingml/2006/main" w="0">
             <a:noFill/>
@@ -10275,38 +10303,42 @@
           <p:cNvPr id="21" name="p15-g-7">
             <a:extLst xmlns:a="http://schemas.openxmlformats.org/drawingml/2006/main">
               <a:ext uri="{FF2B5EF4-FFF2-40B4-BE49-F238E27FC236}">
-                <a16:creationId xmlns:a16="http://schemas.microsoft.com/office/drawing/2014/main" id="{33BE81B4-C4D9-4C25-9C98-2EC52FFB8B66}"/>
-              </a:ext>
-            </a:extLst>
-          </p:cNvPr>
-          <p:cNvSpPr>
-            <a:spLocks xmlns:a="http://schemas.openxmlformats.org/drawingml/2006/main" noGrp="1"/>
-          </p:cNvSpPr>
-          <p:nvPr/>
-        </p:nvSpPr>
-        <p:spPr>
-          <a:xfrm xmlns:a="http://schemas.openxmlformats.org/drawingml/2006/main">
-            <a:off x="6934200" y="3905250"/>
-            <a:ext cx="4914900" cy="590550"/>
-          </a:xfrm>
-          <a:prstGeom xmlns:a="http://schemas.openxmlformats.org/drawingml/2006/main" prst="rect">
-            <a:avLst/>
-          </a:prstGeom>
-          <a:solidFill xmlns:a="http://schemas.openxmlformats.org/drawingml/2006/main">
-            <a:srgbClr val="F3F6F7"/>
-          </a:solidFill>
-          <a:ln xmlns:a="http://schemas.openxmlformats.org/drawingml/2006/main" w="0">
-            <a:noFill/>
-            <a:prstDash val="solid"/>
-          </a:ln>
-        </p:spPr>
-        <p:txBody>
-          <a:bodyPr xmlns:a="http://schemas.openxmlformats.org/drawingml/2006/main" lIns="76200" tIns="38100" rIns="76200" bIns="38100" anchor="ctr"/>
-          <a:lstStyle xmlns:a="http://schemas.openxmlformats.org/drawingml/2006/main"/>
-          <a:p xmlns:a="http://schemas.openxmlformats.org/drawingml/2006/main">
-            <a:pPr algn="l">
+                <a16:creationId xmlns:a16="http://schemas.microsoft.com/office/drawing/2014/main" id="{DC13862B-C446-43C9-93F8-8DDB444DBE06}"/>
+              </a:ext>
+            </a:extLst>
+          </p:cNvPr>
+          <p:cNvSpPr>
+            <a:spLocks xmlns:a="http://schemas.openxmlformats.org/drawingml/2006/main" noGrp="1"/>
+          </p:cNvSpPr>
+          <p:nvPr/>
+        </p:nvSpPr>
+        <p:spPr>
+          <a:xfrm xmlns:a="http://schemas.openxmlformats.org/drawingml/2006/main">
+            <a:off x="4933950" y="3467100"/>
+            <a:ext cx="3238500" cy="647700"/>
+          </a:xfrm>
+          <a:prstGeom xmlns:a="http://schemas.openxmlformats.org/drawingml/2006/main" prst="roundRect">
+            <a:avLst>
+              <a:gd name="adj" fmla="val 11765"/>
+            </a:avLst>
+          </a:prstGeom>
+          <a:solidFill xmlns:a="http://schemas.openxmlformats.org/drawingml/2006/main">
+            <a:srgbClr val="F8E9EA"/>
+          </a:solidFill>
+          <a:ln xmlns:a="http://schemas.openxmlformats.org/drawingml/2006/main" w="9525">
+            <a:solidFill>
+              <a:srgbClr val="D6DDE2"/>
+            </a:solidFill>
+            <a:prstDash val="solid"/>
+          </a:ln>
+        </p:spPr>
+        <p:txBody>
+          <a:bodyPr xmlns:a="http://schemas.openxmlformats.org/drawingml/2006/main" lIns="76200" tIns="38100" rIns="76200" bIns="38100" anchor="ctr"/>
+          <a:lstStyle xmlns:a="http://schemas.openxmlformats.org/drawingml/2006/main"/>
+          <a:p xmlns:a="http://schemas.openxmlformats.org/drawingml/2006/main">
+            <a:pPr algn="ctr">
               <a:lnSpc>
-                <a:spcPct val="112000"/>
+                <a:spcPct val="108000"/>
               </a:lnSpc>
               <a:buNone/>
               <a:defRPr sz="1350" b="1">
@@ -10324,29 +10356,149 @@
                 <a:ea typeface="Microsoft YaHei"/>
                 <a:cs typeface="Microsoft YaHei"/>
               </a:rPr>
-              <a:t>迁移完整模板且不丢 AI/伦理记录</a:t>
-            </a:r>
-          </a:p>
-        </p:txBody>
-      </p:sp>
-      <p:sp>
-        <p:nvSpPr>
-          <p:cNvPr id="22" name="p15-scope">
-            <a:extLst xmlns:a="http://schemas.openxmlformats.org/drawingml/2006/main">
-              <a:ext uri="{FF2B5EF4-FFF2-40B4-BE49-F238E27FC236}">
-                <a16:creationId xmlns:a16="http://schemas.microsoft.com/office/drawing/2014/main" id="{709B23C2-9EBF-4C4C-A90F-CE0C48D80C2D}"/>
-              </a:ext>
-            </a:extLst>
-          </p:cNvPr>
-          <p:cNvSpPr>
-            <a:spLocks xmlns:a="http://schemas.openxmlformats.org/drawingml/2006/main" noGrp="1"/>
-          </p:cNvSpPr>
-          <p:nvPr/>
-        </p:nvSpPr>
-        <p:spPr>
-          <a:xfrm xmlns:a="http://schemas.openxmlformats.org/drawingml/2006/main">
-            <a:off x="2743200" y="4991100"/>
-            <a:ext cx="6705600" cy="514350"/>
+              <a:t>已遇失败 / 放弃备选记录</a:t>
+            </a:r>
+          </a:p>
+        </p:txBody>
+      </p:sp>
+      <p:sp>
+        <p:nvSpPr>
+          <p:cNvPr id="22" name="p15-n-8">
+            <a:extLst xmlns:a="http://schemas.openxmlformats.org/drawingml/2006/main">
+              <a:ext uri="{FF2B5EF4-FFF2-40B4-BE49-F238E27FC236}">
+                <a16:creationId xmlns:a16="http://schemas.microsoft.com/office/drawing/2014/main" id="{7A75741C-219F-4855-B603-1553409F1E88}"/>
+              </a:ext>
+            </a:extLst>
+          </p:cNvPr>
+          <p:cNvSpPr>
+            <a:spLocks xmlns:a="http://schemas.openxmlformats.org/drawingml/2006/main" noGrp="1"/>
+          </p:cNvSpPr>
+          <p:nvPr/>
+        </p:nvSpPr>
+        <p:spPr>
+          <a:xfrm xmlns:a="http://schemas.openxmlformats.org/drawingml/2006/main">
+            <a:off x="8324850" y="3543300"/>
+            <a:ext cx="457200" cy="457200"/>
+          </a:xfrm>
+          <a:prstGeom xmlns:a="http://schemas.openxmlformats.org/drawingml/2006/main" prst="roundRect">
+            <a:avLst>
+              <a:gd name="adj" fmla="val 16667"/>
+            </a:avLst>
+          </a:prstGeom>
+          <a:solidFill xmlns:a="http://schemas.openxmlformats.org/drawingml/2006/main">
+            <a:srgbClr val="18354E"/>
+          </a:solidFill>
+          <a:ln xmlns:a="http://schemas.openxmlformats.org/drawingml/2006/main" w="0">
+            <a:noFill/>
+            <a:prstDash val="solid"/>
+          </a:ln>
+        </p:spPr>
+        <p:txBody>
+          <a:bodyPr xmlns:a="http://schemas.openxmlformats.org/drawingml/2006/main" lIns="76200" tIns="38100" rIns="76200" bIns="38100" anchor="ctr"/>
+          <a:lstStyle xmlns:a="http://schemas.openxmlformats.org/drawingml/2006/main"/>
+          <a:p xmlns:a="http://schemas.openxmlformats.org/drawingml/2006/main">
+            <a:pPr algn="ctr">
+              <a:defRPr sz="1350" b="1">
+                <a:solidFill>
+                  <a:srgbClr val="FFFFFF"/>
+                </a:solidFill>
+              </a:defRPr>
+            </a:pPr>
+            <a:r>
+              <a:rPr sz="1350" b="1">
+                <a:solidFill>
+                  <a:srgbClr val="FFFFFF"/>
+                </a:solidFill>
+                <a:latin typeface="Arial"/>
+                <a:ea typeface="Arial"/>
+                <a:cs typeface="Arial"/>
+              </a:rPr>
+              <a:t>9</a:t>
+            </a:r>
+          </a:p>
+        </p:txBody>
+      </p:sp>
+      <p:sp>
+        <p:nvSpPr>
+          <p:cNvPr id="23" name="p15-g-8">
+            <a:extLst xmlns:a="http://schemas.openxmlformats.org/drawingml/2006/main">
+              <a:ext uri="{FF2B5EF4-FFF2-40B4-BE49-F238E27FC236}">
+                <a16:creationId xmlns:a16="http://schemas.microsoft.com/office/drawing/2014/main" id="{191C37A4-96F3-4A51-A392-0AD46EC3FE08}"/>
+              </a:ext>
+            </a:extLst>
+          </p:cNvPr>
+          <p:cNvSpPr>
+            <a:spLocks xmlns:a="http://schemas.openxmlformats.org/drawingml/2006/main" noGrp="1"/>
+          </p:cNvSpPr>
+          <p:nvPr/>
+        </p:nvSpPr>
+        <p:spPr>
+          <a:xfrm xmlns:a="http://schemas.openxmlformats.org/drawingml/2006/main">
+            <a:off x="8877300" y="3467100"/>
+            <a:ext cx="3238500" cy="647700"/>
+          </a:xfrm>
+          <a:prstGeom xmlns:a="http://schemas.openxmlformats.org/drawingml/2006/main" prst="roundRect">
+            <a:avLst>
+              <a:gd name="adj" fmla="val 11765"/>
+            </a:avLst>
+          </a:prstGeom>
+          <a:solidFill xmlns:a="http://schemas.openxmlformats.org/drawingml/2006/main">
+            <a:srgbClr val="F3F6F7"/>
+          </a:solidFill>
+          <a:ln xmlns:a="http://schemas.openxmlformats.org/drawingml/2006/main" w="9525">
+            <a:solidFill>
+              <a:srgbClr val="D6DDE2"/>
+            </a:solidFill>
+            <a:prstDash val="solid"/>
+          </a:ln>
+        </p:spPr>
+        <p:txBody>
+          <a:bodyPr xmlns:a="http://schemas.openxmlformats.org/drawingml/2006/main" lIns="76200" tIns="38100" rIns="76200" bIns="38100" anchor="ctr"/>
+          <a:lstStyle xmlns:a="http://schemas.openxmlformats.org/drawingml/2006/main"/>
+          <a:p xmlns:a="http://schemas.openxmlformats.org/drawingml/2006/main">
+            <a:pPr algn="ctr">
+              <a:lnSpc>
+                <a:spcPct val="108000"/>
+              </a:lnSpc>
+              <a:buNone/>
+              <a:defRPr sz="1350" b="1">
+                <a:solidFill>
+                  <a:srgbClr val="263746"/>
+                </a:solidFill>
+              </a:defRPr>
+            </a:pPr>
+            <a:r>
+              <a:rPr sz="1350" b="1">
+                <a:solidFill>
+                  <a:srgbClr val="263746"/>
+                </a:solidFill>
+                <a:latin typeface="Microsoft YaHei"/>
+                <a:ea typeface="Microsoft YaHei"/>
+                <a:cs typeface="Microsoft YaHei"/>
+              </a:rPr>
+              <a:t>迁移模板，不丢 AI / 伦理</a:t>
+            </a:r>
+          </a:p>
+        </p:txBody>
+      </p:sp>
+      <p:sp>
+        <p:nvSpPr>
+          <p:cNvPr id="24" name="p15-scope">
+            <a:extLst xmlns:a="http://schemas.openxmlformats.org/drawingml/2006/main">
+              <a:ext uri="{FF2B5EF4-FFF2-40B4-BE49-F238E27FC236}">
+                <a16:creationId xmlns:a16="http://schemas.microsoft.com/office/drawing/2014/main" id="{504A0FB5-CD15-473B-AEB5-6D179C1DE402}"/>
+              </a:ext>
+            </a:extLst>
+          </p:cNvPr>
+          <p:cNvSpPr>
+            <a:spLocks xmlns:a="http://schemas.openxmlformats.org/drawingml/2006/main" noGrp="1"/>
+          </p:cNvSpPr>
+          <p:nvPr/>
+        </p:nvSpPr>
+        <p:spPr>
+          <a:xfrm xmlns:a="http://schemas.openxmlformats.org/drawingml/2006/main">
+            <a:off x="1809750" y="4857750"/>
+            <a:ext cx="8572500" cy="647700"/>
           </a:xfrm>
           <a:prstGeom xmlns:a="http://schemas.openxmlformats.org/drawingml/2006/main" prst="rect">
             <a:avLst/>
@@ -10364,14 +10516,14 @@
           <a:lstStyle xmlns:a="http://schemas.openxmlformats.org/drawingml/2006/main"/>
           <a:p xmlns:a="http://schemas.openxmlformats.org/drawingml/2006/main">
             <a:pPr algn="ctr">
-              <a:defRPr sz="1725" b="1">
+              <a:defRPr sz="1575" b="1">
                 <a:solidFill>
                   <a:srgbClr val="C8161E"/>
                 </a:solidFill>
               </a:defRPr>
             </a:pPr>
             <a:r>
-              <a:rPr sz="1725" b="1">
+              <a:rPr sz="1575" b="1">
                 <a:solidFill>
                   <a:srgbClr val="C8161E"/>
                 </a:solidFill>
@@ -10379,7 +10531,7 @@
                 <a:ea typeface="Microsoft YaHei"/>
                 <a:cs typeface="Microsoft YaHei"/>
               </a:rPr>
-              <a:t>本课重点补全：1 / 2 / 3 / 5 / 7｜整理：4 / 6 / 8</a:t>
+              <a:t>重点补全 1 / 2 / 3 / 5 / 7 / 8｜事实失败记录不能用前瞻预案替代</a:t>
             </a:r>
           </a:p>
         </p:txBody>
@@ -10483,7 +10635,7 @@
           <p:cNvPr id="6" name="p16-j2-title">
             <a:extLst xmlns:a="http://schemas.openxmlformats.org/drawingml/2006/main">
               <a:ext uri="{FF2B5EF4-FFF2-40B4-BE49-F238E27FC236}">
-                <a16:creationId xmlns:a16="http://schemas.microsoft.com/office/drawing/2014/main" id="{0B007FC0-996B-4E8B-8CD4-3F074D838CA3}"/>
+                <a16:creationId xmlns:a16="http://schemas.microsoft.com/office/drawing/2014/main" id="{9C0C4C42-10FA-4D88-B2B9-BEC4E48ABD3B}"/>
               </a:ext>
             </a:extLst>
           </p:cNvPr>
@@ -10536,7 +10688,7 @@
           <p:cNvPr id="7" name="p16-j2-h-0">
             <a:extLst xmlns:a="http://schemas.openxmlformats.org/drawingml/2006/main">
               <a:ext uri="{FF2B5EF4-FFF2-40B4-BE49-F238E27FC236}">
-                <a16:creationId xmlns:a16="http://schemas.microsoft.com/office/drawing/2014/main" id="{812CF822-8976-4AA7-872A-4CD787F847C0}"/>
+                <a16:creationId xmlns:a16="http://schemas.microsoft.com/office/drawing/2014/main" id="{18239AC4-815B-4234-BEB0-8ED88D818BBE}"/>
               </a:ext>
             </a:extLst>
           </p:cNvPr>
@@ -10591,7 +10743,7 @@
           <p:cNvPr id="8" name="p16-j2-h-1">
             <a:extLst xmlns:a="http://schemas.openxmlformats.org/drawingml/2006/main">
               <a:ext uri="{FF2B5EF4-FFF2-40B4-BE49-F238E27FC236}">
-                <a16:creationId xmlns:a16="http://schemas.microsoft.com/office/drawing/2014/main" id="{937C36A6-0450-4BD9-BBFA-351624991F6B}"/>
+                <a16:creationId xmlns:a16="http://schemas.microsoft.com/office/drawing/2014/main" id="{1D6CAD97-BDA3-4FD0-B04E-F2D103186E71}"/>
               </a:ext>
             </a:extLst>
           </p:cNvPr>
@@ -10646,7 +10798,7 @@
           <p:cNvPr id="9" name="p16-j2-r0-0">
             <a:extLst xmlns:a="http://schemas.openxmlformats.org/drawingml/2006/main">
               <a:ext uri="{FF2B5EF4-FFF2-40B4-BE49-F238E27FC236}">
-                <a16:creationId xmlns:a16="http://schemas.microsoft.com/office/drawing/2014/main" id="{8EF1CAC9-9C37-49D0-B427-5AF3C6D53810}"/>
+                <a16:creationId xmlns:a16="http://schemas.microsoft.com/office/drawing/2014/main" id="{7D262087-06C9-4C08-9C83-AF936F3AD605}"/>
               </a:ext>
             </a:extLst>
           </p:cNvPr>
@@ -10707,7 +10859,7 @@
           <p:cNvPr id="10" name="p16-j2-r0-1">
             <a:extLst xmlns:a="http://schemas.openxmlformats.org/drawingml/2006/main">
               <a:ext uri="{FF2B5EF4-FFF2-40B4-BE49-F238E27FC236}">
-                <a16:creationId xmlns:a16="http://schemas.microsoft.com/office/drawing/2014/main" id="{63E780C2-AC1F-4804-8BBF-07899FC0940F}"/>
+                <a16:creationId xmlns:a16="http://schemas.microsoft.com/office/drawing/2014/main" id="{E0559269-9C49-472F-860D-41691CEA0040}"/>
               </a:ext>
             </a:extLst>
           </p:cNvPr>
@@ -10768,7 +10920,7 @@
           <p:cNvPr id="11" name="p16-j2-r1-0">
             <a:extLst xmlns:a="http://schemas.openxmlformats.org/drawingml/2006/main">
               <a:ext uri="{FF2B5EF4-FFF2-40B4-BE49-F238E27FC236}">
-                <a16:creationId xmlns:a16="http://schemas.microsoft.com/office/drawing/2014/main" id="{D2B60103-699A-4992-ADFD-F809A3856DAD}"/>
+                <a16:creationId xmlns:a16="http://schemas.microsoft.com/office/drawing/2014/main" id="{521C7730-53B6-4CE5-8661-7689E0B95863}"/>
               </a:ext>
             </a:extLst>
           </p:cNvPr>
@@ -10829,7 +10981,7 @@
           <p:cNvPr id="12" name="p16-j2-r1-1">
             <a:extLst xmlns:a="http://schemas.openxmlformats.org/drawingml/2006/main">
               <a:ext uri="{FF2B5EF4-FFF2-40B4-BE49-F238E27FC236}">
-                <a16:creationId xmlns:a16="http://schemas.microsoft.com/office/drawing/2014/main" id="{A6E20997-F301-4565-BE6D-9E0E7AC54DBE}"/>
+                <a16:creationId xmlns:a16="http://schemas.microsoft.com/office/drawing/2014/main" id="{AD09C8EB-812E-4AAD-850F-46B848486E4B}"/>
               </a:ext>
             </a:extLst>
           </p:cNvPr>
@@ -10890,7 +11042,7 @@
           <p:cNvPr id="13" name="p16-j2-r2-0">
             <a:extLst xmlns:a="http://schemas.openxmlformats.org/drawingml/2006/main">
               <a:ext uri="{FF2B5EF4-FFF2-40B4-BE49-F238E27FC236}">
-                <a16:creationId xmlns:a16="http://schemas.microsoft.com/office/drawing/2014/main" id="{E3A876ED-FB24-4727-8B5A-D5238E82E915}"/>
+                <a16:creationId xmlns:a16="http://schemas.microsoft.com/office/drawing/2014/main" id="{C8D68AEE-3162-43DD-8DCA-6538E2508B02}"/>
               </a:ext>
             </a:extLst>
           </p:cNvPr>
@@ -10951,7 +11103,7 @@
           <p:cNvPr id="14" name="p16-j2-r2-1">
             <a:extLst xmlns:a="http://schemas.openxmlformats.org/drawingml/2006/main">
               <a:ext uri="{FF2B5EF4-FFF2-40B4-BE49-F238E27FC236}">
-                <a16:creationId xmlns:a16="http://schemas.microsoft.com/office/drawing/2014/main" id="{C6D44DA1-9318-4023-92DE-7ABD24D153CC}"/>
+                <a16:creationId xmlns:a16="http://schemas.microsoft.com/office/drawing/2014/main" id="{33F0EE1A-158D-43E0-BC09-00CA64DF5039}"/>
               </a:ext>
             </a:extLst>
           </p:cNvPr>
@@ -11012,7 +11164,7 @@
           <p:cNvPr id="15" name="p16-j2-r3-0">
             <a:extLst xmlns:a="http://schemas.openxmlformats.org/drawingml/2006/main">
               <a:ext uri="{FF2B5EF4-FFF2-40B4-BE49-F238E27FC236}">
-                <a16:creationId xmlns:a16="http://schemas.microsoft.com/office/drawing/2014/main" id="{CA49ABDB-4809-4E99-808E-2E2E40721782}"/>
+                <a16:creationId xmlns:a16="http://schemas.microsoft.com/office/drawing/2014/main" id="{781A93E0-A9A4-4384-8EB7-989A53D2BB2D}"/>
               </a:ext>
             </a:extLst>
           </p:cNvPr>
@@ -11073,7 +11225,7 @@
           <p:cNvPr id="16" name="p16-j2-r3-1">
             <a:extLst xmlns:a="http://schemas.openxmlformats.org/drawingml/2006/main">
               <a:ext uri="{FF2B5EF4-FFF2-40B4-BE49-F238E27FC236}">
-                <a16:creationId xmlns:a16="http://schemas.microsoft.com/office/drawing/2014/main" id="{DC65B38D-7282-4BC2-BA03-C85990EFB8DB}"/>
+                <a16:creationId xmlns:a16="http://schemas.microsoft.com/office/drawing/2014/main" id="{633931C2-B025-4D30-AD7C-32914F994FD1}"/>
               </a:ext>
             </a:extLst>
           </p:cNvPr>
@@ -11134,7 +11286,7 @@
           <p:cNvPr id="17" name="p16-j2-r4-0">
             <a:extLst xmlns:a="http://schemas.openxmlformats.org/drawingml/2006/main">
               <a:ext uri="{FF2B5EF4-FFF2-40B4-BE49-F238E27FC236}">
-                <a16:creationId xmlns:a16="http://schemas.microsoft.com/office/drawing/2014/main" id="{33686817-7FA5-42B5-964F-14BF5DA5CFB9}"/>
+                <a16:creationId xmlns:a16="http://schemas.microsoft.com/office/drawing/2014/main" id="{D8831D74-2286-413B-A018-068E3EDDC82D}"/>
               </a:ext>
             </a:extLst>
           </p:cNvPr>
@@ -11195,7 +11347,7 @@
           <p:cNvPr id="18" name="p16-j2-r4-1">
             <a:extLst xmlns:a="http://schemas.openxmlformats.org/drawingml/2006/main">
               <a:ext uri="{FF2B5EF4-FFF2-40B4-BE49-F238E27FC236}">
-                <a16:creationId xmlns:a16="http://schemas.microsoft.com/office/drawing/2014/main" id="{0821AAE2-92BB-498F-9D49-EBEEFFCD65CA}"/>
+                <a16:creationId xmlns:a16="http://schemas.microsoft.com/office/drawing/2014/main" id="{996FC999-43A1-47EF-B9F2-6F32B40EA29D}"/>
               </a:ext>
             </a:extLst>
           </p:cNvPr>
@@ -11256,7 +11408,7 @@
           <p:cNvPr id="19" name="p16-peer-title">
             <a:extLst xmlns:a="http://schemas.openxmlformats.org/drawingml/2006/main">
               <a:ext uri="{FF2B5EF4-FFF2-40B4-BE49-F238E27FC236}">
-                <a16:creationId xmlns:a16="http://schemas.microsoft.com/office/drawing/2014/main" id="{2C12E0C7-02D4-4BF8-B024-0988C41246F7}"/>
+                <a16:creationId xmlns:a16="http://schemas.microsoft.com/office/drawing/2014/main" id="{F9448C7E-2E6E-412B-A969-4E50FC083C0A}"/>
               </a:ext>
             </a:extLst>
           </p:cNvPr>
@@ -11309,7 +11461,7 @@
           <p:cNvPr id="20" name="p16-f-0">
             <a:extLst xmlns:a="http://schemas.openxmlformats.org/drawingml/2006/main">
               <a:ext uri="{FF2B5EF4-FFF2-40B4-BE49-F238E27FC236}">
-                <a16:creationId xmlns:a16="http://schemas.microsoft.com/office/drawing/2014/main" id="{30F7574D-2441-4086-865B-5552580E6EE2}"/>
+                <a16:creationId xmlns:a16="http://schemas.microsoft.com/office/drawing/2014/main" id="{DE8BA4E0-21F0-45C7-93CC-EE344058F9D0}"/>
               </a:ext>
             </a:extLst>
           </p:cNvPr>
@@ -11364,7 +11516,7 @@
           <p:cNvPr id="21" name="p16-s-0">
             <a:extLst xmlns:a="http://schemas.openxmlformats.org/drawingml/2006/main">
               <a:ext uri="{FF2B5EF4-FFF2-40B4-BE49-F238E27FC236}">
-                <a16:creationId xmlns:a16="http://schemas.microsoft.com/office/drawing/2014/main" id="{BE710896-6847-4B2C-8EB1-E6C6BC064694}"/>
+                <a16:creationId xmlns:a16="http://schemas.microsoft.com/office/drawing/2014/main" id="{8EC213E1-24E0-4613-81A0-B8F1D8155737}"/>
               </a:ext>
             </a:extLst>
           </p:cNvPr>
@@ -11419,7 +11571,7 @@
           <p:cNvPr id="22" name="p16-f-1">
             <a:extLst xmlns:a="http://schemas.openxmlformats.org/drawingml/2006/main">
               <a:ext uri="{FF2B5EF4-FFF2-40B4-BE49-F238E27FC236}">
-                <a16:creationId xmlns:a16="http://schemas.microsoft.com/office/drawing/2014/main" id="{8A21B209-B142-4543-B27F-8BACA32656F1}"/>
+                <a16:creationId xmlns:a16="http://schemas.microsoft.com/office/drawing/2014/main" id="{795CE846-38BD-4FB9-B47D-92E29FE4445B}"/>
               </a:ext>
             </a:extLst>
           </p:cNvPr>
@@ -11474,7 +11626,7 @@
           <p:cNvPr id="23" name="p16-s-1">
             <a:extLst xmlns:a="http://schemas.openxmlformats.org/drawingml/2006/main">
               <a:ext uri="{FF2B5EF4-FFF2-40B4-BE49-F238E27FC236}">
-                <a16:creationId xmlns:a16="http://schemas.microsoft.com/office/drawing/2014/main" id="{614C977D-F364-47B2-A969-634AA7C084B5}"/>
+                <a16:creationId xmlns:a16="http://schemas.microsoft.com/office/drawing/2014/main" id="{2719FA26-2C13-46C5-9423-7B39F91019A2}"/>
               </a:ext>
             </a:extLst>
           </p:cNvPr>
@@ -11529,7 +11681,7 @@
           <p:cNvPr id="24" name="p16-f-2">
             <a:extLst xmlns:a="http://schemas.openxmlformats.org/drawingml/2006/main">
               <a:ext uri="{FF2B5EF4-FFF2-40B4-BE49-F238E27FC236}">
-                <a16:creationId xmlns:a16="http://schemas.microsoft.com/office/drawing/2014/main" id="{9EBA48E3-7578-406E-B6E2-78BAD74390C2}"/>
+                <a16:creationId xmlns:a16="http://schemas.microsoft.com/office/drawing/2014/main" id="{54A97CA3-E3CA-4542-9DAF-18C0CB7B6F70}"/>
               </a:ext>
             </a:extLst>
           </p:cNvPr>
@@ -11584,7 +11736,7 @@
           <p:cNvPr id="25" name="p16-s-2">
             <a:extLst xmlns:a="http://schemas.openxmlformats.org/drawingml/2006/main">
               <a:ext uri="{FF2B5EF4-FFF2-40B4-BE49-F238E27FC236}">
-                <a16:creationId xmlns:a16="http://schemas.microsoft.com/office/drawing/2014/main" id="{DC02AF76-41B0-47C3-BDEE-EDCA91999A36}"/>
+                <a16:creationId xmlns:a16="http://schemas.microsoft.com/office/drawing/2014/main" id="{F97F156B-8F47-4AA2-84EF-D16B9F168F40}"/>
               </a:ext>
             </a:extLst>
           </p:cNvPr>
@@ -11639,7 +11791,7 @@
           <p:cNvPr id="26" name="p16-bottom">
             <a:extLst xmlns:a="http://schemas.openxmlformats.org/drawingml/2006/main">
               <a:ext uri="{FF2B5EF4-FFF2-40B4-BE49-F238E27FC236}">
-                <a16:creationId xmlns:a16="http://schemas.microsoft.com/office/drawing/2014/main" id="{1F10E7B5-7D44-4251-B1F7-4A148D845F6A}"/>
+                <a16:creationId xmlns:a16="http://schemas.microsoft.com/office/drawing/2014/main" id="{3FBEA16E-C8AF-436A-8F21-2B2EEA6B1CC4}"/>
               </a:ext>
             </a:extLst>
           </p:cNvPr>
@@ -11788,7 +11940,7 @@
           <p:cNvPr id="6" name="p17-time">
             <a:extLst xmlns:a="http://schemas.openxmlformats.org/drawingml/2006/main">
               <a:ext uri="{FF2B5EF4-FFF2-40B4-BE49-F238E27FC236}">
-                <a16:creationId xmlns:a16="http://schemas.microsoft.com/office/drawing/2014/main" id="{7DBEF395-A9BE-4574-BB03-A508B53D1EA0}"/>
+                <a16:creationId xmlns:a16="http://schemas.microsoft.com/office/drawing/2014/main" id="{A969966B-BBCA-428D-A66A-325A7812988E}"/>
               </a:ext>
             </a:extLst>
           </p:cNvPr>
@@ -11841,23 +11993,23 @@
           <p:cNvPr id="7" name="p17-n-0">
             <a:extLst xmlns:a="http://schemas.openxmlformats.org/drawingml/2006/main">
               <a:ext uri="{FF2B5EF4-FFF2-40B4-BE49-F238E27FC236}">
-                <a16:creationId xmlns:a16="http://schemas.microsoft.com/office/drawing/2014/main" id="{DEAC408B-251D-4CDC-BAD7-8374034FA0D7}"/>
-              </a:ext>
-            </a:extLst>
-          </p:cNvPr>
-          <p:cNvSpPr>
-            <a:spLocks xmlns:a="http://schemas.openxmlformats.org/drawingml/2006/main" noGrp="1"/>
-          </p:cNvSpPr>
-          <p:nvPr/>
-        </p:nvSpPr>
-        <p:spPr>
-          <a:xfrm xmlns:a="http://schemas.openxmlformats.org/drawingml/2006/main">
-            <a:off x="533400" y="1200150"/>
-            <a:ext cx="457200" cy="457200"/>
+                <a16:creationId xmlns:a16="http://schemas.microsoft.com/office/drawing/2014/main" id="{C092E0E9-0EE4-46BB-AAFC-D3D4B626564E}"/>
+              </a:ext>
+            </a:extLst>
+          </p:cNvPr>
+          <p:cNvSpPr>
+            <a:spLocks xmlns:a="http://schemas.openxmlformats.org/drawingml/2006/main" noGrp="1"/>
+          </p:cNvSpPr>
+          <p:nvPr/>
+        </p:nvSpPr>
+        <p:spPr>
+          <a:xfrm xmlns:a="http://schemas.openxmlformats.org/drawingml/2006/main">
+            <a:off x="457200" y="1257300"/>
+            <a:ext cx="438150" cy="438150"/>
           </a:xfrm>
           <a:prstGeom xmlns:a="http://schemas.openxmlformats.org/drawingml/2006/main" prst="roundRect">
             <a:avLst>
-              <a:gd name="adj" fmla="val 16667"/>
+              <a:gd name="adj" fmla="val 17391"/>
             </a:avLst>
           </a:prstGeom>
           <a:solidFill xmlns:a="http://schemas.openxmlformats.org/drawingml/2006/main">
@@ -11898,78 +12050,82 @@
           <p:cNvPr id="8" name="p17-t-0">
             <a:extLst xmlns:a="http://schemas.openxmlformats.org/drawingml/2006/main">
               <a:ext uri="{FF2B5EF4-FFF2-40B4-BE49-F238E27FC236}">
-                <a16:creationId xmlns:a16="http://schemas.microsoft.com/office/drawing/2014/main" id="{D33A6133-B940-408D-8DB5-7C860984C983}"/>
-              </a:ext>
-            </a:extLst>
-          </p:cNvPr>
-          <p:cNvSpPr>
-            <a:spLocks xmlns:a="http://schemas.openxmlformats.org/drawingml/2006/main" noGrp="1"/>
-          </p:cNvSpPr>
-          <p:nvPr/>
-        </p:nvSpPr>
-        <p:spPr>
-          <a:xfrm xmlns:a="http://schemas.openxmlformats.org/drawingml/2006/main">
-            <a:off x="1085850" y="1200150"/>
-            <a:ext cx="4857750" cy="457200"/>
-          </a:xfrm>
-          <a:prstGeom xmlns:a="http://schemas.openxmlformats.org/drawingml/2006/main" prst="rect">
-            <a:avLst/>
-          </a:prstGeom>
-          <a:solidFill xmlns:a="http://schemas.openxmlformats.org/drawingml/2006/main">
-            <a:srgbClr val="F3F6F7"/>
-          </a:solidFill>
-          <a:ln xmlns:a="http://schemas.openxmlformats.org/drawingml/2006/main" w="0">
-            <a:noFill/>
-            <a:prstDash val="solid"/>
-          </a:ln>
-        </p:spPr>
-        <p:txBody>
-          <a:bodyPr xmlns:a="http://schemas.openxmlformats.org/drawingml/2006/main" lIns="76200" tIns="38100" rIns="76200" bIns="38100" anchor="ctr"/>
-          <a:lstStyle xmlns:a="http://schemas.openxmlformats.org/drawingml/2006/main"/>
-          <a:p xmlns:a="http://schemas.openxmlformats.org/drawingml/2006/main">
-            <a:pPr algn="l">
-              <a:defRPr sz="1350" b="1">
-                <a:solidFill>
-                  <a:srgbClr val="263746"/>
-                </a:solidFill>
-              </a:defRPr>
-            </a:pPr>
-            <a:r>
-              <a:rPr sz="1350" b="1">
-                <a:solidFill>
-                  <a:srgbClr val="263746"/>
-                </a:solidFill>
-                <a:latin typeface="Microsoft YaHei"/>
-                <a:ea typeface="Microsoft YaHei"/>
-                <a:cs typeface="Microsoft YaHei"/>
-              </a:rPr>
-              <a:t>选 baseline：类型 + 公平性</a:t>
-            </a:r>
-          </a:p>
-        </p:txBody>
-      </p:sp>
-      <p:sp>
-        <p:nvSpPr>
-          <p:cNvPr id="9" name="p17-n-1">
-            <a:extLst xmlns:a="http://schemas.openxmlformats.org/drawingml/2006/main">
-              <a:ext uri="{FF2B5EF4-FFF2-40B4-BE49-F238E27FC236}">
-                <a16:creationId xmlns:a16="http://schemas.microsoft.com/office/drawing/2014/main" id="{BFF79DFB-F37D-4773-9A0F-1746811E27C8}"/>
-              </a:ext>
-            </a:extLst>
-          </p:cNvPr>
-          <p:cNvSpPr>
-            <a:spLocks xmlns:a="http://schemas.openxmlformats.org/drawingml/2006/main" noGrp="1"/>
-          </p:cNvSpPr>
-          <p:nvPr/>
-        </p:nvSpPr>
-        <p:spPr>
-          <a:xfrm xmlns:a="http://schemas.openxmlformats.org/drawingml/2006/main">
-            <a:off x="6248400" y="1200150"/>
-            <a:ext cx="457200" cy="457200"/>
+                <a16:creationId xmlns:a16="http://schemas.microsoft.com/office/drawing/2014/main" id="{91116682-615F-4152-BED1-6652F23A650C}"/>
+              </a:ext>
+            </a:extLst>
+          </p:cNvPr>
+          <p:cNvSpPr>
+            <a:spLocks xmlns:a="http://schemas.openxmlformats.org/drawingml/2006/main" noGrp="1"/>
+          </p:cNvSpPr>
+          <p:nvPr/>
+        </p:nvSpPr>
+        <p:spPr>
+          <a:xfrm xmlns:a="http://schemas.openxmlformats.org/drawingml/2006/main">
+            <a:off x="990600" y="1219200"/>
+            <a:ext cx="3238500" cy="514350"/>
           </a:xfrm>
           <a:prstGeom xmlns:a="http://schemas.openxmlformats.org/drawingml/2006/main" prst="roundRect">
             <a:avLst>
-              <a:gd name="adj" fmla="val 16667"/>
+              <a:gd name="adj" fmla="val 14815"/>
+            </a:avLst>
+          </a:prstGeom>
+          <a:solidFill xmlns:a="http://schemas.openxmlformats.org/drawingml/2006/main">
+            <a:srgbClr val="F3F6F7"/>
+          </a:solidFill>
+          <a:ln xmlns:a="http://schemas.openxmlformats.org/drawingml/2006/main" w="9525">
+            <a:solidFill>
+              <a:srgbClr val="D6DDE2"/>
+            </a:solidFill>
+            <a:prstDash val="solid"/>
+          </a:ln>
+        </p:spPr>
+        <p:txBody>
+          <a:bodyPr xmlns:a="http://schemas.openxmlformats.org/drawingml/2006/main" lIns="76200" tIns="38100" rIns="76200" bIns="38100" anchor="ctr"/>
+          <a:lstStyle xmlns:a="http://schemas.openxmlformats.org/drawingml/2006/main"/>
+          <a:p xmlns:a="http://schemas.openxmlformats.org/drawingml/2006/main">
+            <a:pPr algn="ctr">
+              <a:defRPr sz="1350" b="1">
+                <a:solidFill>
+                  <a:srgbClr val="263746"/>
+                </a:solidFill>
+              </a:defRPr>
+            </a:pPr>
+            <a:r>
+              <a:rPr sz="1350" b="1">
+                <a:solidFill>
+                  <a:srgbClr val="263746"/>
+                </a:solidFill>
+                <a:latin typeface="Microsoft YaHei"/>
+                <a:ea typeface="Microsoft YaHei"/>
+                <a:cs typeface="Microsoft YaHei"/>
+              </a:rPr>
+              <a:t>选公平 baseline</a:t>
+            </a:r>
+          </a:p>
+        </p:txBody>
+      </p:sp>
+      <p:sp>
+        <p:nvSpPr>
+          <p:cNvPr id="9" name="p17-n-1">
+            <a:extLst xmlns:a="http://schemas.openxmlformats.org/drawingml/2006/main">
+              <a:ext uri="{FF2B5EF4-FFF2-40B4-BE49-F238E27FC236}">
+                <a16:creationId xmlns:a16="http://schemas.microsoft.com/office/drawing/2014/main" id="{6475DBFD-A535-49D6-B807-918815CA55C1}"/>
+              </a:ext>
+            </a:extLst>
+          </p:cNvPr>
+          <p:cNvSpPr>
+            <a:spLocks xmlns:a="http://schemas.openxmlformats.org/drawingml/2006/main" noGrp="1"/>
+          </p:cNvSpPr>
+          <p:nvPr/>
+        </p:nvSpPr>
+        <p:spPr>
+          <a:xfrm xmlns:a="http://schemas.openxmlformats.org/drawingml/2006/main">
+            <a:off x="4400550" y="1257300"/>
+            <a:ext cx="438150" cy="438150"/>
+          </a:xfrm>
+          <a:prstGeom xmlns:a="http://schemas.openxmlformats.org/drawingml/2006/main" prst="roundRect">
+            <a:avLst>
+              <a:gd name="adj" fmla="val 17391"/>
             </a:avLst>
           </a:prstGeom>
           <a:solidFill xmlns:a="http://schemas.openxmlformats.org/drawingml/2006/main">
@@ -12010,82 +12166,86 @@
           <p:cNvPr id="10" name="p17-t-1">
             <a:extLst xmlns:a="http://schemas.openxmlformats.org/drawingml/2006/main">
               <a:ext uri="{FF2B5EF4-FFF2-40B4-BE49-F238E27FC236}">
-                <a16:creationId xmlns:a16="http://schemas.microsoft.com/office/drawing/2014/main" id="{52EEE28D-F0C5-4971-A600-F83C8D0F3F23}"/>
-              </a:ext>
-            </a:extLst>
-          </p:cNvPr>
-          <p:cNvSpPr>
-            <a:spLocks xmlns:a="http://schemas.openxmlformats.org/drawingml/2006/main" noGrp="1"/>
-          </p:cNvSpPr>
-          <p:nvPr/>
-        </p:nvSpPr>
-        <p:spPr>
-          <a:xfrm xmlns:a="http://schemas.openxmlformats.org/drawingml/2006/main">
-            <a:off x="6800850" y="1200150"/>
-            <a:ext cx="4857750" cy="457200"/>
-          </a:xfrm>
-          <a:prstGeom xmlns:a="http://schemas.openxmlformats.org/drawingml/2006/main" prst="rect">
-            <a:avLst/>
-          </a:prstGeom>
-          <a:solidFill xmlns:a="http://schemas.openxmlformats.org/drawingml/2006/main">
-            <a:srgbClr val="F3F6F7"/>
-          </a:solidFill>
-          <a:ln xmlns:a="http://schemas.openxmlformats.org/drawingml/2006/main" w="0">
-            <a:noFill/>
-            <a:prstDash val="solid"/>
-          </a:ln>
-        </p:spPr>
-        <p:txBody>
-          <a:bodyPr xmlns:a="http://schemas.openxmlformats.org/drawingml/2006/main" lIns="76200" tIns="38100" rIns="76200" bIns="38100" anchor="ctr"/>
-          <a:lstStyle xmlns:a="http://schemas.openxmlformats.org/drawingml/2006/main"/>
-          <a:p xmlns:a="http://schemas.openxmlformats.org/drawingml/2006/main">
-            <a:pPr algn="l">
-              <a:defRPr sz="1350" b="1">
-                <a:solidFill>
-                  <a:srgbClr val="263746"/>
-                </a:solidFill>
-              </a:defRPr>
-            </a:pPr>
-            <a:r>
-              <a:rPr sz="1350" b="1">
-                <a:solidFill>
-                  <a:srgbClr val="263746"/>
-                </a:solidFill>
-                <a:latin typeface="Microsoft YaHei"/>
-                <a:ea typeface="Microsoft YaHei"/>
-                <a:cs typeface="Microsoft YaHei"/>
-              </a:rPr>
-              <a:t>补七字段：停止、随机化、失败预案</a:t>
-            </a:r>
-          </a:p>
-        </p:txBody>
-      </p:sp>
-      <p:sp>
-        <p:nvSpPr>
-          <p:cNvPr id="11" name="p17-n-2">
-            <a:extLst xmlns:a="http://schemas.openxmlformats.org/drawingml/2006/main">
-              <a:ext uri="{FF2B5EF4-FFF2-40B4-BE49-F238E27FC236}">
-                <a16:creationId xmlns:a16="http://schemas.microsoft.com/office/drawing/2014/main" id="{7E87405E-9AA3-4D12-92F0-891B597860B6}"/>
-              </a:ext>
-            </a:extLst>
-          </p:cNvPr>
-          <p:cNvSpPr>
-            <a:spLocks xmlns:a="http://schemas.openxmlformats.org/drawingml/2006/main" noGrp="1"/>
-          </p:cNvSpPr>
-          <p:nvPr/>
-        </p:nvSpPr>
-        <p:spPr>
-          <a:xfrm xmlns:a="http://schemas.openxmlformats.org/drawingml/2006/main">
-            <a:off x="533400" y="2019300"/>
-            <a:ext cx="457200" cy="457200"/>
+                <a16:creationId xmlns:a16="http://schemas.microsoft.com/office/drawing/2014/main" id="{95A42451-47CE-4A40-8B73-3FB0A7F26810}"/>
+              </a:ext>
+            </a:extLst>
+          </p:cNvPr>
+          <p:cNvSpPr>
+            <a:spLocks xmlns:a="http://schemas.openxmlformats.org/drawingml/2006/main" noGrp="1"/>
+          </p:cNvSpPr>
+          <p:nvPr/>
+        </p:nvSpPr>
+        <p:spPr>
+          <a:xfrm xmlns:a="http://schemas.openxmlformats.org/drawingml/2006/main">
+            <a:off x="4933950" y="1219200"/>
+            <a:ext cx="3238500" cy="514350"/>
           </a:xfrm>
           <a:prstGeom xmlns:a="http://schemas.openxmlformats.org/drawingml/2006/main" prst="roundRect">
             <a:avLst>
-              <a:gd name="adj" fmla="val 16667"/>
+              <a:gd name="adj" fmla="val 14815"/>
             </a:avLst>
           </a:prstGeom>
           <a:solidFill xmlns:a="http://schemas.openxmlformats.org/drawingml/2006/main">
-            <a:srgbClr val="C8161E"/>
+            <a:srgbClr val="F3F6F7"/>
+          </a:solidFill>
+          <a:ln xmlns:a="http://schemas.openxmlformats.org/drawingml/2006/main" w="9525">
+            <a:solidFill>
+              <a:srgbClr val="D6DDE2"/>
+            </a:solidFill>
+            <a:prstDash val="solid"/>
+          </a:ln>
+        </p:spPr>
+        <p:txBody>
+          <a:bodyPr xmlns:a="http://schemas.openxmlformats.org/drawingml/2006/main" lIns="76200" tIns="38100" rIns="76200" bIns="38100" anchor="ctr"/>
+          <a:lstStyle xmlns:a="http://schemas.openxmlformats.org/drawingml/2006/main"/>
+          <a:p xmlns:a="http://schemas.openxmlformats.org/drawingml/2006/main">
+            <a:pPr algn="ctr">
+              <a:defRPr sz="1350" b="1">
+                <a:solidFill>
+                  <a:srgbClr val="263746"/>
+                </a:solidFill>
+              </a:defRPr>
+            </a:pPr>
+            <a:r>
+              <a:rPr sz="1350" b="1">
+                <a:solidFill>
+                  <a:srgbClr val="263746"/>
+                </a:solidFill>
+                <a:latin typeface="Microsoft YaHei"/>
+                <a:ea typeface="Microsoft YaHei"/>
+                <a:cs typeface="Microsoft YaHei"/>
+              </a:rPr>
+              <a:t>补七字段规格</a:t>
+            </a:r>
+          </a:p>
+        </p:txBody>
+      </p:sp>
+      <p:sp>
+        <p:nvSpPr>
+          <p:cNvPr id="11" name="p17-n-2">
+            <a:extLst xmlns:a="http://schemas.openxmlformats.org/drawingml/2006/main">
+              <a:ext uri="{FF2B5EF4-FFF2-40B4-BE49-F238E27FC236}">
+                <a16:creationId xmlns:a16="http://schemas.microsoft.com/office/drawing/2014/main" id="{DCAAFDD0-74CA-42CA-95F1-CF1B8E4B9F7D}"/>
+              </a:ext>
+            </a:extLst>
+          </p:cNvPr>
+          <p:cNvSpPr>
+            <a:spLocks xmlns:a="http://schemas.openxmlformats.org/drawingml/2006/main" noGrp="1"/>
+          </p:cNvSpPr>
+          <p:nvPr/>
+        </p:nvSpPr>
+        <p:spPr>
+          <a:xfrm xmlns:a="http://schemas.openxmlformats.org/drawingml/2006/main">
+            <a:off x="8343900" y="1257300"/>
+            <a:ext cx="438150" cy="438150"/>
+          </a:xfrm>
+          <a:prstGeom xmlns:a="http://schemas.openxmlformats.org/drawingml/2006/main" prst="roundRect">
+            <a:avLst>
+              <a:gd name="adj" fmla="val 17391"/>
+            </a:avLst>
+          </a:prstGeom>
+          <a:solidFill xmlns:a="http://schemas.openxmlformats.org/drawingml/2006/main">
+            <a:srgbClr val="18354E"/>
           </a:solidFill>
           <a:ln xmlns:a="http://schemas.openxmlformats.org/drawingml/2006/main" w="0">
             <a:noFill/>
@@ -12122,78 +12282,82 @@
           <p:cNvPr id="12" name="p17-t-2">
             <a:extLst xmlns:a="http://schemas.openxmlformats.org/drawingml/2006/main">
               <a:ext uri="{FF2B5EF4-FFF2-40B4-BE49-F238E27FC236}">
-                <a16:creationId xmlns:a16="http://schemas.microsoft.com/office/drawing/2014/main" id="{E73581B9-5F8C-420E-92D1-8743B0F98DE7}"/>
-              </a:ext>
-            </a:extLst>
-          </p:cNvPr>
-          <p:cNvSpPr>
-            <a:spLocks xmlns:a="http://schemas.openxmlformats.org/drawingml/2006/main" noGrp="1"/>
-          </p:cNvSpPr>
-          <p:nvPr/>
-        </p:nvSpPr>
-        <p:spPr>
-          <a:xfrm xmlns:a="http://schemas.openxmlformats.org/drawingml/2006/main">
-            <a:off x="1085850" y="2019300"/>
-            <a:ext cx="4857750" cy="457200"/>
-          </a:xfrm>
-          <a:prstGeom xmlns:a="http://schemas.openxmlformats.org/drawingml/2006/main" prst="rect">
-            <a:avLst/>
-          </a:prstGeom>
-          <a:solidFill xmlns:a="http://schemas.openxmlformats.org/drawingml/2006/main">
-            <a:srgbClr val="F8E9EA"/>
-          </a:solidFill>
-          <a:ln xmlns:a="http://schemas.openxmlformats.org/drawingml/2006/main" w="0">
-            <a:noFill/>
-            <a:prstDash val="solid"/>
-          </a:ln>
-        </p:spPr>
-        <p:txBody>
-          <a:bodyPr xmlns:a="http://schemas.openxmlformats.org/drawingml/2006/main" lIns="76200" tIns="38100" rIns="76200" bIns="38100" anchor="ctr"/>
-          <a:lstStyle xmlns:a="http://schemas.openxmlformats.org/drawingml/2006/main"/>
-          <a:p xmlns:a="http://schemas.openxmlformats.org/drawingml/2006/main">
-            <a:pPr algn="l">
-              <a:defRPr sz="1350" b="1">
-                <a:solidFill>
-                  <a:srgbClr val="263746"/>
-                </a:solidFill>
-              </a:defRPr>
-            </a:pPr>
-            <a:r>
-              <a:rPr sz="1350" b="1">
-                <a:solidFill>
-                  <a:srgbClr val="263746"/>
-                </a:solidFill>
-                <a:latin typeface="Microsoft YaHei"/>
-                <a:ea typeface="Microsoft YaHei"/>
-                <a:cs typeface="Microsoft YaHei"/>
-              </a:rPr>
-              <a:t>写六类复现说明：种子或等价条件</a:t>
-            </a:r>
-          </a:p>
-        </p:txBody>
-      </p:sp>
-      <p:sp>
-        <p:nvSpPr>
-          <p:cNvPr id="13" name="p17-n-3">
-            <a:extLst xmlns:a="http://schemas.openxmlformats.org/drawingml/2006/main">
-              <a:ext uri="{FF2B5EF4-FFF2-40B4-BE49-F238E27FC236}">
-                <a16:creationId xmlns:a16="http://schemas.microsoft.com/office/drawing/2014/main" id="{B6FAC3F9-8AF9-4810-B39E-9C25A9DB29BC}"/>
-              </a:ext>
-            </a:extLst>
-          </p:cNvPr>
-          <p:cNvSpPr>
-            <a:spLocks xmlns:a="http://schemas.openxmlformats.org/drawingml/2006/main" noGrp="1"/>
-          </p:cNvSpPr>
-          <p:nvPr/>
-        </p:nvSpPr>
-        <p:spPr>
-          <a:xfrm xmlns:a="http://schemas.openxmlformats.org/drawingml/2006/main">
-            <a:off x="6248400" y="2019300"/>
-            <a:ext cx="457200" cy="457200"/>
+                <a16:creationId xmlns:a16="http://schemas.microsoft.com/office/drawing/2014/main" id="{36695B6E-1023-4B78-8F88-4268741088E8}"/>
+              </a:ext>
+            </a:extLst>
+          </p:cNvPr>
+          <p:cNvSpPr>
+            <a:spLocks xmlns:a="http://schemas.openxmlformats.org/drawingml/2006/main" noGrp="1"/>
+          </p:cNvSpPr>
+          <p:nvPr/>
+        </p:nvSpPr>
+        <p:spPr>
+          <a:xfrm xmlns:a="http://schemas.openxmlformats.org/drawingml/2006/main">
+            <a:off x="8877300" y="1219200"/>
+            <a:ext cx="3238500" cy="514350"/>
           </a:xfrm>
           <a:prstGeom xmlns:a="http://schemas.openxmlformats.org/drawingml/2006/main" prst="roundRect">
             <a:avLst>
-              <a:gd name="adj" fmla="val 16667"/>
+              <a:gd name="adj" fmla="val 14815"/>
+            </a:avLst>
+          </a:prstGeom>
+          <a:solidFill xmlns:a="http://schemas.openxmlformats.org/drawingml/2006/main">
+            <a:srgbClr val="F3F6F7"/>
+          </a:solidFill>
+          <a:ln xmlns:a="http://schemas.openxmlformats.org/drawingml/2006/main" w="9525">
+            <a:solidFill>
+              <a:srgbClr val="D6DDE2"/>
+            </a:solidFill>
+            <a:prstDash val="solid"/>
+          </a:ln>
+        </p:spPr>
+        <p:txBody>
+          <a:bodyPr xmlns:a="http://schemas.openxmlformats.org/drawingml/2006/main" lIns="76200" tIns="38100" rIns="76200" bIns="38100" anchor="ctr"/>
+          <a:lstStyle xmlns:a="http://schemas.openxmlformats.org/drawingml/2006/main"/>
+          <a:p xmlns:a="http://schemas.openxmlformats.org/drawingml/2006/main">
+            <a:pPr algn="ctr">
+              <a:defRPr sz="1350" b="1">
+                <a:solidFill>
+                  <a:srgbClr val="263746"/>
+                </a:solidFill>
+              </a:defRPr>
+            </a:pPr>
+            <a:r>
+              <a:rPr sz="1350" b="1">
+                <a:solidFill>
+                  <a:srgbClr val="263746"/>
+                </a:solidFill>
+                <a:latin typeface="Microsoft YaHei"/>
+                <a:ea typeface="Microsoft YaHei"/>
+                <a:cs typeface="Microsoft YaHei"/>
+              </a:rPr>
+              <a:t>写六类复现说明</a:t>
+            </a:r>
+          </a:p>
+        </p:txBody>
+      </p:sp>
+      <p:sp>
+        <p:nvSpPr>
+          <p:cNvPr id="13" name="p17-n-3">
+            <a:extLst xmlns:a="http://schemas.openxmlformats.org/drawingml/2006/main">
+              <a:ext uri="{FF2B5EF4-FFF2-40B4-BE49-F238E27FC236}">
+                <a16:creationId xmlns:a16="http://schemas.microsoft.com/office/drawing/2014/main" id="{4E7AE44D-F1D9-4442-8FAF-2D2D7CBE3129}"/>
+              </a:ext>
+            </a:extLst>
+          </p:cNvPr>
+          <p:cNvSpPr>
+            <a:spLocks xmlns:a="http://schemas.openxmlformats.org/drawingml/2006/main" noGrp="1"/>
+          </p:cNvSpPr>
+          <p:nvPr/>
+        </p:nvSpPr>
+        <p:spPr>
+          <a:xfrm xmlns:a="http://schemas.openxmlformats.org/drawingml/2006/main">
+            <a:off x="457200" y="2247900"/>
+            <a:ext cx="438150" cy="438150"/>
+          </a:xfrm>
+          <a:prstGeom xmlns:a="http://schemas.openxmlformats.org/drawingml/2006/main" prst="roundRect">
+            <a:avLst>
+              <a:gd name="adj" fmla="val 17391"/>
             </a:avLst>
           </a:prstGeom>
           <a:solidFill xmlns:a="http://schemas.openxmlformats.org/drawingml/2006/main">
@@ -12234,78 +12398,82 @@
           <p:cNvPr id="14" name="p17-t-3">
             <a:extLst xmlns:a="http://schemas.openxmlformats.org/drawingml/2006/main">
               <a:ext uri="{FF2B5EF4-FFF2-40B4-BE49-F238E27FC236}">
-                <a16:creationId xmlns:a16="http://schemas.microsoft.com/office/drawing/2014/main" id="{66BD5A0D-28D2-47D3-B2AF-93B62D9CB5F9}"/>
-              </a:ext>
-            </a:extLst>
-          </p:cNvPr>
-          <p:cNvSpPr>
-            <a:spLocks xmlns:a="http://schemas.openxmlformats.org/drawingml/2006/main" noGrp="1"/>
-          </p:cNvSpPr>
-          <p:nvPr/>
-        </p:nvSpPr>
-        <p:spPr>
-          <a:xfrm xmlns:a="http://schemas.openxmlformats.org/drawingml/2006/main">
-            <a:off x="6800850" y="2019300"/>
-            <a:ext cx="4857750" cy="457200"/>
-          </a:xfrm>
-          <a:prstGeom xmlns:a="http://schemas.openxmlformats.org/drawingml/2006/main" prst="rect">
-            <a:avLst/>
-          </a:prstGeom>
-          <a:solidFill xmlns:a="http://schemas.openxmlformats.org/drawingml/2006/main">
-            <a:srgbClr val="F3F6F7"/>
-          </a:solidFill>
-          <a:ln xmlns:a="http://schemas.openxmlformats.org/drawingml/2006/main" w="0">
-            <a:noFill/>
-            <a:prstDash val="solid"/>
-          </a:ln>
-        </p:spPr>
-        <p:txBody>
-          <a:bodyPr xmlns:a="http://schemas.openxmlformats.org/drawingml/2006/main" lIns="76200" tIns="38100" rIns="76200" bIns="38100" anchor="ctr"/>
-          <a:lstStyle xmlns:a="http://schemas.openxmlformats.org/drawingml/2006/main"/>
-          <a:p xmlns:a="http://schemas.openxmlformats.org/drawingml/2006/main">
-            <a:pPr algn="l">
-              <a:defRPr sz="1350" b="1">
-                <a:solidFill>
-                  <a:srgbClr val="263746"/>
-                </a:solidFill>
-              </a:defRPr>
-            </a:pPr>
-            <a:r>
-              <a:rPr sz="1350" b="1">
-                <a:solidFill>
-                  <a:srgbClr val="263746"/>
-                </a:solidFill>
-                <a:latin typeface="Microsoft YaHei"/>
-                <a:ea typeface="Microsoft YaHei"/>
-                <a:cs typeface="Microsoft YaHei"/>
-              </a:rPr>
-              <a:t>重复计划与要声称的强度匹配</a:t>
-            </a:r>
-          </a:p>
-        </p:txBody>
-      </p:sp>
-      <p:sp>
-        <p:nvSpPr>
-          <p:cNvPr id="15" name="p17-n-4">
-            <a:extLst xmlns:a="http://schemas.openxmlformats.org/drawingml/2006/main">
-              <a:ext uri="{FF2B5EF4-FFF2-40B4-BE49-F238E27FC236}">
-                <a16:creationId xmlns:a16="http://schemas.microsoft.com/office/drawing/2014/main" id="{555EA258-89D2-43FC-B892-42441E883A5F}"/>
-              </a:ext>
-            </a:extLst>
-          </p:cNvPr>
-          <p:cNvSpPr>
-            <a:spLocks xmlns:a="http://schemas.openxmlformats.org/drawingml/2006/main" noGrp="1"/>
-          </p:cNvSpPr>
-          <p:nvPr/>
-        </p:nvSpPr>
-        <p:spPr>
-          <a:xfrm xmlns:a="http://schemas.openxmlformats.org/drawingml/2006/main">
-            <a:off x="533400" y="2838450"/>
-            <a:ext cx="457200" cy="457200"/>
+                <a16:creationId xmlns:a16="http://schemas.microsoft.com/office/drawing/2014/main" id="{41BB0D5C-32C6-48D6-936C-FA02DB67C079}"/>
+              </a:ext>
+            </a:extLst>
+          </p:cNvPr>
+          <p:cNvSpPr>
+            <a:spLocks xmlns:a="http://schemas.openxmlformats.org/drawingml/2006/main" noGrp="1"/>
+          </p:cNvSpPr>
+          <p:nvPr/>
+        </p:nvSpPr>
+        <p:spPr>
+          <a:xfrm xmlns:a="http://schemas.openxmlformats.org/drawingml/2006/main">
+            <a:off x="990600" y="2209800"/>
+            <a:ext cx="3238500" cy="514350"/>
           </a:xfrm>
           <a:prstGeom xmlns:a="http://schemas.openxmlformats.org/drawingml/2006/main" prst="roundRect">
             <a:avLst>
-              <a:gd name="adj" fmla="val 16667"/>
+              <a:gd name="adj" fmla="val 14815"/>
+            </a:avLst>
+          </a:prstGeom>
+          <a:solidFill xmlns:a="http://schemas.openxmlformats.org/drawingml/2006/main">
+            <a:srgbClr val="F3F6F7"/>
+          </a:solidFill>
+          <a:ln xmlns:a="http://schemas.openxmlformats.org/drawingml/2006/main" w="9525">
+            <a:solidFill>
+              <a:srgbClr val="D6DDE2"/>
+            </a:solidFill>
+            <a:prstDash val="solid"/>
+          </a:ln>
+        </p:spPr>
+        <p:txBody>
+          <a:bodyPr xmlns:a="http://schemas.openxmlformats.org/drawingml/2006/main" lIns="76200" tIns="38100" rIns="76200" bIns="38100" anchor="ctr"/>
+          <a:lstStyle xmlns:a="http://schemas.openxmlformats.org/drawingml/2006/main"/>
+          <a:p xmlns:a="http://schemas.openxmlformats.org/drawingml/2006/main">
+            <a:pPr algn="ctr">
+              <a:defRPr sz="1350" b="1">
+                <a:solidFill>
+                  <a:srgbClr val="263746"/>
+                </a:solidFill>
+              </a:defRPr>
+            </a:pPr>
+            <a:r>
+              <a:rPr sz="1350" b="1">
+                <a:solidFill>
+                  <a:srgbClr val="263746"/>
+                </a:solidFill>
+                <a:latin typeface="Microsoft YaHei"/>
+                <a:ea typeface="Microsoft YaHei"/>
+                <a:cs typeface="Microsoft YaHei"/>
+              </a:rPr>
+              <a:t>重复计划匹配主张</a:t>
+            </a:r>
+          </a:p>
+        </p:txBody>
+      </p:sp>
+      <p:sp>
+        <p:nvSpPr>
+          <p:cNvPr id="15" name="p17-n-4">
+            <a:extLst xmlns:a="http://schemas.openxmlformats.org/drawingml/2006/main">
+              <a:ext uri="{FF2B5EF4-FFF2-40B4-BE49-F238E27FC236}">
+                <a16:creationId xmlns:a16="http://schemas.microsoft.com/office/drawing/2014/main" id="{06ACCD14-E04A-46F7-A14B-C8C2C2B818ED}"/>
+              </a:ext>
+            </a:extLst>
+          </p:cNvPr>
+          <p:cNvSpPr>
+            <a:spLocks xmlns:a="http://schemas.openxmlformats.org/drawingml/2006/main" noGrp="1"/>
+          </p:cNvSpPr>
+          <p:nvPr/>
+        </p:nvSpPr>
+        <p:spPr>
+          <a:xfrm xmlns:a="http://schemas.openxmlformats.org/drawingml/2006/main">
+            <a:off x="4400550" y="2247900"/>
+            <a:ext cx="438150" cy="438150"/>
+          </a:xfrm>
+          <a:prstGeom xmlns:a="http://schemas.openxmlformats.org/drawingml/2006/main" prst="roundRect">
+            <a:avLst>
+              <a:gd name="adj" fmla="val 17391"/>
             </a:avLst>
           </a:prstGeom>
           <a:solidFill xmlns:a="http://schemas.openxmlformats.org/drawingml/2006/main">
@@ -12346,78 +12514,82 @@
           <p:cNvPr id="16" name="p17-t-4">
             <a:extLst xmlns:a="http://schemas.openxmlformats.org/drawingml/2006/main">
               <a:ext uri="{FF2B5EF4-FFF2-40B4-BE49-F238E27FC236}">
-                <a16:creationId xmlns:a16="http://schemas.microsoft.com/office/drawing/2014/main" id="{FB4AF0C2-AEEF-442C-95E8-38B5D96CD345}"/>
-              </a:ext>
-            </a:extLst>
-          </p:cNvPr>
-          <p:cNvSpPr>
-            <a:spLocks xmlns:a="http://schemas.openxmlformats.org/drawingml/2006/main" noGrp="1"/>
-          </p:cNvSpPr>
-          <p:nvPr/>
-        </p:nvSpPr>
-        <p:spPr>
-          <a:xfrm xmlns:a="http://schemas.openxmlformats.org/drawingml/2006/main">
-            <a:off x="1085850" y="2838450"/>
-            <a:ext cx="4857750" cy="457200"/>
-          </a:xfrm>
-          <a:prstGeom xmlns:a="http://schemas.openxmlformats.org/drawingml/2006/main" prst="rect">
-            <a:avLst/>
-          </a:prstGeom>
-          <a:solidFill xmlns:a="http://schemas.openxmlformats.org/drawingml/2006/main">
-            <a:srgbClr val="F3F6F7"/>
-          </a:solidFill>
-          <a:ln xmlns:a="http://schemas.openxmlformats.org/drawingml/2006/main" w="0">
-            <a:noFill/>
-            <a:prstDash val="solid"/>
-          </a:ln>
-        </p:spPr>
-        <p:txBody>
-          <a:bodyPr xmlns:a="http://schemas.openxmlformats.org/drawingml/2006/main" lIns="76200" tIns="38100" rIns="76200" bIns="38100" anchor="ctr"/>
-          <a:lstStyle xmlns:a="http://schemas.openxmlformats.org/drawingml/2006/main"/>
-          <a:p xmlns:a="http://schemas.openxmlformats.org/drawingml/2006/main">
-            <a:pPr algn="l">
-              <a:defRPr sz="1350" b="1">
-                <a:solidFill>
-                  <a:srgbClr val="263746"/>
-                </a:solidFill>
-              </a:defRPr>
-            </a:pPr>
-            <a:r>
-              <a:rPr sz="1350" b="1">
-                <a:solidFill>
-                  <a:srgbClr val="263746"/>
-                </a:solidFill>
-                <a:latin typeface="Microsoft YaHei"/>
-                <a:ea typeface="Microsoft YaHei"/>
-                <a:cs typeface="Microsoft YaHei"/>
-              </a:rPr>
-              <a:t>写 J2 六字段</a:t>
-            </a:r>
-          </a:p>
-        </p:txBody>
-      </p:sp>
-      <p:sp>
-        <p:nvSpPr>
-          <p:cNvPr id="17" name="p17-n-5">
-            <a:extLst xmlns:a="http://schemas.openxmlformats.org/drawingml/2006/main">
-              <a:ext uri="{FF2B5EF4-FFF2-40B4-BE49-F238E27FC236}">
-                <a16:creationId xmlns:a16="http://schemas.microsoft.com/office/drawing/2014/main" id="{56632C23-67BC-474D-AEC3-D877ACE861CF}"/>
-              </a:ext>
-            </a:extLst>
-          </p:cNvPr>
-          <p:cNvSpPr>
-            <a:spLocks xmlns:a="http://schemas.openxmlformats.org/drawingml/2006/main" noGrp="1"/>
-          </p:cNvSpPr>
-          <p:nvPr/>
-        </p:nvSpPr>
-        <p:spPr>
-          <a:xfrm xmlns:a="http://schemas.openxmlformats.org/drawingml/2006/main">
-            <a:off x="6248400" y="2838450"/>
-            <a:ext cx="457200" cy="457200"/>
+                <a16:creationId xmlns:a16="http://schemas.microsoft.com/office/drawing/2014/main" id="{5535FDAE-CB18-4840-B8D9-0AD8EFC980D6}"/>
+              </a:ext>
+            </a:extLst>
+          </p:cNvPr>
+          <p:cNvSpPr>
+            <a:spLocks xmlns:a="http://schemas.openxmlformats.org/drawingml/2006/main" noGrp="1"/>
+          </p:cNvSpPr>
+          <p:nvPr/>
+        </p:nvSpPr>
+        <p:spPr>
+          <a:xfrm xmlns:a="http://schemas.openxmlformats.org/drawingml/2006/main">
+            <a:off x="4933950" y="2209800"/>
+            <a:ext cx="3238500" cy="514350"/>
           </a:xfrm>
           <a:prstGeom xmlns:a="http://schemas.openxmlformats.org/drawingml/2006/main" prst="roundRect">
             <a:avLst>
-              <a:gd name="adj" fmla="val 16667"/>
+              <a:gd name="adj" fmla="val 14815"/>
+            </a:avLst>
+          </a:prstGeom>
+          <a:solidFill xmlns:a="http://schemas.openxmlformats.org/drawingml/2006/main">
+            <a:srgbClr val="F3F6F7"/>
+          </a:solidFill>
+          <a:ln xmlns:a="http://schemas.openxmlformats.org/drawingml/2006/main" w="9525">
+            <a:solidFill>
+              <a:srgbClr val="D6DDE2"/>
+            </a:solidFill>
+            <a:prstDash val="solid"/>
+          </a:ln>
+        </p:spPr>
+        <p:txBody>
+          <a:bodyPr xmlns:a="http://schemas.openxmlformats.org/drawingml/2006/main" lIns="76200" tIns="38100" rIns="76200" bIns="38100" anchor="ctr"/>
+          <a:lstStyle xmlns:a="http://schemas.openxmlformats.org/drawingml/2006/main"/>
+          <a:p xmlns:a="http://schemas.openxmlformats.org/drawingml/2006/main">
+            <a:pPr algn="ctr">
+              <a:defRPr sz="1350" b="1">
+                <a:solidFill>
+                  <a:srgbClr val="263746"/>
+                </a:solidFill>
+              </a:defRPr>
+            </a:pPr>
+            <a:r>
+              <a:rPr sz="1350" b="1">
+                <a:solidFill>
+                  <a:srgbClr val="263746"/>
+                </a:solidFill>
+                <a:latin typeface="Microsoft YaHei"/>
+                <a:ea typeface="Microsoft YaHei"/>
+                <a:cs typeface="Microsoft YaHei"/>
+              </a:rPr>
+              <a:t>写 J2 六字段</a:t>
+            </a:r>
+          </a:p>
+        </p:txBody>
+      </p:sp>
+      <p:sp>
+        <p:nvSpPr>
+          <p:cNvPr id="17" name="p17-n-5">
+            <a:extLst xmlns:a="http://schemas.openxmlformats.org/drawingml/2006/main">
+              <a:ext uri="{FF2B5EF4-FFF2-40B4-BE49-F238E27FC236}">
+                <a16:creationId xmlns:a16="http://schemas.microsoft.com/office/drawing/2014/main" id="{A261B8CA-9102-41AF-A663-A8AFF6748A7A}"/>
+              </a:ext>
+            </a:extLst>
+          </p:cNvPr>
+          <p:cNvSpPr>
+            <a:spLocks xmlns:a="http://schemas.openxmlformats.org/drawingml/2006/main" noGrp="1"/>
+          </p:cNvSpPr>
+          <p:nvPr/>
+        </p:nvSpPr>
+        <p:spPr>
+          <a:xfrm xmlns:a="http://schemas.openxmlformats.org/drawingml/2006/main">
+            <a:off x="8343900" y="2247900"/>
+            <a:ext cx="438150" cy="438150"/>
+          </a:xfrm>
+          <a:prstGeom xmlns:a="http://schemas.openxmlformats.org/drawingml/2006/main" prst="roundRect">
+            <a:avLst>
+              <a:gd name="adj" fmla="val 17391"/>
             </a:avLst>
           </a:prstGeom>
           <a:solidFill xmlns:a="http://schemas.openxmlformats.org/drawingml/2006/main">
@@ -12458,82 +12630,86 @@
           <p:cNvPr id="18" name="p17-t-5">
             <a:extLst xmlns:a="http://schemas.openxmlformats.org/drawingml/2006/main">
               <a:ext uri="{FF2B5EF4-FFF2-40B4-BE49-F238E27FC236}">
-                <a16:creationId xmlns:a16="http://schemas.microsoft.com/office/drawing/2014/main" id="{2F201781-888C-4C01-A964-D46E668F5A52}"/>
-              </a:ext>
-            </a:extLst>
-          </p:cNvPr>
-          <p:cNvSpPr>
-            <a:spLocks xmlns:a="http://schemas.openxmlformats.org/drawingml/2006/main" noGrp="1"/>
-          </p:cNvSpPr>
-          <p:nvPr/>
-        </p:nvSpPr>
-        <p:spPr>
-          <a:xfrm xmlns:a="http://schemas.openxmlformats.org/drawingml/2006/main">
-            <a:off x="6800850" y="2838450"/>
-            <a:ext cx="4857750" cy="457200"/>
-          </a:xfrm>
-          <a:prstGeom xmlns:a="http://schemas.openxmlformats.org/drawingml/2006/main" prst="rect">
-            <a:avLst/>
-          </a:prstGeom>
-          <a:solidFill xmlns:a="http://schemas.openxmlformats.org/drawingml/2006/main">
-            <a:srgbClr val="F3F6F7"/>
-          </a:solidFill>
-          <a:ln xmlns:a="http://schemas.openxmlformats.org/drawingml/2006/main" w="0">
-            <a:noFill/>
-            <a:prstDash val="solid"/>
-          </a:ln>
-        </p:spPr>
-        <p:txBody>
-          <a:bodyPr xmlns:a="http://schemas.openxmlformats.org/drawingml/2006/main" lIns="76200" tIns="38100" rIns="76200" bIns="38100" anchor="ctr"/>
-          <a:lstStyle xmlns:a="http://schemas.openxmlformats.org/drawingml/2006/main"/>
-          <a:p xmlns:a="http://schemas.openxmlformats.org/drawingml/2006/main">
-            <a:pPr algn="l">
-              <a:defRPr sz="1350" b="1">
-                <a:solidFill>
-                  <a:srgbClr val="263746"/>
-                </a:solidFill>
-              </a:defRPr>
-            </a:pPr>
-            <a:r>
-              <a:rPr sz="1350" b="1">
-                <a:solidFill>
-                  <a:srgbClr val="263746"/>
-                </a:solidFill>
-                <a:latin typeface="Microsoft YaHei"/>
-                <a:ea typeface="Microsoft YaHei"/>
-                <a:cs typeface="Microsoft YaHei"/>
-              </a:rPr>
-              <a:t>反馈逐条采纳 / 拒绝 / 暂缓</a:t>
-            </a:r>
-          </a:p>
-        </p:txBody>
-      </p:sp>
-      <p:sp>
-        <p:nvSpPr>
-          <p:cNvPr id="19" name="p17-n-6">
-            <a:extLst xmlns:a="http://schemas.openxmlformats.org/drawingml/2006/main">
-              <a:ext uri="{FF2B5EF4-FFF2-40B4-BE49-F238E27FC236}">
-                <a16:creationId xmlns:a16="http://schemas.microsoft.com/office/drawing/2014/main" id="{E837E1D4-AEA6-47AC-AF74-2FF17604ADB6}"/>
-              </a:ext>
-            </a:extLst>
-          </p:cNvPr>
-          <p:cNvSpPr>
-            <a:spLocks xmlns:a="http://schemas.openxmlformats.org/drawingml/2006/main" noGrp="1"/>
-          </p:cNvSpPr>
-          <p:nvPr/>
-        </p:nvSpPr>
-        <p:spPr>
-          <a:xfrm xmlns:a="http://schemas.openxmlformats.org/drawingml/2006/main">
-            <a:off x="533400" y="3657600"/>
-            <a:ext cx="457200" cy="457200"/>
+                <a16:creationId xmlns:a16="http://schemas.microsoft.com/office/drawing/2014/main" id="{D43C8B72-2259-4473-A901-776D5FB10D72}"/>
+              </a:ext>
+            </a:extLst>
+          </p:cNvPr>
+          <p:cNvSpPr>
+            <a:spLocks xmlns:a="http://schemas.openxmlformats.org/drawingml/2006/main" noGrp="1"/>
+          </p:cNvSpPr>
+          <p:nvPr/>
+        </p:nvSpPr>
+        <p:spPr>
+          <a:xfrm xmlns:a="http://schemas.openxmlformats.org/drawingml/2006/main">
+            <a:off x="8877300" y="2209800"/>
+            <a:ext cx="3238500" cy="514350"/>
           </a:xfrm>
           <a:prstGeom xmlns:a="http://schemas.openxmlformats.org/drawingml/2006/main" prst="roundRect">
             <a:avLst>
-              <a:gd name="adj" fmla="val 16667"/>
+              <a:gd name="adj" fmla="val 14815"/>
             </a:avLst>
           </a:prstGeom>
           <a:solidFill xmlns:a="http://schemas.openxmlformats.org/drawingml/2006/main">
-            <a:srgbClr val="18354E"/>
+            <a:srgbClr val="F3F6F7"/>
+          </a:solidFill>
+          <a:ln xmlns:a="http://schemas.openxmlformats.org/drawingml/2006/main" w="9525">
+            <a:solidFill>
+              <a:srgbClr val="D6DDE2"/>
+            </a:solidFill>
+            <a:prstDash val="solid"/>
+          </a:ln>
+        </p:spPr>
+        <p:txBody>
+          <a:bodyPr xmlns:a="http://schemas.openxmlformats.org/drawingml/2006/main" lIns="76200" tIns="38100" rIns="76200" bIns="38100" anchor="ctr"/>
+          <a:lstStyle xmlns:a="http://schemas.openxmlformats.org/drawingml/2006/main"/>
+          <a:p xmlns:a="http://schemas.openxmlformats.org/drawingml/2006/main">
+            <a:pPr algn="ctr">
+              <a:defRPr sz="1350" b="1">
+                <a:solidFill>
+                  <a:srgbClr val="263746"/>
+                </a:solidFill>
+              </a:defRPr>
+            </a:pPr>
+            <a:r>
+              <a:rPr sz="1350" b="1">
+                <a:solidFill>
+                  <a:srgbClr val="263746"/>
+                </a:solidFill>
+                <a:latin typeface="Microsoft YaHei"/>
+                <a:ea typeface="Microsoft YaHei"/>
+                <a:cs typeface="Microsoft YaHei"/>
+              </a:rPr>
+              <a:t>逐条处理同伴反馈</a:t>
+            </a:r>
+          </a:p>
+        </p:txBody>
+      </p:sp>
+      <p:sp>
+        <p:nvSpPr>
+          <p:cNvPr id="19" name="p17-n-6">
+            <a:extLst xmlns:a="http://schemas.openxmlformats.org/drawingml/2006/main">
+              <a:ext uri="{FF2B5EF4-FFF2-40B4-BE49-F238E27FC236}">
+                <a16:creationId xmlns:a16="http://schemas.microsoft.com/office/drawing/2014/main" id="{42F39F1B-D154-4170-BDE1-C88BE0D9C831}"/>
+              </a:ext>
+            </a:extLst>
+          </p:cNvPr>
+          <p:cNvSpPr>
+            <a:spLocks xmlns:a="http://schemas.openxmlformats.org/drawingml/2006/main" noGrp="1"/>
+          </p:cNvSpPr>
+          <p:nvPr/>
+        </p:nvSpPr>
+        <p:spPr>
+          <a:xfrm xmlns:a="http://schemas.openxmlformats.org/drawingml/2006/main">
+            <a:off x="457200" y="3238500"/>
+            <a:ext cx="438150" cy="438150"/>
+          </a:xfrm>
+          <a:prstGeom xmlns:a="http://schemas.openxmlformats.org/drawingml/2006/main" prst="roundRect">
+            <a:avLst>
+              <a:gd name="adj" fmla="val 17391"/>
+            </a:avLst>
+          </a:prstGeom>
+          <a:solidFill xmlns:a="http://schemas.openxmlformats.org/drawingml/2006/main">
+            <a:srgbClr val="C8161E"/>
           </a:solidFill>
           <a:ln xmlns:a="http://schemas.openxmlformats.org/drawingml/2006/main" w="0">
             <a:noFill/>
@@ -12570,78 +12746,82 @@
           <p:cNvPr id="20" name="p17-t-6">
             <a:extLst xmlns:a="http://schemas.openxmlformats.org/drawingml/2006/main">
               <a:ext uri="{FF2B5EF4-FFF2-40B4-BE49-F238E27FC236}">
-                <a16:creationId xmlns:a16="http://schemas.microsoft.com/office/drawing/2014/main" id="{DC15CF26-339E-418F-8671-3769E66B1B33}"/>
-              </a:ext>
-            </a:extLst>
-          </p:cNvPr>
-          <p:cNvSpPr>
-            <a:spLocks xmlns:a="http://schemas.openxmlformats.org/drawingml/2006/main" noGrp="1"/>
-          </p:cNvSpPr>
-          <p:nvPr/>
-        </p:nvSpPr>
-        <p:spPr>
-          <a:xfrm xmlns:a="http://schemas.openxmlformats.org/drawingml/2006/main">
-            <a:off x="1085850" y="3657600"/>
-            <a:ext cx="4857750" cy="457200"/>
-          </a:xfrm>
-          <a:prstGeom xmlns:a="http://schemas.openxmlformats.org/drawingml/2006/main" prst="rect">
-            <a:avLst/>
-          </a:prstGeom>
-          <a:solidFill xmlns:a="http://schemas.openxmlformats.org/drawingml/2006/main">
-            <a:srgbClr val="F3F6F7"/>
-          </a:solidFill>
-          <a:ln xmlns:a="http://schemas.openxmlformats.org/drawingml/2006/main" w="0">
-            <a:noFill/>
-            <a:prstDash val="solid"/>
-          </a:ln>
-        </p:spPr>
-        <p:txBody>
-          <a:bodyPr xmlns:a="http://schemas.openxmlformats.org/drawingml/2006/main" lIns="76200" tIns="38100" rIns="76200" bIns="38100" anchor="ctr"/>
-          <a:lstStyle xmlns:a="http://schemas.openxmlformats.org/drawingml/2006/main"/>
-          <a:p xmlns:a="http://schemas.openxmlformats.org/drawingml/2006/main">
-            <a:pPr algn="l">
-              <a:defRPr sz="1350" b="1">
-                <a:solidFill>
-                  <a:srgbClr val="263746"/>
-                </a:solidFill>
-              </a:defRPr>
-            </a:pPr>
-            <a:r>
-              <a:rPr sz="1350" b="1">
-                <a:solidFill>
-                  <a:srgbClr val="263746"/>
-                </a:solidFill>
-                <a:latin typeface="Microsoft YaHei"/>
-                <a:ea typeface="Microsoft YaHei"/>
-                <a:cs typeface="Microsoft YaHei"/>
-              </a:rPr>
-              <a:t>启动模板迁移，不丢 AI 记录</a:t>
-            </a:r>
-          </a:p>
-        </p:txBody>
-      </p:sp>
-      <p:sp>
-        <p:nvSpPr>
-          <p:cNvPr id="21" name="p17-n-7">
-            <a:extLst xmlns:a="http://schemas.openxmlformats.org/drawingml/2006/main">
-              <a:ext uri="{FF2B5EF4-FFF2-40B4-BE49-F238E27FC236}">
-                <a16:creationId xmlns:a16="http://schemas.microsoft.com/office/drawing/2014/main" id="{EE0BFB5D-A583-45FE-89E7-68206A674A72}"/>
-              </a:ext>
-            </a:extLst>
-          </p:cNvPr>
-          <p:cNvSpPr>
-            <a:spLocks xmlns:a="http://schemas.openxmlformats.org/drawingml/2006/main" noGrp="1"/>
-          </p:cNvSpPr>
-          <p:nvPr/>
-        </p:nvSpPr>
-        <p:spPr>
-          <a:xfrm xmlns:a="http://schemas.openxmlformats.org/drawingml/2006/main">
-            <a:off x="6248400" y="3657600"/>
-            <a:ext cx="457200" cy="457200"/>
+                <a16:creationId xmlns:a16="http://schemas.microsoft.com/office/drawing/2014/main" id="{48B7A217-8ACB-457A-B870-959106DF1D1F}"/>
+              </a:ext>
+            </a:extLst>
+          </p:cNvPr>
+          <p:cNvSpPr>
+            <a:spLocks xmlns:a="http://schemas.openxmlformats.org/drawingml/2006/main" noGrp="1"/>
+          </p:cNvSpPr>
+          <p:nvPr/>
+        </p:nvSpPr>
+        <p:spPr>
+          <a:xfrm xmlns:a="http://schemas.openxmlformats.org/drawingml/2006/main">
+            <a:off x="990600" y="3200400"/>
+            <a:ext cx="3238500" cy="514350"/>
           </a:xfrm>
           <a:prstGeom xmlns:a="http://schemas.openxmlformats.org/drawingml/2006/main" prst="roundRect">
             <a:avLst>
-              <a:gd name="adj" fmla="val 16667"/>
+              <a:gd name="adj" fmla="val 14815"/>
+            </a:avLst>
+          </a:prstGeom>
+          <a:solidFill xmlns:a="http://schemas.openxmlformats.org/drawingml/2006/main">
+            <a:srgbClr val="F8E9EA"/>
+          </a:solidFill>
+          <a:ln xmlns:a="http://schemas.openxmlformats.org/drawingml/2006/main" w="9525">
+            <a:solidFill>
+              <a:srgbClr val="D6DDE2"/>
+            </a:solidFill>
+            <a:prstDash val="solid"/>
+          </a:ln>
+        </p:spPr>
+        <p:txBody>
+          <a:bodyPr xmlns:a="http://schemas.openxmlformats.org/drawingml/2006/main" lIns="76200" tIns="38100" rIns="76200" bIns="38100" anchor="ctr"/>
+          <a:lstStyle xmlns:a="http://schemas.openxmlformats.org/drawingml/2006/main"/>
+          <a:p xmlns:a="http://schemas.openxmlformats.org/drawingml/2006/main">
+            <a:pPr algn="ctr">
+              <a:defRPr sz="1350" b="1">
+                <a:solidFill>
+                  <a:srgbClr val="263746"/>
+                </a:solidFill>
+              </a:defRPr>
+            </a:pPr>
+            <a:r>
+              <a:rPr sz="1350" b="1">
+                <a:solidFill>
+                  <a:srgbClr val="263746"/>
+                </a:solidFill>
+                <a:latin typeface="Microsoft YaHei"/>
+                <a:ea typeface="Microsoft YaHei"/>
+                <a:cs typeface="Microsoft YaHei"/>
+              </a:rPr>
+              <a:t>记录已遇失败 / 放弃备选</a:t>
+            </a:r>
+          </a:p>
+        </p:txBody>
+      </p:sp>
+      <p:sp>
+        <p:nvSpPr>
+          <p:cNvPr id="21" name="p17-n-7">
+            <a:extLst xmlns:a="http://schemas.openxmlformats.org/drawingml/2006/main">
+              <a:ext uri="{FF2B5EF4-FFF2-40B4-BE49-F238E27FC236}">
+                <a16:creationId xmlns:a16="http://schemas.microsoft.com/office/drawing/2014/main" id="{8E981B9F-5E2B-4A1E-B2D1-D335FFA715DE}"/>
+              </a:ext>
+            </a:extLst>
+          </p:cNvPr>
+          <p:cNvSpPr>
+            <a:spLocks xmlns:a="http://schemas.openxmlformats.org/drawingml/2006/main" noGrp="1"/>
+          </p:cNvSpPr>
+          <p:nvPr/>
+        </p:nvSpPr>
+        <p:spPr>
+          <a:xfrm xmlns:a="http://schemas.openxmlformats.org/drawingml/2006/main">
+            <a:off x="4400550" y="3238500"/>
+            <a:ext cx="438150" cy="438150"/>
+          </a:xfrm>
+          <a:prstGeom xmlns:a="http://schemas.openxmlformats.org/drawingml/2006/main" prst="roundRect">
+            <a:avLst>
+              <a:gd name="adj" fmla="val 17391"/>
             </a:avLst>
           </a:prstGeom>
           <a:solidFill xmlns:a="http://schemas.openxmlformats.org/drawingml/2006/main">
@@ -12682,25 +12862,200 @@
           <p:cNvPr id="22" name="p17-t-7">
             <a:extLst xmlns:a="http://schemas.openxmlformats.org/drawingml/2006/main">
               <a:ext uri="{FF2B5EF4-FFF2-40B4-BE49-F238E27FC236}">
-                <a16:creationId xmlns:a16="http://schemas.microsoft.com/office/drawing/2014/main" id="{44CCDD22-137A-4E20-ACE7-E9B5049D35CF}"/>
-              </a:ext>
-            </a:extLst>
-          </p:cNvPr>
-          <p:cNvSpPr>
-            <a:spLocks xmlns:a="http://schemas.openxmlformats.org/drawingml/2006/main" noGrp="1"/>
-          </p:cNvSpPr>
-          <p:nvPr/>
-        </p:nvSpPr>
-        <p:spPr>
-          <a:xfrm xmlns:a="http://schemas.openxmlformats.org/drawingml/2006/main">
-            <a:off x="6800850" y="3657600"/>
-            <a:ext cx="4857750" cy="457200"/>
+                <a16:creationId xmlns:a16="http://schemas.microsoft.com/office/drawing/2014/main" id="{DA55403A-DF89-4B4D-B8C8-069F01D81479}"/>
+              </a:ext>
+            </a:extLst>
+          </p:cNvPr>
+          <p:cNvSpPr>
+            <a:spLocks xmlns:a="http://schemas.openxmlformats.org/drawingml/2006/main" noGrp="1"/>
+          </p:cNvSpPr>
+          <p:nvPr/>
+        </p:nvSpPr>
+        <p:spPr>
+          <a:xfrm xmlns:a="http://schemas.openxmlformats.org/drawingml/2006/main">
+            <a:off x="4933950" y="3200400"/>
+            <a:ext cx="3238500" cy="514350"/>
+          </a:xfrm>
+          <a:prstGeom xmlns:a="http://schemas.openxmlformats.org/drawingml/2006/main" prst="roundRect">
+            <a:avLst>
+              <a:gd name="adj" fmla="val 14815"/>
+            </a:avLst>
+          </a:prstGeom>
+          <a:solidFill xmlns:a="http://schemas.openxmlformats.org/drawingml/2006/main">
+            <a:srgbClr val="F3F6F7"/>
+          </a:solidFill>
+          <a:ln xmlns:a="http://schemas.openxmlformats.org/drawingml/2006/main" w="9525">
+            <a:solidFill>
+              <a:srgbClr val="D6DDE2"/>
+            </a:solidFill>
+            <a:prstDash val="solid"/>
+          </a:ln>
+        </p:spPr>
+        <p:txBody>
+          <a:bodyPr xmlns:a="http://schemas.openxmlformats.org/drawingml/2006/main" lIns="76200" tIns="38100" rIns="76200" bIns="38100" anchor="ctr"/>
+          <a:lstStyle xmlns:a="http://schemas.openxmlformats.org/drawingml/2006/main"/>
+          <a:p xmlns:a="http://schemas.openxmlformats.org/drawingml/2006/main">
+            <a:pPr algn="ctr">
+              <a:defRPr sz="1350" b="1">
+                <a:solidFill>
+                  <a:srgbClr val="263746"/>
+                </a:solidFill>
+              </a:defRPr>
+            </a:pPr>
+            <a:r>
+              <a:rPr sz="1350" b="1">
+                <a:solidFill>
+                  <a:srgbClr val="263746"/>
+                </a:solidFill>
+                <a:latin typeface="Microsoft YaHei"/>
+                <a:ea typeface="Microsoft YaHei"/>
+                <a:cs typeface="Microsoft YaHei"/>
+              </a:rPr>
+              <a:t>启动模板迁移</a:t>
+            </a:r>
+          </a:p>
+        </p:txBody>
+      </p:sp>
+      <p:sp>
+        <p:nvSpPr>
+          <p:cNvPr id="23" name="p17-n-8">
+            <a:extLst xmlns:a="http://schemas.openxmlformats.org/drawingml/2006/main">
+              <a:ext uri="{FF2B5EF4-FFF2-40B4-BE49-F238E27FC236}">
+                <a16:creationId xmlns:a16="http://schemas.microsoft.com/office/drawing/2014/main" id="{C201D8DA-D3D0-4723-B7D8-4DFCE4A037D3}"/>
+              </a:ext>
+            </a:extLst>
+          </p:cNvPr>
+          <p:cNvSpPr>
+            <a:spLocks xmlns:a="http://schemas.openxmlformats.org/drawingml/2006/main" noGrp="1"/>
+          </p:cNvSpPr>
+          <p:nvPr/>
+        </p:nvSpPr>
+        <p:spPr>
+          <a:xfrm xmlns:a="http://schemas.openxmlformats.org/drawingml/2006/main">
+            <a:off x="8343900" y="3238500"/>
+            <a:ext cx="438150" cy="438150"/>
+          </a:xfrm>
+          <a:prstGeom xmlns:a="http://schemas.openxmlformats.org/drawingml/2006/main" prst="roundRect">
+            <a:avLst>
+              <a:gd name="adj" fmla="val 17391"/>
+            </a:avLst>
+          </a:prstGeom>
+          <a:solidFill xmlns:a="http://schemas.openxmlformats.org/drawingml/2006/main">
+            <a:srgbClr val="18354E"/>
+          </a:solidFill>
+          <a:ln xmlns:a="http://schemas.openxmlformats.org/drawingml/2006/main" w="0">
+            <a:noFill/>
+            <a:prstDash val="solid"/>
+          </a:ln>
+        </p:spPr>
+        <p:txBody>
+          <a:bodyPr xmlns:a="http://schemas.openxmlformats.org/drawingml/2006/main" lIns="76200" tIns="38100" rIns="76200" bIns="38100" anchor="ctr"/>
+          <a:lstStyle xmlns:a="http://schemas.openxmlformats.org/drawingml/2006/main"/>
+          <a:p xmlns:a="http://schemas.openxmlformats.org/drawingml/2006/main">
+            <a:pPr algn="ctr">
+              <a:defRPr sz="1350" b="1">
+                <a:solidFill>
+                  <a:srgbClr val="FFFFFF"/>
+                </a:solidFill>
+              </a:defRPr>
+            </a:pPr>
+            <a:r>
+              <a:rPr sz="1350" b="1">
+                <a:solidFill>
+                  <a:srgbClr val="FFFFFF"/>
+                </a:solidFill>
+                <a:latin typeface="Arial"/>
+                <a:ea typeface="Arial"/>
+                <a:cs typeface="Arial"/>
+              </a:rPr>
+              <a:t>9</a:t>
+            </a:r>
+          </a:p>
+        </p:txBody>
+      </p:sp>
+      <p:sp>
+        <p:nvSpPr>
+          <p:cNvPr id="24" name="p17-t-8">
+            <a:extLst xmlns:a="http://schemas.openxmlformats.org/drawingml/2006/main">
+              <a:ext uri="{FF2B5EF4-FFF2-40B4-BE49-F238E27FC236}">
+                <a16:creationId xmlns:a16="http://schemas.microsoft.com/office/drawing/2014/main" id="{F1021BFB-0BDB-47F5-A101-C6A2492D883F}"/>
+              </a:ext>
+            </a:extLst>
+          </p:cNvPr>
+          <p:cNvSpPr>
+            <a:spLocks xmlns:a="http://schemas.openxmlformats.org/drawingml/2006/main" noGrp="1"/>
+          </p:cNvSpPr>
+          <p:nvPr/>
+        </p:nvSpPr>
+        <p:spPr>
+          <a:xfrm xmlns:a="http://schemas.openxmlformats.org/drawingml/2006/main">
+            <a:off x="8877300" y="3200400"/>
+            <a:ext cx="3238500" cy="514350"/>
+          </a:xfrm>
+          <a:prstGeom xmlns:a="http://schemas.openxmlformats.org/drawingml/2006/main" prst="roundRect">
+            <a:avLst>
+              <a:gd name="adj" fmla="val 14815"/>
+            </a:avLst>
+          </a:prstGeom>
+          <a:solidFill xmlns:a="http://schemas.openxmlformats.org/drawingml/2006/main">
+            <a:srgbClr val="F3F6F7"/>
+          </a:solidFill>
+          <a:ln xmlns:a="http://schemas.openxmlformats.org/drawingml/2006/main" w="9525">
+            <a:solidFill>
+              <a:srgbClr val="D6DDE2"/>
+            </a:solidFill>
+            <a:prstDash val="solid"/>
+          </a:ln>
+        </p:spPr>
+        <p:txBody>
+          <a:bodyPr xmlns:a="http://schemas.openxmlformats.org/drawingml/2006/main" lIns="76200" tIns="38100" rIns="76200" bIns="38100" anchor="ctr"/>
+          <a:lstStyle xmlns:a="http://schemas.openxmlformats.org/drawingml/2006/main"/>
+          <a:p xmlns:a="http://schemas.openxmlformats.org/drawingml/2006/main">
+            <a:pPr algn="ctr">
+              <a:defRPr sz="1350" b="1">
+                <a:solidFill>
+                  <a:srgbClr val="263746"/>
+                </a:solidFill>
+              </a:defRPr>
+            </a:pPr>
+            <a:r>
+              <a:rPr sz="1350" b="1">
+                <a:solidFill>
+                  <a:srgbClr val="263746"/>
+                </a:solidFill>
+                <a:latin typeface="Microsoft YaHei"/>
+                <a:ea typeface="Microsoft YaHei"/>
+                <a:cs typeface="Microsoft YaHei"/>
+              </a:rPr>
+              <a:t>对照九项标状态</a:t>
+            </a:r>
+          </a:p>
+        </p:txBody>
+      </p:sp>
+      <p:sp>
+        <p:nvSpPr>
+          <p:cNvPr id="25" name="p17-path">
+            <a:extLst xmlns:a="http://schemas.openxmlformats.org/drawingml/2006/main">
+              <a:ext uri="{FF2B5EF4-FFF2-40B4-BE49-F238E27FC236}">
+                <a16:creationId xmlns:a16="http://schemas.microsoft.com/office/drawing/2014/main" id="{FE5C6DA2-ECC3-4FF9-A915-B0371AA16424}"/>
+              </a:ext>
+            </a:extLst>
+          </p:cNvPr>
+          <p:cNvSpPr>
+            <a:spLocks xmlns:a="http://schemas.openxmlformats.org/drawingml/2006/main" noGrp="1"/>
+          </p:cNvSpPr>
+          <p:nvPr/>
+        </p:nvSpPr>
+        <p:spPr>
+          <a:xfrm xmlns:a="http://schemas.openxmlformats.org/drawingml/2006/main">
+            <a:off x="838200" y="4419600"/>
+            <a:ext cx="4743450" cy="533400"/>
           </a:xfrm>
           <a:prstGeom xmlns:a="http://schemas.openxmlformats.org/drawingml/2006/main" prst="rect">
             <a:avLst/>
           </a:prstGeom>
           <a:solidFill xmlns:a="http://schemas.openxmlformats.org/drawingml/2006/main">
-            <a:srgbClr val="F3F6F7"/>
+            <a:srgbClr val="E8F0F6"/>
           </a:solidFill>
           <a:ln xmlns:a="http://schemas.openxmlformats.org/drawingml/2006/main" w="0">
             <a:noFill/>
@@ -12711,61 +13066,6 @@
           <a:bodyPr xmlns:a="http://schemas.openxmlformats.org/drawingml/2006/main" lIns="76200" tIns="38100" rIns="76200" bIns="38100" anchor="ctr"/>
           <a:lstStyle xmlns:a="http://schemas.openxmlformats.org/drawingml/2006/main"/>
           <a:p xmlns:a="http://schemas.openxmlformats.org/drawingml/2006/main">
-            <a:pPr algn="l">
-              <a:defRPr sz="1350" b="1">
-                <a:solidFill>
-                  <a:srgbClr val="263746"/>
-                </a:solidFill>
-              </a:defRPr>
-            </a:pPr>
-            <a:r>
-              <a:rPr sz="1350" b="1">
-                <a:solidFill>
-                  <a:srgbClr val="263746"/>
-                </a:solidFill>
-                <a:latin typeface="Microsoft YaHei"/>
-                <a:ea typeface="Microsoft YaHei"/>
-                <a:cs typeface="Microsoft YaHei"/>
-              </a:rPr>
-              <a:t>对照八项门条件标状态</a:t>
-            </a:r>
-          </a:p>
-        </p:txBody>
-      </p:sp>
-      <p:sp>
-        <p:nvSpPr>
-          <p:cNvPr id="23" name="p17-path">
-            <a:extLst xmlns:a="http://schemas.openxmlformats.org/drawingml/2006/main">
-              <a:ext uri="{FF2B5EF4-FFF2-40B4-BE49-F238E27FC236}">
-                <a16:creationId xmlns:a16="http://schemas.microsoft.com/office/drawing/2014/main" id="{FC6BED60-5C05-4BAB-83F5-8CC7B966B1C3}"/>
-              </a:ext>
-            </a:extLst>
-          </p:cNvPr>
-          <p:cNvSpPr>
-            <a:spLocks xmlns:a="http://schemas.openxmlformats.org/drawingml/2006/main" noGrp="1"/>
-          </p:cNvSpPr>
-          <p:nvPr/>
-        </p:nvSpPr>
-        <p:spPr>
-          <a:xfrm xmlns:a="http://schemas.openxmlformats.org/drawingml/2006/main">
-            <a:off x="838200" y="4591050"/>
-            <a:ext cx="4743450" cy="533400"/>
-          </a:xfrm>
-          <a:prstGeom xmlns:a="http://schemas.openxmlformats.org/drawingml/2006/main" prst="rect">
-            <a:avLst/>
-          </a:prstGeom>
-          <a:solidFill xmlns:a="http://schemas.openxmlformats.org/drawingml/2006/main">
-            <a:srgbClr val="E8F0F6"/>
-          </a:solidFill>
-          <a:ln xmlns:a="http://schemas.openxmlformats.org/drawingml/2006/main" w="0">
-            <a:noFill/>
-            <a:prstDash val="solid"/>
-          </a:ln>
-        </p:spPr>
-        <p:txBody>
-          <a:bodyPr xmlns:a="http://schemas.openxmlformats.org/drawingml/2006/main" lIns="76200" tIns="38100" rIns="76200" bIns="38100" anchor="ctr"/>
-          <a:lstStyle xmlns:a="http://schemas.openxmlformats.org/drawingml/2006/main"/>
-          <a:p xmlns:a="http://schemas.openxmlformats.org/drawingml/2006/main">
             <a:pPr algn="ctr">
               <a:defRPr sz="1650" b="1">
                 <a:solidFill>
@@ -12789,21 +13089,21 @@
       </p:sp>
       <p:sp>
         <p:nvSpPr>
-          <p:cNvPr id="24" name="p17-files">
-            <a:extLst xmlns:a="http://schemas.openxmlformats.org/drawingml/2006/main">
-              <a:ext uri="{FF2B5EF4-FFF2-40B4-BE49-F238E27FC236}">
-                <a16:creationId xmlns:a16="http://schemas.microsoft.com/office/drawing/2014/main" id="{6E5C44B3-2695-4F50-80F0-4F11A0F8F496}"/>
-              </a:ext>
-            </a:extLst>
-          </p:cNvPr>
-          <p:cNvSpPr>
-            <a:spLocks xmlns:a="http://schemas.openxmlformats.org/drawingml/2006/main" noGrp="1"/>
-          </p:cNvSpPr>
-          <p:nvPr/>
-        </p:nvSpPr>
-        <p:spPr>
-          <a:xfrm xmlns:a="http://schemas.openxmlformats.org/drawingml/2006/main">
-            <a:off x="5848350" y="4514850"/>
+          <p:cNvPr id="26" name="p17-files">
+            <a:extLst xmlns:a="http://schemas.openxmlformats.org/drawingml/2006/main">
+              <a:ext uri="{FF2B5EF4-FFF2-40B4-BE49-F238E27FC236}">
+                <a16:creationId xmlns:a16="http://schemas.microsoft.com/office/drawing/2014/main" id="{1A9CC5E7-CD4B-4C99-9285-7FEA9559A213}"/>
+              </a:ext>
+            </a:extLst>
+          </p:cNvPr>
+          <p:cNvSpPr>
+            <a:spLocks xmlns:a="http://schemas.openxmlformats.org/drawingml/2006/main" noGrp="1"/>
+          </p:cNvSpPr>
+          <p:nvPr/>
+        </p:nvSpPr>
+        <p:spPr>
+          <a:xfrm xmlns:a="http://schemas.openxmlformats.org/drawingml/2006/main">
+            <a:off x="5848350" y="4343400"/>
             <a:ext cx="5676900" cy="685800"/>
           </a:xfrm>
           <a:prstGeom xmlns:a="http://schemas.openxmlformats.org/drawingml/2006/main" prst="rect">
@@ -12841,7 +13141,7 @@
                 <a:ea typeface="Microsoft YaHei"/>
                 <a:cs typeface="Microsoft YaHei"/>
               </a:rPr>
-              <a:t>写入：experiment-spec.md</a:t>
+              <a:t>写入：experiment-spec.md｜hypothesis-and-judgment.md</a:t>
             </a:r>
           </a:p>
           <a:p xmlns:a="http://schemas.openxmlformats.org/drawingml/2006/main">
@@ -12865,17 +13165,17 @@
                 <a:ea typeface="Microsoft YaHei"/>
                 <a:cs typeface="Microsoft YaHei"/>
               </a:rPr>
-              <a:t>hypothesis-and-judgment.md｜peer-review.md</a:t>
-            </a:r>
-          </a:p>
-        </p:txBody>
-      </p:sp>
-      <p:sp>
-        <p:nvSpPr>
-          <p:cNvPr id="25" name="p17-fallback">
-            <a:extLst xmlns:a="http://schemas.openxmlformats.org/drawingml/2006/main">
-              <a:ext uri="{FF2B5EF4-FFF2-40B4-BE49-F238E27FC236}">
-                <a16:creationId xmlns:a16="http://schemas.microsoft.com/office/drawing/2014/main" id="{92CB6817-FEF0-44A7-AD4C-D7FEF77A1DFD}"/>
+              <a:t>peer-review.md｜failure-log.md</a:t>
+            </a:r>
+          </a:p>
+        </p:txBody>
+      </p:sp>
+      <p:sp>
+        <p:nvSpPr>
+          <p:cNvPr id="27" name="p17-fallback">
+            <a:extLst xmlns:a="http://schemas.openxmlformats.org/drawingml/2006/main">
+              <a:ext uri="{FF2B5EF4-FFF2-40B4-BE49-F238E27FC236}">
+                <a16:creationId xmlns:a16="http://schemas.microsoft.com/office/drawing/2014/main" id="{DC7B5938-87EC-420F-9092-7B1D53F13999}"/>
               </a:ext>
             </a:extLst>
           </p:cNvPr>
@@ -13022,7 +13322,7 @@
           <p:cNvPr id="6" name="p18-time">
             <a:extLst xmlns:a="http://schemas.openxmlformats.org/drawingml/2006/main">
               <a:ext uri="{FF2B5EF4-FFF2-40B4-BE49-F238E27FC236}">
-                <a16:creationId xmlns:a16="http://schemas.microsoft.com/office/drawing/2014/main" id="{37116290-D714-4427-95A8-70DD7C224B58}"/>
+                <a16:creationId xmlns:a16="http://schemas.microsoft.com/office/drawing/2014/main" id="{512A231B-AF19-41DD-B274-B45BEF4E6558}"/>
               </a:ext>
             </a:extLst>
           </p:cNvPr>
@@ -13075,7 +13375,7 @@
           <p:cNvPr id="7" name="p18-check-title">
             <a:extLst xmlns:a="http://schemas.openxmlformats.org/drawingml/2006/main">
               <a:ext uri="{FF2B5EF4-FFF2-40B4-BE49-F238E27FC236}">
-                <a16:creationId xmlns:a16="http://schemas.microsoft.com/office/drawing/2014/main" id="{3136DA3C-FF70-43ED-ACC0-96D6D3D517F2}"/>
+                <a16:creationId xmlns:a16="http://schemas.microsoft.com/office/drawing/2014/main" id="{F082680A-8862-4726-A775-906F1A820B4E}"/>
               </a:ext>
             </a:extLst>
           </p:cNvPr>
@@ -13128,7 +13428,7 @@
           <p:cNvPr id="8" name="p18-c-0">
             <a:extLst xmlns:a="http://schemas.openxmlformats.org/drawingml/2006/main">
               <a:ext uri="{FF2B5EF4-FFF2-40B4-BE49-F238E27FC236}">
-                <a16:creationId xmlns:a16="http://schemas.microsoft.com/office/drawing/2014/main" id="{2B0EBC3E-93AE-4CE0-9F41-78AECA4149FA}"/>
+                <a16:creationId xmlns:a16="http://schemas.microsoft.com/office/drawing/2014/main" id="{EDC35436-4D0E-4648-9F8B-6A3F6EF1FE9D}"/>
               </a:ext>
             </a:extLst>
           </p:cNvPr>
@@ -13185,7 +13485,7 @@
           <p:cNvPr id="9" name="p18-t-0">
             <a:extLst xmlns:a="http://schemas.openxmlformats.org/drawingml/2006/main">
               <a:ext uri="{FF2B5EF4-FFF2-40B4-BE49-F238E27FC236}">
-                <a16:creationId xmlns:a16="http://schemas.microsoft.com/office/drawing/2014/main" id="{05AA306A-48BA-421F-B0A9-28517D8B1CA1}"/>
+                <a16:creationId xmlns:a16="http://schemas.microsoft.com/office/drawing/2014/main" id="{142159DC-C53A-4885-861B-9AE2082CA76F}"/>
               </a:ext>
             </a:extLst>
           </p:cNvPr>
@@ -13240,7 +13540,7 @@
           <p:cNvPr id="10" name="p18-c-1">
             <a:extLst xmlns:a="http://schemas.openxmlformats.org/drawingml/2006/main">
               <a:ext uri="{FF2B5EF4-FFF2-40B4-BE49-F238E27FC236}">
-                <a16:creationId xmlns:a16="http://schemas.microsoft.com/office/drawing/2014/main" id="{8C3883FC-1297-4FCC-9B5B-FFA2A529BE54}"/>
+                <a16:creationId xmlns:a16="http://schemas.microsoft.com/office/drawing/2014/main" id="{9A06D4B2-32F2-4152-8783-2F721FDF8B9C}"/>
               </a:ext>
             </a:extLst>
           </p:cNvPr>
@@ -13297,7 +13597,7 @@
           <p:cNvPr id="11" name="p18-t-1">
             <a:extLst xmlns:a="http://schemas.openxmlformats.org/drawingml/2006/main">
               <a:ext uri="{FF2B5EF4-FFF2-40B4-BE49-F238E27FC236}">
-                <a16:creationId xmlns:a16="http://schemas.microsoft.com/office/drawing/2014/main" id="{3D8B3B39-845E-44E1-BB40-B61F698B3138}"/>
+                <a16:creationId xmlns:a16="http://schemas.microsoft.com/office/drawing/2014/main" id="{E6AD41BA-8980-4C40-A19C-6CD7A322D641}"/>
               </a:ext>
             </a:extLst>
           </p:cNvPr>
@@ -13352,7 +13652,7 @@
           <p:cNvPr id="12" name="p18-c-2">
             <a:extLst xmlns:a="http://schemas.openxmlformats.org/drawingml/2006/main">
               <a:ext uri="{FF2B5EF4-FFF2-40B4-BE49-F238E27FC236}">
-                <a16:creationId xmlns:a16="http://schemas.microsoft.com/office/drawing/2014/main" id="{1C8FF6C5-8E6F-42F5-A16D-2AF836C943A9}"/>
+                <a16:creationId xmlns:a16="http://schemas.microsoft.com/office/drawing/2014/main" id="{B25764B9-D8D9-4047-9C3B-C185F4B8011E}"/>
               </a:ext>
             </a:extLst>
           </p:cNvPr>
@@ -13409,7 +13709,7 @@
           <p:cNvPr id="13" name="p18-t-2">
             <a:extLst xmlns:a="http://schemas.openxmlformats.org/drawingml/2006/main">
               <a:ext uri="{FF2B5EF4-FFF2-40B4-BE49-F238E27FC236}">
-                <a16:creationId xmlns:a16="http://schemas.microsoft.com/office/drawing/2014/main" id="{F294B73B-2E55-4071-9A70-33D2E74C2E2C}"/>
+                <a16:creationId xmlns:a16="http://schemas.microsoft.com/office/drawing/2014/main" id="{7DB59B72-E81B-42FC-B5DD-858E118C2A77}"/>
               </a:ext>
             </a:extLst>
           </p:cNvPr>
@@ -13464,7 +13764,7 @@
           <p:cNvPr id="14" name="p18-c-3">
             <a:extLst xmlns:a="http://schemas.openxmlformats.org/drawingml/2006/main">
               <a:ext uri="{FF2B5EF4-FFF2-40B4-BE49-F238E27FC236}">
-                <a16:creationId xmlns:a16="http://schemas.microsoft.com/office/drawing/2014/main" id="{1ACFF010-5248-4254-9847-C4E51688E920}"/>
+                <a16:creationId xmlns:a16="http://schemas.microsoft.com/office/drawing/2014/main" id="{9D300384-EB26-48BB-9635-E20B1B202754}"/>
               </a:ext>
             </a:extLst>
           </p:cNvPr>
@@ -13521,7 +13821,7 @@
           <p:cNvPr id="15" name="p18-t-3">
             <a:extLst xmlns:a="http://schemas.openxmlformats.org/drawingml/2006/main">
               <a:ext uri="{FF2B5EF4-FFF2-40B4-BE49-F238E27FC236}">
-                <a16:creationId xmlns:a16="http://schemas.microsoft.com/office/drawing/2014/main" id="{32CD1C81-2123-4CEA-93BF-DF109C7950EF}"/>
+                <a16:creationId xmlns:a16="http://schemas.microsoft.com/office/drawing/2014/main" id="{1C330E01-C461-4857-80CA-60C6ED3B6455}"/>
               </a:ext>
             </a:extLst>
           </p:cNvPr>
@@ -13576,7 +13876,7 @@
           <p:cNvPr id="16" name="p18-c-4">
             <a:extLst xmlns:a="http://schemas.openxmlformats.org/drawingml/2006/main">
               <a:ext uri="{FF2B5EF4-FFF2-40B4-BE49-F238E27FC236}">
-                <a16:creationId xmlns:a16="http://schemas.microsoft.com/office/drawing/2014/main" id="{636BA6A3-6C2B-49D5-99E4-FCBE39A08FFD}"/>
+                <a16:creationId xmlns:a16="http://schemas.microsoft.com/office/drawing/2014/main" id="{194FE123-2BAB-4A9C-919C-500DF8BD9FE9}"/>
               </a:ext>
             </a:extLst>
           </p:cNvPr>
@@ -13633,7 +13933,7 @@
           <p:cNvPr id="17" name="p18-t-4">
             <a:extLst xmlns:a="http://schemas.openxmlformats.org/drawingml/2006/main">
               <a:ext uri="{FF2B5EF4-FFF2-40B4-BE49-F238E27FC236}">
-                <a16:creationId xmlns:a16="http://schemas.microsoft.com/office/drawing/2014/main" id="{0C1E034D-6849-47AA-B020-C11C4039B622}"/>
+                <a16:creationId xmlns:a16="http://schemas.microsoft.com/office/drawing/2014/main" id="{608AA3D8-442F-4B2E-BD15-284F56AAFB66}"/>
               </a:ext>
             </a:extLst>
           </p:cNvPr>
@@ -13678,7 +13978,7 @@
                 <a:ea typeface="Microsoft YaHei"/>
                 <a:cs typeface="Microsoft YaHei"/>
               </a:rPr>
-              <a:t>实验记录至少 1 行可追溯</a:t>
+              <a:t>失败事实与实验记录可追溯</a:t>
             </a:r>
           </a:p>
         </p:txBody>
@@ -13688,7 +13988,7 @@
           <p:cNvPr id="18" name="p18-tree-title">
             <a:extLst xmlns:a="http://schemas.openxmlformats.org/drawingml/2006/main">
               <a:ext uri="{FF2B5EF4-FFF2-40B4-BE49-F238E27FC236}">
-                <a16:creationId xmlns:a16="http://schemas.microsoft.com/office/drawing/2014/main" id="{84993C59-A7FA-4CC9-8ADC-872B11B55800}"/>
+                <a16:creationId xmlns:a16="http://schemas.microsoft.com/office/drawing/2014/main" id="{C478686F-AB35-41BB-9A0D-DD9D9B1E8E4A}"/>
               </a:ext>
             </a:extLst>
           </p:cNvPr>
@@ -13741,7 +14041,7 @@
           <p:cNvPr id="19" name="p18-tree">
             <a:extLst xmlns:a="http://schemas.openxmlformats.org/drawingml/2006/main">
               <a:ext uri="{FF2B5EF4-FFF2-40B4-BE49-F238E27FC236}">
-                <a16:creationId xmlns:a16="http://schemas.microsoft.com/office/drawing/2014/main" id="{8B92F3B1-567E-4809-95DE-DB94307A70E1}"/>
+                <a16:creationId xmlns:a16="http://schemas.microsoft.com/office/drawing/2014/main" id="{C7F3B825-5E7B-41F1-96DA-8D055E42FAB4}"/>
               </a:ext>
             </a:extLst>
           </p:cNvPr>
@@ -13776,17 +14076,17 @@
           <a:p xmlns:a="http://schemas.openxmlformats.org/drawingml/2006/main">
             <a:pPr algn="l">
               <a:lnSpc>
-                <a:spcPct val="102000"/>
+                <a:spcPct val="100000"/>
               </a:lnSpc>
               <a:buNone/>
-              <a:defRPr sz="1425" b="1">
+              <a:defRPr sz="1350" b="1">
                 <a:solidFill>
                   <a:srgbClr val="18354E"/>
                 </a:solidFill>
               </a:defRPr>
             </a:pPr>
             <a:r>
-              <a:rPr sz="1425" b="1">
+              <a:rPr sz="1350" b="1">
                 <a:solidFill>
                   <a:srgbClr val="18354E"/>
                 </a:solidFill>
@@ -13800,17 +14100,17 @@
           <a:p xmlns:a="http://schemas.openxmlformats.org/drawingml/2006/main">
             <a:pPr algn="l">
               <a:lnSpc>
-                <a:spcPct val="102000"/>
+                <a:spcPct val="100000"/>
               </a:lnSpc>
               <a:buNone/>
-              <a:defRPr sz="1425" b="1">
+              <a:defRPr sz="1350" b="1">
                 <a:solidFill>
                   <a:srgbClr val="18354E"/>
                 </a:solidFill>
               </a:defRPr>
             </a:pPr>
             <a:r>
-              <a:rPr sz="1425" b="1">
+              <a:rPr sz="1350" b="1">
                 <a:solidFill>
                   <a:srgbClr val="18354E"/>
                 </a:solidFill>
@@ -13824,17 +14124,17 @@
           <a:p xmlns:a="http://schemas.openxmlformats.org/drawingml/2006/main">
             <a:pPr algn="l">
               <a:lnSpc>
-                <a:spcPct val="102000"/>
+                <a:spcPct val="100000"/>
               </a:lnSpc>
               <a:buNone/>
-              <a:defRPr sz="1425" b="1">
+              <a:defRPr sz="1350" b="1">
                 <a:solidFill>
                   <a:srgbClr val="18354E"/>
                 </a:solidFill>
               </a:defRPr>
             </a:pPr>
             <a:r>
-              <a:rPr sz="1425" b="1">
+              <a:rPr sz="1350" b="1">
                 <a:solidFill>
                   <a:srgbClr val="18354E"/>
                 </a:solidFill>
@@ -13848,17 +14148,17 @@
           <a:p xmlns:a="http://schemas.openxmlformats.org/drawingml/2006/main">
             <a:pPr algn="l">
               <a:lnSpc>
-                <a:spcPct val="102000"/>
+                <a:spcPct val="100000"/>
               </a:lnSpc>
               <a:buNone/>
-              <a:defRPr sz="1425" b="1">
+              <a:defRPr sz="1350" b="1">
                 <a:solidFill>
                   <a:srgbClr val="18354E"/>
                 </a:solidFill>
               </a:defRPr>
             </a:pPr>
             <a:r>
-              <a:rPr sz="1425" b="1">
+              <a:rPr sz="1350" b="1">
                 <a:solidFill>
                   <a:srgbClr val="18354E"/>
                 </a:solidFill>
@@ -13872,17 +14172,17 @@
           <a:p xmlns:a="http://schemas.openxmlformats.org/drawingml/2006/main">
             <a:pPr algn="l">
               <a:lnSpc>
-                <a:spcPct val="102000"/>
+                <a:spcPct val="100000"/>
               </a:lnSpc>
               <a:buNone/>
-              <a:defRPr sz="1425" b="1">
+              <a:defRPr sz="1350" b="1">
                 <a:solidFill>
                   <a:srgbClr val="18354E"/>
                 </a:solidFill>
               </a:defRPr>
             </a:pPr>
             <a:r>
-              <a:rPr sz="1425" b="1">
+              <a:rPr sz="1350" b="1">
                 <a:solidFill>
                   <a:srgbClr val="18354E"/>
                 </a:solidFill>
@@ -13896,17 +14196,17 @@
           <a:p xmlns:a="http://schemas.openxmlformats.org/drawingml/2006/main">
             <a:pPr algn="l">
               <a:lnSpc>
-                <a:spcPct val="102000"/>
+                <a:spcPct val="100000"/>
               </a:lnSpc>
               <a:buNone/>
-              <a:defRPr sz="1425" b="1">
+              <a:defRPr sz="1350" b="1">
                 <a:solidFill>
                   <a:srgbClr val="18354E"/>
                 </a:solidFill>
               </a:defRPr>
             </a:pPr>
             <a:r>
-              <a:rPr sz="1425" b="1">
+              <a:rPr sz="1350" b="1">
                 <a:solidFill>
                   <a:srgbClr val="18354E"/>
                 </a:solidFill>
@@ -13920,17 +14220,17 @@
           <a:p xmlns:a="http://schemas.openxmlformats.org/drawingml/2006/main">
             <a:pPr algn="l">
               <a:lnSpc>
-                <a:spcPct val="102000"/>
+                <a:spcPct val="100000"/>
               </a:lnSpc>
               <a:buNone/>
-              <a:defRPr sz="1425" b="1">
+              <a:defRPr sz="1350" b="1">
                 <a:solidFill>
                   <a:srgbClr val="18354E"/>
                 </a:solidFill>
               </a:defRPr>
             </a:pPr>
             <a:r>
-              <a:rPr sz="1425" b="1">
+              <a:rPr sz="1350" b="1">
                 <a:solidFill>
                   <a:srgbClr val="18354E"/>
                 </a:solidFill>
@@ -13944,17 +14244,17 @@
           <a:p xmlns:a="http://schemas.openxmlformats.org/drawingml/2006/main">
             <a:pPr algn="l">
               <a:lnSpc>
-                <a:spcPct val="102000"/>
+                <a:spcPct val="100000"/>
               </a:lnSpc>
               <a:buNone/>
-              <a:defRPr sz="1425" b="1">
+              <a:defRPr sz="1350" b="1">
                 <a:solidFill>
                   <a:srgbClr val="18354E"/>
                 </a:solidFill>
               </a:defRPr>
             </a:pPr>
             <a:r>
-              <a:rPr sz="1425" b="1">
+              <a:rPr sz="1350" b="1">
                 <a:solidFill>
                   <a:srgbClr val="18354E"/>
                 </a:solidFill>
@@ -13968,17 +14268,17 @@
           <a:p xmlns:a="http://schemas.openxmlformats.org/drawingml/2006/main">
             <a:pPr algn="l">
               <a:lnSpc>
-                <a:spcPct val="102000"/>
+                <a:spcPct val="100000"/>
               </a:lnSpc>
               <a:buNone/>
-              <a:defRPr sz="1425" b="1">
+              <a:defRPr sz="1350" b="1">
                 <a:solidFill>
                   <a:srgbClr val="18354E"/>
                 </a:solidFill>
               </a:defRPr>
             </a:pPr>
             <a:r>
-              <a:rPr sz="1425" b="1">
+              <a:rPr sz="1350" b="1">
                 <a:solidFill>
                   <a:srgbClr val="18354E"/>
                 </a:solidFill>
@@ -13992,17 +14292,17 @@
           <a:p xmlns:a="http://schemas.openxmlformats.org/drawingml/2006/main">
             <a:pPr algn="l">
               <a:lnSpc>
-                <a:spcPct val="102000"/>
+                <a:spcPct val="100000"/>
               </a:lnSpc>
               <a:buNone/>
-              <a:defRPr sz="1425" b="1">
+              <a:defRPr sz="1350" b="1">
                 <a:solidFill>
                   <a:srgbClr val="18354E"/>
                 </a:solidFill>
               </a:defRPr>
             </a:pPr>
             <a:r>
-              <a:rPr sz="1425" b="1">
+              <a:rPr sz="1350" b="1">
                 <a:solidFill>
                   <a:srgbClr val="18354E"/>
                 </a:solidFill>
@@ -14016,17 +14316,17 @@
           <a:p xmlns:a="http://schemas.openxmlformats.org/drawingml/2006/main">
             <a:pPr algn="l">
               <a:lnSpc>
-                <a:spcPct val="102000"/>
+                <a:spcPct val="100000"/>
               </a:lnSpc>
               <a:buNone/>
-              <a:defRPr sz="1425" b="1">
+              <a:defRPr sz="1350" b="1">
                 <a:solidFill>
                   <a:srgbClr val="18354E"/>
                 </a:solidFill>
               </a:defRPr>
             </a:pPr>
             <a:r>
-              <a:rPr sz="1425" b="1">
+              <a:rPr sz="1350" b="1">
                 <a:solidFill>
                   <a:srgbClr val="18354E"/>
                 </a:solidFill>
@@ -14034,6 +14334,30 @@
                 <a:ea typeface="Consolas"/>
                 <a:cs typeface="Consolas"/>
               </a:rPr>
+              <a:t>├─ failure-log.md</a:t>
+            </a:r>
+          </a:p>
+          <a:p xmlns:a="http://schemas.openxmlformats.org/drawingml/2006/main">
+            <a:pPr algn="l">
+              <a:lnSpc>
+                <a:spcPct val="100000"/>
+              </a:lnSpc>
+              <a:buNone/>
+              <a:defRPr sz="1350" b="1">
+                <a:solidFill>
+                  <a:srgbClr val="18354E"/>
+                </a:solidFill>
+              </a:defRPr>
+            </a:pPr>
+            <a:r>
+              <a:rPr sz="1350" b="1">
+                <a:solidFill>
+                  <a:srgbClr val="18354E"/>
+                </a:solidFill>
+                <a:latin typeface="Consolas"/>
+                <a:ea typeface="Consolas"/>
+                <a:cs typeface="Consolas"/>
+              </a:rPr>
               <a:t>└─ src/  experiments/  notes/</a:t>
             </a:r>
           </a:p>
@@ -14044,7 +14368,7 @@
           <p:cNvPr id="20" name="p18-bottom">
             <a:extLst xmlns:a="http://schemas.openxmlformats.org/drawingml/2006/main">
               <a:ext uri="{FF2B5EF4-FFF2-40B4-BE49-F238E27FC236}">
-                <a16:creationId xmlns:a16="http://schemas.microsoft.com/office/drawing/2014/main" id="{BC0A3081-7EED-4C08-AF53-2A4253204891}"/>
+                <a16:creationId xmlns:a16="http://schemas.microsoft.com/office/drawing/2014/main" id="{AE225FDF-2700-4211-8E4F-DF97B6CC7918}"/>
               </a:ext>
             </a:extLst>
           </p:cNvPr>
@@ -14193,7 +14517,7 @@
           <p:cNvPr id="6" name="p19-time">
             <a:extLst xmlns:a="http://schemas.openxmlformats.org/drawingml/2006/main">
               <a:ext uri="{FF2B5EF4-FFF2-40B4-BE49-F238E27FC236}">
-                <a16:creationId xmlns:a16="http://schemas.microsoft.com/office/drawing/2014/main" id="{A3D50E6F-08CA-4C56-AD34-08A1E11F8ADD}"/>
+                <a16:creationId xmlns:a16="http://schemas.microsoft.com/office/drawing/2014/main" id="{51A297C1-730D-4BD8-95CF-60BD6A96D7EF}"/>
               </a:ext>
             </a:extLst>
           </p:cNvPr>
@@ -14246,23 +14570,23 @@
           <p:cNvPr id="7" name="p19-n-0">
             <a:extLst xmlns:a="http://schemas.openxmlformats.org/drawingml/2006/main">
               <a:ext uri="{FF2B5EF4-FFF2-40B4-BE49-F238E27FC236}">
-                <a16:creationId xmlns:a16="http://schemas.microsoft.com/office/drawing/2014/main" id="{65DC097F-5C74-4F4B-A812-E1D3C6D86B0A}"/>
-              </a:ext>
-            </a:extLst>
-          </p:cNvPr>
-          <p:cNvSpPr>
-            <a:spLocks xmlns:a="http://schemas.openxmlformats.org/drawingml/2006/main" noGrp="1"/>
-          </p:cNvSpPr>
-          <p:nvPr/>
-        </p:nvSpPr>
-        <p:spPr>
-          <a:xfrm xmlns:a="http://schemas.openxmlformats.org/drawingml/2006/main">
-            <a:off x="533400" y="1200150"/>
-            <a:ext cx="457200" cy="457200"/>
+                <a16:creationId xmlns:a16="http://schemas.microsoft.com/office/drawing/2014/main" id="{21D1CEE2-A412-4613-A2D5-57583AEB4C7D}"/>
+              </a:ext>
+            </a:extLst>
+          </p:cNvPr>
+          <p:cNvSpPr>
+            <a:spLocks xmlns:a="http://schemas.openxmlformats.org/drawingml/2006/main" noGrp="1"/>
+          </p:cNvSpPr>
+          <p:nvPr/>
+        </p:nvSpPr>
+        <p:spPr>
+          <a:xfrm xmlns:a="http://schemas.openxmlformats.org/drawingml/2006/main">
+            <a:off x="457200" y="1238250"/>
+            <a:ext cx="438150" cy="438150"/>
           </a:xfrm>
           <a:prstGeom xmlns:a="http://schemas.openxmlformats.org/drawingml/2006/main" prst="roundRect">
             <a:avLst>
-              <a:gd name="adj" fmla="val 16667"/>
+              <a:gd name="adj" fmla="val 17391"/>
             </a:avLst>
           </a:prstGeom>
           <a:solidFill xmlns:a="http://schemas.openxmlformats.org/drawingml/2006/main">
@@ -14303,78 +14627,82 @@
           <p:cNvPr id="8" name="p19-q-0">
             <a:extLst xmlns:a="http://schemas.openxmlformats.org/drawingml/2006/main">
               <a:ext uri="{FF2B5EF4-FFF2-40B4-BE49-F238E27FC236}">
-                <a16:creationId xmlns:a16="http://schemas.microsoft.com/office/drawing/2014/main" id="{10AD68DA-9A06-43BF-B556-56A3B9B9DF1E}"/>
-              </a:ext>
-            </a:extLst>
-          </p:cNvPr>
-          <p:cNvSpPr>
-            <a:spLocks xmlns:a="http://schemas.openxmlformats.org/drawingml/2006/main" noGrp="1"/>
-          </p:cNvSpPr>
-          <p:nvPr/>
-        </p:nvSpPr>
-        <p:spPr>
-          <a:xfrm xmlns:a="http://schemas.openxmlformats.org/drawingml/2006/main">
-            <a:off x="1104900" y="1200150"/>
-            <a:ext cx="4762500" cy="457200"/>
-          </a:xfrm>
-          <a:prstGeom xmlns:a="http://schemas.openxmlformats.org/drawingml/2006/main" prst="rect">
-            <a:avLst/>
-          </a:prstGeom>
-          <a:solidFill xmlns:a="http://schemas.openxmlformats.org/drawingml/2006/main">
-            <a:srgbClr val="F3F6F7"/>
-          </a:solidFill>
-          <a:ln xmlns:a="http://schemas.openxmlformats.org/drawingml/2006/main" w="0">
-            <a:noFill/>
-            <a:prstDash val="solid"/>
-          </a:ln>
-        </p:spPr>
-        <p:txBody>
-          <a:bodyPr xmlns:a="http://schemas.openxmlformats.org/drawingml/2006/main" lIns="76200" tIns="38100" rIns="76200" bIns="38100" anchor="ctr"/>
-          <a:lstStyle xmlns:a="http://schemas.openxmlformats.org/drawingml/2006/main"/>
-          <a:p xmlns:a="http://schemas.openxmlformats.org/drawingml/2006/main">
-            <a:pPr algn="l">
-              <a:defRPr sz="1350" b="1">
-                <a:solidFill>
-                  <a:srgbClr val="263746"/>
-                </a:solidFill>
-              </a:defRPr>
-            </a:pPr>
-            <a:r>
-              <a:rPr sz="1350" b="1">
-                <a:solidFill>
-                  <a:srgbClr val="263746"/>
-                </a:solidFill>
-                <a:latin typeface="Microsoft YaHei"/>
-                <a:ea typeface="Microsoft YaHei"/>
-                <a:cs typeface="Microsoft YaHei"/>
-              </a:rPr>
-              <a:t>baseline 类型与公平性？</a:t>
-            </a:r>
-          </a:p>
-        </p:txBody>
-      </p:sp>
-      <p:sp>
-        <p:nvSpPr>
-          <p:cNvPr id="9" name="p19-n-1">
-            <a:extLst xmlns:a="http://schemas.openxmlformats.org/drawingml/2006/main">
-              <a:ext uri="{FF2B5EF4-FFF2-40B4-BE49-F238E27FC236}">
-                <a16:creationId xmlns:a16="http://schemas.microsoft.com/office/drawing/2014/main" id="{A94F0B3D-375D-43A9-982E-FC0A780E6B61}"/>
-              </a:ext>
-            </a:extLst>
-          </p:cNvPr>
-          <p:cNvSpPr>
-            <a:spLocks xmlns:a="http://schemas.openxmlformats.org/drawingml/2006/main" noGrp="1"/>
-          </p:cNvSpPr>
-          <p:nvPr/>
-        </p:nvSpPr>
-        <p:spPr>
-          <a:xfrm xmlns:a="http://schemas.openxmlformats.org/drawingml/2006/main">
-            <a:off x="6267450" y="1200150"/>
-            <a:ext cx="457200" cy="457200"/>
+                <a16:creationId xmlns:a16="http://schemas.microsoft.com/office/drawing/2014/main" id="{D6890311-1C76-42D3-B2AC-67B517FB60A9}"/>
+              </a:ext>
+            </a:extLst>
+          </p:cNvPr>
+          <p:cNvSpPr>
+            <a:spLocks xmlns:a="http://schemas.openxmlformats.org/drawingml/2006/main" noGrp="1"/>
+          </p:cNvSpPr>
+          <p:nvPr/>
+        </p:nvSpPr>
+        <p:spPr>
+          <a:xfrm xmlns:a="http://schemas.openxmlformats.org/drawingml/2006/main">
+            <a:off x="990600" y="1200150"/>
+            <a:ext cx="3238500" cy="514350"/>
           </a:xfrm>
           <a:prstGeom xmlns:a="http://schemas.openxmlformats.org/drawingml/2006/main" prst="roundRect">
             <a:avLst>
-              <a:gd name="adj" fmla="val 16667"/>
+              <a:gd name="adj" fmla="val 14815"/>
+            </a:avLst>
+          </a:prstGeom>
+          <a:solidFill xmlns:a="http://schemas.openxmlformats.org/drawingml/2006/main">
+            <a:srgbClr val="F3F6F7"/>
+          </a:solidFill>
+          <a:ln xmlns:a="http://schemas.openxmlformats.org/drawingml/2006/main" w="9525">
+            <a:solidFill>
+              <a:srgbClr val="D6DDE2"/>
+            </a:solidFill>
+            <a:prstDash val="solid"/>
+          </a:ln>
+        </p:spPr>
+        <p:txBody>
+          <a:bodyPr xmlns:a="http://schemas.openxmlformats.org/drawingml/2006/main" lIns="76200" tIns="38100" rIns="76200" bIns="38100" anchor="ctr"/>
+          <a:lstStyle xmlns:a="http://schemas.openxmlformats.org/drawingml/2006/main"/>
+          <a:p xmlns:a="http://schemas.openxmlformats.org/drawingml/2006/main">
+            <a:pPr algn="ctr">
+              <a:defRPr sz="1350" b="1">
+                <a:solidFill>
+                  <a:srgbClr val="263746"/>
+                </a:solidFill>
+              </a:defRPr>
+            </a:pPr>
+            <a:r>
+              <a:rPr sz="1350" b="1">
+                <a:solidFill>
+                  <a:srgbClr val="263746"/>
+                </a:solidFill>
+                <a:latin typeface="Microsoft YaHei"/>
+                <a:ea typeface="Microsoft YaHei"/>
+                <a:cs typeface="Microsoft YaHei"/>
+              </a:rPr>
+              <a:t>baseline 公平？</a:t>
+            </a:r>
+          </a:p>
+        </p:txBody>
+      </p:sp>
+      <p:sp>
+        <p:nvSpPr>
+          <p:cNvPr id="9" name="p19-n-1">
+            <a:extLst xmlns:a="http://schemas.openxmlformats.org/drawingml/2006/main">
+              <a:ext uri="{FF2B5EF4-FFF2-40B4-BE49-F238E27FC236}">
+                <a16:creationId xmlns:a16="http://schemas.microsoft.com/office/drawing/2014/main" id="{AF732A4F-BC36-4C35-B62D-B07882069863}"/>
+              </a:ext>
+            </a:extLst>
+          </p:cNvPr>
+          <p:cNvSpPr>
+            <a:spLocks xmlns:a="http://schemas.openxmlformats.org/drawingml/2006/main" noGrp="1"/>
+          </p:cNvSpPr>
+          <p:nvPr/>
+        </p:nvSpPr>
+        <p:spPr>
+          <a:xfrm xmlns:a="http://schemas.openxmlformats.org/drawingml/2006/main">
+            <a:off x="4400550" y="1238250"/>
+            <a:ext cx="438150" cy="438150"/>
+          </a:xfrm>
+          <a:prstGeom xmlns:a="http://schemas.openxmlformats.org/drawingml/2006/main" prst="roundRect">
+            <a:avLst>
+              <a:gd name="adj" fmla="val 17391"/>
             </a:avLst>
           </a:prstGeom>
           <a:solidFill xmlns:a="http://schemas.openxmlformats.org/drawingml/2006/main">
@@ -14415,78 +14743,82 @@
           <p:cNvPr id="10" name="p19-q-1">
             <a:extLst xmlns:a="http://schemas.openxmlformats.org/drawingml/2006/main">
               <a:ext uri="{FF2B5EF4-FFF2-40B4-BE49-F238E27FC236}">
-                <a16:creationId xmlns:a16="http://schemas.microsoft.com/office/drawing/2014/main" id="{9DA65B4E-FCAA-4213-A5F9-38018FD415A6}"/>
-              </a:ext>
-            </a:extLst>
-          </p:cNvPr>
-          <p:cNvSpPr>
-            <a:spLocks xmlns:a="http://schemas.openxmlformats.org/drawingml/2006/main" noGrp="1"/>
-          </p:cNvSpPr>
-          <p:nvPr/>
-        </p:nvSpPr>
-        <p:spPr>
-          <a:xfrm xmlns:a="http://schemas.openxmlformats.org/drawingml/2006/main">
-            <a:off x="6838950" y="1200150"/>
-            <a:ext cx="4762500" cy="457200"/>
-          </a:xfrm>
-          <a:prstGeom xmlns:a="http://schemas.openxmlformats.org/drawingml/2006/main" prst="rect">
-            <a:avLst/>
-          </a:prstGeom>
-          <a:solidFill xmlns:a="http://schemas.openxmlformats.org/drawingml/2006/main">
-            <a:srgbClr val="F8E9EA"/>
-          </a:solidFill>
-          <a:ln xmlns:a="http://schemas.openxmlformats.org/drawingml/2006/main" w="0">
-            <a:noFill/>
-            <a:prstDash val="solid"/>
-          </a:ln>
-        </p:spPr>
-        <p:txBody>
-          <a:bodyPr xmlns:a="http://schemas.openxmlformats.org/drawingml/2006/main" lIns="76200" tIns="38100" rIns="76200" bIns="38100" anchor="ctr"/>
-          <a:lstStyle xmlns:a="http://schemas.openxmlformats.org/drawingml/2006/main"/>
-          <a:p xmlns:a="http://schemas.openxmlformats.org/drawingml/2006/main">
-            <a:pPr algn="l">
-              <a:defRPr sz="1350" b="1">
-                <a:solidFill>
-                  <a:srgbClr val="263746"/>
-                </a:solidFill>
-              </a:defRPr>
-            </a:pPr>
-            <a:r>
-              <a:rPr sz="1350" b="1">
-                <a:solidFill>
-                  <a:srgbClr val="263746"/>
-                </a:solidFill>
-                <a:latin typeface="Microsoft YaHei"/>
-                <a:ea typeface="Microsoft YaHei"/>
-                <a:cs typeface="Microsoft YaHei"/>
-              </a:rPr>
-              <a:t>种子或等价条件可追溯？</a:t>
-            </a:r>
-          </a:p>
-        </p:txBody>
-      </p:sp>
-      <p:sp>
-        <p:nvSpPr>
-          <p:cNvPr id="11" name="p19-n-2">
-            <a:extLst xmlns:a="http://schemas.openxmlformats.org/drawingml/2006/main">
-              <a:ext uri="{FF2B5EF4-FFF2-40B4-BE49-F238E27FC236}">
-                <a16:creationId xmlns:a16="http://schemas.microsoft.com/office/drawing/2014/main" id="{5467CB02-A4BE-4409-ACF3-49371D4CC164}"/>
-              </a:ext>
-            </a:extLst>
-          </p:cNvPr>
-          <p:cNvSpPr>
-            <a:spLocks xmlns:a="http://schemas.openxmlformats.org/drawingml/2006/main" noGrp="1"/>
-          </p:cNvSpPr>
-          <p:nvPr/>
-        </p:nvSpPr>
-        <p:spPr>
-          <a:xfrm xmlns:a="http://schemas.openxmlformats.org/drawingml/2006/main">
-            <a:off x="533400" y="1981200"/>
-            <a:ext cx="457200" cy="457200"/>
+                <a16:creationId xmlns:a16="http://schemas.microsoft.com/office/drawing/2014/main" id="{FEDEF650-657E-4FA5-95C7-20F2053EB2BB}"/>
+              </a:ext>
+            </a:extLst>
+          </p:cNvPr>
+          <p:cNvSpPr>
+            <a:spLocks xmlns:a="http://schemas.openxmlformats.org/drawingml/2006/main" noGrp="1"/>
+          </p:cNvSpPr>
+          <p:nvPr/>
+        </p:nvSpPr>
+        <p:spPr>
+          <a:xfrm xmlns:a="http://schemas.openxmlformats.org/drawingml/2006/main">
+            <a:off x="4933950" y="1200150"/>
+            <a:ext cx="3238500" cy="514350"/>
           </a:xfrm>
           <a:prstGeom xmlns:a="http://schemas.openxmlformats.org/drawingml/2006/main" prst="roundRect">
             <a:avLst>
-              <a:gd name="adj" fmla="val 16667"/>
+              <a:gd name="adj" fmla="val 14815"/>
+            </a:avLst>
+          </a:prstGeom>
+          <a:solidFill xmlns:a="http://schemas.openxmlformats.org/drawingml/2006/main">
+            <a:srgbClr val="F8E9EA"/>
+          </a:solidFill>
+          <a:ln xmlns:a="http://schemas.openxmlformats.org/drawingml/2006/main" w="9525">
+            <a:solidFill>
+              <a:srgbClr val="D6DDE2"/>
+            </a:solidFill>
+            <a:prstDash val="solid"/>
+          </a:ln>
+        </p:spPr>
+        <p:txBody>
+          <a:bodyPr xmlns:a="http://schemas.openxmlformats.org/drawingml/2006/main" lIns="76200" tIns="38100" rIns="76200" bIns="38100" anchor="ctr"/>
+          <a:lstStyle xmlns:a="http://schemas.openxmlformats.org/drawingml/2006/main"/>
+          <a:p xmlns:a="http://schemas.openxmlformats.org/drawingml/2006/main">
+            <a:pPr algn="ctr">
+              <a:defRPr sz="1350" b="1">
+                <a:solidFill>
+                  <a:srgbClr val="263746"/>
+                </a:solidFill>
+              </a:defRPr>
+            </a:pPr>
+            <a:r>
+              <a:rPr sz="1350" b="1">
+                <a:solidFill>
+                  <a:srgbClr val="263746"/>
+                </a:solidFill>
+                <a:latin typeface="Microsoft YaHei"/>
+                <a:ea typeface="Microsoft YaHei"/>
+                <a:cs typeface="Microsoft YaHei"/>
+              </a:rPr>
+              <a:t>复现条件可追溯？</a:t>
+            </a:r>
+          </a:p>
+        </p:txBody>
+      </p:sp>
+      <p:sp>
+        <p:nvSpPr>
+          <p:cNvPr id="11" name="p19-n-2">
+            <a:extLst xmlns:a="http://schemas.openxmlformats.org/drawingml/2006/main">
+              <a:ext uri="{FF2B5EF4-FFF2-40B4-BE49-F238E27FC236}">
+                <a16:creationId xmlns:a16="http://schemas.microsoft.com/office/drawing/2014/main" id="{76963BAF-5627-4A31-96BE-A25B9F394C39}"/>
+              </a:ext>
+            </a:extLst>
+          </p:cNvPr>
+          <p:cNvSpPr>
+            <a:spLocks xmlns:a="http://schemas.openxmlformats.org/drawingml/2006/main" noGrp="1"/>
+          </p:cNvSpPr>
+          <p:nvPr/>
+        </p:nvSpPr>
+        <p:spPr>
+          <a:xfrm xmlns:a="http://schemas.openxmlformats.org/drawingml/2006/main">
+            <a:off x="8343900" y="1238250"/>
+            <a:ext cx="438150" cy="438150"/>
+          </a:xfrm>
+          <a:prstGeom xmlns:a="http://schemas.openxmlformats.org/drawingml/2006/main" prst="roundRect">
+            <a:avLst>
+              <a:gd name="adj" fmla="val 17391"/>
             </a:avLst>
           </a:prstGeom>
           <a:solidFill xmlns:a="http://schemas.openxmlformats.org/drawingml/2006/main">
@@ -14527,78 +14859,82 @@
           <p:cNvPr id="12" name="p19-q-2">
             <a:extLst xmlns:a="http://schemas.openxmlformats.org/drawingml/2006/main">
               <a:ext uri="{FF2B5EF4-FFF2-40B4-BE49-F238E27FC236}">
-                <a16:creationId xmlns:a16="http://schemas.microsoft.com/office/drawing/2014/main" id="{2BF69308-A820-4FD0-A043-63ACF290C39C}"/>
-              </a:ext>
-            </a:extLst>
-          </p:cNvPr>
-          <p:cNvSpPr>
-            <a:spLocks xmlns:a="http://schemas.openxmlformats.org/drawingml/2006/main" noGrp="1"/>
-          </p:cNvSpPr>
-          <p:nvPr/>
-        </p:nvSpPr>
-        <p:spPr>
-          <a:xfrm xmlns:a="http://schemas.openxmlformats.org/drawingml/2006/main">
-            <a:off x="1104900" y="1981200"/>
-            <a:ext cx="4762500" cy="457200"/>
-          </a:xfrm>
-          <a:prstGeom xmlns:a="http://schemas.openxmlformats.org/drawingml/2006/main" prst="rect">
-            <a:avLst/>
-          </a:prstGeom>
-          <a:solidFill xmlns:a="http://schemas.openxmlformats.org/drawingml/2006/main">
-            <a:srgbClr val="F8E9EA"/>
-          </a:solidFill>
-          <a:ln xmlns:a="http://schemas.openxmlformats.org/drawingml/2006/main" w="0">
-            <a:noFill/>
-            <a:prstDash val="solid"/>
-          </a:ln>
-        </p:spPr>
-        <p:txBody>
-          <a:bodyPr xmlns:a="http://schemas.openxmlformats.org/drawingml/2006/main" lIns="76200" tIns="38100" rIns="76200" bIns="38100" anchor="ctr"/>
-          <a:lstStyle xmlns:a="http://schemas.openxmlformats.org/drawingml/2006/main"/>
-          <a:p xmlns:a="http://schemas.openxmlformats.org/drawingml/2006/main">
-            <a:pPr algn="l">
-              <a:defRPr sz="1350" b="1">
-                <a:solidFill>
-                  <a:srgbClr val="263746"/>
-                </a:solidFill>
-              </a:defRPr>
-            </a:pPr>
-            <a:r>
-              <a:rPr sz="1350" b="1">
-                <a:solidFill>
-                  <a:srgbClr val="263746"/>
-                </a:solidFill>
-                <a:latin typeface="Microsoft YaHei"/>
-                <a:ea typeface="Microsoft YaHei"/>
-                <a:cs typeface="Microsoft YaHei"/>
-              </a:rPr>
-              <a:t>重复计划支持主张强度？</a:t>
-            </a:r>
-          </a:p>
-        </p:txBody>
-      </p:sp>
-      <p:sp>
-        <p:nvSpPr>
-          <p:cNvPr id="13" name="p19-n-3">
-            <a:extLst xmlns:a="http://schemas.openxmlformats.org/drawingml/2006/main">
-              <a:ext uri="{FF2B5EF4-FFF2-40B4-BE49-F238E27FC236}">
-                <a16:creationId xmlns:a16="http://schemas.microsoft.com/office/drawing/2014/main" id="{5097AB66-C732-4A39-9CC4-AF3929E3E485}"/>
-              </a:ext>
-            </a:extLst>
-          </p:cNvPr>
-          <p:cNvSpPr>
-            <a:spLocks xmlns:a="http://schemas.openxmlformats.org/drawingml/2006/main" noGrp="1"/>
-          </p:cNvSpPr>
-          <p:nvPr/>
-        </p:nvSpPr>
-        <p:spPr>
-          <a:xfrm xmlns:a="http://schemas.openxmlformats.org/drawingml/2006/main">
-            <a:off x="6267450" y="1981200"/>
-            <a:ext cx="457200" cy="457200"/>
+                <a16:creationId xmlns:a16="http://schemas.microsoft.com/office/drawing/2014/main" id="{D4C79ACB-8D2B-4F65-B511-DD52396536E6}"/>
+              </a:ext>
+            </a:extLst>
+          </p:cNvPr>
+          <p:cNvSpPr>
+            <a:spLocks xmlns:a="http://schemas.openxmlformats.org/drawingml/2006/main" noGrp="1"/>
+          </p:cNvSpPr>
+          <p:nvPr/>
+        </p:nvSpPr>
+        <p:spPr>
+          <a:xfrm xmlns:a="http://schemas.openxmlformats.org/drawingml/2006/main">
+            <a:off x="8877300" y="1200150"/>
+            <a:ext cx="3238500" cy="514350"/>
           </a:xfrm>
           <a:prstGeom xmlns:a="http://schemas.openxmlformats.org/drawingml/2006/main" prst="roundRect">
             <a:avLst>
-              <a:gd name="adj" fmla="val 16667"/>
+              <a:gd name="adj" fmla="val 14815"/>
+            </a:avLst>
+          </a:prstGeom>
+          <a:solidFill xmlns:a="http://schemas.openxmlformats.org/drawingml/2006/main">
+            <a:srgbClr val="F8E9EA"/>
+          </a:solidFill>
+          <a:ln xmlns:a="http://schemas.openxmlformats.org/drawingml/2006/main" w="9525">
+            <a:solidFill>
+              <a:srgbClr val="D6DDE2"/>
+            </a:solidFill>
+            <a:prstDash val="solid"/>
+          </a:ln>
+        </p:spPr>
+        <p:txBody>
+          <a:bodyPr xmlns:a="http://schemas.openxmlformats.org/drawingml/2006/main" lIns="76200" tIns="38100" rIns="76200" bIns="38100" anchor="ctr"/>
+          <a:lstStyle xmlns:a="http://schemas.openxmlformats.org/drawingml/2006/main"/>
+          <a:p xmlns:a="http://schemas.openxmlformats.org/drawingml/2006/main">
+            <a:pPr algn="ctr">
+              <a:defRPr sz="1350" b="1">
+                <a:solidFill>
+                  <a:srgbClr val="263746"/>
+                </a:solidFill>
+              </a:defRPr>
+            </a:pPr>
+            <a:r>
+              <a:rPr sz="1350" b="1">
+                <a:solidFill>
+                  <a:srgbClr val="263746"/>
+                </a:solidFill>
+                <a:latin typeface="Microsoft YaHei"/>
+                <a:ea typeface="Microsoft YaHei"/>
+                <a:cs typeface="Microsoft YaHei"/>
+              </a:rPr>
+              <a:t>重复计划支持主张？</a:t>
+            </a:r>
+          </a:p>
+        </p:txBody>
+      </p:sp>
+      <p:sp>
+        <p:nvSpPr>
+          <p:cNvPr id="13" name="p19-n-3">
+            <a:extLst xmlns:a="http://schemas.openxmlformats.org/drawingml/2006/main">
+              <a:ext uri="{FF2B5EF4-FFF2-40B4-BE49-F238E27FC236}">
+                <a16:creationId xmlns:a16="http://schemas.microsoft.com/office/drawing/2014/main" id="{72E069C0-7F4A-4488-A88A-2E0806C4E922}"/>
+              </a:ext>
+            </a:extLst>
+          </p:cNvPr>
+          <p:cNvSpPr>
+            <a:spLocks xmlns:a="http://schemas.openxmlformats.org/drawingml/2006/main" noGrp="1"/>
+          </p:cNvSpPr>
+          <p:nvPr/>
+        </p:nvSpPr>
+        <p:spPr>
+          <a:xfrm xmlns:a="http://schemas.openxmlformats.org/drawingml/2006/main">
+            <a:off x="457200" y="2228850"/>
+            <a:ext cx="438150" cy="438150"/>
+          </a:xfrm>
+          <a:prstGeom xmlns:a="http://schemas.openxmlformats.org/drawingml/2006/main" prst="roundRect">
+            <a:avLst>
+              <a:gd name="adj" fmla="val 17391"/>
             </a:avLst>
           </a:prstGeom>
           <a:solidFill xmlns:a="http://schemas.openxmlformats.org/drawingml/2006/main">
@@ -14639,78 +14975,82 @@
           <p:cNvPr id="14" name="p19-q-3">
             <a:extLst xmlns:a="http://schemas.openxmlformats.org/drawingml/2006/main">
               <a:ext uri="{FF2B5EF4-FFF2-40B4-BE49-F238E27FC236}">
-                <a16:creationId xmlns:a16="http://schemas.microsoft.com/office/drawing/2014/main" id="{27B27D7E-4B6E-4DE7-84A7-620C3FC0D29C}"/>
-              </a:ext>
-            </a:extLst>
-          </p:cNvPr>
-          <p:cNvSpPr>
-            <a:spLocks xmlns:a="http://schemas.openxmlformats.org/drawingml/2006/main" noGrp="1"/>
-          </p:cNvSpPr>
-          <p:nvPr/>
-        </p:nvSpPr>
-        <p:spPr>
-          <a:xfrm xmlns:a="http://schemas.openxmlformats.org/drawingml/2006/main">
-            <a:off x="6838950" y="1981200"/>
-            <a:ext cx="4762500" cy="457200"/>
-          </a:xfrm>
-          <a:prstGeom xmlns:a="http://schemas.openxmlformats.org/drawingml/2006/main" prst="rect">
-            <a:avLst/>
-          </a:prstGeom>
-          <a:solidFill xmlns:a="http://schemas.openxmlformats.org/drawingml/2006/main">
-            <a:srgbClr val="F8E9EA"/>
-          </a:solidFill>
-          <a:ln xmlns:a="http://schemas.openxmlformats.org/drawingml/2006/main" w="0">
-            <a:noFill/>
-            <a:prstDash val="solid"/>
-          </a:ln>
-        </p:spPr>
-        <p:txBody>
-          <a:bodyPr xmlns:a="http://schemas.openxmlformats.org/drawingml/2006/main" lIns="76200" tIns="38100" rIns="76200" bIns="38100" anchor="ctr"/>
-          <a:lstStyle xmlns:a="http://schemas.openxmlformats.org/drawingml/2006/main"/>
-          <a:p xmlns:a="http://schemas.openxmlformats.org/drawingml/2006/main">
-            <a:pPr algn="l">
-              <a:defRPr sz="1350" b="1">
-                <a:solidFill>
-                  <a:srgbClr val="263746"/>
-                </a:solidFill>
-              </a:defRPr>
-            </a:pPr>
-            <a:r>
-              <a:rPr sz="1350" b="1">
-                <a:solidFill>
-                  <a:srgbClr val="263746"/>
-                </a:solidFill>
-                <a:latin typeface="Microsoft YaHei"/>
-                <a:ea typeface="Microsoft YaHei"/>
-                <a:cs typeface="Microsoft YaHei"/>
-              </a:rPr>
-              <a:t>停止条件预先写明？</a:t>
-            </a:r>
-          </a:p>
-        </p:txBody>
-      </p:sp>
-      <p:sp>
-        <p:nvSpPr>
-          <p:cNvPr id="15" name="p19-n-4">
-            <a:extLst xmlns:a="http://schemas.openxmlformats.org/drawingml/2006/main">
-              <a:ext uri="{FF2B5EF4-FFF2-40B4-BE49-F238E27FC236}">
-                <a16:creationId xmlns:a16="http://schemas.microsoft.com/office/drawing/2014/main" id="{D43AA7DE-5DD7-4756-B5F3-065CEC4E106B}"/>
-              </a:ext>
-            </a:extLst>
-          </p:cNvPr>
-          <p:cNvSpPr>
-            <a:spLocks xmlns:a="http://schemas.openxmlformats.org/drawingml/2006/main" noGrp="1"/>
-          </p:cNvSpPr>
-          <p:nvPr/>
-        </p:nvSpPr>
-        <p:spPr>
-          <a:xfrm xmlns:a="http://schemas.openxmlformats.org/drawingml/2006/main">
-            <a:off x="533400" y="2762250"/>
-            <a:ext cx="457200" cy="457200"/>
+                <a16:creationId xmlns:a16="http://schemas.microsoft.com/office/drawing/2014/main" id="{B3480517-4416-4568-A504-6C5B0DE67EC9}"/>
+              </a:ext>
+            </a:extLst>
+          </p:cNvPr>
+          <p:cNvSpPr>
+            <a:spLocks xmlns:a="http://schemas.openxmlformats.org/drawingml/2006/main" noGrp="1"/>
+          </p:cNvSpPr>
+          <p:nvPr/>
+        </p:nvSpPr>
+        <p:spPr>
+          <a:xfrm xmlns:a="http://schemas.openxmlformats.org/drawingml/2006/main">
+            <a:off x="990600" y="2190750"/>
+            <a:ext cx="3238500" cy="514350"/>
           </a:xfrm>
           <a:prstGeom xmlns:a="http://schemas.openxmlformats.org/drawingml/2006/main" prst="roundRect">
             <a:avLst>
-              <a:gd name="adj" fmla="val 16667"/>
+              <a:gd name="adj" fmla="val 14815"/>
+            </a:avLst>
+          </a:prstGeom>
+          <a:solidFill xmlns:a="http://schemas.openxmlformats.org/drawingml/2006/main">
+            <a:srgbClr val="F8E9EA"/>
+          </a:solidFill>
+          <a:ln xmlns:a="http://schemas.openxmlformats.org/drawingml/2006/main" w="9525">
+            <a:solidFill>
+              <a:srgbClr val="D6DDE2"/>
+            </a:solidFill>
+            <a:prstDash val="solid"/>
+          </a:ln>
+        </p:spPr>
+        <p:txBody>
+          <a:bodyPr xmlns:a="http://schemas.openxmlformats.org/drawingml/2006/main" lIns="76200" tIns="38100" rIns="76200" bIns="38100" anchor="ctr"/>
+          <a:lstStyle xmlns:a="http://schemas.openxmlformats.org/drawingml/2006/main"/>
+          <a:p xmlns:a="http://schemas.openxmlformats.org/drawingml/2006/main">
+            <a:pPr algn="ctr">
+              <a:defRPr sz="1350" b="1">
+                <a:solidFill>
+                  <a:srgbClr val="263746"/>
+                </a:solidFill>
+              </a:defRPr>
+            </a:pPr>
+            <a:r>
+              <a:rPr sz="1350" b="1">
+                <a:solidFill>
+                  <a:srgbClr val="263746"/>
+                </a:solidFill>
+                <a:latin typeface="Microsoft YaHei"/>
+                <a:ea typeface="Microsoft YaHei"/>
+                <a:cs typeface="Microsoft YaHei"/>
+              </a:rPr>
+              <a:t>停止条件预先写？</a:t>
+            </a:r>
+          </a:p>
+        </p:txBody>
+      </p:sp>
+      <p:sp>
+        <p:nvSpPr>
+          <p:cNvPr id="15" name="p19-n-4">
+            <a:extLst xmlns:a="http://schemas.openxmlformats.org/drawingml/2006/main">
+              <a:ext uri="{FF2B5EF4-FFF2-40B4-BE49-F238E27FC236}">
+                <a16:creationId xmlns:a16="http://schemas.microsoft.com/office/drawing/2014/main" id="{7251E959-DC80-42C2-B4B6-5C7C894A3018}"/>
+              </a:ext>
+            </a:extLst>
+          </p:cNvPr>
+          <p:cNvSpPr>
+            <a:spLocks xmlns:a="http://schemas.openxmlformats.org/drawingml/2006/main" noGrp="1"/>
+          </p:cNvSpPr>
+          <p:nvPr/>
+        </p:nvSpPr>
+        <p:spPr>
+          <a:xfrm xmlns:a="http://schemas.openxmlformats.org/drawingml/2006/main">
+            <a:off x="4400550" y="2228850"/>
+            <a:ext cx="438150" cy="438150"/>
+          </a:xfrm>
+          <a:prstGeom xmlns:a="http://schemas.openxmlformats.org/drawingml/2006/main" prst="roundRect">
+            <a:avLst>
+              <a:gd name="adj" fmla="val 17391"/>
             </a:avLst>
           </a:prstGeom>
           <a:solidFill xmlns:a="http://schemas.openxmlformats.org/drawingml/2006/main">
@@ -14751,78 +15091,82 @@
           <p:cNvPr id="16" name="p19-q-4">
             <a:extLst xmlns:a="http://schemas.openxmlformats.org/drawingml/2006/main">
               <a:ext uri="{FF2B5EF4-FFF2-40B4-BE49-F238E27FC236}">
-                <a16:creationId xmlns:a16="http://schemas.microsoft.com/office/drawing/2014/main" id="{A3932610-6D1F-4D48-B37B-854909CD6A77}"/>
-              </a:ext>
-            </a:extLst>
-          </p:cNvPr>
-          <p:cNvSpPr>
-            <a:spLocks xmlns:a="http://schemas.openxmlformats.org/drawingml/2006/main" noGrp="1"/>
-          </p:cNvSpPr>
-          <p:nvPr/>
-        </p:nvSpPr>
-        <p:spPr>
-          <a:xfrm xmlns:a="http://schemas.openxmlformats.org/drawingml/2006/main">
-            <a:off x="1104900" y="2762250"/>
-            <a:ext cx="4762500" cy="457200"/>
-          </a:xfrm>
-          <a:prstGeom xmlns:a="http://schemas.openxmlformats.org/drawingml/2006/main" prst="rect">
-            <a:avLst/>
-          </a:prstGeom>
-          <a:solidFill xmlns:a="http://schemas.openxmlformats.org/drawingml/2006/main">
-            <a:srgbClr val="F3F6F7"/>
-          </a:solidFill>
-          <a:ln xmlns:a="http://schemas.openxmlformats.org/drawingml/2006/main" w="0">
-            <a:noFill/>
-            <a:prstDash val="solid"/>
-          </a:ln>
-        </p:spPr>
-        <p:txBody>
-          <a:bodyPr xmlns:a="http://schemas.openxmlformats.org/drawingml/2006/main" lIns="76200" tIns="38100" rIns="76200" bIns="38100" anchor="ctr"/>
-          <a:lstStyle xmlns:a="http://schemas.openxmlformats.org/drawingml/2006/main"/>
-          <a:p xmlns:a="http://schemas.openxmlformats.org/drawingml/2006/main">
-            <a:pPr algn="l">
-              <a:defRPr sz="1350" b="1">
-                <a:solidFill>
-                  <a:srgbClr val="263746"/>
-                </a:solidFill>
-              </a:defRPr>
-            </a:pPr>
-            <a:r>
-              <a:rPr sz="1350" b="1">
-                <a:solidFill>
-                  <a:srgbClr val="263746"/>
-                </a:solidFill>
-                <a:latin typeface="Microsoft YaHei"/>
-                <a:ea typeface="Microsoft YaHei"/>
-                <a:cs typeface="Microsoft YaHei"/>
-              </a:rPr>
-              <a:t>J2 六字段含适用边界？</a:t>
-            </a:r>
-          </a:p>
-        </p:txBody>
-      </p:sp>
-      <p:sp>
-        <p:nvSpPr>
-          <p:cNvPr id="17" name="p19-n-5">
-            <a:extLst xmlns:a="http://schemas.openxmlformats.org/drawingml/2006/main">
-              <a:ext uri="{FF2B5EF4-FFF2-40B4-BE49-F238E27FC236}">
-                <a16:creationId xmlns:a16="http://schemas.microsoft.com/office/drawing/2014/main" id="{7C2C953B-02CE-40DE-AD91-ED987A610DC3}"/>
-              </a:ext>
-            </a:extLst>
-          </p:cNvPr>
-          <p:cNvSpPr>
-            <a:spLocks xmlns:a="http://schemas.openxmlformats.org/drawingml/2006/main" noGrp="1"/>
-          </p:cNvSpPr>
-          <p:nvPr/>
-        </p:nvSpPr>
-        <p:spPr>
-          <a:xfrm xmlns:a="http://schemas.openxmlformats.org/drawingml/2006/main">
-            <a:off x="6267450" y="2762250"/>
-            <a:ext cx="457200" cy="457200"/>
+                <a16:creationId xmlns:a16="http://schemas.microsoft.com/office/drawing/2014/main" id="{932BCC9A-D1FB-4643-8D8C-A6B5EE9C92A3}"/>
+              </a:ext>
+            </a:extLst>
+          </p:cNvPr>
+          <p:cNvSpPr>
+            <a:spLocks xmlns:a="http://schemas.openxmlformats.org/drawingml/2006/main" noGrp="1"/>
+          </p:cNvSpPr>
+          <p:nvPr/>
+        </p:nvSpPr>
+        <p:spPr>
+          <a:xfrm xmlns:a="http://schemas.openxmlformats.org/drawingml/2006/main">
+            <a:off x="4933950" y="2190750"/>
+            <a:ext cx="3238500" cy="514350"/>
           </a:xfrm>
           <a:prstGeom xmlns:a="http://schemas.openxmlformats.org/drawingml/2006/main" prst="roundRect">
             <a:avLst>
-              <a:gd name="adj" fmla="val 16667"/>
+              <a:gd name="adj" fmla="val 14815"/>
+            </a:avLst>
+          </a:prstGeom>
+          <a:solidFill xmlns:a="http://schemas.openxmlformats.org/drawingml/2006/main">
+            <a:srgbClr val="F3F6F7"/>
+          </a:solidFill>
+          <a:ln xmlns:a="http://schemas.openxmlformats.org/drawingml/2006/main" w="9525">
+            <a:solidFill>
+              <a:srgbClr val="D6DDE2"/>
+            </a:solidFill>
+            <a:prstDash val="solid"/>
+          </a:ln>
+        </p:spPr>
+        <p:txBody>
+          <a:bodyPr xmlns:a="http://schemas.openxmlformats.org/drawingml/2006/main" lIns="76200" tIns="38100" rIns="76200" bIns="38100" anchor="ctr"/>
+          <a:lstStyle xmlns:a="http://schemas.openxmlformats.org/drawingml/2006/main"/>
+          <a:p xmlns:a="http://schemas.openxmlformats.org/drawingml/2006/main">
+            <a:pPr algn="ctr">
+              <a:defRPr sz="1350" b="1">
+                <a:solidFill>
+                  <a:srgbClr val="263746"/>
+                </a:solidFill>
+              </a:defRPr>
+            </a:pPr>
+            <a:r>
+              <a:rPr sz="1350" b="1">
+                <a:solidFill>
+                  <a:srgbClr val="263746"/>
+                </a:solidFill>
+                <a:latin typeface="Microsoft YaHei"/>
+                <a:ea typeface="Microsoft YaHei"/>
+                <a:cs typeface="Microsoft YaHei"/>
+              </a:rPr>
+              <a:t>J2 有适用边界？</a:t>
+            </a:r>
+          </a:p>
+        </p:txBody>
+      </p:sp>
+      <p:sp>
+        <p:nvSpPr>
+          <p:cNvPr id="17" name="p19-n-5">
+            <a:extLst xmlns:a="http://schemas.openxmlformats.org/drawingml/2006/main">
+              <a:ext uri="{FF2B5EF4-FFF2-40B4-BE49-F238E27FC236}">
+                <a16:creationId xmlns:a16="http://schemas.microsoft.com/office/drawing/2014/main" id="{1A6AEB92-CC32-4BD8-8C33-C5E9D765DD56}"/>
+              </a:ext>
+            </a:extLst>
+          </p:cNvPr>
+          <p:cNvSpPr>
+            <a:spLocks xmlns:a="http://schemas.openxmlformats.org/drawingml/2006/main" noGrp="1"/>
+          </p:cNvSpPr>
+          <p:nvPr/>
+        </p:nvSpPr>
+        <p:spPr>
+          <a:xfrm xmlns:a="http://schemas.openxmlformats.org/drawingml/2006/main">
+            <a:off x="8343900" y="2228850"/>
+            <a:ext cx="438150" cy="438150"/>
+          </a:xfrm>
+          <a:prstGeom xmlns:a="http://schemas.openxmlformats.org/drawingml/2006/main" prst="roundRect">
+            <a:avLst>
+              <a:gd name="adj" fmla="val 17391"/>
             </a:avLst>
           </a:prstGeom>
           <a:solidFill xmlns:a="http://schemas.openxmlformats.org/drawingml/2006/main">
@@ -14863,78 +15207,82 @@
           <p:cNvPr id="18" name="p19-q-5">
             <a:extLst xmlns:a="http://schemas.openxmlformats.org/drawingml/2006/main">
               <a:ext uri="{FF2B5EF4-FFF2-40B4-BE49-F238E27FC236}">
-                <a16:creationId xmlns:a16="http://schemas.microsoft.com/office/drawing/2014/main" id="{155D11B9-354A-4757-B2FA-5E1F8C8E25F7}"/>
-              </a:ext>
-            </a:extLst>
-          </p:cNvPr>
-          <p:cNvSpPr>
-            <a:spLocks xmlns:a="http://schemas.openxmlformats.org/drawingml/2006/main" noGrp="1"/>
-          </p:cNvSpPr>
-          <p:nvPr/>
-        </p:nvSpPr>
-        <p:spPr>
-          <a:xfrm xmlns:a="http://schemas.openxmlformats.org/drawingml/2006/main">
-            <a:off x="6838950" y="2762250"/>
-            <a:ext cx="4762500" cy="457200"/>
-          </a:xfrm>
-          <a:prstGeom xmlns:a="http://schemas.openxmlformats.org/drawingml/2006/main" prst="rect">
-            <a:avLst/>
-          </a:prstGeom>
-          <a:solidFill xmlns:a="http://schemas.openxmlformats.org/drawingml/2006/main">
-            <a:srgbClr val="F3F6F7"/>
-          </a:solidFill>
-          <a:ln xmlns:a="http://schemas.openxmlformats.org/drawingml/2006/main" w="0">
-            <a:noFill/>
-            <a:prstDash val="solid"/>
-          </a:ln>
-        </p:spPr>
-        <p:txBody>
-          <a:bodyPr xmlns:a="http://schemas.openxmlformats.org/drawingml/2006/main" lIns="76200" tIns="38100" rIns="76200" bIns="38100" anchor="ctr"/>
-          <a:lstStyle xmlns:a="http://schemas.openxmlformats.org/drawingml/2006/main"/>
-          <a:p xmlns:a="http://schemas.openxmlformats.org/drawingml/2006/main">
-            <a:pPr algn="l">
-              <a:defRPr sz="1350" b="1">
-                <a:solidFill>
-                  <a:srgbClr val="263746"/>
-                </a:solidFill>
-              </a:defRPr>
-            </a:pPr>
-            <a:r>
-              <a:rPr sz="1350" b="1">
-                <a:solidFill>
-                  <a:srgbClr val="263746"/>
-                </a:solidFill>
-                <a:latin typeface="Microsoft YaHei"/>
-                <a:ea typeface="Microsoft YaHei"/>
-                <a:cs typeface="Microsoft YaHei"/>
-              </a:rPr>
-              <a:t>拒绝反馈有依据？</a:t>
-            </a:r>
-          </a:p>
-        </p:txBody>
-      </p:sp>
-      <p:sp>
-        <p:nvSpPr>
-          <p:cNvPr id="19" name="p19-n-6">
-            <a:extLst xmlns:a="http://schemas.openxmlformats.org/drawingml/2006/main">
-              <a:ext uri="{FF2B5EF4-FFF2-40B4-BE49-F238E27FC236}">
-                <a16:creationId xmlns:a16="http://schemas.microsoft.com/office/drawing/2014/main" id="{549F63D9-EDAF-4726-9A10-5F4EAF683C0D}"/>
-              </a:ext>
-            </a:extLst>
-          </p:cNvPr>
-          <p:cNvSpPr>
-            <a:spLocks xmlns:a="http://schemas.openxmlformats.org/drawingml/2006/main" noGrp="1"/>
-          </p:cNvSpPr>
-          <p:nvPr/>
-        </p:nvSpPr>
-        <p:spPr>
-          <a:xfrm xmlns:a="http://schemas.openxmlformats.org/drawingml/2006/main">
-            <a:off x="533400" y="3543300"/>
-            <a:ext cx="457200" cy="457200"/>
+                <a16:creationId xmlns:a16="http://schemas.microsoft.com/office/drawing/2014/main" id="{C483658F-42A6-4C1F-8D96-A123F0B30F8E}"/>
+              </a:ext>
+            </a:extLst>
+          </p:cNvPr>
+          <p:cNvSpPr>
+            <a:spLocks xmlns:a="http://schemas.openxmlformats.org/drawingml/2006/main" noGrp="1"/>
+          </p:cNvSpPr>
+          <p:nvPr/>
+        </p:nvSpPr>
+        <p:spPr>
+          <a:xfrm xmlns:a="http://schemas.openxmlformats.org/drawingml/2006/main">
+            <a:off x="8877300" y="2190750"/>
+            <a:ext cx="3238500" cy="514350"/>
           </a:xfrm>
           <a:prstGeom xmlns:a="http://schemas.openxmlformats.org/drawingml/2006/main" prst="roundRect">
             <a:avLst>
-              <a:gd name="adj" fmla="val 16667"/>
+              <a:gd name="adj" fmla="val 14815"/>
+            </a:avLst>
+          </a:prstGeom>
+          <a:solidFill xmlns:a="http://schemas.openxmlformats.org/drawingml/2006/main">
+            <a:srgbClr val="F3F6F7"/>
+          </a:solidFill>
+          <a:ln xmlns:a="http://schemas.openxmlformats.org/drawingml/2006/main" w="9525">
+            <a:solidFill>
+              <a:srgbClr val="D6DDE2"/>
+            </a:solidFill>
+            <a:prstDash val="solid"/>
+          </a:ln>
+        </p:spPr>
+        <p:txBody>
+          <a:bodyPr xmlns:a="http://schemas.openxmlformats.org/drawingml/2006/main" lIns="76200" tIns="38100" rIns="76200" bIns="38100" anchor="ctr"/>
+          <a:lstStyle xmlns:a="http://schemas.openxmlformats.org/drawingml/2006/main"/>
+          <a:p xmlns:a="http://schemas.openxmlformats.org/drawingml/2006/main">
+            <a:pPr algn="ctr">
+              <a:defRPr sz="1350" b="1">
+                <a:solidFill>
+                  <a:srgbClr val="263746"/>
+                </a:solidFill>
+              </a:defRPr>
+            </a:pPr>
+            <a:r>
+              <a:rPr sz="1350" b="1">
+                <a:solidFill>
+                  <a:srgbClr val="263746"/>
+                </a:solidFill>
+                <a:latin typeface="Microsoft YaHei"/>
+                <a:ea typeface="Microsoft YaHei"/>
+                <a:cs typeface="Microsoft YaHei"/>
+              </a:rPr>
+              <a:t>拒绝反馈有依据？</a:t>
+            </a:r>
+          </a:p>
+        </p:txBody>
+      </p:sp>
+      <p:sp>
+        <p:nvSpPr>
+          <p:cNvPr id="19" name="p19-n-6">
+            <a:extLst xmlns:a="http://schemas.openxmlformats.org/drawingml/2006/main">
+              <a:ext uri="{FF2B5EF4-FFF2-40B4-BE49-F238E27FC236}">
+                <a16:creationId xmlns:a16="http://schemas.microsoft.com/office/drawing/2014/main" id="{EB6478B7-2E59-4765-913A-844D72938F43}"/>
+              </a:ext>
+            </a:extLst>
+          </p:cNvPr>
+          <p:cNvSpPr>
+            <a:spLocks xmlns:a="http://schemas.openxmlformats.org/drawingml/2006/main" noGrp="1"/>
+          </p:cNvSpPr>
+          <p:nvPr/>
+        </p:nvSpPr>
+        <p:spPr>
+          <a:xfrm xmlns:a="http://schemas.openxmlformats.org/drawingml/2006/main">
+            <a:off x="457200" y="3219450"/>
+            <a:ext cx="438150" cy="438150"/>
+          </a:xfrm>
+          <a:prstGeom xmlns:a="http://schemas.openxmlformats.org/drawingml/2006/main" prst="roundRect">
+            <a:avLst>
+              <a:gd name="adj" fmla="val 17391"/>
             </a:avLst>
           </a:prstGeom>
           <a:solidFill xmlns:a="http://schemas.openxmlformats.org/drawingml/2006/main">
@@ -14975,82 +15323,86 @@
           <p:cNvPr id="20" name="p19-q-6">
             <a:extLst xmlns:a="http://schemas.openxmlformats.org/drawingml/2006/main">
               <a:ext uri="{FF2B5EF4-FFF2-40B4-BE49-F238E27FC236}">
-                <a16:creationId xmlns:a16="http://schemas.microsoft.com/office/drawing/2014/main" id="{96703D48-634D-4DCE-9BF6-ED5CB45426FB}"/>
-              </a:ext>
-            </a:extLst>
-          </p:cNvPr>
-          <p:cNvSpPr>
-            <a:spLocks xmlns:a="http://schemas.openxmlformats.org/drawingml/2006/main" noGrp="1"/>
-          </p:cNvSpPr>
-          <p:nvPr/>
-        </p:nvSpPr>
-        <p:spPr>
-          <a:xfrm xmlns:a="http://schemas.openxmlformats.org/drawingml/2006/main">
-            <a:off x="1104900" y="3543300"/>
-            <a:ext cx="4762500" cy="457200"/>
-          </a:xfrm>
-          <a:prstGeom xmlns:a="http://schemas.openxmlformats.org/drawingml/2006/main" prst="rect">
-            <a:avLst/>
-          </a:prstGeom>
-          <a:solidFill xmlns:a="http://schemas.openxmlformats.org/drawingml/2006/main">
-            <a:srgbClr val="F3F6F7"/>
-          </a:solidFill>
-          <a:ln xmlns:a="http://schemas.openxmlformats.org/drawingml/2006/main" w="0">
-            <a:noFill/>
-            <a:prstDash val="solid"/>
-          </a:ln>
-        </p:spPr>
-        <p:txBody>
-          <a:bodyPr xmlns:a="http://schemas.openxmlformats.org/drawingml/2006/main" lIns="76200" tIns="38100" rIns="76200" bIns="38100" anchor="ctr"/>
-          <a:lstStyle xmlns:a="http://schemas.openxmlformats.org/drawingml/2006/main"/>
-          <a:p xmlns:a="http://schemas.openxmlformats.org/drawingml/2006/main">
-            <a:pPr algn="l">
-              <a:defRPr sz="1350" b="1">
-                <a:solidFill>
-                  <a:srgbClr val="263746"/>
-                </a:solidFill>
-              </a:defRPr>
-            </a:pPr>
-            <a:r>
-              <a:rPr sz="1350" b="1">
-                <a:solidFill>
-                  <a:srgbClr val="263746"/>
-                </a:solidFill>
-                <a:latin typeface="Microsoft YaHei"/>
-                <a:ea typeface="Microsoft YaHei"/>
-                <a:cs typeface="Microsoft YaHei"/>
-              </a:rPr>
-              <a:t>最大风险有对应预案？</a:t>
-            </a:r>
-          </a:p>
-        </p:txBody>
-      </p:sp>
-      <p:sp>
-        <p:nvSpPr>
-          <p:cNvPr id="21" name="p19-n-7">
-            <a:extLst xmlns:a="http://schemas.openxmlformats.org/drawingml/2006/main">
-              <a:ext uri="{FF2B5EF4-FFF2-40B4-BE49-F238E27FC236}">
-                <a16:creationId xmlns:a16="http://schemas.microsoft.com/office/drawing/2014/main" id="{111FFAFA-52C5-46B6-A071-AC0F3B581B63}"/>
-              </a:ext>
-            </a:extLst>
-          </p:cNvPr>
-          <p:cNvSpPr>
-            <a:spLocks xmlns:a="http://schemas.openxmlformats.org/drawingml/2006/main" noGrp="1"/>
-          </p:cNvSpPr>
-          <p:nvPr/>
-        </p:nvSpPr>
-        <p:spPr>
-          <a:xfrm xmlns:a="http://schemas.openxmlformats.org/drawingml/2006/main">
-            <a:off x="6267450" y="3543300"/>
-            <a:ext cx="457200" cy="457200"/>
+                <a16:creationId xmlns:a16="http://schemas.microsoft.com/office/drawing/2014/main" id="{2539AB83-DF00-4B46-8E39-39F3DE5E0563}"/>
+              </a:ext>
+            </a:extLst>
+          </p:cNvPr>
+          <p:cNvSpPr>
+            <a:spLocks xmlns:a="http://schemas.openxmlformats.org/drawingml/2006/main" noGrp="1"/>
+          </p:cNvSpPr>
+          <p:nvPr/>
+        </p:nvSpPr>
+        <p:spPr>
+          <a:xfrm xmlns:a="http://schemas.openxmlformats.org/drawingml/2006/main">
+            <a:off x="990600" y="3181350"/>
+            <a:ext cx="3238500" cy="514350"/>
           </a:xfrm>
           <a:prstGeom xmlns:a="http://schemas.openxmlformats.org/drawingml/2006/main" prst="roundRect">
             <a:avLst>
-              <a:gd name="adj" fmla="val 16667"/>
+              <a:gd name="adj" fmla="val 14815"/>
             </a:avLst>
           </a:prstGeom>
           <a:solidFill xmlns:a="http://schemas.openxmlformats.org/drawingml/2006/main">
-            <a:srgbClr val="18354E"/>
+            <a:srgbClr val="F3F6F7"/>
+          </a:solidFill>
+          <a:ln xmlns:a="http://schemas.openxmlformats.org/drawingml/2006/main" w="9525">
+            <a:solidFill>
+              <a:srgbClr val="D6DDE2"/>
+            </a:solidFill>
+            <a:prstDash val="solid"/>
+          </a:ln>
+        </p:spPr>
+        <p:txBody>
+          <a:bodyPr xmlns:a="http://schemas.openxmlformats.org/drawingml/2006/main" lIns="76200" tIns="38100" rIns="76200" bIns="38100" anchor="ctr"/>
+          <a:lstStyle xmlns:a="http://schemas.openxmlformats.org/drawingml/2006/main"/>
+          <a:p xmlns:a="http://schemas.openxmlformats.org/drawingml/2006/main">
+            <a:pPr algn="ctr">
+              <a:defRPr sz="1350" b="1">
+                <a:solidFill>
+                  <a:srgbClr val="263746"/>
+                </a:solidFill>
+              </a:defRPr>
+            </a:pPr>
+            <a:r>
+              <a:rPr sz="1350" b="1">
+                <a:solidFill>
+                  <a:srgbClr val="263746"/>
+                </a:solidFill>
+                <a:latin typeface="Microsoft YaHei"/>
+                <a:ea typeface="Microsoft YaHei"/>
+                <a:cs typeface="Microsoft YaHei"/>
+              </a:rPr>
+              <a:t>最大风险有预案？</a:t>
+            </a:r>
+          </a:p>
+        </p:txBody>
+      </p:sp>
+      <p:sp>
+        <p:nvSpPr>
+          <p:cNvPr id="21" name="p19-n-7">
+            <a:extLst xmlns:a="http://schemas.openxmlformats.org/drawingml/2006/main">
+              <a:ext uri="{FF2B5EF4-FFF2-40B4-BE49-F238E27FC236}">
+                <a16:creationId xmlns:a16="http://schemas.microsoft.com/office/drawing/2014/main" id="{E91F4D82-6F69-40BB-BACA-196EB3067D97}"/>
+              </a:ext>
+            </a:extLst>
+          </p:cNvPr>
+          <p:cNvSpPr>
+            <a:spLocks xmlns:a="http://schemas.openxmlformats.org/drawingml/2006/main" noGrp="1"/>
+          </p:cNvSpPr>
+          <p:nvPr/>
+        </p:nvSpPr>
+        <p:spPr>
+          <a:xfrm xmlns:a="http://schemas.openxmlformats.org/drawingml/2006/main">
+            <a:off x="4400550" y="3219450"/>
+            <a:ext cx="438150" cy="438150"/>
+          </a:xfrm>
+          <a:prstGeom xmlns:a="http://schemas.openxmlformats.org/drawingml/2006/main" prst="roundRect">
+            <a:avLst>
+              <a:gd name="adj" fmla="val 17391"/>
+            </a:avLst>
+          </a:prstGeom>
+          <a:solidFill xmlns:a="http://schemas.openxmlformats.org/drawingml/2006/main">
+            <a:srgbClr val="C8161E"/>
           </a:solidFill>
           <a:ln xmlns:a="http://schemas.openxmlformats.org/drawingml/2006/main" w="0">
             <a:noFill/>
@@ -15087,25 +15439,200 @@
           <p:cNvPr id="22" name="p19-q-7">
             <a:extLst xmlns:a="http://schemas.openxmlformats.org/drawingml/2006/main">
               <a:ext uri="{FF2B5EF4-FFF2-40B4-BE49-F238E27FC236}">
-                <a16:creationId xmlns:a16="http://schemas.microsoft.com/office/drawing/2014/main" id="{CAAE4093-BC5F-4AF0-9AB6-BD32A6B2F377}"/>
-              </a:ext>
-            </a:extLst>
-          </p:cNvPr>
-          <p:cNvSpPr>
-            <a:spLocks xmlns:a="http://schemas.openxmlformats.org/drawingml/2006/main" noGrp="1"/>
-          </p:cNvSpPr>
-          <p:nvPr/>
-        </p:nvSpPr>
-        <p:spPr>
-          <a:xfrm xmlns:a="http://schemas.openxmlformats.org/drawingml/2006/main">
-            <a:off x="6838950" y="3543300"/>
-            <a:ext cx="4762500" cy="457200"/>
+                <a16:creationId xmlns:a16="http://schemas.microsoft.com/office/drawing/2014/main" id="{79C39E3E-BF79-4356-B5F1-F821818ADAC2}"/>
+              </a:ext>
+            </a:extLst>
+          </p:cNvPr>
+          <p:cNvSpPr>
+            <a:spLocks xmlns:a="http://schemas.openxmlformats.org/drawingml/2006/main" noGrp="1"/>
+          </p:cNvSpPr>
+          <p:nvPr/>
+        </p:nvSpPr>
+        <p:spPr>
+          <a:xfrm xmlns:a="http://schemas.openxmlformats.org/drawingml/2006/main">
+            <a:off x="4933950" y="3181350"/>
+            <a:ext cx="3238500" cy="514350"/>
+          </a:xfrm>
+          <a:prstGeom xmlns:a="http://schemas.openxmlformats.org/drawingml/2006/main" prst="roundRect">
+            <a:avLst>
+              <a:gd name="adj" fmla="val 14815"/>
+            </a:avLst>
+          </a:prstGeom>
+          <a:solidFill xmlns:a="http://schemas.openxmlformats.org/drawingml/2006/main">
+            <a:srgbClr val="F8E9EA"/>
+          </a:solidFill>
+          <a:ln xmlns:a="http://schemas.openxmlformats.org/drawingml/2006/main" w="9525">
+            <a:solidFill>
+              <a:srgbClr val="D6DDE2"/>
+            </a:solidFill>
+            <a:prstDash val="solid"/>
+          </a:ln>
+        </p:spPr>
+        <p:txBody>
+          <a:bodyPr xmlns:a="http://schemas.openxmlformats.org/drawingml/2006/main" lIns="76200" tIns="38100" rIns="76200" bIns="38100" anchor="ctr"/>
+          <a:lstStyle xmlns:a="http://schemas.openxmlformats.org/drawingml/2006/main"/>
+          <a:p xmlns:a="http://schemas.openxmlformats.org/drawingml/2006/main">
+            <a:pPr algn="ctr">
+              <a:defRPr sz="1350" b="1">
+                <a:solidFill>
+                  <a:srgbClr val="263746"/>
+                </a:solidFill>
+              </a:defRPr>
+            </a:pPr>
+            <a:r>
+              <a:rPr sz="1350" b="1">
+                <a:solidFill>
+                  <a:srgbClr val="263746"/>
+                </a:solidFill>
+                <a:latin typeface="Microsoft YaHei"/>
+                <a:ea typeface="Microsoft YaHei"/>
+                <a:cs typeface="Microsoft YaHei"/>
+              </a:rPr>
+              <a:t>已有失败事实记录？</a:t>
+            </a:r>
+          </a:p>
+        </p:txBody>
+      </p:sp>
+      <p:sp>
+        <p:nvSpPr>
+          <p:cNvPr id="23" name="p19-n-8">
+            <a:extLst xmlns:a="http://schemas.openxmlformats.org/drawingml/2006/main">
+              <a:ext uri="{FF2B5EF4-FFF2-40B4-BE49-F238E27FC236}">
+                <a16:creationId xmlns:a16="http://schemas.microsoft.com/office/drawing/2014/main" id="{F3CEA42C-5913-4E8F-9E25-9BE378992AED}"/>
+              </a:ext>
+            </a:extLst>
+          </p:cNvPr>
+          <p:cNvSpPr>
+            <a:spLocks xmlns:a="http://schemas.openxmlformats.org/drawingml/2006/main" noGrp="1"/>
+          </p:cNvSpPr>
+          <p:nvPr/>
+        </p:nvSpPr>
+        <p:spPr>
+          <a:xfrm xmlns:a="http://schemas.openxmlformats.org/drawingml/2006/main">
+            <a:off x="8343900" y="3219450"/>
+            <a:ext cx="438150" cy="438150"/>
+          </a:xfrm>
+          <a:prstGeom xmlns:a="http://schemas.openxmlformats.org/drawingml/2006/main" prst="roundRect">
+            <a:avLst>
+              <a:gd name="adj" fmla="val 17391"/>
+            </a:avLst>
+          </a:prstGeom>
+          <a:solidFill xmlns:a="http://schemas.openxmlformats.org/drawingml/2006/main">
+            <a:srgbClr val="18354E"/>
+          </a:solidFill>
+          <a:ln xmlns:a="http://schemas.openxmlformats.org/drawingml/2006/main" w="0">
+            <a:noFill/>
+            <a:prstDash val="solid"/>
+          </a:ln>
+        </p:spPr>
+        <p:txBody>
+          <a:bodyPr xmlns:a="http://schemas.openxmlformats.org/drawingml/2006/main" lIns="76200" tIns="38100" rIns="76200" bIns="38100" anchor="ctr"/>
+          <a:lstStyle xmlns:a="http://schemas.openxmlformats.org/drawingml/2006/main"/>
+          <a:p xmlns:a="http://schemas.openxmlformats.org/drawingml/2006/main">
+            <a:pPr algn="ctr">
+              <a:defRPr sz="1350" b="1">
+                <a:solidFill>
+                  <a:srgbClr val="FFFFFF"/>
+                </a:solidFill>
+              </a:defRPr>
+            </a:pPr>
+            <a:r>
+              <a:rPr sz="1350" b="1">
+                <a:solidFill>
+                  <a:srgbClr val="FFFFFF"/>
+                </a:solidFill>
+                <a:latin typeface="Arial"/>
+                <a:ea typeface="Arial"/>
+                <a:cs typeface="Arial"/>
+              </a:rPr>
+              <a:t>9</a:t>
+            </a:r>
+          </a:p>
+        </p:txBody>
+      </p:sp>
+      <p:sp>
+        <p:nvSpPr>
+          <p:cNvPr id="24" name="p19-q-8">
+            <a:extLst xmlns:a="http://schemas.openxmlformats.org/drawingml/2006/main">
+              <a:ext uri="{FF2B5EF4-FFF2-40B4-BE49-F238E27FC236}">
+                <a16:creationId xmlns:a16="http://schemas.microsoft.com/office/drawing/2014/main" id="{81BB49BA-8176-4CF0-B1EE-517F4A261855}"/>
+              </a:ext>
+            </a:extLst>
+          </p:cNvPr>
+          <p:cNvSpPr>
+            <a:spLocks xmlns:a="http://schemas.openxmlformats.org/drawingml/2006/main" noGrp="1"/>
+          </p:cNvSpPr>
+          <p:nvPr/>
+        </p:nvSpPr>
+        <p:spPr>
+          <a:xfrm xmlns:a="http://schemas.openxmlformats.org/drawingml/2006/main">
+            <a:off x="8877300" y="3181350"/>
+            <a:ext cx="3238500" cy="514350"/>
+          </a:xfrm>
+          <a:prstGeom xmlns:a="http://schemas.openxmlformats.org/drawingml/2006/main" prst="roundRect">
+            <a:avLst>
+              <a:gd name="adj" fmla="val 14815"/>
+            </a:avLst>
+          </a:prstGeom>
+          <a:solidFill xmlns:a="http://schemas.openxmlformats.org/drawingml/2006/main">
+            <a:srgbClr val="F3F6F7"/>
+          </a:solidFill>
+          <a:ln xmlns:a="http://schemas.openxmlformats.org/drawingml/2006/main" w="9525">
+            <a:solidFill>
+              <a:srgbClr val="D6DDE2"/>
+            </a:solidFill>
+            <a:prstDash val="solid"/>
+          </a:ln>
+        </p:spPr>
+        <p:txBody>
+          <a:bodyPr xmlns:a="http://schemas.openxmlformats.org/drawingml/2006/main" lIns="76200" tIns="38100" rIns="76200" bIns="38100" anchor="ctr"/>
+          <a:lstStyle xmlns:a="http://schemas.openxmlformats.org/drawingml/2006/main"/>
+          <a:p xmlns:a="http://schemas.openxmlformats.org/drawingml/2006/main">
+            <a:pPr algn="ctr">
+              <a:defRPr sz="1350" b="1">
+                <a:solidFill>
+                  <a:srgbClr val="263746"/>
+                </a:solidFill>
+              </a:defRPr>
+            </a:pPr>
+            <a:r>
+              <a:rPr sz="1350" b="1">
+                <a:solidFill>
+                  <a:srgbClr val="263746"/>
+                </a:solidFill>
+                <a:latin typeface="Microsoft YaHei"/>
+                <a:ea typeface="Microsoft YaHei"/>
+                <a:cs typeface="Microsoft YaHei"/>
+              </a:rPr>
+              <a:t>迁移未丢 AI / 伦理？</a:t>
+            </a:r>
+          </a:p>
+        </p:txBody>
+      </p:sp>
+      <p:sp>
+        <p:nvSpPr>
+          <p:cNvPr id="25" name="p19-author">
+            <a:extLst xmlns:a="http://schemas.openxmlformats.org/drawingml/2006/main">
+              <a:ext uri="{FF2B5EF4-FFF2-40B4-BE49-F238E27FC236}">
+                <a16:creationId xmlns:a16="http://schemas.microsoft.com/office/drawing/2014/main" id="{31E4FFDD-402D-4D21-A3B2-8F3A71D9D86F}"/>
+              </a:ext>
+            </a:extLst>
+          </p:cNvPr>
+          <p:cNvSpPr>
+            <a:spLocks xmlns:a="http://schemas.openxmlformats.org/drawingml/2006/main" noGrp="1"/>
+          </p:cNvSpPr>
+          <p:nvPr/>
+        </p:nvSpPr>
+        <p:spPr>
+          <a:xfrm xmlns:a="http://schemas.openxmlformats.org/drawingml/2006/main">
+            <a:off x="1085850" y="4438650"/>
+            <a:ext cx="5086350" cy="609600"/>
           </a:xfrm>
           <a:prstGeom xmlns:a="http://schemas.openxmlformats.org/drawingml/2006/main" prst="rect">
             <a:avLst/>
           </a:prstGeom>
           <a:solidFill xmlns:a="http://schemas.openxmlformats.org/drawingml/2006/main">
-            <a:srgbClr val="F3F6F7"/>
+            <a:srgbClr val="E8F0F6"/>
           </a:solidFill>
           <a:ln xmlns:a="http://schemas.openxmlformats.org/drawingml/2006/main" w="0">
             <a:noFill/>
@@ -15116,51 +15643,51 @@
           <a:bodyPr xmlns:a="http://schemas.openxmlformats.org/drawingml/2006/main" lIns="76200" tIns="38100" rIns="76200" bIns="38100" anchor="ctr"/>
           <a:lstStyle xmlns:a="http://schemas.openxmlformats.org/drawingml/2006/main"/>
           <a:p xmlns:a="http://schemas.openxmlformats.org/drawingml/2006/main">
-            <a:pPr algn="l">
-              <a:defRPr sz="1350" b="1">
-                <a:solidFill>
-                  <a:srgbClr val="263746"/>
-                </a:solidFill>
-              </a:defRPr>
-            </a:pPr>
-            <a:r>
-              <a:rPr sz="1350" b="1">
-                <a:solidFill>
-                  <a:srgbClr val="263746"/>
-                </a:solidFill>
-                <a:latin typeface="Microsoft YaHei"/>
-                <a:ea typeface="Microsoft YaHei"/>
-                <a:cs typeface="Microsoft YaHei"/>
-              </a:rPr>
-              <a:t>迁移未丢 AI / 伦理记录？</a:t>
-            </a:r>
-          </a:p>
-        </p:txBody>
-      </p:sp>
-      <p:sp>
-        <p:nvSpPr>
-          <p:cNvPr id="23" name="p19-author">
-            <a:extLst xmlns:a="http://schemas.openxmlformats.org/drawingml/2006/main">
-              <a:ext uri="{FF2B5EF4-FFF2-40B4-BE49-F238E27FC236}">
-                <a16:creationId xmlns:a16="http://schemas.microsoft.com/office/drawing/2014/main" id="{76CD8538-F94F-4D50-AE81-1DAAA8798238}"/>
-              </a:ext>
-            </a:extLst>
-          </p:cNvPr>
-          <p:cNvSpPr>
-            <a:spLocks xmlns:a="http://schemas.openxmlformats.org/drawingml/2006/main" noGrp="1"/>
-          </p:cNvSpPr>
-          <p:nvPr/>
-        </p:nvSpPr>
-        <p:spPr>
-          <a:xfrm xmlns:a="http://schemas.openxmlformats.org/drawingml/2006/main">
-            <a:off x="1085850" y="4552950"/>
-            <a:ext cx="5086350" cy="609600"/>
+            <a:pPr algn="ctr">
+              <a:defRPr sz="1725" b="1">
+                <a:solidFill>
+                  <a:srgbClr val="18354E"/>
+                </a:solidFill>
+              </a:defRPr>
+            </a:pPr>
+            <a:r>
+              <a:rPr sz="1725" b="1">
+                <a:solidFill>
+                  <a:srgbClr val="18354E"/>
+                </a:solidFill>
+                <a:latin typeface="Microsoft YaHei"/>
+                <a:ea typeface="Microsoft YaHei"/>
+                <a:cs typeface="Microsoft YaHei"/>
+              </a:rPr>
+              <a:t>作者记录：采纳｜暂不采纳｜待核验</a:t>
+            </a:r>
+          </a:p>
+        </p:txBody>
+      </p:sp>
+      <p:sp>
+        <p:nvSpPr>
+          <p:cNvPr id="26" name="p19-rule">
+            <a:extLst xmlns:a="http://schemas.openxmlformats.org/drawingml/2006/main">
+              <a:ext uri="{FF2B5EF4-FFF2-40B4-BE49-F238E27FC236}">
+                <a16:creationId xmlns:a16="http://schemas.microsoft.com/office/drawing/2014/main" id="{AA7923D9-9F94-4E0D-AC6C-1767A8F228C7}"/>
+              </a:ext>
+            </a:extLst>
+          </p:cNvPr>
+          <p:cNvSpPr>
+            <a:spLocks xmlns:a="http://schemas.openxmlformats.org/drawingml/2006/main" noGrp="1"/>
+          </p:cNvSpPr>
+          <p:nvPr/>
+        </p:nvSpPr>
+        <p:spPr>
+          <a:xfrm xmlns:a="http://schemas.openxmlformats.org/drawingml/2006/main">
+            <a:off x="6457950" y="4438650"/>
+            <a:ext cx="4819650" cy="609600"/>
           </a:xfrm>
           <a:prstGeom xmlns:a="http://schemas.openxmlformats.org/drawingml/2006/main" prst="rect">
             <a:avLst/>
           </a:prstGeom>
           <a:solidFill xmlns:a="http://schemas.openxmlformats.org/drawingml/2006/main">
-            <a:srgbClr val="E8F0F6"/>
+            <a:srgbClr val="F8E9EA"/>
           </a:solidFill>
           <a:ln xmlns:a="http://schemas.openxmlformats.org/drawingml/2006/main" w="0">
             <a:noFill/>
@@ -15172,61 +15699,6 @@
           <a:lstStyle xmlns:a="http://schemas.openxmlformats.org/drawingml/2006/main"/>
           <a:p xmlns:a="http://schemas.openxmlformats.org/drawingml/2006/main">
             <a:pPr algn="ctr">
-              <a:defRPr sz="1725" b="1">
-                <a:solidFill>
-                  <a:srgbClr val="18354E"/>
-                </a:solidFill>
-              </a:defRPr>
-            </a:pPr>
-            <a:r>
-              <a:rPr sz="1725" b="1">
-                <a:solidFill>
-                  <a:srgbClr val="18354E"/>
-                </a:solidFill>
-                <a:latin typeface="Microsoft YaHei"/>
-                <a:ea typeface="Microsoft YaHei"/>
-                <a:cs typeface="Microsoft YaHei"/>
-              </a:rPr>
-              <a:t>作者记录：采纳｜暂不采纳｜待核验</a:t>
-            </a:r>
-          </a:p>
-        </p:txBody>
-      </p:sp>
-      <p:sp>
-        <p:nvSpPr>
-          <p:cNvPr id="24" name="p19-rule">
-            <a:extLst xmlns:a="http://schemas.openxmlformats.org/drawingml/2006/main">
-              <a:ext uri="{FF2B5EF4-FFF2-40B4-BE49-F238E27FC236}">
-                <a16:creationId xmlns:a16="http://schemas.microsoft.com/office/drawing/2014/main" id="{9616B017-A1A2-48FC-90D7-43535E6BDBDC}"/>
-              </a:ext>
-            </a:extLst>
-          </p:cNvPr>
-          <p:cNvSpPr>
-            <a:spLocks xmlns:a="http://schemas.openxmlformats.org/drawingml/2006/main" noGrp="1"/>
-          </p:cNvSpPr>
-          <p:nvPr/>
-        </p:nvSpPr>
-        <p:spPr>
-          <a:xfrm xmlns:a="http://schemas.openxmlformats.org/drawingml/2006/main">
-            <a:off x="6457950" y="4552950"/>
-            <a:ext cx="4819650" cy="609600"/>
-          </a:xfrm>
-          <a:prstGeom xmlns:a="http://schemas.openxmlformats.org/drawingml/2006/main" prst="rect">
-            <a:avLst/>
-          </a:prstGeom>
-          <a:solidFill xmlns:a="http://schemas.openxmlformats.org/drawingml/2006/main">
-            <a:srgbClr val="F8E9EA"/>
-          </a:solidFill>
-          <a:ln xmlns:a="http://schemas.openxmlformats.org/drawingml/2006/main" w="0">
-            <a:noFill/>
-            <a:prstDash val="solid"/>
-          </a:ln>
-        </p:spPr>
-        <p:txBody>
-          <a:bodyPr xmlns:a="http://schemas.openxmlformats.org/drawingml/2006/main" lIns="76200" tIns="38100" rIns="76200" bIns="38100" anchor="ctr"/>
-          <a:lstStyle xmlns:a="http://schemas.openxmlformats.org/drawingml/2006/main"/>
-          <a:p xmlns:a="http://schemas.openxmlformats.org/drawingml/2006/main">
-            <a:pPr algn="ctr">
               <a:defRPr sz="1575" b="1">
                 <a:solidFill>
                   <a:srgbClr val="C8161E"/>
@@ -15249,21 +15721,21 @@
       </p:sp>
       <p:sp>
         <p:nvSpPr>
-          <p:cNvPr id="25" name="p19-format">
-            <a:extLst xmlns:a="http://schemas.openxmlformats.org/drawingml/2006/main">
-              <a:ext uri="{FF2B5EF4-FFF2-40B4-BE49-F238E27FC236}">
-                <a16:creationId xmlns:a16="http://schemas.microsoft.com/office/drawing/2014/main" id="{975661A0-C7B6-47D7-B903-2D7190E79FBE}"/>
-              </a:ext>
-            </a:extLst>
-          </p:cNvPr>
-          <p:cNvSpPr>
-            <a:spLocks xmlns:a="http://schemas.openxmlformats.org/drawingml/2006/main" noGrp="1"/>
-          </p:cNvSpPr>
-          <p:nvPr/>
-        </p:nvSpPr>
-        <p:spPr>
-          <a:xfrm xmlns:a="http://schemas.openxmlformats.org/drawingml/2006/main">
-            <a:off x="2095500" y="5334000"/>
+          <p:cNvPr id="27" name="p19-format">
+            <a:extLst xmlns:a="http://schemas.openxmlformats.org/drawingml/2006/main">
+              <a:ext uri="{FF2B5EF4-FFF2-40B4-BE49-F238E27FC236}">
+                <a16:creationId xmlns:a16="http://schemas.microsoft.com/office/drawing/2014/main" id="{97830A02-13F2-4609-B737-ACC556BE77AB}"/>
+              </a:ext>
+            </a:extLst>
+          </p:cNvPr>
+          <p:cNvSpPr>
+            <a:spLocks xmlns:a="http://schemas.openxmlformats.org/drawingml/2006/main" noGrp="1"/>
+          </p:cNvSpPr>
+          <p:nvPr/>
+        </p:nvSpPr>
+        <p:spPr>
+          <a:xfrm xmlns:a="http://schemas.openxmlformats.org/drawingml/2006/main">
+            <a:off x="2095500" y="5238750"/>
             <a:ext cx="8001000" cy="323850"/>
           </a:xfrm>
           <a:prstGeom xmlns:a="http://schemas.openxmlformats.org/drawingml/2006/main" prst="rect">
@@ -15295,7 +15767,7 @@
                 <a:ea typeface="Microsoft YaHei"/>
                 <a:cs typeface="Microsoft YaHei"/>
               </a:rPr>
-              <a:t>每人 45 秒说明 baseline + 七字段 + 反馈处理；同伴按八项检查。</a:t>
+              <a:t>每人 45 秒说明 baseline + 七字段 + 反馈处理；同伴按九项检查。</a:t>
             </a:r>
           </a:p>
         </p:txBody>
@@ -15360,7 +15832,7 @@
                 <a:ea typeface="Microsoft YaHei"/>
                 <a:cs typeface="Microsoft YaHei"/>
               </a:rPr>
-              <a:t>第 7-8 课之后，草图离判断门还差六项</a:t>
+              <a:t>第 7-8 课之后，草图离判断门还差七项</a:t>
             </a:r>
             <a:endParaRPr/>
           </a:p>
@@ -15399,7 +15871,7 @@
           <p:cNvPr id="6" name="p02-left-title">
             <a:extLst xmlns:a="http://schemas.openxmlformats.org/drawingml/2006/main">
               <a:ext uri="{FF2B5EF4-FFF2-40B4-BE49-F238E27FC236}">
-                <a16:creationId xmlns:a16="http://schemas.microsoft.com/office/drawing/2014/main" id="{8E565074-9FDC-4D4E-AE9A-C29314016321}"/>
+                <a16:creationId xmlns:a16="http://schemas.microsoft.com/office/drawing/2014/main" id="{F6A9774A-9B12-49F1-8E4C-796A5D2B567F}"/>
               </a:ext>
             </a:extLst>
           </p:cNvPr>
@@ -15452,7 +15924,7 @@
           <p:cNvPr id="7" name="p02-l-0">
             <a:extLst xmlns:a="http://schemas.openxmlformats.org/drawingml/2006/main">
               <a:ext uri="{FF2B5EF4-FFF2-40B4-BE49-F238E27FC236}">
-                <a16:creationId xmlns:a16="http://schemas.microsoft.com/office/drawing/2014/main" id="{ED74DB10-6D51-4004-9389-3FE8DF42661D}"/>
+                <a16:creationId xmlns:a16="http://schemas.microsoft.com/office/drawing/2014/main" id="{982BED14-F5EC-43D6-B29E-3C1F67C06423}"/>
               </a:ext>
             </a:extLst>
           </p:cNvPr>
@@ -15537,7 +16009,7 @@
           <p:cNvPr id="8" name="p02-l-1">
             <a:extLst xmlns:a="http://schemas.openxmlformats.org/drawingml/2006/main">
               <a:ext uri="{FF2B5EF4-FFF2-40B4-BE49-F238E27FC236}">
-                <a16:creationId xmlns:a16="http://schemas.microsoft.com/office/drawing/2014/main" id="{0A72F89C-D6B5-4ECC-9419-8C02FA42415F}"/>
+                <a16:creationId xmlns:a16="http://schemas.microsoft.com/office/drawing/2014/main" id="{583D9A29-A4E6-41C4-9BE8-41AEBC90A0B2}"/>
               </a:ext>
             </a:extLst>
           </p:cNvPr>
@@ -15622,7 +16094,7 @@
           <p:cNvPr id="9" name="p02-l-2">
             <a:extLst xmlns:a="http://schemas.openxmlformats.org/drawingml/2006/main">
               <a:ext uri="{FF2B5EF4-FFF2-40B4-BE49-F238E27FC236}">
-                <a16:creationId xmlns:a16="http://schemas.microsoft.com/office/drawing/2014/main" id="{04EDD0AD-03CB-4878-AC0A-6B8328B4FCFB}"/>
+                <a16:creationId xmlns:a16="http://schemas.microsoft.com/office/drawing/2014/main" id="{17B4E5D1-74D5-4853-B26A-D30028F60BAA}"/>
               </a:ext>
             </a:extLst>
           </p:cNvPr>
@@ -15707,7 +16179,7 @@
           <p:cNvPr id="10" name="p02-l-3">
             <a:extLst xmlns:a="http://schemas.openxmlformats.org/drawingml/2006/main">
               <a:ext uri="{FF2B5EF4-FFF2-40B4-BE49-F238E27FC236}">
-                <a16:creationId xmlns:a16="http://schemas.microsoft.com/office/drawing/2014/main" id="{624681EE-A028-4D4B-A9A0-7215C86DD649}"/>
+                <a16:creationId xmlns:a16="http://schemas.microsoft.com/office/drawing/2014/main" id="{909D3D37-3FA4-4F2E-82F2-34E8202657A1}"/>
               </a:ext>
             </a:extLst>
           </p:cNvPr>
@@ -15792,7 +16264,7 @@
           <p:cNvPr id="11" name="p02-mid">
             <a:extLst xmlns:a="http://schemas.openxmlformats.org/drawingml/2006/main">
               <a:ext uri="{FF2B5EF4-FFF2-40B4-BE49-F238E27FC236}">
-                <a16:creationId xmlns:a16="http://schemas.microsoft.com/office/drawing/2014/main" id="{262A5F36-FFCB-441F-B72F-B4E3DC5AF39A}"/>
+                <a16:creationId xmlns:a16="http://schemas.microsoft.com/office/drawing/2014/main" id="{081ABEA6-3D74-4E97-A780-8D5BF4CA3CA0}"/>
               </a:ext>
             </a:extLst>
           </p:cNvPr>
@@ -15823,7 +16295,7 @@
           <p:cNvPr id="12" name="p02-arrow">
             <a:extLst xmlns:a="http://schemas.openxmlformats.org/drawingml/2006/main">
               <a:ext uri="{FF2B5EF4-FFF2-40B4-BE49-F238E27FC236}">
-                <a16:creationId xmlns:a16="http://schemas.microsoft.com/office/drawing/2014/main" id="{87C6CEE4-3010-4ED5-9CF4-4047C014E636}"/>
+                <a16:creationId xmlns:a16="http://schemas.microsoft.com/office/drawing/2014/main" id="{ACCC78A2-31C5-4C1E-BB61-DC2D8DCBD678}"/>
               </a:ext>
             </a:extLst>
           </p:cNvPr>
@@ -15880,7 +16352,7 @@
           <p:cNvPr id="13" name="p02-right-title">
             <a:extLst xmlns:a="http://schemas.openxmlformats.org/drawingml/2006/main">
               <a:ext uri="{FF2B5EF4-FFF2-40B4-BE49-F238E27FC236}">
-                <a16:creationId xmlns:a16="http://schemas.microsoft.com/office/drawing/2014/main" id="{772EBA43-8AE5-458D-AD25-DA379CC90F5C}"/>
+                <a16:creationId xmlns:a16="http://schemas.microsoft.com/office/drawing/2014/main" id="{A8A7BCC3-6CE2-484E-A4C1-B1BDF0D90C4D}"/>
               </a:ext>
             </a:extLst>
           </p:cNvPr>
@@ -15933,23 +16405,23 @@
           <p:cNvPr id="14" name="p02-n-0">
             <a:extLst xmlns:a="http://schemas.openxmlformats.org/drawingml/2006/main">
               <a:ext uri="{FF2B5EF4-FFF2-40B4-BE49-F238E27FC236}">
-                <a16:creationId xmlns:a16="http://schemas.microsoft.com/office/drawing/2014/main" id="{435DE951-9559-4F36-A678-C762F106A14C}"/>
-              </a:ext>
-            </a:extLst>
-          </p:cNvPr>
-          <p:cNvSpPr>
-            <a:spLocks xmlns:a="http://schemas.openxmlformats.org/drawingml/2006/main" noGrp="1"/>
-          </p:cNvSpPr>
-          <p:nvPr/>
-        </p:nvSpPr>
-        <p:spPr>
-          <a:xfrm xmlns:a="http://schemas.openxmlformats.org/drawingml/2006/main">
-            <a:off x="7334250" y="1581150"/>
-            <a:ext cx="400050" cy="381000"/>
+                <a16:creationId xmlns:a16="http://schemas.microsoft.com/office/drawing/2014/main" id="{DA8A621C-45F0-42CF-8F7B-EB7AC47BA6CF}"/>
+              </a:ext>
+            </a:extLst>
+          </p:cNvPr>
+          <p:cNvSpPr>
+            <a:spLocks xmlns:a="http://schemas.openxmlformats.org/drawingml/2006/main" noGrp="1"/>
+          </p:cNvSpPr>
+          <p:nvPr/>
+        </p:nvSpPr>
+        <p:spPr>
+          <a:xfrm xmlns:a="http://schemas.openxmlformats.org/drawingml/2006/main">
+            <a:off x="7334250" y="1485900"/>
+            <a:ext cx="400050" cy="361950"/>
           </a:xfrm>
           <a:prstGeom xmlns:a="http://schemas.openxmlformats.org/drawingml/2006/main" prst="roundRect">
             <a:avLst>
-              <a:gd name="adj" fmla="val 20000"/>
+              <a:gd name="adj" fmla="val 21053"/>
             </a:avLst>
           </a:prstGeom>
           <a:solidFill xmlns:a="http://schemas.openxmlformats.org/drawingml/2006/main">
@@ -15990,19 +16462,19 @@
           <p:cNvPr id="15" name="p02-r-0">
             <a:extLst xmlns:a="http://schemas.openxmlformats.org/drawingml/2006/main">
               <a:ext uri="{FF2B5EF4-FFF2-40B4-BE49-F238E27FC236}">
-                <a16:creationId xmlns:a16="http://schemas.microsoft.com/office/drawing/2014/main" id="{EE6F91F8-FFDB-4FFD-A833-F3908E5D2922}"/>
-              </a:ext>
-            </a:extLst>
-          </p:cNvPr>
-          <p:cNvSpPr>
-            <a:spLocks xmlns:a="http://schemas.openxmlformats.org/drawingml/2006/main" noGrp="1"/>
-          </p:cNvSpPr>
-          <p:nvPr/>
-        </p:nvSpPr>
-        <p:spPr>
-          <a:xfrm xmlns:a="http://schemas.openxmlformats.org/drawingml/2006/main">
-            <a:off x="7829550" y="1581150"/>
-            <a:ext cx="3600450" cy="381000"/>
+                <a16:creationId xmlns:a16="http://schemas.microsoft.com/office/drawing/2014/main" id="{F26F37AC-F736-4379-B11F-375C3038F6E9}"/>
+              </a:ext>
+            </a:extLst>
+          </p:cNvPr>
+          <p:cNvSpPr>
+            <a:spLocks xmlns:a="http://schemas.openxmlformats.org/drawingml/2006/main" noGrp="1"/>
+          </p:cNvSpPr>
+          <p:nvPr/>
+        </p:nvSpPr>
+        <p:spPr>
+          <a:xfrm xmlns:a="http://schemas.openxmlformats.org/drawingml/2006/main">
+            <a:off x="7829550" y="1485900"/>
+            <a:ext cx="3600450" cy="361950"/>
           </a:xfrm>
           <a:prstGeom xmlns:a="http://schemas.openxmlformats.org/drawingml/2006/main" prst="rect">
             <a:avLst/>
@@ -16045,23 +16517,23 @@
           <p:cNvPr id="16" name="p02-n-1">
             <a:extLst xmlns:a="http://schemas.openxmlformats.org/drawingml/2006/main">
               <a:ext uri="{FF2B5EF4-FFF2-40B4-BE49-F238E27FC236}">
-                <a16:creationId xmlns:a16="http://schemas.microsoft.com/office/drawing/2014/main" id="{5B2CC9ED-A053-4E57-B51E-AEC9627B0FAC}"/>
-              </a:ext>
-            </a:extLst>
-          </p:cNvPr>
-          <p:cNvSpPr>
-            <a:spLocks xmlns:a="http://schemas.openxmlformats.org/drawingml/2006/main" noGrp="1"/>
-          </p:cNvSpPr>
-          <p:nvPr/>
-        </p:nvSpPr>
-        <p:spPr>
-          <a:xfrm xmlns:a="http://schemas.openxmlformats.org/drawingml/2006/main">
-            <a:off x="7334250" y="2152650"/>
-            <a:ext cx="400050" cy="381000"/>
+                <a16:creationId xmlns:a16="http://schemas.microsoft.com/office/drawing/2014/main" id="{0825B908-48CC-4332-AFF5-3455BDC02660}"/>
+              </a:ext>
+            </a:extLst>
+          </p:cNvPr>
+          <p:cNvSpPr>
+            <a:spLocks xmlns:a="http://schemas.openxmlformats.org/drawingml/2006/main" noGrp="1"/>
+          </p:cNvSpPr>
+          <p:nvPr/>
+        </p:nvSpPr>
+        <p:spPr>
+          <a:xfrm xmlns:a="http://schemas.openxmlformats.org/drawingml/2006/main">
+            <a:off x="7334250" y="2000250"/>
+            <a:ext cx="400050" cy="361950"/>
           </a:xfrm>
           <a:prstGeom xmlns:a="http://schemas.openxmlformats.org/drawingml/2006/main" prst="roundRect">
             <a:avLst>
-              <a:gd name="adj" fmla="val 20000"/>
+              <a:gd name="adj" fmla="val 21053"/>
             </a:avLst>
           </a:prstGeom>
           <a:solidFill xmlns:a="http://schemas.openxmlformats.org/drawingml/2006/main">
@@ -16102,19 +16574,19 @@
           <p:cNvPr id="17" name="p02-r-1">
             <a:extLst xmlns:a="http://schemas.openxmlformats.org/drawingml/2006/main">
               <a:ext uri="{FF2B5EF4-FFF2-40B4-BE49-F238E27FC236}">
-                <a16:creationId xmlns:a16="http://schemas.microsoft.com/office/drawing/2014/main" id="{2A348D9E-1089-42C7-858C-0C06D64B7005}"/>
-              </a:ext>
-            </a:extLst>
-          </p:cNvPr>
-          <p:cNvSpPr>
-            <a:spLocks xmlns:a="http://schemas.openxmlformats.org/drawingml/2006/main" noGrp="1"/>
-          </p:cNvSpPr>
-          <p:nvPr/>
-        </p:nvSpPr>
-        <p:spPr>
-          <a:xfrm xmlns:a="http://schemas.openxmlformats.org/drawingml/2006/main">
-            <a:off x="7829550" y="2152650"/>
-            <a:ext cx="3600450" cy="381000"/>
+                <a16:creationId xmlns:a16="http://schemas.microsoft.com/office/drawing/2014/main" id="{1C00844D-4FB5-41C1-8D3A-D9BEADA72E06}"/>
+              </a:ext>
+            </a:extLst>
+          </p:cNvPr>
+          <p:cNvSpPr>
+            <a:spLocks xmlns:a="http://schemas.openxmlformats.org/drawingml/2006/main" noGrp="1"/>
+          </p:cNvSpPr>
+          <p:nvPr/>
+        </p:nvSpPr>
+        <p:spPr>
+          <a:xfrm xmlns:a="http://schemas.openxmlformats.org/drawingml/2006/main">
+            <a:off x="7829550" y="2000250"/>
+            <a:ext cx="3600450" cy="361950"/>
           </a:xfrm>
           <a:prstGeom xmlns:a="http://schemas.openxmlformats.org/drawingml/2006/main" prst="rect">
             <a:avLst/>
@@ -16157,27 +16629,27 @@
           <p:cNvPr id="18" name="p02-n-2">
             <a:extLst xmlns:a="http://schemas.openxmlformats.org/drawingml/2006/main">
               <a:ext uri="{FF2B5EF4-FFF2-40B4-BE49-F238E27FC236}">
-                <a16:creationId xmlns:a16="http://schemas.microsoft.com/office/drawing/2014/main" id="{F73F79F9-0712-413D-AC94-F5E47B03C4DF}"/>
-              </a:ext>
-            </a:extLst>
-          </p:cNvPr>
-          <p:cNvSpPr>
-            <a:spLocks xmlns:a="http://schemas.openxmlformats.org/drawingml/2006/main" noGrp="1"/>
-          </p:cNvSpPr>
-          <p:nvPr/>
-        </p:nvSpPr>
-        <p:spPr>
-          <a:xfrm xmlns:a="http://schemas.openxmlformats.org/drawingml/2006/main">
-            <a:off x="7334250" y="2724150"/>
-            <a:ext cx="400050" cy="381000"/>
+                <a16:creationId xmlns:a16="http://schemas.microsoft.com/office/drawing/2014/main" id="{2BBC6D1A-6917-4BDA-BE75-D1795C7D8F8C}"/>
+              </a:ext>
+            </a:extLst>
+          </p:cNvPr>
+          <p:cNvSpPr>
+            <a:spLocks xmlns:a="http://schemas.openxmlformats.org/drawingml/2006/main" noGrp="1"/>
+          </p:cNvSpPr>
+          <p:nvPr/>
+        </p:nvSpPr>
+        <p:spPr>
+          <a:xfrm xmlns:a="http://schemas.openxmlformats.org/drawingml/2006/main">
+            <a:off x="7334250" y="2514600"/>
+            <a:ext cx="400050" cy="361950"/>
           </a:xfrm>
           <a:prstGeom xmlns:a="http://schemas.openxmlformats.org/drawingml/2006/main" prst="roundRect">
             <a:avLst>
-              <a:gd name="adj" fmla="val 20000"/>
+              <a:gd name="adj" fmla="val 21053"/>
             </a:avLst>
           </a:prstGeom>
           <a:solidFill xmlns:a="http://schemas.openxmlformats.org/drawingml/2006/main">
-            <a:srgbClr val="C8161E"/>
+            <a:srgbClr val="18354E"/>
           </a:solidFill>
           <a:ln xmlns:a="http://schemas.openxmlformats.org/drawingml/2006/main" w="0">
             <a:noFill/>
@@ -16214,25 +16686,25 @@
           <p:cNvPr id="19" name="p02-r-2">
             <a:extLst xmlns:a="http://schemas.openxmlformats.org/drawingml/2006/main">
               <a:ext uri="{FF2B5EF4-FFF2-40B4-BE49-F238E27FC236}">
-                <a16:creationId xmlns:a16="http://schemas.microsoft.com/office/drawing/2014/main" id="{A2A4349C-C1E7-4772-B8F8-A31BF250E2C6}"/>
-              </a:ext>
-            </a:extLst>
-          </p:cNvPr>
-          <p:cNvSpPr>
-            <a:spLocks xmlns:a="http://schemas.openxmlformats.org/drawingml/2006/main" noGrp="1"/>
-          </p:cNvSpPr>
-          <p:nvPr/>
-        </p:nvSpPr>
-        <p:spPr>
-          <a:xfrm xmlns:a="http://schemas.openxmlformats.org/drawingml/2006/main">
-            <a:off x="7829550" y="2724150"/>
-            <a:ext cx="3600450" cy="381000"/>
+                <a16:creationId xmlns:a16="http://schemas.microsoft.com/office/drawing/2014/main" id="{F3B130E2-3675-4090-9AA1-F39A5AF1FCDE}"/>
+              </a:ext>
+            </a:extLst>
+          </p:cNvPr>
+          <p:cNvSpPr>
+            <a:spLocks xmlns:a="http://schemas.openxmlformats.org/drawingml/2006/main" noGrp="1"/>
+          </p:cNvSpPr>
+          <p:nvPr/>
+        </p:nvSpPr>
+        <p:spPr>
+          <a:xfrm xmlns:a="http://schemas.openxmlformats.org/drawingml/2006/main">
+            <a:off x="7829550" y="2514600"/>
+            <a:ext cx="3600450" cy="361950"/>
           </a:xfrm>
           <a:prstGeom xmlns:a="http://schemas.openxmlformats.org/drawingml/2006/main" prst="rect">
             <a:avLst/>
           </a:prstGeom>
           <a:solidFill xmlns:a="http://schemas.openxmlformats.org/drawingml/2006/main">
-            <a:srgbClr val="F8E9EA"/>
+            <a:srgbClr val="F3F6F7"/>
           </a:solidFill>
           <a:ln xmlns:a="http://schemas.openxmlformats.org/drawingml/2006/main" w="0">
             <a:noFill/>
@@ -16269,23 +16741,23 @@
           <p:cNvPr id="20" name="p02-n-3">
             <a:extLst xmlns:a="http://schemas.openxmlformats.org/drawingml/2006/main">
               <a:ext uri="{FF2B5EF4-FFF2-40B4-BE49-F238E27FC236}">
-                <a16:creationId xmlns:a16="http://schemas.microsoft.com/office/drawing/2014/main" id="{DD1B72CD-5551-47EC-85FA-B70DC68427CA}"/>
-              </a:ext>
-            </a:extLst>
-          </p:cNvPr>
-          <p:cNvSpPr>
-            <a:spLocks xmlns:a="http://schemas.openxmlformats.org/drawingml/2006/main" noGrp="1"/>
-          </p:cNvSpPr>
-          <p:nvPr/>
-        </p:nvSpPr>
-        <p:spPr>
-          <a:xfrm xmlns:a="http://schemas.openxmlformats.org/drawingml/2006/main">
-            <a:off x="7334250" y="3295650"/>
-            <a:ext cx="400050" cy="381000"/>
+                <a16:creationId xmlns:a16="http://schemas.microsoft.com/office/drawing/2014/main" id="{F20CFFFB-9C12-43BE-A9CB-D2D0D8992B11}"/>
+              </a:ext>
+            </a:extLst>
+          </p:cNvPr>
+          <p:cNvSpPr>
+            <a:spLocks xmlns:a="http://schemas.openxmlformats.org/drawingml/2006/main" noGrp="1"/>
+          </p:cNvSpPr>
+          <p:nvPr/>
+        </p:nvSpPr>
+        <p:spPr>
+          <a:xfrm xmlns:a="http://schemas.openxmlformats.org/drawingml/2006/main">
+            <a:off x="7334250" y="3028950"/>
+            <a:ext cx="400050" cy="361950"/>
           </a:xfrm>
           <a:prstGeom xmlns:a="http://schemas.openxmlformats.org/drawingml/2006/main" prst="roundRect">
             <a:avLst>
-              <a:gd name="adj" fmla="val 20000"/>
+              <a:gd name="adj" fmla="val 21053"/>
             </a:avLst>
           </a:prstGeom>
           <a:solidFill xmlns:a="http://schemas.openxmlformats.org/drawingml/2006/main">
@@ -16326,19 +16798,19 @@
           <p:cNvPr id="21" name="p02-r-3">
             <a:extLst xmlns:a="http://schemas.openxmlformats.org/drawingml/2006/main">
               <a:ext uri="{FF2B5EF4-FFF2-40B4-BE49-F238E27FC236}">
-                <a16:creationId xmlns:a16="http://schemas.microsoft.com/office/drawing/2014/main" id="{0044921D-EF08-4746-97D0-661AECB8F9B9}"/>
-              </a:ext>
-            </a:extLst>
-          </p:cNvPr>
-          <p:cNvSpPr>
-            <a:spLocks xmlns:a="http://schemas.openxmlformats.org/drawingml/2006/main" noGrp="1"/>
-          </p:cNvSpPr>
-          <p:nvPr/>
-        </p:nvSpPr>
-        <p:spPr>
-          <a:xfrm xmlns:a="http://schemas.openxmlformats.org/drawingml/2006/main">
-            <a:off x="7829550" y="3295650"/>
-            <a:ext cx="3600450" cy="381000"/>
+                <a16:creationId xmlns:a16="http://schemas.microsoft.com/office/drawing/2014/main" id="{08931141-A7DD-44B4-93D1-37A70F2918C5}"/>
+              </a:ext>
+            </a:extLst>
+          </p:cNvPr>
+          <p:cNvSpPr>
+            <a:spLocks xmlns:a="http://schemas.openxmlformats.org/drawingml/2006/main" noGrp="1"/>
+          </p:cNvSpPr>
+          <p:nvPr/>
+        </p:nvSpPr>
+        <p:spPr>
+          <a:xfrm xmlns:a="http://schemas.openxmlformats.org/drawingml/2006/main">
+            <a:off x="7829550" y="3028950"/>
+            <a:ext cx="3600450" cy="361950"/>
           </a:xfrm>
           <a:prstGeom xmlns:a="http://schemas.openxmlformats.org/drawingml/2006/main" prst="rect">
             <a:avLst/>
@@ -16381,23 +16853,23 @@
           <p:cNvPr id="22" name="p02-n-4">
             <a:extLst xmlns:a="http://schemas.openxmlformats.org/drawingml/2006/main">
               <a:ext uri="{FF2B5EF4-FFF2-40B4-BE49-F238E27FC236}">
-                <a16:creationId xmlns:a16="http://schemas.microsoft.com/office/drawing/2014/main" id="{928FB153-29A1-426E-BB34-9BD37997FFF3}"/>
-              </a:ext>
-            </a:extLst>
-          </p:cNvPr>
-          <p:cNvSpPr>
-            <a:spLocks xmlns:a="http://schemas.openxmlformats.org/drawingml/2006/main" noGrp="1"/>
-          </p:cNvSpPr>
-          <p:nvPr/>
-        </p:nvSpPr>
-        <p:spPr>
-          <a:xfrm xmlns:a="http://schemas.openxmlformats.org/drawingml/2006/main">
-            <a:off x="7334250" y="3867150"/>
-            <a:ext cx="400050" cy="381000"/>
+                <a16:creationId xmlns:a16="http://schemas.microsoft.com/office/drawing/2014/main" id="{9918A2B8-1EE9-42F0-B2A7-A355A2140B7B}"/>
+              </a:ext>
+            </a:extLst>
+          </p:cNvPr>
+          <p:cNvSpPr>
+            <a:spLocks xmlns:a="http://schemas.openxmlformats.org/drawingml/2006/main" noGrp="1"/>
+          </p:cNvSpPr>
+          <p:nvPr/>
+        </p:nvSpPr>
+        <p:spPr>
+          <a:xfrm xmlns:a="http://schemas.openxmlformats.org/drawingml/2006/main">
+            <a:off x="7334250" y="3543300"/>
+            <a:ext cx="400050" cy="361950"/>
           </a:xfrm>
           <a:prstGeom xmlns:a="http://schemas.openxmlformats.org/drawingml/2006/main" prst="roundRect">
             <a:avLst>
-              <a:gd name="adj" fmla="val 20000"/>
+              <a:gd name="adj" fmla="val 21053"/>
             </a:avLst>
           </a:prstGeom>
           <a:solidFill xmlns:a="http://schemas.openxmlformats.org/drawingml/2006/main">
@@ -16438,19 +16910,19 @@
           <p:cNvPr id="23" name="p02-r-4">
             <a:extLst xmlns:a="http://schemas.openxmlformats.org/drawingml/2006/main">
               <a:ext uri="{FF2B5EF4-FFF2-40B4-BE49-F238E27FC236}">
-                <a16:creationId xmlns:a16="http://schemas.microsoft.com/office/drawing/2014/main" id="{F6792B37-5AFB-4B9F-9434-2396DC413897}"/>
-              </a:ext>
-            </a:extLst>
-          </p:cNvPr>
-          <p:cNvSpPr>
-            <a:spLocks xmlns:a="http://schemas.openxmlformats.org/drawingml/2006/main" noGrp="1"/>
-          </p:cNvSpPr>
-          <p:nvPr/>
-        </p:nvSpPr>
-        <p:spPr>
-          <a:xfrm xmlns:a="http://schemas.openxmlformats.org/drawingml/2006/main">
-            <a:off x="7829550" y="3867150"/>
-            <a:ext cx="3600450" cy="381000"/>
+                <a16:creationId xmlns:a16="http://schemas.microsoft.com/office/drawing/2014/main" id="{1BBB5859-B867-4968-978C-C5377014EDC0}"/>
+              </a:ext>
+            </a:extLst>
+          </p:cNvPr>
+          <p:cNvSpPr>
+            <a:spLocks xmlns:a="http://schemas.openxmlformats.org/drawingml/2006/main" noGrp="1"/>
+          </p:cNvSpPr>
+          <p:nvPr/>
+        </p:nvSpPr>
+        <p:spPr>
+          <a:xfrm xmlns:a="http://schemas.openxmlformats.org/drawingml/2006/main">
+            <a:off x="7829550" y="3543300"/>
+            <a:ext cx="3600450" cy="361950"/>
           </a:xfrm>
           <a:prstGeom xmlns:a="http://schemas.openxmlformats.org/drawingml/2006/main" prst="rect">
             <a:avLst/>
@@ -16493,27 +16965,27 @@
           <p:cNvPr id="24" name="p02-n-5">
             <a:extLst xmlns:a="http://schemas.openxmlformats.org/drawingml/2006/main">
               <a:ext uri="{FF2B5EF4-FFF2-40B4-BE49-F238E27FC236}">
-                <a16:creationId xmlns:a16="http://schemas.microsoft.com/office/drawing/2014/main" id="{84E8CB20-6A7E-49BA-A596-BC2E77CC531B}"/>
-              </a:ext>
-            </a:extLst>
-          </p:cNvPr>
-          <p:cNvSpPr>
-            <a:spLocks xmlns:a="http://schemas.openxmlformats.org/drawingml/2006/main" noGrp="1"/>
-          </p:cNvSpPr>
-          <p:nvPr/>
-        </p:nvSpPr>
-        <p:spPr>
-          <a:xfrm xmlns:a="http://schemas.openxmlformats.org/drawingml/2006/main">
-            <a:off x="7334250" y="4438650"/>
-            <a:ext cx="400050" cy="381000"/>
+                <a16:creationId xmlns:a16="http://schemas.microsoft.com/office/drawing/2014/main" id="{D6E4AEC2-14EB-48B6-844A-D2BA711EA8A2}"/>
+              </a:ext>
+            </a:extLst>
+          </p:cNvPr>
+          <p:cNvSpPr>
+            <a:spLocks xmlns:a="http://schemas.openxmlformats.org/drawingml/2006/main" noGrp="1"/>
+          </p:cNvSpPr>
+          <p:nvPr/>
+        </p:nvSpPr>
+        <p:spPr>
+          <a:xfrm xmlns:a="http://schemas.openxmlformats.org/drawingml/2006/main">
+            <a:off x="7334250" y="4057650"/>
+            <a:ext cx="400050" cy="361950"/>
           </a:xfrm>
           <a:prstGeom xmlns:a="http://schemas.openxmlformats.org/drawingml/2006/main" prst="roundRect">
             <a:avLst>
-              <a:gd name="adj" fmla="val 20000"/>
+              <a:gd name="adj" fmla="val 21053"/>
             </a:avLst>
           </a:prstGeom>
           <a:solidFill xmlns:a="http://schemas.openxmlformats.org/drawingml/2006/main">
-            <a:srgbClr val="18354E"/>
+            <a:srgbClr val="C8161E"/>
           </a:solidFill>
           <a:ln xmlns:a="http://schemas.openxmlformats.org/drawingml/2006/main" w="0">
             <a:noFill/>
@@ -16550,25 +17022,25 @@
           <p:cNvPr id="25" name="p02-r-5">
             <a:extLst xmlns:a="http://schemas.openxmlformats.org/drawingml/2006/main">
               <a:ext uri="{FF2B5EF4-FFF2-40B4-BE49-F238E27FC236}">
-                <a16:creationId xmlns:a16="http://schemas.microsoft.com/office/drawing/2014/main" id="{B5C336BF-9ED9-475D-8F21-0C5E3F40616B}"/>
-              </a:ext>
-            </a:extLst>
-          </p:cNvPr>
-          <p:cNvSpPr>
-            <a:spLocks xmlns:a="http://schemas.openxmlformats.org/drawingml/2006/main" noGrp="1"/>
-          </p:cNvSpPr>
-          <p:nvPr/>
-        </p:nvSpPr>
-        <p:spPr>
-          <a:xfrm xmlns:a="http://schemas.openxmlformats.org/drawingml/2006/main">
-            <a:off x="7829550" y="4438650"/>
-            <a:ext cx="3600450" cy="381000"/>
+                <a16:creationId xmlns:a16="http://schemas.microsoft.com/office/drawing/2014/main" id="{C910CAD6-43FB-42D4-9147-8986560E92C5}"/>
+              </a:ext>
+            </a:extLst>
+          </p:cNvPr>
+          <p:cNvSpPr>
+            <a:spLocks xmlns:a="http://schemas.openxmlformats.org/drawingml/2006/main" noGrp="1"/>
+          </p:cNvSpPr>
+          <p:nvPr/>
+        </p:nvSpPr>
+        <p:spPr>
+          <a:xfrm xmlns:a="http://schemas.openxmlformats.org/drawingml/2006/main">
+            <a:off x="7829550" y="4057650"/>
+            <a:ext cx="3600450" cy="361950"/>
           </a:xfrm>
           <a:prstGeom xmlns:a="http://schemas.openxmlformats.org/drawingml/2006/main" prst="rect">
             <a:avLst/>
           </a:prstGeom>
           <a:solidFill xmlns:a="http://schemas.openxmlformats.org/drawingml/2006/main">
-            <a:srgbClr val="F3F6F7"/>
+            <a:srgbClr val="F8E9EA"/>
           </a:solidFill>
           <a:ln xmlns:a="http://schemas.openxmlformats.org/drawingml/2006/main" w="0">
             <a:noFill/>
@@ -16595,6 +17067,118 @@
                 <a:ea typeface="Microsoft YaHei"/>
                 <a:cs typeface="Microsoft YaHei"/>
               </a:rPr>
+              <a:t>已遇失败 / 放弃备选未落档</a:t>
+            </a:r>
+          </a:p>
+        </p:txBody>
+      </p:sp>
+      <p:sp>
+        <p:nvSpPr>
+          <p:cNvPr id="26" name="p02-n-6">
+            <a:extLst xmlns:a="http://schemas.openxmlformats.org/drawingml/2006/main">
+              <a:ext uri="{FF2B5EF4-FFF2-40B4-BE49-F238E27FC236}">
+                <a16:creationId xmlns:a16="http://schemas.microsoft.com/office/drawing/2014/main" id="{98D93E04-3AC0-4F53-84B5-EFBC2E2DC540}"/>
+              </a:ext>
+            </a:extLst>
+          </p:cNvPr>
+          <p:cNvSpPr>
+            <a:spLocks xmlns:a="http://schemas.openxmlformats.org/drawingml/2006/main" noGrp="1"/>
+          </p:cNvSpPr>
+          <p:nvPr/>
+        </p:nvSpPr>
+        <p:spPr>
+          <a:xfrm xmlns:a="http://schemas.openxmlformats.org/drawingml/2006/main">
+            <a:off x="7334250" y="4572000"/>
+            <a:ext cx="400050" cy="361950"/>
+          </a:xfrm>
+          <a:prstGeom xmlns:a="http://schemas.openxmlformats.org/drawingml/2006/main" prst="roundRect">
+            <a:avLst>
+              <a:gd name="adj" fmla="val 21053"/>
+            </a:avLst>
+          </a:prstGeom>
+          <a:solidFill xmlns:a="http://schemas.openxmlformats.org/drawingml/2006/main">
+            <a:srgbClr val="18354E"/>
+          </a:solidFill>
+          <a:ln xmlns:a="http://schemas.openxmlformats.org/drawingml/2006/main" w="0">
+            <a:noFill/>
+            <a:prstDash val="solid"/>
+          </a:ln>
+        </p:spPr>
+        <p:txBody>
+          <a:bodyPr xmlns:a="http://schemas.openxmlformats.org/drawingml/2006/main" lIns="76200" tIns="38100" rIns="76200" bIns="38100" anchor="ctr"/>
+          <a:lstStyle xmlns:a="http://schemas.openxmlformats.org/drawingml/2006/main"/>
+          <a:p xmlns:a="http://schemas.openxmlformats.org/drawingml/2006/main">
+            <a:pPr algn="ctr">
+              <a:defRPr sz="1350" b="1">
+                <a:solidFill>
+                  <a:srgbClr val="FFFFFF"/>
+                </a:solidFill>
+              </a:defRPr>
+            </a:pPr>
+            <a:r>
+              <a:rPr sz="1350" b="1">
+                <a:solidFill>
+                  <a:srgbClr val="FFFFFF"/>
+                </a:solidFill>
+                <a:latin typeface="Arial"/>
+                <a:ea typeface="Arial"/>
+                <a:cs typeface="Arial"/>
+              </a:rPr>
+              <a:t>7</a:t>
+            </a:r>
+          </a:p>
+        </p:txBody>
+      </p:sp>
+      <p:sp>
+        <p:nvSpPr>
+          <p:cNvPr id="27" name="p02-r-6">
+            <a:extLst xmlns:a="http://schemas.openxmlformats.org/drawingml/2006/main">
+              <a:ext uri="{FF2B5EF4-FFF2-40B4-BE49-F238E27FC236}">
+                <a16:creationId xmlns:a16="http://schemas.microsoft.com/office/drawing/2014/main" id="{19698469-605A-4EA4-8CA5-AA0EBD95C369}"/>
+              </a:ext>
+            </a:extLst>
+          </p:cNvPr>
+          <p:cNvSpPr>
+            <a:spLocks xmlns:a="http://schemas.openxmlformats.org/drawingml/2006/main" noGrp="1"/>
+          </p:cNvSpPr>
+          <p:nvPr/>
+        </p:nvSpPr>
+        <p:spPr>
+          <a:xfrm xmlns:a="http://schemas.openxmlformats.org/drawingml/2006/main">
+            <a:off x="7829550" y="4572000"/>
+            <a:ext cx="3600450" cy="361950"/>
+          </a:xfrm>
+          <a:prstGeom xmlns:a="http://schemas.openxmlformats.org/drawingml/2006/main" prst="rect">
+            <a:avLst/>
+          </a:prstGeom>
+          <a:solidFill xmlns:a="http://schemas.openxmlformats.org/drawingml/2006/main">
+            <a:srgbClr val="F3F6F7"/>
+          </a:solidFill>
+          <a:ln xmlns:a="http://schemas.openxmlformats.org/drawingml/2006/main" w="0">
+            <a:noFill/>
+            <a:prstDash val="solid"/>
+          </a:ln>
+        </p:spPr>
+        <p:txBody>
+          <a:bodyPr xmlns:a="http://schemas.openxmlformats.org/drawingml/2006/main" lIns="76200" tIns="38100" rIns="76200" bIns="38100" anchor="ctr"/>
+          <a:lstStyle xmlns:a="http://schemas.openxmlformats.org/drawingml/2006/main"/>
+          <a:p xmlns:a="http://schemas.openxmlformats.org/drawingml/2006/main">
+            <a:pPr algn="l">
+              <a:defRPr sz="1350" b="1">
+                <a:solidFill>
+                  <a:srgbClr val="263746"/>
+                </a:solidFill>
+              </a:defRPr>
+            </a:pPr>
+            <a:r>
+              <a:rPr sz="1350" b="1">
+                <a:solidFill>
+                  <a:srgbClr val="263746"/>
+                </a:solidFill>
+                <a:latin typeface="Microsoft YaHei"/>
+                <a:ea typeface="Microsoft YaHei"/>
+                <a:cs typeface="Microsoft YaHei"/>
+              </a:rPr>
               <a:t>迁移完整项目模板</a:t>
             </a:r>
           </a:p>
@@ -16602,10 +17186,10 @@
       </p:sp>
       <p:sp>
         <p:nvSpPr>
-          <p:cNvPr id="26" name="p02-bottom">
-            <a:extLst xmlns:a="http://schemas.openxmlformats.org/drawingml/2006/main">
-              <a:ext uri="{FF2B5EF4-FFF2-40B4-BE49-F238E27FC236}">
-                <a16:creationId xmlns:a16="http://schemas.microsoft.com/office/drawing/2014/main" id="{6C844554-6F84-41B9-A6F0-71F162A3FF78}"/>
+          <p:cNvPr id="28" name="p02-bottom">
+            <a:extLst xmlns:a="http://schemas.openxmlformats.org/drawingml/2006/main">
+              <a:ext uri="{FF2B5EF4-FFF2-40B4-BE49-F238E27FC236}">
+                <a16:creationId xmlns:a16="http://schemas.microsoft.com/office/drawing/2014/main" id="{3C250F8C-405C-4307-A9FB-6AF7F3993705}"/>
               </a:ext>
             </a:extLst>
           </p:cNvPr>
@@ -16754,7 +17338,7 @@
           <p:cNvPr id="6" name="p20-sn0">
             <a:extLst xmlns:a="http://schemas.openxmlformats.org/drawingml/2006/main">
               <a:ext uri="{FF2B5EF4-FFF2-40B4-BE49-F238E27FC236}">
-                <a16:creationId xmlns:a16="http://schemas.microsoft.com/office/drawing/2014/main" id="{28ED987D-31D7-4560-AED2-EDC3684777BF}"/>
+                <a16:creationId xmlns:a16="http://schemas.microsoft.com/office/drawing/2014/main" id="{60D6A80E-07AE-4F55-B553-0DBB539CE7B8}"/>
               </a:ext>
             </a:extLst>
           </p:cNvPr>
@@ -16811,7 +17395,7 @@
           <p:cNvPr id="7" name="p20-sh0">
             <a:extLst xmlns:a="http://schemas.openxmlformats.org/drawingml/2006/main">
               <a:ext uri="{FF2B5EF4-FFF2-40B4-BE49-F238E27FC236}">
-                <a16:creationId xmlns:a16="http://schemas.microsoft.com/office/drawing/2014/main" id="{DACD38F1-DB16-42A7-B669-48283283AF7A}"/>
+                <a16:creationId xmlns:a16="http://schemas.microsoft.com/office/drawing/2014/main" id="{D62C51BB-2AB9-4905-9B42-1610B9860A3A}"/>
               </a:ext>
             </a:extLst>
           </p:cNvPr>
@@ -16868,7 +17452,7 @@
           <p:cNvPr id="8" name="p20-sd0">
             <a:extLst xmlns:a="http://schemas.openxmlformats.org/drawingml/2006/main">
               <a:ext uri="{FF2B5EF4-FFF2-40B4-BE49-F238E27FC236}">
-                <a16:creationId xmlns:a16="http://schemas.microsoft.com/office/drawing/2014/main" id="{6DDB9F47-EDED-4843-84D2-BB60F963F664}"/>
+                <a16:creationId xmlns:a16="http://schemas.microsoft.com/office/drawing/2014/main" id="{813C1A7C-2956-4EAB-BBB4-05C8552E71E2}"/>
               </a:ext>
             </a:extLst>
           </p:cNvPr>
@@ -16931,7 +17515,7 @@
           <p:cNvPr id="9" name="p20-sn1">
             <a:extLst xmlns:a="http://schemas.openxmlformats.org/drawingml/2006/main">
               <a:ext uri="{FF2B5EF4-FFF2-40B4-BE49-F238E27FC236}">
-                <a16:creationId xmlns:a16="http://schemas.microsoft.com/office/drawing/2014/main" id="{71768FC9-BED0-4604-AE5C-968C66971D14}"/>
+                <a16:creationId xmlns:a16="http://schemas.microsoft.com/office/drawing/2014/main" id="{D0007AE7-55EE-4A57-B5E2-F893F16ED836}"/>
               </a:ext>
             </a:extLst>
           </p:cNvPr>
@@ -16988,7 +17572,7 @@
           <p:cNvPr id="10" name="p20-sh1">
             <a:extLst xmlns:a="http://schemas.openxmlformats.org/drawingml/2006/main">
               <a:ext uri="{FF2B5EF4-FFF2-40B4-BE49-F238E27FC236}">
-                <a16:creationId xmlns:a16="http://schemas.microsoft.com/office/drawing/2014/main" id="{28349343-3D55-417A-8125-D64BFBC434B8}"/>
+                <a16:creationId xmlns:a16="http://schemas.microsoft.com/office/drawing/2014/main" id="{8CD2E056-DC7F-4719-9719-1189EC1D15C2}"/>
               </a:ext>
             </a:extLst>
           </p:cNvPr>
@@ -17045,7 +17629,7 @@
           <p:cNvPr id="11" name="p20-sd1">
             <a:extLst xmlns:a="http://schemas.openxmlformats.org/drawingml/2006/main">
               <a:ext uri="{FF2B5EF4-FFF2-40B4-BE49-F238E27FC236}">
-                <a16:creationId xmlns:a16="http://schemas.microsoft.com/office/drawing/2014/main" id="{DCC7DF99-A9A8-48BE-9185-8B32AF8C6644}"/>
+                <a16:creationId xmlns:a16="http://schemas.microsoft.com/office/drawing/2014/main" id="{9838E44C-DEA6-4886-B678-BAA1FD227129}"/>
               </a:ext>
             </a:extLst>
           </p:cNvPr>
@@ -17108,7 +17692,7 @@
           <p:cNvPr id="12" name="p20-sn2">
             <a:extLst xmlns:a="http://schemas.openxmlformats.org/drawingml/2006/main">
               <a:ext uri="{FF2B5EF4-FFF2-40B4-BE49-F238E27FC236}">
-                <a16:creationId xmlns:a16="http://schemas.microsoft.com/office/drawing/2014/main" id="{C50F7EAC-4B3B-4767-8471-6F2FB3B6B05E}"/>
+                <a16:creationId xmlns:a16="http://schemas.microsoft.com/office/drawing/2014/main" id="{64BB821B-2131-4048-86CC-4505772787B5}"/>
               </a:ext>
             </a:extLst>
           </p:cNvPr>
@@ -17165,7 +17749,7 @@
           <p:cNvPr id="13" name="p20-sh2">
             <a:extLst xmlns:a="http://schemas.openxmlformats.org/drawingml/2006/main">
               <a:ext uri="{FF2B5EF4-FFF2-40B4-BE49-F238E27FC236}">
-                <a16:creationId xmlns:a16="http://schemas.microsoft.com/office/drawing/2014/main" id="{129961C4-CB7E-441B-9345-6872D7FF216E}"/>
+                <a16:creationId xmlns:a16="http://schemas.microsoft.com/office/drawing/2014/main" id="{3967BACB-1A45-442C-9DB3-513D413CA792}"/>
               </a:ext>
             </a:extLst>
           </p:cNvPr>
@@ -17222,7 +17806,7 @@
           <p:cNvPr id="14" name="p20-sd2">
             <a:extLst xmlns:a="http://schemas.openxmlformats.org/drawingml/2006/main">
               <a:ext uri="{FF2B5EF4-FFF2-40B4-BE49-F238E27FC236}">
-                <a16:creationId xmlns:a16="http://schemas.microsoft.com/office/drawing/2014/main" id="{71903AFE-8E31-4A61-A1B1-23932EE00542}"/>
+                <a16:creationId xmlns:a16="http://schemas.microsoft.com/office/drawing/2014/main" id="{4FAD39B0-BEEF-46A3-9FAB-F89BD29B522F}"/>
               </a:ext>
             </a:extLst>
           </p:cNvPr>
@@ -17285,7 +17869,7 @@
           <p:cNvPr id="15" name="p20-sn3">
             <a:extLst xmlns:a="http://schemas.openxmlformats.org/drawingml/2006/main">
               <a:ext uri="{FF2B5EF4-FFF2-40B4-BE49-F238E27FC236}">
-                <a16:creationId xmlns:a16="http://schemas.microsoft.com/office/drawing/2014/main" id="{8EBBD08D-5FDD-4CC6-84BF-BD4EBD9EB89A}"/>
+                <a16:creationId xmlns:a16="http://schemas.microsoft.com/office/drawing/2014/main" id="{8186D59F-9F13-42CA-BF91-9D932B6FC185}"/>
               </a:ext>
             </a:extLst>
           </p:cNvPr>
@@ -17342,7 +17926,7 @@
           <p:cNvPr id="16" name="p20-sh3">
             <a:extLst xmlns:a="http://schemas.openxmlformats.org/drawingml/2006/main">
               <a:ext uri="{FF2B5EF4-FFF2-40B4-BE49-F238E27FC236}">
-                <a16:creationId xmlns:a16="http://schemas.microsoft.com/office/drawing/2014/main" id="{D6FD2B61-C4A0-410C-AF41-D28A9B3D0A60}"/>
+                <a16:creationId xmlns:a16="http://schemas.microsoft.com/office/drawing/2014/main" id="{108DC2CA-8B3D-4CD6-9239-1DBB212C4F52}"/>
               </a:ext>
             </a:extLst>
           </p:cNvPr>
@@ -17399,7 +17983,7 @@
           <p:cNvPr id="17" name="p20-sd3">
             <a:extLst xmlns:a="http://schemas.openxmlformats.org/drawingml/2006/main">
               <a:ext uri="{FF2B5EF4-FFF2-40B4-BE49-F238E27FC236}">
-                <a16:creationId xmlns:a16="http://schemas.microsoft.com/office/drawing/2014/main" id="{7A5C92D0-2FC7-48A6-B209-CC7A3DF8F120}"/>
+                <a16:creationId xmlns:a16="http://schemas.microsoft.com/office/drawing/2014/main" id="{07A738EA-39BD-43F5-BFF6-D136AD25266C}"/>
               </a:ext>
             </a:extLst>
           </p:cNvPr>
@@ -17452,7 +18036,7 @@
                 <a:ea typeface="Microsoft YaHei"/>
                 <a:cs typeface="Microsoft YaHei"/>
               </a:rPr>
-              <a:t>把规格、判断、反馈与风险绑定到当前版本</a:t>
+              <a:t>规格、判断、反馈、风险与失败事实绑定当前版本</a:t>
             </a:r>
           </a:p>
         </p:txBody>
@@ -17462,7 +18046,7 @@
           <p:cNvPr id="18" name="p20-boundary">
             <a:extLst xmlns:a="http://schemas.openxmlformats.org/drawingml/2006/main">
               <a:ext uri="{FF2B5EF4-FFF2-40B4-BE49-F238E27FC236}">
-                <a16:creationId xmlns:a16="http://schemas.microsoft.com/office/drawing/2014/main" id="{09C72B66-D7F3-4DA8-8746-15B5C3D1164A}"/>
+                <a16:creationId xmlns:a16="http://schemas.microsoft.com/office/drawing/2014/main" id="{F218E38E-341F-4914-93E1-6698EF7F1169}"/>
               </a:ext>
             </a:extLst>
           </p:cNvPr>
@@ -17613,7 +18197,7 @@
           <p:cNvPr id="6" name="p20-submit-title">
             <a:extLst xmlns:a="http://schemas.openxmlformats.org/drawingml/2006/main">
               <a:ext uri="{FF2B5EF4-FFF2-40B4-BE49-F238E27FC236}">
-                <a16:creationId xmlns:a16="http://schemas.microsoft.com/office/drawing/2014/main" id="{58EAF929-064C-4EDF-82D1-5B6808513D93}"/>
+                <a16:creationId xmlns:a16="http://schemas.microsoft.com/office/drawing/2014/main" id="{B8ACE220-F73E-430D-A156-DFB47E23B6AE}"/>
               </a:ext>
             </a:extLst>
           </p:cNvPr>
@@ -17666,7 +18250,7 @@
           <p:cNvPr id="7" name="p20-submit">
             <a:extLst xmlns:a="http://schemas.openxmlformats.org/drawingml/2006/main">
               <a:ext uri="{FF2B5EF4-FFF2-40B4-BE49-F238E27FC236}">
-                <a16:creationId xmlns:a16="http://schemas.microsoft.com/office/drawing/2014/main" id="{6F05DDFD-F0C1-4C9D-AEB1-8F1E27E4F1B2}"/>
+                <a16:creationId xmlns:a16="http://schemas.microsoft.com/office/drawing/2014/main" id="{F1BA96A4-DC81-4B56-99EB-D878E0CD5560}"/>
               </a:ext>
             </a:extLst>
           </p:cNvPr>
@@ -17756,7 +18340,7 @@
           <p:cNvPr id="8" name="p20-back-title">
             <a:extLst xmlns:a="http://schemas.openxmlformats.org/drawingml/2006/main">
               <a:ext uri="{FF2B5EF4-FFF2-40B4-BE49-F238E27FC236}">
-                <a16:creationId xmlns:a16="http://schemas.microsoft.com/office/drawing/2014/main" id="{E6A70CA9-369E-4581-8A7D-A0AB3FF89441}"/>
+                <a16:creationId xmlns:a16="http://schemas.microsoft.com/office/drawing/2014/main" id="{7C4C4E12-04F7-4C3A-BEC1-BF77638CC867}"/>
               </a:ext>
             </a:extLst>
           </p:cNvPr>
@@ -17809,7 +18393,7 @@
           <p:cNvPr id="9" name="p20-back">
             <a:extLst xmlns:a="http://schemas.openxmlformats.org/drawingml/2006/main">
               <a:ext uri="{FF2B5EF4-FFF2-40B4-BE49-F238E27FC236}">
-                <a16:creationId xmlns:a16="http://schemas.microsoft.com/office/drawing/2014/main" id="{C18CD464-54C6-4142-BFAD-C3156A8CF2A9}"/>
+                <a16:creationId xmlns:a16="http://schemas.microsoft.com/office/drawing/2014/main" id="{14880199-E305-4897-B080-39672A1C6201}"/>
               </a:ext>
             </a:extLst>
           </p:cNvPr>
@@ -17840,7 +18424,7 @@
           <a:p xmlns:a="http://schemas.openxmlformats.org/drawingml/2006/main">
             <a:pPr algn="ctr">
               <a:lnSpc>
-                <a:spcPct val="112000"/>
+                <a:spcPct val="102000"/>
               </a:lnSpc>
               <a:buNone/>
               <a:defRPr sz="1350" b="1">
@@ -17864,7 +18448,7 @@
           <a:p xmlns:a="http://schemas.openxmlformats.org/drawingml/2006/main">
             <a:pPr algn="ctr">
               <a:lnSpc>
-                <a:spcPct val="112000"/>
+                <a:spcPct val="102000"/>
               </a:lnSpc>
               <a:buNone/>
               <a:defRPr sz="1350" b="1">
@@ -17888,7 +18472,7 @@
           <a:p xmlns:a="http://schemas.openxmlformats.org/drawingml/2006/main">
             <a:pPr algn="ctr">
               <a:lnSpc>
-                <a:spcPct val="112000"/>
+                <a:spcPct val="102000"/>
               </a:lnSpc>
               <a:buNone/>
               <a:defRPr sz="1350" b="1">
@@ -17912,7 +18496,7 @@
           <a:p xmlns:a="http://schemas.openxmlformats.org/drawingml/2006/main">
             <a:pPr algn="ctr">
               <a:lnSpc>
-                <a:spcPct val="112000"/>
+                <a:spcPct val="102000"/>
               </a:lnSpc>
               <a:buNone/>
               <a:defRPr sz="1350" b="1">
@@ -17936,7 +18520,7 @@
           <a:p xmlns:a="http://schemas.openxmlformats.org/drawingml/2006/main">
             <a:pPr algn="ctr">
               <a:lnSpc>
-                <a:spcPct val="112000"/>
+                <a:spcPct val="102000"/>
               </a:lnSpc>
               <a:buNone/>
               <a:defRPr sz="1350" b="1">
@@ -17960,7 +18544,7 @@
           <a:p xmlns:a="http://schemas.openxmlformats.org/drawingml/2006/main">
             <a:pPr algn="ctr">
               <a:lnSpc>
-                <a:spcPct val="112000"/>
+                <a:spcPct val="102000"/>
               </a:lnSpc>
               <a:buNone/>
               <a:defRPr sz="1350" b="1">
@@ -17978,6 +18562,30 @@
                 <a:ea typeface="Microsoft YaHei"/>
                 <a:cs typeface="Microsoft YaHei"/>
               </a:rPr>
+              <a:t>失败事实缺失 → failure-log.md</a:t>
+            </a:r>
+          </a:p>
+          <a:p xmlns:a="http://schemas.openxmlformats.org/drawingml/2006/main">
+            <a:pPr algn="ctr">
+              <a:lnSpc>
+                <a:spcPct val="102000"/>
+              </a:lnSpc>
+              <a:buNone/>
+              <a:defRPr sz="1350" b="1">
+                <a:solidFill>
+                  <a:srgbClr val="263746"/>
+                </a:solidFill>
+              </a:defRPr>
+            </a:pPr>
+            <a:r>
+              <a:rPr sz="1350" b="1">
+                <a:solidFill>
+                  <a:srgbClr val="263746"/>
+                </a:solidFill>
+                <a:latin typeface="Microsoft YaHei"/>
+                <a:ea typeface="Microsoft YaHei"/>
+                <a:cs typeface="Microsoft YaHei"/>
+              </a:rPr>
               <a:t>迁移丢记录 → 迁移验收</a:t>
             </a:r>
           </a:p>
@@ -17988,7 +18596,7 @@
           <p:cNvPr id="10" name="p20-next-title">
             <a:extLst xmlns:a="http://schemas.openxmlformats.org/drawingml/2006/main">
               <a:ext uri="{FF2B5EF4-FFF2-40B4-BE49-F238E27FC236}">
-                <a16:creationId xmlns:a16="http://schemas.microsoft.com/office/drawing/2014/main" id="{0AD13980-6175-419F-806A-40B3BBE9A96D}"/>
+                <a16:creationId xmlns:a16="http://schemas.microsoft.com/office/drawing/2014/main" id="{BBBB54F9-9A38-4F12-AB92-61BB4B7D8AAE}"/>
               </a:ext>
             </a:extLst>
           </p:cNvPr>
@@ -18041,7 +18649,7 @@
           <p:cNvPr id="11" name="p20-l1">
             <a:extLst xmlns:a="http://schemas.openxmlformats.org/drawingml/2006/main">
               <a:ext uri="{FF2B5EF4-FFF2-40B4-BE49-F238E27FC236}">
-                <a16:creationId xmlns:a16="http://schemas.microsoft.com/office/drawing/2014/main" id="{F7C2988E-563D-4CC2-AB21-FD84856F500B}"/>
+                <a16:creationId xmlns:a16="http://schemas.microsoft.com/office/drawing/2014/main" id="{5DA60061-A4FA-4096-83E5-32881ACB00E0}"/>
               </a:ext>
             </a:extLst>
           </p:cNvPr>
@@ -18072,7 +18680,7 @@
           <p:cNvPr id="12" name="p20-l2">
             <a:extLst xmlns:a="http://schemas.openxmlformats.org/drawingml/2006/main">
               <a:ext uri="{FF2B5EF4-FFF2-40B4-BE49-F238E27FC236}">
-                <a16:creationId xmlns:a16="http://schemas.microsoft.com/office/drawing/2014/main" id="{29177F11-9928-4E5D-831B-897733834A94}"/>
+                <a16:creationId xmlns:a16="http://schemas.microsoft.com/office/drawing/2014/main" id="{BD517B73-5C4E-470B-A5B2-CF156915253A}"/>
               </a:ext>
             </a:extLst>
           </p:cNvPr>
@@ -18103,7 +18711,7 @@
           <p:cNvPr id="13" name="p20-a">
             <a:extLst xmlns:a="http://schemas.openxmlformats.org/drawingml/2006/main">
               <a:ext uri="{FF2B5EF4-FFF2-40B4-BE49-F238E27FC236}">
-                <a16:creationId xmlns:a16="http://schemas.microsoft.com/office/drawing/2014/main" id="{521B7F4A-390A-49FF-8F9C-3AE375DD182C}"/>
+                <a16:creationId xmlns:a16="http://schemas.microsoft.com/office/drawing/2014/main" id="{A666D929-119C-45F9-9CFB-59D3A1103646}"/>
               </a:ext>
             </a:extLst>
           </p:cNvPr>
@@ -18188,7 +18796,7 @@
           <p:cNvPr id="14" name="p20-b">
             <a:extLst xmlns:a="http://schemas.openxmlformats.org/drawingml/2006/main">
               <a:ext uri="{FF2B5EF4-FFF2-40B4-BE49-F238E27FC236}">
-                <a16:creationId xmlns:a16="http://schemas.microsoft.com/office/drawing/2014/main" id="{99470900-6061-4667-AEC2-E2EC336FB3C7}"/>
+                <a16:creationId xmlns:a16="http://schemas.microsoft.com/office/drawing/2014/main" id="{4579E8D4-071A-4648-9AAE-0F8B93F1D892}"/>
               </a:ext>
             </a:extLst>
           </p:cNvPr>
@@ -18273,7 +18881,7 @@
           <p:cNvPr id="15" name="p20-c">
             <a:extLst xmlns:a="http://schemas.openxmlformats.org/drawingml/2006/main">
               <a:ext uri="{FF2B5EF4-FFF2-40B4-BE49-F238E27FC236}">
-                <a16:creationId xmlns:a16="http://schemas.microsoft.com/office/drawing/2014/main" id="{025ACAC8-1BC3-4565-B127-CC3D3AEF2829}"/>
+                <a16:creationId xmlns:a16="http://schemas.microsoft.com/office/drawing/2014/main" id="{DCA18D6D-DF82-4487-9F51-BA9F00487357}"/>
               </a:ext>
             </a:extLst>
           </p:cNvPr>
@@ -18358,7 +18966,7 @@
           <p:cNvPr id="16" name="p20-bottom">
             <a:extLst xmlns:a="http://schemas.openxmlformats.org/drawingml/2006/main">
               <a:ext uri="{FF2B5EF4-FFF2-40B4-BE49-F238E27FC236}">
-                <a16:creationId xmlns:a16="http://schemas.microsoft.com/office/drawing/2014/main" id="{EDA2D03D-4532-4B51-8B87-9EBC05F06DEA}"/>
+                <a16:creationId xmlns:a16="http://schemas.microsoft.com/office/drawing/2014/main" id="{BD3A3028-362F-4423-AF6C-577F6DFAB669}"/>
               </a:ext>
             </a:extLst>
           </p:cNvPr>
@@ -18401,7 +19009,7 @@
                 <a:ea typeface="Microsoft YaHei"/>
                 <a:cs typeface="Microsoft YaHei"/>
               </a:rPr>
-              <a:t>退出卡：你的 baseline 为什么公平？复现说明齐到种子了吗？哪项门条件最可能不通过？</a:t>
+              <a:t>退出卡：baseline 为什么公平？复现齐到种子了吗？已遇失败和前瞻预案分开了吗？</a:t>
             </a:r>
           </a:p>
         </p:txBody>
@@ -18505,7 +19113,7 @@
           <p:cNvPr id="6" name="p03-n-0">
             <a:extLst xmlns:a="http://schemas.openxmlformats.org/drawingml/2006/main">
               <a:ext uri="{FF2B5EF4-FFF2-40B4-BE49-F238E27FC236}">
-                <a16:creationId xmlns:a16="http://schemas.microsoft.com/office/drawing/2014/main" id="{7B7B3705-CA36-44B1-BDEA-A0D356F893D2}"/>
+                <a16:creationId xmlns:a16="http://schemas.microsoft.com/office/drawing/2014/main" id="{F0B87E25-D8FF-4E65-808E-71C0E88C4E97}"/>
               </a:ext>
             </a:extLst>
           </p:cNvPr>
@@ -18562,7 +19170,7 @@
           <p:cNvPr id="7" name="p03-g-0">
             <a:extLst xmlns:a="http://schemas.openxmlformats.org/drawingml/2006/main">
               <a:ext uri="{FF2B5EF4-FFF2-40B4-BE49-F238E27FC236}">
-                <a16:creationId xmlns:a16="http://schemas.microsoft.com/office/drawing/2014/main" id="{AB454581-AAC2-46B1-B408-2EA3F45617F0}"/>
+                <a16:creationId xmlns:a16="http://schemas.microsoft.com/office/drawing/2014/main" id="{67092735-43F8-43CB-9525-AA6732D43687}"/>
               </a:ext>
             </a:extLst>
           </p:cNvPr>
@@ -18617,7 +19225,7 @@
           <p:cNvPr id="8" name="p03-n-1">
             <a:extLst xmlns:a="http://schemas.openxmlformats.org/drawingml/2006/main">
               <a:ext uri="{FF2B5EF4-FFF2-40B4-BE49-F238E27FC236}">
-                <a16:creationId xmlns:a16="http://schemas.microsoft.com/office/drawing/2014/main" id="{C40FB344-184C-4214-B583-CBE5811AC382}"/>
+                <a16:creationId xmlns:a16="http://schemas.microsoft.com/office/drawing/2014/main" id="{E2529C4A-AEF6-46EC-B073-16ADA7CB1825}"/>
               </a:ext>
             </a:extLst>
           </p:cNvPr>
@@ -18674,7 +19282,7 @@
           <p:cNvPr id="9" name="p03-g-1">
             <a:extLst xmlns:a="http://schemas.openxmlformats.org/drawingml/2006/main">
               <a:ext uri="{FF2B5EF4-FFF2-40B4-BE49-F238E27FC236}">
-                <a16:creationId xmlns:a16="http://schemas.microsoft.com/office/drawing/2014/main" id="{849F2763-4C48-4B67-8445-5FCFD2C8C18D}"/>
+                <a16:creationId xmlns:a16="http://schemas.microsoft.com/office/drawing/2014/main" id="{916BA632-213F-48F4-9AFF-2A5C1901CD29}"/>
               </a:ext>
             </a:extLst>
           </p:cNvPr>
@@ -18729,7 +19337,7 @@
           <p:cNvPr id="10" name="p03-n-2">
             <a:extLst xmlns:a="http://schemas.openxmlformats.org/drawingml/2006/main">
               <a:ext uri="{FF2B5EF4-FFF2-40B4-BE49-F238E27FC236}">
-                <a16:creationId xmlns:a16="http://schemas.microsoft.com/office/drawing/2014/main" id="{296030FE-8054-4387-AE34-5B3326CCA183}"/>
+                <a16:creationId xmlns:a16="http://schemas.microsoft.com/office/drawing/2014/main" id="{D60ABF7C-82CE-45CF-A7CA-3097EAA809D4}"/>
               </a:ext>
             </a:extLst>
           </p:cNvPr>
@@ -18786,7 +19394,7 @@
           <p:cNvPr id="11" name="p03-g-2">
             <a:extLst xmlns:a="http://schemas.openxmlformats.org/drawingml/2006/main">
               <a:ext uri="{FF2B5EF4-FFF2-40B4-BE49-F238E27FC236}">
-                <a16:creationId xmlns:a16="http://schemas.microsoft.com/office/drawing/2014/main" id="{3ABD7028-36D6-4CC5-9175-F4619981F30E}"/>
+                <a16:creationId xmlns:a16="http://schemas.microsoft.com/office/drawing/2014/main" id="{00837D7B-9BCE-4885-A359-90116B878B83}"/>
               </a:ext>
             </a:extLst>
           </p:cNvPr>
@@ -18841,7 +19449,7 @@
           <p:cNvPr id="12" name="p03-n-3">
             <a:extLst xmlns:a="http://schemas.openxmlformats.org/drawingml/2006/main">
               <a:ext uri="{FF2B5EF4-FFF2-40B4-BE49-F238E27FC236}">
-                <a16:creationId xmlns:a16="http://schemas.microsoft.com/office/drawing/2014/main" id="{C56D90D3-DF2C-4F32-B8CB-466564F0F57F}"/>
+                <a16:creationId xmlns:a16="http://schemas.microsoft.com/office/drawing/2014/main" id="{FB2DB414-D9D2-4FBF-B444-733E2F5DF2D0}"/>
               </a:ext>
             </a:extLst>
           </p:cNvPr>
@@ -18898,7 +19506,7 @@
           <p:cNvPr id="13" name="p03-g-3">
             <a:extLst xmlns:a="http://schemas.openxmlformats.org/drawingml/2006/main">
               <a:ext uri="{FF2B5EF4-FFF2-40B4-BE49-F238E27FC236}">
-                <a16:creationId xmlns:a16="http://schemas.microsoft.com/office/drawing/2014/main" id="{0497B5E6-5DE8-4468-A4B4-57712B8376D0}"/>
+                <a16:creationId xmlns:a16="http://schemas.microsoft.com/office/drawing/2014/main" id="{D0D16633-4EE1-4FC6-B653-0A9CFD70678E}"/>
               </a:ext>
             </a:extLst>
           </p:cNvPr>
@@ -18953,7 +19561,7 @@
           <p:cNvPr id="14" name="p03-n-4">
             <a:extLst xmlns:a="http://schemas.openxmlformats.org/drawingml/2006/main">
               <a:ext uri="{FF2B5EF4-FFF2-40B4-BE49-F238E27FC236}">
-                <a16:creationId xmlns:a16="http://schemas.microsoft.com/office/drawing/2014/main" id="{D729D5E8-8F4C-4A07-87D7-BE9DD0CA66E7}"/>
+                <a16:creationId xmlns:a16="http://schemas.microsoft.com/office/drawing/2014/main" id="{8CC3BF35-31D1-4A0B-9966-64E82A22EB27}"/>
               </a:ext>
             </a:extLst>
           </p:cNvPr>
@@ -19010,7 +19618,7 @@
           <p:cNvPr id="15" name="p03-g-4">
             <a:extLst xmlns:a="http://schemas.openxmlformats.org/drawingml/2006/main">
               <a:ext uri="{FF2B5EF4-FFF2-40B4-BE49-F238E27FC236}">
-                <a16:creationId xmlns:a16="http://schemas.microsoft.com/office/drawing/2014/main" id="{9B4DEDDC-5F0D-4BCA-95BF-FAFBF1C42E37}"/>
+                <a16:creationId xmlns:a16="http://schemas.microsoft.com/office/drawing/2014/main" id="{17E5B96B-17AD-4A97-8384-D3CBEB8F29C9}"/>
               </a:ext>
             </a:extLst>
           </p:cNvPr>
@@ -19065,7 +19673,7 @@
           <p:cNvPr id="16" name="p03-n-5">
             <a:extLst xmlns:a="http://schemas.openxmlformats.org/drawingml/2006/main">
               <a:ext uri="{FF2B5EF4-FFF2-40B4-BE49-F238E27FC236}">
-                <a16:creationId xmlns:a16="http://schemas.microsoft.com/office/drawing/2014/main" id="{342EB615-58F1-4559-A46B-F235F3818BD6}"/>
+                <a16:creationId xmlns:a16="http://schemas.microsoft.com/office/drawing/2014/main" id="{A2B6A8DE-2232-4645-BC99-976EE6E56B91}"/>
               </a:ext>
             </a:extLst>
           </p:cNvPr>
@@ -19122,7 +19730,7 @@
           <p:cNvPr id="17" name="p03-g-5">
             <a:extLst xmlns:a="http://schemas.openxmlformats.org/drawingml/2006/main">
               <a:ext uri="{FF2B5EF4-FFF2-40B4-BE49-F238E27FC236}">
-                <a16:creationId xmlns:a16="http://schemas.microsoft.com/office/drawing/2014/main" id="{5EF94B14-2B14-4D86-80FD-C1A8C852FA94}"/>
+                <a16:creationId xmlns:a16="http://schemas.microsoft.com/office/drawing/2014/main" id="{7716A471-0BD3-47A2-A35A-1D4365F4BDA9}"/>
               </a:ext>
             </a:extLst>
           </p:cNvPr>
@@ -19177,7 +19785,7 @@
           <p:cNvPr id="18" name="p03-n-6">
             <a:extLst xmlns:a="http://schemas.openxmlformats.org/drawingml/2006/main">
               <a:ext uri="{FF2B5EF4-FFF2-40B4-BE49-F238E27FC236}">
-                <a16:creationId xmlns:a16="http://schemas.microsoft.com/office/drawing/2014/main" id="{9B4F68F7-B664-40E3-83CB-69B2EEE0C56B}"/>
+                <a16:creationId xmlns:a16="http://schemas.microsoft.com/office/drawing/2014/main" id="{40C49D55-2EAE-40F2-93CE-7FAF3E1053E3}"/>
               </a:ext>
             </a:extLst>
           </p:cNvPr>
@@ -19234,7 +19842,7 @@
           <p:cNvPr id="19" name="p03-g-6">
             <a:extLst xmlns:a="http://schemas.openxmlformats.org/drawingml/2006/main">
               <a:ext uri="{FF2B5EF4-FFF2-40B4-BE49-F238E27FC236}">
-                <a16:creationId xmlns:a16="http://schemas.microsoft.com/office/drawing/2014/main" id="{EE8ACF44-50E7-4578-A79C-E1F2DC264F5D}"/>
+                <a16:creationId xmlns:a16="http://schemas.microsoft.com/office/drawing/2014/main" id="{92A657DD-46FE-499D-AFB7-99D9DA446215}"/>
               </a:ext>
             </a:extLst>
           </p:cNvPr>
@@ -19279,7 +19887,7 @@
                 <a:ea typeface="Microsoft YaHei"/>
                 <a:cs typeface="Microsoft YaHei"/>
               </a:rPr>
-              <a:t>对照八项门条件</a:t>
+              <a:t>对照九项门条件</a:t>
             </a:r>
           </a:p>
         </p:txBody>
@@ -19289,7 +19897,7 @@
           <p:cNvPr id="20" name="p03-sep">
             <a:extLst xmlns:a="http://schemas.openxmlformats.org/drawingml/2006/main">
               <a:ext uri="{FF2B5EF4-FFF2-40B4-BE49-F238E27FC236}">
-                <a16:creationId xmlns:a16="http://schemas.microsoft.com/office/drawing/2014/main" id="{501104C5-EBFC-451F-9794-20BC502E7DC5}"/>
+                <a16:creationId xmlns:a16="http://schemas.microsoft.com/office/drawing/2014/main" id="{17CD1292-5848-41E8-8EE0-ADA96F3102B2}"/>
               </a:ext>
             </a:extLst>
           </p:cNvPr>
@@ -19320,7 +19928,7 @@
           <p:cNvPr id="21" name="p03-out-title">
             <a:extLst xmlns:a="http://schemas.openxmlformats.org/drawingml/2006/main">
               <a:ext uri="{FF2B5EF4-FFF2-40B4-BE49-F238E27FC236}">
-                <a16:creationId xmlns:a16="http://schemas.microsoft.com/office/drawing/2014/main" id="{87CE3F82-6EF0-42CA-BC88-E271587E0920}"/>
+                <a16:creationId xmlns:a16="http://schemas.microsoft.com/office/drawing/2014/main" id="{C47D438E-45D9-46CC-88AA-8B9C5C11D473}"/>
               </a:ext>
             </a:extLst>
           </p:cNvPr>
@@ -19373,7 +19981,7 @@
           <p:cNvPr id="22" name="p03-out">
             <a:extLst xmlns:a="http://schemas.openxmlformats.org/drawingml/2006/main">
               <a:ext uri="{FF2B5EF4-FFF2-40B4-BE49-F238E27FC236}">
-                <a16:creationId xmlns:a16="http://schemas.microsoft.com/office/drawing/2014/main" id="{C518E744-D9BD-4766-B0AA-781DFA86BEA5}"/>
+                <a16:creationId xmlns:a16="http://schemas.microsoft.com/office/drawing/2014/main" id="{BCC4EA60-8E4C-486C-81A5-50C2B2F71F55}"/>
               </a:ext>
             </a:extLst>
           </p:cNvPr>
@@ -19566,7 +20174,7 @@
           <p:cNvPr id="23" name="p03-bottom">
             <a:extLst xmlns:a="http://schemas.openxmlformats.org/drawingml/2006/main">
               <a:ext uri="{FF2B5EF4-FFF2-40B4-BE49-F238E27FC236}">
-                <a16:creationId xmlns:a16="http://schemas.microsoft.com/office/drawing/2014/main" id="{58FABD77-E978-4670-BB8A-906ADB66936D}"/>
+                <a16:creationId xmlns:a16="http://schemas.microsoft.com/office/drawing/2014/main" id="{C4C23A96-B9A6-4320-A3DA-A94E1130D4BE}"/>
               </a:ext>
             </a:extLst>
           </p:cNvPr>
@@ -19713,7 +20321,7 @@
           <p:cNvPr id="6" name="p04-def">
             <a:extLst xmlns:a="http://schemas.openxmlformats.org/drawingml/2006/main">
               <a:ext uri="{FF2B5EF4-FFF2-40B4-BE49-F238E27FC236}">
-                <a16:creationId xmlns:a16="http://schemas.microsoft.com/office/drawing/2014/main" id="{63965064-FFB8-4134-AD63-6A3883B98597}"/>
+                <a16:creationId xmlns:a16="http://schemas.microsoft.com/office/drawing/2014/main" id="{4AAEF01E-422F-4215-BC66-48B3A5B9858F}"/>
               </a:ext>
             </a:extLst>
           </p:cNvPr>
@@ -19768,7 +20376,7 @@
           <p:cNvPr id="7" name="p04-l-0">
             <a:extLst xmlns:a="http://schemas.openxmlformats.org/drawingml/2006/main">
               <a:ext uri="{FF2B5EF4-FFF2-40B4-BE49-F238E27FC236}">
-                <a16:creationId xmlns:a16="http://schemas.microsoft.com/office/drawing/2014/main" id="{25E269D9-9242-4E5C-89DE-30A2BD045F5C}"/>
+                <a16:creationId xmlns:a16="http://schemas.microsoft.com/office/drawing/2014/main" id="{DA0D21C5-C150-4802-A7E4-127B0422646A}"/>
               </a:ext>
             </a:extLst>
           </p:cNvPr>
@@ -19825,7 +20433,7 @@
           <p:cNvPr id="8" name="p04-t-0">
             <a:extLst xmlns:a="http://schemas.openxmlformats.org/drawingml/2006/main">
               <a:ext uri="{FF2B5EF4-FFF2-40B4-BE49-F238E27FC236}">
-                <a16:creationId xmlns:a16="http://schemas.microsoft.com/office/drawing/2014/main" id="{FA4B1034-6FF0-4A48-ABF9-0C3C51431963}"/>
+                <a16:creationId xmlns:a16="http://schemas.microsoft.com/office/drawing/2014/main" id="{18AA2287-0104-4E02-B483-F47796C65DF4}"/>
               </a:ext>
             </a:extLst>
           </p:cNvPr>
@@ -19915,7 +20523,7 @@
           <p:cNvPr id="9" name="p04-l-1">
             <a:extLst xmlns:a="http://schemas.openxmlformats.org/drawingml/2006/main">
               <a:ext uri="{FF2B5EF4-FFF2-40B4-BE49-F238E27FC236}">
-                <a16:creationId xmlns:a16="http://schemas.microsoft.com/office/drawing/2014/main" id="{7EFB866C-FCC0-403A-BD2A-EE0314EB3513}"/>
+                <a16:creationId xmlns:a16="http://schemas.microsoft.com/office/drawing/2014/main" id="{5595D8FD-05C4-428B-9CA6-1D810991BE01}"/>
               </a:ext>
             </a:extLst>
           </p:cNvPr>
@@ -19972,7 +20580,7 @@
           <p:cNvPr id="10" name="p04-t-1">
             <a:extLst xmlns:a="http://schemas.openxmlformats.org/drawingml/2006/main">
               <a:ext uri="{FF2B5EF4-FFF2-40B4-BE49-F238E27FC236}">
-                <a16:creationId xmlns:a16="http://schemas.microsoft.com/office/drawing/2014/main" id="{476FB04C-B0B2-47F1-9E38-A872B4739FDC}"/>
+                <a16:creationId xmlns:a16="http://schemas.microsoft.com/office/drawing/2014/main" id="{00E9D932-B56F-4171-BAB2-4B83B8596630}"/>
               </a:ext>
             </a:extLst>
           </p:cNvPr>
@@ -20062,7 +20670,7 @@
           <p:cNvPr id="11" name="p04-l-2">
             <a:extLst xmlns:a="http://schemas.openxmlformats.org/drawingml/2006/main">
               <a:ext uri="{FF2B5EF4-FFF2-40B4-BE49-F238E27FC236}">
-                <a16:creationId xmlns:a16="http://schemas.microsoft.com/office/drawing/2014/main" id="{8050421B-82D4-4E96-ABF1-C5F0F6566713}"/>
+                <a16:creationId xmlns:a16="http://schemas.microsoft.com/office/drawing/2014/main" id="{CD4334DE-CECF-4662-84BD-1B5C44B9E7FE}"/>
               </a:ext>
             </a:extLst>
           </p:cNvPr>
@@ -20119,7 +20727,7 @@
           <p:cNvPr id="12" name="p04-t-2">
             <a:extLst xmlns:a="http://schemas.openxmlformats.org/drawingml/2006/main">
               <a:ext uri="{FF2B5EF4-FFF2-40B4-BE49-F238E27FC236}">
-                <a16:creationId xmlns:a16="http://schemas.microsoft.com/office/drawing/2014/main" id="{7295EA98-4895-478B-9EB3-AE4B4CF6305D}"/>
+                <a16:creationId xmlns:a16="http://schemas.microsoft.com/office/drawing/2014/main" id="{E79510E0-0F6F-4F95-8CAF-F87B4F9F1183}"/>
               </a:ext>
             </a:extLst>
           </p:cNvPr>
@@ -20209,7 +20817,7 @@
           <p:cNvPr id="13" name="p04-bottom">
             <a:extLst xmlns:a="http://schemas.openxmlformats.org/drawingml/2006/main">
               <a:ext uri="{FF2B5EF4-FFF2-40B4-BE49-F238E27FC236}">
-                <a16:creationId xmlns:a16="http://schemas.microsoft.com/office/drawing/2014/main" id="{CE2D0DE1-3034-488D-A59F-5AD8E542AEB9}"/>
+                <a16:creationId xmlns:a16="http://schemas.microsoft.com/office/drawing/2014/main" id="{83B1CE82-407C-4E7C-90F8-95EA7776DE5C}"/>
               </a:ext>
             </a:extLst>
           </p:cNvPr>
@@ -20358,7 +20966,7 @@
           <p:cNvPr id="6" name="p05-n-0">
             <a:extLst xmlns:a="http://schemas.openxmlformats.org/drawingml/2006/main">
               <a:ext uri="{FF2B5EF4-FFF2-40B4-BE49-F238E27FC236}">
-                <a16:creationId xmlns:a16="http://schemas.microsoft.com/office/drawing/2014/main" id="{96A3A6FF-AC5D-4338-B039-153B1E7721C1}"/>
+                <a16:creationId xmlns:a16="http://schemas.microsoft.com/office/drawing/2014/main" id="{F03A45D8-CC26-4976-BBE1-6CBA438E0EBE}"/>
               </a:ext>
             </a:extLst>
           </p:cNvPr>
@@ -20415,7 +21023,7 @@
           <p:cNvPr id="7" name="p05-main-0">
             <a:extLst xmlns:a="http://schemas.openxmlformats.org/drawingml/2006/main">
               <a:ext uri="{FF2B5EF4-FFF2-40B4-BE49-F238E27FC236}">
-                <a16:creationId xmlns:a16="http://schemas.microsoft.com/office/drawing/2014/main" id="{1FB0AFCE-6E8A-4A5A-82C6-3C6FF6E50214}"/>
+                <a16:creationId xmlns:a16="http://schemas.microsoft.com/office/drawing/2014/main" id="{8DD45B1D-74D9-446D-8AC2-311D48E832DE}"/>
               </a:ext>
             </a:extLst>
           </p:cNvPr>
@@ -20470,7 +21078,7 @@
           <p:cNvPr id="8" name="p05-why-0">
             <a:extLst xmlns:a="http://schemas.openxmlformats.org/drawingml/2006/main">
               <a:ext uri="{FF2B5EF4-FFF2-40B4-BE49-F238E27FC236}">
-                <a16:creationId xmlns:a16="http://schemas.microsoft.com/office/drawing/2014/main" id="{7741617C-01C9-44CE-9D4D-6C50271B01DC}"/>
+                <a16:creationId xmlns:a16="http://schemas.microsoft.com/office/drawing/2014/main" id="{E2B7D3E7-9339-4A33-8BE1-87FC56F2BC9E}"/>
               </a:ext>
             </a:extLst>
           </p:cNvPr>
@@ -20527,7 +21135,7 @@
           <p:cNvPr id="9" name="p05-n-1">
             <a:extLst xmlns:a="http://schemas.openxmlformats.org/drawingml/2006/main">
               <a:ext uri="{FF2B5EF4-FFF2-40B4-BE49-F238E27FC236}">
-                <a16:creationId xmlns:a16="http://schemas.microsoft.com/office/drawing/2014/main" id="{E60D7B5C-B064-45BD-B87D-50BF0975A658}"/>
+                <a16:creationId xmlns:a16="http://schemas.microsoft.com/office/drawing/2014/main" id="{43B02FA0-78C4-4D64-8534-F897F250F0F1}"/>
               </a:ext>
             </a:extLst>
           </p:cNvPr>
@@ -20584,7 +21192,7 @@
           <p:cNvPr id="10" name="p05-main-1">
             <a:extLst xmlns:a="http://schemas.openxmlformats.org/drawingml/2006/main">
               <a:ext uri="{FF2B5EF4-FFF2-40B4-BE49-F238E27FC236}">
-                <a16:creationId xmlns:a16="http://schemas.microsoft.com/office/drawing/2014/main" id="{BF7CA254-14BB-4EC0-917E-208A6C8893F5}"/>
+                <a16:creationId xmlns:a16="http://schemas.microsoft.com/office/drawing/2014/main" id="{CCE7DB67-0EEF-448C-B2A9-45A3C8A55410}"/>
               </a:ext>
             </a:extLst>
           </p:cNvPr>
@@ -20639,7 +21247,7 @@
           <p:cNvPr id="11" name="p05-why-1">
             <a:extLst xmlns:a="http://schemas.openxmlformats.org/drawingml/2006/main">
               <a:ext uri="{FF2B5EF4-FFF2-40B4-BE49-F238E27FC236}">
-                <a16:creationId xmlns:a16="http://schemas.microsoft.com/office/drawing/2014/main" id="{F9825687-DFAC-4580-B59C-824CBD8D85BE}"/>
+                <a16:creationId xmlns:a16="http://schemas.microsoft.com/office/drawing/2014/main" id="{DFF67064-375B-4F7E-A015-3270833A6DD0}"/>
               </a:ext>
             </a:extLst>
           </p:cNvPr>
@@ -20696,7 +21304,7 @@
           <p:cNvPr id="12" name="p05-n-2">
             <a:extLst xmlns:a="http://schemas.openxmlformats.org/drawingml/2006/main">
               <a:ext uri="{FF2B5EF4-FFF2-40B4-BE49-F238E27FC236}">
-                <a16:creationId xmlns:a16="http://schemas.microsoft.com/office/drawing/2014/main" id="{7A305979-4305-4010-ADA8-EA223C1F35E1}"/>
+                <a16:creationId xmlns:a16="http://schemas.microsoft.com/office/drawing/2014/main" id="{2F675DC0-9F5C-40B5-BCA0-46DD78E1F02F}"/>
               </a:ext>
             </a:extLst>
           </p:cNvPr>
@@ -20753,7 +21361,7 @@
           <p:cNvPr id="13" name="p05-main-2">
             <a:extLst xmlns:a="http://schemas.openxmlformats.org/drawingml/2006/main">
               <a:ext uri="{FF2B5EF4-FFF2-40B4-BE49-F238E27FC236}">
-                <a16:creationId xmlns:a16="http://schemas.microsoft.com/office/drawing/2014/main" id="{E2B0410C-3421-4C83-957A-07E7DA770CCC}"/>
+                <a16:creationId xmlns:a16="http://schemas.microsoft.com/office/drawing/2014/main" id="{F5BF201E-8FCF-4CC6-860D-BFAA91E7D338}"/>
               </a:ext>
             </a:extLst>
           </p:cNvPr>
@@ -20808,7 +21416,7 @@
           <p:cNvPr id="14" name="p05-why-2">
             <a:extLst xmlns:a="http://schemas.openxmlformats.org/drawingml/2006/main">
               <a:ext uri="{FF2B5EF4-FFF2-40B4-BE49-F238E27FC236}">
-                <a16:creationId xmlns:a16="http://schemas.microsoft.com/office/drawing/2014/main" id="{5C06E732-2F65-4897-8B0D-92647F104442}"/>
+                <a16:creationId xmlns:a16="http://schemas.microsoft.com/office/drawing/2014/main" id="{E684122F-D58E-43C9-8193-878773A06477}"/>
               </a:ext>
             </a:extLst>
           </p:cNvPr>
@@ -20865,7 +21473,7 @@
           <p:cNvPr id="15" name="p05-n-3">
             <a:extLst xmlns:a="http://schemas.openxmlformats.org/drawingml/2006/main">
               <a:ext uri="{FF2B5EF4-FFF2-40B4-BE49-F238E27FC236}">
-                <a16:creationId xmlns:a16="http://schemas.microsoft.com/office/drawing/2014/main" id="{79734CFE-95B5-4A25-A695-9AE4AE4F75A1}"/>
+                <a16:creationId xmlns:a16="http://schemas.microsoft.com/office/drawing/2014/main" id="{1D5A9CC6-F8DC-4B0E-B7C9-9207050E3EF2}"/>
               </a:ext>
             </a:extLst>
           </p:cNvPr>
@@ -20922,7 +21530,7 @@
           <p:cNvPr id="16" name="p05-main-3">
             <a:extLst xmlns:a="http://schemas.openxmlformats.org/drawingml/2006/main">
               <a:ext uri="{FF2B5EF4-FFF2-40B4-BE49-F238E27FC236}">
-                <a16:creationId xmlns:a16="http://schemas.microsoft.com/office/drawing/2014/main" id="{F01C0F4E-C5E1-4CBA-80DE-7388C17A6211}"/>
+                <a16:creationId xmlns:a16="http://schemas.microsoft.com/office/drawing/2014/main" id="{F40EEA1B-4277-4FD9-A3D2-F2B58745A0BB}"/>
               </a:ext>
             </a:extLst>
           </p:cNvPr>
@@ -20977,7 +21585,7 @@
           <p:cNvPr id="17" name="p05-why-3">
             <a:extLst xmlns:a="http://schemas.openxmlformats.org/drawingml/2006/main">
               <a:ext uri="{FF2B5EF4-FFF2-40B4-BE49-F238E27FC236}">
-                <a16:creationId xmlns:a16="http://schemas.microsoft.com/office/drawing/2014/main" id="{E487D9A9-3764-4830-9A68-D2324D272E1B}"/>
+                <a16:creationId xmlns:a16="http://schemas.microsoft.com/office/drawing/2014/main" id="{06EC6555-01CA-4B3E-BEE3-94A9ACD8B280}"/>
               </a:ext>
             </a:extLst>
           </p:cNvPr>
@@ -21034,7 +21642,7 @@
           <p:cNvPr id="18" name="p05-n-4">
             <a:extLst xmlns:a="http://schemas.openxmlformats.org/drawingml/2006/main">
               <a:ext uri="{FF2B5EF4-FFF2-40B4-BE49-F238E27FC236}">
-                <a16:creationId xmlns:a16="http://schemas.microsoft.com/office/drawing/2014/main" id="{1CA7B1CA-9DAC-49FD-8FB3-F9264B1643F1}"/>
+                <a16:creationId xmlns:a16="http://schemas.microsoft.com/office/drawing/2014/main" id="{4A59B2BA-9204-415E-B432-5CB59C40239E}"/>
               </a:ext>
             </a:extLst>
           </p:cNvPr>
@@ -21091,7 +21699,7 @@
           <p:cNvPr id="19" name="p05-main-4">
             <a:extLst xmlns:a="http://schemas.openxmlformats.org/drawingml/2006/main">
               <a:ext uri="{FF2B5EF4-FFF2-40B4-BE49-F238E27FC236}">
-                <a16:creationId xmlns:a16="http://schemas.microsoft.com/office/drawing/2014/main" id="{95FE5B7A-FC3B-4279-9A7C-7827D4A3F75D}"/>
+                <a16:creationId xmlns:a16="http://schemas.microsoft.com/office/drawing/2014/main" id="{5C06B4C5-35F1-4280-8ECD-9BC445B732B8}"/>
               </a:ext>
             </a:extLst>
           </p:cNvPr>
@@ -21146,7 +21754,7 @@
           <p:cNvPr id="20" name="p05-why-4">
             <a:extLst xmlns:a="http://schemas.openxmlformats.org/drawingml/2006/main">
               <a:ext uri="{FF2B5EF4-FFF2-40B4-BE49-F238E27FC236}">
-                <a16:creationId xmlns:a16="http://schemas.microsoft.com/office/drawing/2014/main" id="{0FEE630E-C810-4B8A-A0F2-94976ACB17F7}"/>
+                <a16:creationId xmlns:a16="http://schemas.microsoft.com/office/drawing/2014/main" id="{A52E12CB-9B45-4583-BE09-F5C131A5E082}"/>
               </a:ext>
             </a:extLst>
           </p:cNvPr>
@@ -21203,7 +21811,7 @@
           <p:cNvPr id="21" name="p05-bottom">
             <a:extLst xmlns:a="http://schemas.openxmlformats.org/drawingml/2006/main">
               <a:ext uri="{FF2B5EF4-FFF2-40B4-BE49-F238E27FC236}">
-                <a16:creationId xmlns:a16="http://schemas.microsoft.com/office/drawing/2014/main" id="{7905B9F9-88A9-42EA-BB94-47BFC4270AC3}"/>
+                <a16:creationId xmlns:a16="http://schemas.microsoft.com/office/drawing/2014/main" id="{CF9F4CF1-0F06-4D67-A54C-C162FE34C0E3}"/>
               </a:ext>
             </a:extLst>
           </p:cNvPr>
@@ -21350,7 +21958,7 @@
           <p:cNvPr id="6" name="p06-table-h-0">
             <a:extLst xmlns:a="http://schemas.openxmlformats.org/drawingml/2006/main">
               <a:ext uri="{FF2B5EF4-FFF2-40B4-BE49-F238E27FC236}">
-                <a16:creationId xmlns:a16="http://schemas.microsoft.com/office/drawing/2014/main" id="{C027FE04-6795-4B1D-A74D-E93B4D238D0D}"/>
+                <a16:creationId xmlns:a16="http://schemas.microsoft.com/office/drawing/2014/main" id="{CD60C556-A415-4EAB-8920-3790EE2A4388}"/>
               </a:ext>
             </a:extLst>
           </p:cNvPr>
@@ -21405,7 +22013,7 @@
           <p:cNvPr id="7" name="p06-table-h-1">
             <a:extLst xmlns:a="http://schemas.openxmlformats.org/drawingml/2006/main">
               <a:ext uri="{FF2B5EF4-FFF2-40B4-BE49-F238E27FC236}">
-                <a16:creationId xmlns:a16="http://schemas.microsoft.com/office/drawing/2014/main" id="{4C640871-72F6-43E3-AA56-B8E2CC516A98}"/>
+                <a16:creationId xmlns:a16="http://schemas.microsoft.com/office/drawing/2014/main" id="{B844963D-4948-4380-9D35-0F092BDF5483}"/>
               </a:ext>
             </a:extLst>
           </p:cNvPr>
@@ -21460,7 +22068,7 @@
           <p:cNvPr id="8" name="p06-table-h-2">
             <a:extLst xmlns:a="http://schemas.openxmlformats.org/drawingml/2006/main">
               <a:ext uri="{FF2B5EF4-FFF2-40B4-BE49-F238E27FC236}">
-                <a16:creationId xmlns:a16="http://schemas.microsoft.com/office/drawing/2014/main" id="{54FBAB27-9B7E-48D5-A7DE-C78772C93267}"/>
+                <a16:creationId xmlns:a16="http://schemas.microsoft.com/office/drawing/2014/main" id="{540C13D1-A10D-4281-AC23-FF7A6EECE218}"/>
               </a:ext>
             </a:extLst>
           </p:cNvPr>
@@ -21515,7 +22123,7 @@
           <p:cNvPr id="9" name="p06-table-r0-0">
             <a:extLst xmlns:a="http://schemas.openxmlformats.org/drawingml/2006/main">
               <a:ext uri="{FF2B5EF4-FFF2-40B4-BE49-F238E27FC236}">
-                <a16:creationId xmlns:a16="http://schemas.microsoft.com/office/drawing/2014/main" id="{53A5618E-D9F2-4C7F-AC44-65F14D9FFC31}"/>
+                <a16:creationId xmlns:a16="http://schemas.microsoft.com/office/drawing/2014/main" id="{00A775FF-8C28-4707-98E3-8401F679246E}"/>
               </a:ext>
             </a:extLst>
           </p:cNvPr>
@@ -21576,7 +22184,7 @@
           <p:cNvPr id="10" name="p06-table-r0-1">
             <a:extLst xmlns:a="http://schemas.openxmlformats.org/drawingml/2006/main">
               <a:ext uri="{FF2B5EF4-FFF2-40B4-BE49-F238E27FC236}">
-                <a16:creationId xmlns:a16="http://schemas.microsoft.com/office/drawing/2014/main" id="{60A65376-0CB8-463B-BC45-0C3E1D2CB906}"/>
+                <a16:creationId xmlns:a16="http://schemas.microsoft.com/office/drawing/2014/main" id="{7925C0B1-5EA8-46CD-ADF3-7FC0512FE08A}"/>
               </a:ext>
             </a:extLst>
           </p:cNvPr>
@@ -21637,7 +22245,7 @@
           <p:cNvPr id="11" name="p06-table-r0-2">
             <a:extLst xmlns:a="http://schemas.openxmlformats.org/drawingml/2006/main">
               <a:ext uri="{FF2B5EF4-FFF2-40B4-BE49-F238E27FC236}">
-                <a16:creationId xmlns:a16="http://schemas.microsoft.com/office/drawing/2014/main" id="{5BEC54CE-057F-4DBA-A4D6-A930CD4C119E}"/>
+                <a16:creationId xmlns:a16="http://schemas.microsoft.com/office/drawing/2014/main" id="{AA077415-B9B7-4826-8EF8-2A8A6D7B1F84}"/>
               </a:ext>
             </a:extLst>
           </p:cNvPr>
@@ -21698,7 +22306,7 @@
           <p:cNvPr id="12" name="p06-table-r1-0">
             <a:extLst xmlns:a="http://schemas.openxmlformats.org/drawingml/2006/main">
               <a:ext uri="{FF2B5EF4-FFF2-40B4-BE49-F238E27FC236}">
-                <a16:creationId xmlns:a16="http://schemas.microsoft.com/office/drawing/2014/main" id="{0430C8C2-C748-4DC4-BB19-0AF1EA91C510}"/>
+                <a16:creationId xmlns:a16="http://schemas.microsoft.com/office/drawing/2014/main" id="{A1DEA176-C3C6-4040-99CA-59131894CD39}"/>
               </a:ext>
             </a:extLst>
           </p:cNvPr>
@@ -21759,7 +22367,7 @@
           <p:cNvPr id="13" name="p06-table-r1-1">
             <a:extLst xmlns:a="http://schemas.openxmlformats.org/drawingml/2006/main">
               <a:ext uri="{FF2B5EF4-FFF2-40B4-BE49-F238E27FC236}">
-                <a16:creationId xmlns:a16="http://schemas.microsoft.com/office/drawing/2014/main" id="{76674344-5726-4798-A865-9482FAA11DD0}"/>
+                <a16:creationId xmlns:a16="http://schemas.microsoft.com/office/drawing/2014/main" id="{0B98BA76-4CB7-4045-9695-BC549796A403}"/>
               </a:ext>
             </a:extLst>
           </p:cNvPr>
@@ -21820,7 +22428,7 @@
           <p:cNvPr id="14" name="p06-table-r1-2">
             <a:extLst xmlns:a="http://schemas.openxmlformats.org/drawingml/2006/main">
               <a:ext uri="{FF2B5EF4-FFF2-40B4-BE49-F238E27FC236}">
-                <a16:creationId xmlns:a16="http://schemas.microsoft.com/office/drawing/2014/main" id="{8D735027-621A-4987-A268-35E09E8E2391}"/>
+                <a16:creationId xmlns:a16="http://schemas.microsoft.com/office/drawing/2014/main" id="{1C2BF0F6-A589-4F31-B698-2FC3B102B7EA}"/>
               </a:ext>
             </a:extLst>
           </p:cNvPr>
@@ -21881,7 +22489,7 @@
           <p:cNvPr id="15" name="p06-table-r2-0">
             <a:extLst xmlns:a="http://schemas.openxmlformats.org/drawingml/2006/main">
               <a:ext uri="{FF2B5EF4-FFF2-40B4-BE49-F238E27FC236}">
-                <a16:creationId xmlns:a16="http://schemas.microsoft.com/office/drawing/2014/main" id="{797B33F0-1C2F-47DF-AF04-C56F3FB56022}"/>
+                <a16:creationId xmlns:a16="http://schemas.microsoft.com/office/drawing/2014/main" id="{FB34FC2D-2B7D-4762-9DCF-275CDD2A9164}"/>
               </a:ext>
             </a:extLst>
           </p:cNvPr>
@@ -21942,7 +22550,7 @@
           <p:cNvPr id="16" name="p06-table-r2-1">
             <a:extLst xmlns:a="http://schemas.openxmlformats.org/drawingml/2006/main">
               <a:ext uri="{FF2B5EF4-FFF2-40B4-BE49-F238E27FC236}">
-                <a16:creationId xmlns:a16="http://schemas.microsoft.com/office/drawing/2014/main" id="{FC3D014E-48B0-45F2-9730-68A6A7AFC249}"/>
+                <a16:creationId xmlns:a16="http://schemas.microsoft.com/office/drawing/2014/main" id="{DC7F8678-DC0D-4AF2-9ED9-1FD5594C1BAC}"/>
               </a:ext>
             </a:extLst>
           </p:cNvPr>
@@ -22003,7 +22611,7 @@
           <p:cNvPr id="17" name="p06-table-r2-2">
             <a:extLst xmlns:a="http://schemas.openxmlformats.org/drawingml/2006/main">
               <a:ext uri="{FF2B5EF4-FFF2-40B4-BE49-F238E27FC236}">
-                <a16:creationId xmlns:a16="http://schemas.microsoft.com/office/drawing/2014/main" id="{3C64C9D5-446B-4BE4-9369-CD69DD24A9DC}"/>
+                <a16:creationId xmlns:a16="http://schemas.microsoft.com/office/drawing/2014/main" id="{970B78A3-C2C2-4D9F-9059-D63F59507252}"/>
               </a:ext>
             </a:extLst>
           </p:cNvPr>
@@ -22064,7 +22672,7 @@
           <p:cNvPr id="18" name="p06-table-r3-0">
             <a:extLst xmlns:a="http://schemas.openxmlformats.org/drawingml/2006/main">
               <a:ext uri="{FF2B5EF4-FFF2-40B4-BE49-F238E27FC236}">
-                <a16:creationId xmlns:a16="http://schemas.microsoft.com/office/drawing/2014/main" id="{DA18C45B-8C9F-4FF2-9491-ABFB9BEE7E26}"/>
+                <a16:creationId xmlns:a16="http://schemas.microsoft.com/office/drawing/2014/main" id="{E61E3E94-EA7C-40A5-A7C1-5E13768B4FEC}"/>
               </a:ext>
             </a:extLst>
           </p:cNvPr>
@@ -22125,7 +22733,7 @@
           <p:cNvPr id="19" name="p06-table-r3-1">
             <a:extLst xmlns:a="http://schemas.openxmlformats.org/drawingml/2006/main">
               <a:ext uri="{FF2B5EF4-FFF2-40B4-BE49-F238E27FC236}">
-                <a16:creationId xmlns:a16="http://schemas.microsoft.com/office/drawing/2014/main" id="{799ADA21-ADDE-48F8-BBB6-59DF0F8F883A}"/>
+                <a16:creationId xmlns:a16="http://schemas.microsoft.com/office/drawing/2014/main" id="{DEE1C21E-2298-4143-8017-5F8F1CF1E047}"/>
               </a:ext>
             </a:extLst>
           </p:cNvPr>
@@ -22186,7 +22794,7 @@
           <p:cNvPr id="20" name="p06-table-r3-2">
             <a:extLst xmlns:a="http://schemas.openxmlformats.org/drawingml/2006/main">
               <a:ext uri="{FF2B5EF4-FFF2-40B4-BE49-F238E27FC236}">
-                <a16:creationId xmlns:a16="http://schemas.microsoft.com/office/drawing/2014/main" id="{3BC071DD-49C6-4F8A-B8B4-791135CEB2EA}"/>
+                <a16:creationId xmlns:a16="http://schemas.microsoft.com/office/drawing/2014/main" id="{1009CCB6-4E53-4E66-BAA9-3372D36D150A}"/>
               </a:ext>
             </a:extLst>
           </p:cNvPr>
@@ -22247,7 +22855,7 @@
           <p:cNvPr id="21" name="p06-table-r4-0">
             <a:extLst xmlns:a="http://schemas.openxmlformats.org/drawingml/2006/main">
               <a:ext uri="{FF2B5EF4-FFF2-40B4-BE49-F238E27FC236}">
-                <a16:creationId xmlns:a16="http://schemas.microsoft.com/office/drawing/2014/main" id="{BF0E2CFA-901C-468C-80FF-D7623B834A18}"/>
+                <a16:creationId xmlns:a16="http://schemas.microsoft.com/office/drawing/2014/main" id="{1AEBF77D-2F0B-4CF3-9F64-0D30B61A6E4D}"/>
               </a:ext>
             </a:extLst>
           </p:cNvPr>
@@ -22308,7 +22916,7 @@
           <p:cNvPr id="22" name="p06-table-r4-1">
             <a:extLst xmlns:a="http://schemas.openxmlformats.org/drawingml/2006/main">
               <a:ext uri="{FF2B5EF4-FFF2-40B4-BE49-F238E27FC236}">
-                <a16:creationId xmlns:a16="http://schemas.microsoft.com/office/drawing/2014/main" id="{020E500B-5697-486F-8ABE-5E63978D9D42}"/>
+                <a16:creationId xmlns:a16="http://schemas.microsoft.com/office/drawing/2014/main" id="{3CBAB7ED-C064-486F-B43F-8164EF9B58FF}"/>
               </a:ext>
             </a:extLst>
           </p:cNvPr>
@@ -22369,7 +22977,7 @@
           <p:cNvPr id="23" name="p06-table-r4-2">
             <a:extLst xmlns:a="http://schemas.openxmlformats.org/drawingml/2006/main">
               <a:ext uri="{FF2B5EF4-FFF2-40B4-BE49-F238E27FC236}">
-                <a16:creationId xmlns:a16="http://schemas.microsoft.com/office/drawing/2014/main" id="{725A9F75-3E61-47CB-820F-61D4A4A57280}"/>
+                <a16:creationId xmlns:a16="http://schemas.microsoft.com/office/drawing/2014/main" id="{1F8AC1B5-AA6B-45F2-978B-20EFDD1E82F2}"/>
               </a:ext>
             </a:extLst>
           </p:cNvPr>
@@ -22430,7 +23038,7 @@
           <p:cNvPr id="24" name="p06-bottom">
             <a:extLst xmlns:a="http://schemas.openxmlformats.org/drawingml/2006/main">
               <a:ext uri="{FF2B5EF4-FFF2-40B4-BE49-F238E27FC236}">
-                <a16:creationId xmlns:a16="http://schemas.microsoft.com/office/drawing/2014/main" id="{2C4BB1F3-C770-410D-8444-280FC38CE8DA}"/>
+                <a16:creationId xmlns:a16="http://schemas.microsoft.com/office/drawing/2014/main" id="{E1041339-B6FC-43F2-9F48-4352EC9A14EB}"/>
               </a:ext>
             </a:extLst>
           </p:cNvPr>
@@ -22579,7 +23187,7 @@
           <p:cNvPr id="6" name="p07-watermark">
             <a:extLst xmlns:a="http://schemas.openxmlformats.org/drawingml/2006/main">
               <a:ext uri="{FF2B5EF4-FFF2-40B4-BE49-F238E27FC236}">
-                <a16:creationId xmlns:a16="http://schemas.microsoft.com/office/drawing/2014/main" id="{E85B761D-129A-4623-A6CD-D283A4555B3F}"/>
+                <a16:creationId xmlns:a16="http://schemas.microsoft.com/office/drawing/2014/main" id="{97A216A2-5798-4E60-BBC9-FB4B77F24D17}"/>
               </a:ext>
             </a:extLst>
           </p:cNvPr>
@@ -22632,7 +23240,7 @@
           <p:cNvPr id="7" name="p07-claim">
             <a:extLst xmlns:a="http://schemas.openxmlformats.org/drawingml/2006/main">
               <a:ext uri="{FF2B5EF4-FFF2-40B4-BE49-F238E27FC236}">
-                <a16:creationId xmlns:a16="http://schemas.microsoft.com/office/drawing/2014/main" id="{295F55E2-598B-429F-818D-15479FB9EC30}"/>
+                <a16:creationId xmlns:a16="http://schemas.microsoft.com/office/drawing/2014/main" id="{E1AFDCC3-E94A-423D-918A-3504B859D58A}"/>
               </a:ext>
             </a:extLst>
           </p:cNvPr>
@@ -22693,7 +23301,7 @@
           <p:cNvPr id="8" name="p07-question">
             <a:extLst xmlns:a="http://schemas.openxmlformats.org/drawingml/2006/main">
               <a:ext uri="{FF2B5EF4-FFF2-40B4-BE49-F238E27FC236}">
-                <a16:creationId xmlns:a16="http://schemas.microsoft.com/office/drawing/2014/main" id="{B4CCDD16-C83A-4ECC-9575-6E6CB58DF86D}"/>
+                <a16:creationId xmlns:a16="http://schemas.microsoft.com/office/drawing/2014/main" id="{54E93406-3FF1-4FBA-8F36-A1270CA8A6C4}"/>
               </a:ext>
             </a:extLst>
           </p:cNvPr>
@@ -22746,7 +23354,7 @@
           <p:cNvPr id="9" name="p07-judgment">
             <a:extLst xmlns:a="http://schemas.openxmlformats.org/drawingml/2006/main">
               <a:ext uri="{FF2B5EF4-FFF2-40B4-BE49-F238E27FC236}">
-                <a16:creationId xmlns:a16="http://schemas.microsoft.com/office/drawing/2014/main" id="{54E1A9A4-CE49-4F24-9FB4-7EB758230499}"/>
+                <a16:creationId xmlns:a16="http://schemas.microsoft.com/office/drawing/2014/main" id="{D17DD9FE-0FF8-41B3-A46E-18F16D71C5AE}"/>
               </a:ext>
             </a:extLst>
           </p:cNvPr>
@@ -22801,7 +23409,7 @@
           <p:cNvPr id="10" name="p07-n-0">
             <a:extLst xmlns:a="http://schemas.openxmlformats.org/drawingml/2006/main">
               <a:ext uri="{FF2B5EF4-FFF2-40B4-BE49-F238E27FC236}">
-                <a16:creationId xmlns:a16="http://schemas.microsoft.com/office/drawing/2014/main" id="{8AAA7CF0-011A-4810-8253-39753156CF70}"/>
+                <a16:creationId xmlns:a16="http://schemas.microsoft.com/office/drawing/2014/main" id="{6F6F9C90-7BFC-4096-9D9E-FAAA21AE3F3D}"/>
               </a:ext>
             </a:extLst>
           </p:cNvPr>
@@ -22858,7 +23466,7 @@
           <p:cNvPr id="11" name="p07-m-0">
             <a:extLst xmlns:a="http://schemas.openxmlformats.org/drawingml/2006/main">
               <a:ext uri="{FF2B5EF4-FFF2-40B4-BE49-F238E27FC236}">
-                <a16:creationId xmlns:a16="http://schemas.microsoft.com/office/drawing/2014/main" id="{0F633CD0-96F0-4AAB-8D09-A553D4578BDC}"/>
+                <a16:creationId xmlns:a16="http://schemas.microsoft.com/office/drawing/2014/main" id="{1BFB550B-71A5-4540-8673-867117747CBB}"/>
               </a:ext>
             </a:extLst>
           </p:cNvPr>
@@ -22913,7 +23521,7 @@
           <p:cNvPr id="12" name="p07-n-1">
             <a:extLst xmlns:a="http://schemas.openxmlformats.org/drawingml/2006/main">
               <a:ext uri="{FF2B5EF4-FFF2-40B4-BE49-F238E27FC236}">
-                <a16:creationId xmlns:a16="http://schemas.microsoft.com/office/drawing/2014/main" id="{15D366FA-23D5-415D-A457-0A503B3D4CCE}"/>
+                <a16:creationId xmlns:a16="http://schemas.microsoft.com/office/drawing/2014/main" id="{C580226F-3586-4340-838F-6D2B4781A711}"/>
               </a:ext>
             </a:extLst>
           </p:cNvPr>
@@ -22970,7 +23578,7 @@
           <p:cNvPr id="13" name="p07-m-1">
             <a:extLst xmlns:a="http://schemas.openxmlformats.org/drawingml/2006/main">
               <a:ext uri="{FF2B5EF4-FFF2-40B4-BE49-F238E27FC236}">
-                <a16:creationId xmlns:a16="http://schemas.microsoft.com/office/drawing/2014/main" id="{A0401979-263C-4188-9D64-4F616DEB8909}"/>
+                <a16:creationId xmlns:a16="http://schemas.microsoft.com/office/drawing/2014/main" id="{260ACE46-442B-4559-935D-F382AB368E2E}"/>
               </a:ext>
             </a:extLst>
           </p:cNvPr>
@@ -23025,7 +23633,7 @@
           <p:cNvPr id="14" name="p07-n-2">
             <a:extLst xmlns:a="http://schemas.openxmlformats.org/drawingml/2006/main">
               <a:ext uri="{FF2B5EF4-FFF2-40B4-BE49-F238E27FC236}">
-                <a16:creationId xmlns:a16="http://schemas.microsoft.com/office/drawing/2014/main" id="{104929DD-61C3-4E66-BAAC-DE449C0CAA64}"/>
+                <a16:creationId xmlns:a16="http://schemas.microsoft.com/office/drawing/2014/main" id="{7D8869AB-C638-4A18-BFD4-FA87D42252DC}"/>
               </a:ext>
             </a:extLst>
           </p:cNvPr>
@@ -23082,7 +23690,7 @@
           <p:cNvPr id="15" name="p07-m-2">
             <a:extLst xmlns:a="http://schemas.openxmlformats.org/drawingml/2006/main">
               <a:ext uri="{FF2B5EF4-FFF2-40B4-BE49-F238E27FC236}">
-                <a16:creationId xmlns:a16="http://schemas.microsoft.com/office/drawing/2014/main" id="{224E2378-28B0-4EF3-9B45-907B42B8B8FF}"/>
+                <a16:creationId xmlns:a16="http://schemas.microsoft.com/office/drawing/2014/main" id="{28EEBC30-E364-4B69-BDD2-C4EE44D15B2C}"/>
               </a:ext>
             </a:extLst>
           </p:cNvPr>
@@ -23137,7 +23745,7 @@
           <p:cNvPr id="16" name="p07-n-3">
             <a:extLst xmlns:a="http://schemas.openxmlformats.org/drawingml/2006/main">
               <a:ext uri="{FF2B5EF4-FFF2-40B4-BE49-F238E27FC236}">
-                <a16:creationId xmlns:a16="http://schemas.microsoft.com/office/drawing/2014/main" id="{545E03EC-63B9-4CBB-8015-9F5D0D1F1850}"/>
+                <a16:creationId xmlns:a16="http://schemas.microsoft.com/office/drawing/2014/main" id="{C64F1670-A9FB-4AEB-81CD-5B381F05767E}"/>
               </a:ext>
             </a:extLst>
           </p:cNvPr>
@@ -23194,7 +23802,7 @@
           <p:cNvPr id="17" name="p07-m-3">
             <a:extLst xmlns:a="http://schemas.openxmlformats.org/drawingml/2006/main">
               <a:ext uri="{FF2B5EF4-FFF2-40B4-BE49-F238E27FC236}">
-                <a16:creationId xmlns:a16="http://schemas.microsoft.com/office/drawing/2014/main" id="{3F37D714-C796-4E2B-B949-0F013CACA198}"/>
+                <a16:creationId xmlns:a16="http://schemas.microsoft.com/office/drawing/2014/main" id="{B6096240-CAA1-4016-99D9-E7221388FF79}"/>
               </a:ext>
             </a:extLst>
           </p:cNvPr>
@@ -23249,7 +23857,7 @@
           <p:cNvPr id="18" name="p07-n-4">
             <a:extLst xmlns:a="http://schemas.openxmlformats.org/drawingml/2006/main">
               <a:ext uri="{FF2B5EF4-FFF2-40B4-BE49-F238E27FC236}">
-                <a16:creationId xmlns:a16="http://schemas.microsoft.com/office/drawing/2014/main" id="{01B95EF6-B81C-4A91-8C49-D11863A96787}"/>
+                <a16:creationId xmlns:a16="http://schemas.microsoft.com/office/drawing/2014/main" id="{0FD38B52-6E9A-41D5-8027-E29085957A45}"/>
               </a:ext>
             </a:extLst>
           </p:cNvPr>
@@ -23306,7 +23914,7 @@
           <p:cNvPr id="19" name="p07-m-4">
             <a:extLst xmlns:a="http://schemas.openxmlformats.org/drawingml/2006/main">
               <a:ext uri="{FF2B5EF4-FFF2-40B4-BE49-F238E27FC236}">
-                <a16:creationId xmlns:a16="http://schemas.microsoft.com/office/drawing/2014/main" id="{FEE1177B-CFD0-429C-AC36-04575BE31062}"/>
+                <a16:creationId xmlns:a16="http://schemas.microsoft.com/office/drawing/2014/main" id="{04E26A0E-5DA3-4185-BEC2-3903AEDE7DE5}"/>
               </a:ext>
             </a:extLst>
           </p:cNvPr>
@@ -23361,7 +23969,7 @@
           <p:cNvPr id="20" name="p07-n-5">
             <a:extLst xmlns:a="http://schemas.openxmlformats.org/drawingml/2006/main">
               <a:ext uri="{FF2B5EF4-FFF2-40B4-BE49-F238E27FC236}">
-                <a16:creationId xmlns:a16="http://schemas.microsoft.com/office/drawing/2014/main" id="{E65C74CE-72FF-4B21-82A0-B40A1A6C0A7E}"/>
+                <a16:creationId xmlns:a16="http://schemas.microsoft.com/office/drawing/2014/main" id="{9FEA4DEE-5036-4DC6-8C6E-4541D15435A0}"/>
               </a:ext>
             </a:extLst>
           </p:cNvPr>
@@ -23418,7 +24026,7 @@
           <p:cNvPr id="21" name="p07-m-5">
             <a:extLst xmlns:a="http://schemas.openxmlformats.org/drawingml/2006/main">
               <a:ext uri="{FF2B5EF4-FFF2-40B4-BE49-F238E27FC236}">
-                <a16:creationId xmlns:a16="http://schemas.microsoft.com/office/drawing/2014/main" id="{B8B7D866-682D-42EF-8E25-E75099A7336A}"/>
+                <a16:creationId xmlns:a16="http://schemas.microsoft.com/office/drawing/2014/main" id="{73D1B817-569B-4095-88FE-350661D00178}"/>
               </a:ext>
             </a:extLst>
           </p:cNvPr>
@@ -23473,7 +24081,7 @@
           <p:cNvPr id="22" name="p07-n-6">
             <a:extLst xmlns:a="http://schemas.openxmlformats.org/drawingml/2006/main">
               <a:ext uri="{FF2B5EF4-FFF2-40B4-BE49-F238E27FC236}">
-                <a16:creationId xmlns:a16="http://schemas.microsoft.com/office/drawing/2014/main" id="{F873309D-86BA-4813-8B8F-324EECD83DB7}"/>
+                <a16:creationId xmlns:a16="http://schemas.microsoft.com/office/drawing/2014/main" id="{1DFD3829-0A2F-4971-9D26-D2149D10DC37}"/>
               </a:ext>
             </a:extLst>
           </p:cNvPr>
@@ -23530,7 +24138,7 @@
           <p:cNvPr id="23" name="p07-m-6">
             <a:extLst xmlns:a="http://schemas.openxmlformats.org/drawingml/2006/main">
               <a:ext uri="{FF2B5EF4-FFF2-40B4-BE49-F238E27FC236}">
-                <a16:creationId xmlns:a16="http://schemas.microsoft.com/office/drawing/2014/main" id="{4F48AB8F-3241-4BE9-BCD3-07AD4714ADD7}"/>
+                <a16:creationId xmlns:a16="http://schemas.microsoft.com/office/drawing/2014/main" id="{9528EAA0-8C41-45F5-81D1-8889B8450F5A}"/>
               </a:ext>
             </a:extLst>
           </p:cNvPr>
@@ -23585,7 +24193,7 @@
           <p:cNvPr id="24" name="p07-bottom">
             <a:extLst xmlns:a="http://schemas.openxmlformats.org/drawingml/2006/main">
               <a:ext uri="{FF2B5EF4-FFF2-40B4-BE49-F238E27FC236}">
-                <a16:creationId xmlns:a16="http://schemas.microsoft.com/office/drawing/2014/main" id="{31B38EB3-DA8F-4611-B1F9-6B0191939E41}"/>
+                <a16:creationId xmlns:a16="http://schemas.microsoft.com/office/drawing/2014/main" id="{8E253BD9-C353-4C79-A9EE-A8CC0B098391}"/>
               </a:ext>
             </a:extLst>
           </p:cNvPr>
@@ -23732,7 +24340,7 @@
           <p:cNvPr id="6" name="p08-table-h-0">
             <a:extLst xmlns:a="http://schemas.openxmlformats.org/drawingml/2006/main">
               <a:ext uri="{FF2B5EF4-FFF2-40B4-BE49-F238E27FC236}">
-                <a16:creationId xmlns:a16="http://schemas.microsoft.com/office/drawing/2014/main" id="{A2BE6434-DE06-4378-A3C4-A1B527C70A63}"/>
+                <a16:creationId xmlns:a16="http://schemas.microsoft.com/office/drawing/2014/main" id="{75344288-2CF8-4547-A492-7D44A321A23C}"/>
               </a:ext>
             </a:extLst>
           </p:cNvPr>
@@ -23787,7 +24395,7 @@
           <p:cNvPr id="7" name="p08-table-h-1">
             <a:extLst xmlns:a="http://schemas.openxmlformats.org/drawingml/2006/main">
               <a:ext uri="{FF2B5EF4-FFF2-40B4-BE49-F238E27FC236}">
-                <a16:creationId xmlns:a16="http://schemas.microsoft.com/office/drawing/2014/main" id="{DA17B26E-7983-491D-8F3A-BD3DD9C3FA93}"/>
+                <a16:creationId xmlns:a16="http://schemas.microsoft.com/office/drawing/2014/main" id="{824F3D90-93D2-4C1D-BDAB-D34EF7007F93}"/>
               </a:ext>
             </a:extLst>
           </p:cNvPr>
@@ -23842,7 +24450,7 @@
           <p:cNvPr id="8" name="p08-table-r0-0">
             <a:extLst xmlns:a="http://schemas.openxmlformats.org/drawingml/2006/main">
               <a:ext uri="{FF2B5EF4-FFF2-40B4-BE49-F238E27FC236}">
-                <a16:creationId xmlns:a16="http://schemas.microsoft.com/office/drawing/2014/main" id="{B4AB6834-9F48-4EC2-8565-F5875FA03250}"/>
+                <a16:creationId xmlns:a16="http://schemas.microsoft.com/office/drawing/2014/main" id="{009E564B-85D3-4C5C-9044-CF7B522C8B29}"/>
               </a:ext>
             </a:extLst>
           </p:cNvPr>
@@ -23903,7 +24511,7 @@
           <p:cNvPr id="9" name="p08-table-r0-1">
             <a:extLst xmlns:a="http://schemas.openxmlformats.org/drawingml/2006/main">
               <a:ext uri="{FF2B5EF4-FFF2-40B4-BE49-F238E27FC236}">
-                <a16:creationId xmlns:a16="http://schemas.microsoft.com/office/drawing/2014/main" id="{EAC39DF0-D97C-4CE9-8A53-6D666A87F692}"/>
+                <a16:creationId xmlns:a16="http://schemas.microsoft.com/office/drawing/2014/main" id="{E7A642B2-52A3-4B25-966B-BC3FA205F546}"/>
               </a:ext>
             </a:extLst>
           </p:cNvPr>
@@ -23964,7 +24572,7 @@
           <p:cNvPr id="10" name="p08-table-r1-0">
             <a:extLst xmlns:a="http://schemas.openxmlformats.org/drawingml/2006/main">
               <a:ext uri="{FF2B5EF4-FFF2-40B4-BE49-F238E27FC236}">
-                <a16:creationId xmlns:a16="http://schemas.microsoft.com/office/drawing/2014/main" id="{7381359A-A3E0-458F-A500-B5ECA05B2029}"/>
+                <a16:creationId xmlns:a16="http://schemas.microsoft.com/office/drawing/2014/main" id="{E9189CC3-3900-4AE7-A713-20D7F61CF2B9}"/>
               </a:ext>
             </a:extLst>
           </p:cNvPr>
@@ -24025,7 +24633,7 @@
           <p:cNvPr id="11" name="p08-table-r1-1">
             <a:extLst xmlns:a="http://schemas.openxmlformats.org/drawingml/2006/main">
               <a:ext uri="{FF2B5EF4-FFF2-40B4-BE49-F238E27FC236}">
-                <a16:creationId xmlns:a16="http://schemas.microsoft.com/office/drawing/2014/main" id="{BE5E21CC-CEFB-4441-A6C0-3536F1E98EB8}"/>
+                <a16:creationId xmlns:a16="http://schemas.microsoft.com/office/drawing/2014/main" id="{3A7EF86A-C69A-4899-9000-10483F4788BD}"/>
               </a:ext>
             </a:extLst>
           </p:cNvPr>
@@ -24086,7 +24694,7 @@
           <p:cNvPr id="12" name="p08-table-r2-0">
             <a:extLst xmlns:a="http://schemas.openxmlformats.org/drawingml/2006/main">
               <a:ext uri="{FF2B5EF4-FFF2-40B4-BE49-F238E27FC236}">
-                <a16:creationId xmlns:a16="http://schemas.microsoft.com/office/drawing/2014/main" id="{46E960A7-37AE-43A2-9791-9AC8A8E4B713}"/>
+                <a16:creationId xmlns:a16="http://schemas.microsoft.com/office/drawing/2014/main" id="{9CB55F11-23D4-4684-83D3-0B4D8E48AFEE}"/>
               </a:ext>
             </a:extLst>
           </p:cNvPr>
@@ -24147,7 +24755,7 @@
           <p:cNvPr id="13" name="p08-table-r2-1">
             <a:extLst xmlns:a="http://schemas.openxmlformats.org/drawingml/2006/main">
               <a:ext uri="{FF2B5EF4-FFF2-40B4-BE49-F238E27FC236}">
-                <a16:creationId xmlns:a16="http://schemas.microsoft.com/office/drawing/2014/main" id="{7AE9FB4E-6813-4D49-BE2D-E6343FD7FC7B}"/>
+                <a16:creationId xmlns:a16="http://schemas.microsoft.com/office/drawing/2014/main" id="{BA625F8C-D3BF-42E4-941F-17B1998F8D38}"/>
               </a:ext>
             </a:extLst>
           </p:cNvPr>
@@ -24208,7 +24816,7 @@
           <p:cNvPr id="14" name="p08-table-r3-0">
             <a:extLst xmlns:a="http://schemas.openxmlformats.org/drawingml/2006/main">
               <a:ext uri="{FF2B5EF4-FFF2-40B4-BE49-F238E27FC236}">
-                <a16:creationId xmlns:a16="http://schemas.microsoft.com/office/drawing/2014/main" id="{9F22E383-7C8F-4108-824D-62BA3598CC32}"/>
+                <a16:creationId xmlns:a16="http://schemas.microsoft.com/office/drawing/2014/main" id="{D6BFA40A-18FF-48D7-99B2-C2980C8633F5}"/>
               </a:ext>
             </a:extLst>
           </p:cNvPr>
@@ -24269,7 +24877,7 @@
           <p:cNvPr id="15" name="p08-table-r3-1">
             <a:extLst xmlns:a="http://schemas.openxmlformats.org/drawingml/2006/main">
               <a:ext uri="{FF2B5EF4-FFF2-40B4-BE49-F238E27FC236}">
-                <a16:creationId xmlns:a16="http://schemas.microsoft.com/office/drawing/2014/main" id="{D77822ED-72B5-4C4D-8D74-8136AF82479D}"/>
+                <a16:creationId xmlns:a16="http://schemas.microsoft.com/office/drawing/2014/main" id="{317BDCDC-132E-4071-A9B0-B1E633023C85}"/>
               </a:ext>
             </a:extLst>
           </p:cNvPr>
@@ -24330,7 +24938,7 @@
           <p:cNvPr id="16" name="p08-table-r4-0">
             <a:extLst xmlns:a="http://schemas.openxmlformats.org/drawingml/2006/main">
               <a:ext uri="{FF2B5EF4-FFF2-40B4-BE49-F238E27FC236}">
-                <a16:creationId xmlns:a16="http://schemas.microsoft.com/office/drawing/2014/main" id="{4D13C8FA-6E31-4FA6-9FBE-DC97125BF6CF}"/>
+                <a16:creationId xmlns:a16="http://schemas.microsoft.com/office/drawing/2014/main" id="{19D85FFE-A0ED-47EF-B9AE-23C6A09206B5}"/>
               </a:ext>
             </a:extLst>
           </p:cNvPr>
@@ -24391,7 +24999,7 @@
           <p:cNvPr id="17" name="p08-table-r4-1">
             <a:extLst xmlns:a="http://schemas.openxmlformats.org/drawingml/2006/main">
               <a:ext uri="{FF2B5EF4-FFF2-40B4-BE49-F238E27FC236}">
-                <a16:creationId xmlns:a16="http://schemas.microsoft.com/office/drawing/2014/main" id="{E9995A05-1603-487B-8900-81497D0CFE1B}"/>
+                <a16:creationId xmlns:a16="http://schemas.microsoft.com/office/drawing/2014/main" id="{595D03B9-AB70-44C3-B2B4-2E420F1E32C5}"/>
               </a:ext>
             </a:extLst>
           </p:cNvPr>
@@ -24452,7 +25060,7 @@
           <p:cNvPr id="18" name="p08-table-r5-0">
             <a:extLst xmlns:a="http://schemas.openxmlformats.org/drawingml/2006/main">
               <a:ext uri="{FF2B5EF4-FFF2-40B4-BE49-F238E27FC236}">
-                <a16:creationId xmlns:a16="http://schemas.microsoft.com/office/drawing/2014/main" id="{0886348D-3B05-40F9-AFE9-DD15942E2319}"/>
+                <a16:creationId xmlns:a16="http://schemas.microsoft.com/office/drawing/2014/main" id="{CB71CC01-71E7-43A8-A7DD-373A9E7D42AC}"/>
               </a:ext>
             </a:extLst>
           </p:cNvPr>
@@ -24513,7 +25121,7 @@
           <p:cNvPr id="19" name="p08-table-r5-1">
             <a:extLst xmlns:a="http://schemas.openxmlformats.org/drawingml/2006/main">
               <a:ext uri="{FF2B5EF4-FFF2-40B4-BE49-F238E27FC236}">
-                <a16:creationId xmlns:a16="http://schemas.microsoft.com/office/drawing/2014/main" id="{36B0914B-9834-42A0-82A3-B079D98BBCBF}"/>
+                <a16:creationId xmlns:a16="http://schemas.microsoft.com/office/drawing/2014/main" id="{22F5CC4F-36A8-4717-B3F0-4FF5B6616B20}"/>
               </a:ext>
             </a:extLst>
           </p:cNvPr>
@@ -24574,7 +25182,7 @@
           <p:cNvPr id="20" name="p08-table-r6-0">
             <a:extLst xmlns:a="http://schemas.openxmlformats.org/drawingml/2006/main">
               <a:ext uri="{FF2B5EF4-FFF2-40B4-BE49-F238E27FC236}">
-                <a16:creationId xmlns:a16="http://schemas.microsoft.com/office/drawing/2014/main" id="{B1768FC5-451C-4842-9252-CF846730097C}"/>
+                <a16:creationId xmlns:a16="http://schemas.microsoft.com/office/drawing/2014/main" id="{5CA682CB-2BD3-4E3A-B9F3-37B2C2C92960}"/>
               </a:ext>
             </a:extLst>
           </p:cNvPr>
@@ -24635,7 +25243,7 @@
           <p:cNvPr id="21" name="p08-table-r6-1">
             <a:extLst xmlns:a="http://schemas.openxmlformats.org/drawingml/2006/main">
               <a:ext uri="{FF2B5EF4-FFF2-40B4-BE49-F238E27FC236}">
-                <a16:creationId xmlns:a16="http://schemas.microsoft.com/office/drawing/2014/main" id="{CAAE6BDD-9FA4-4CA1-8A12-A6842F8500C9}"/>
+                <a16:creationId xmlns:a16="http://schemas.microsoft.com/office/drawing/2014/main" id="{16A81742-2AD8-47D8-84BE-970D08C591BD}"/>
               </a:ext>
             </a:extLst>
           </p:cNvPr>
@@ -24696,7 +25304,7 @@
           <p:cNvPr id="22" name="p08-bottom">
             <a:extLst xmlns:a="http://schemas.openxmlformats.org/drawingml/2006/main">
               <a:ext uri="{FF2B5EF4-FFF2-40B4-BE49-F238E27FC236}">
-                <a16:creationId xmlns:a16="http://schemas.microsoft.com/office/drawing/2014/main" id="{79392AB6-6B10-4733-8559-E25F54CE826D}"/>
+                <a16:creationId xmlns:a16="http://schemas.microsoft.com/office/drawing/2014/main" id="{9A7C6B4D-9198-4D32-A12B-E20DB61DB8FE}"/>
               </a:ext>
             </a:extLst>
           </p:cNvPr>
@@ -24843,7 +25451,7 @@
           <p:cNvPr id="6" name="p09-stop-title">
             <a:extLst xmlns:a="http://schemas.openxmlformats.org/drawingml/2006/main">
               <a:ext uri="{FF2B5EF4-FFF2-40B4-BE49-F238E27FC236}">
-                <a16:creationId xmlns:a16="http://schemas.microsoft.com/office/drawing/2014/main" id="{C42CF4CA-061B-47ED-B7C2-33523A5D0C17}"/>
+                <a16:creationId xmlns:a16="http://schemas.microsoft.com/office/drawing/2014/main" id="{6D53C14C-AE1A-47AA-BEAA-E57855D3AF3C}"/>
               </a:ext>
             </a:extLst>
           </p:cNvPr>
@@ -24896,7 +25504,7 @@
           <p:cNvPr id="7" name="p09-stop">
             <a:extLst xmlns:a="http://schemas.openxmlformats.org/drawingml/2006/main">
               <a:ext uri="{FF2B5EF4-FFF2-40B4-BE49-F238E27FC236}">
-                <a16:creationId xmlns:a16="http://schemas.microsoft.com/office/drawing/2014/main" id="{9F298F8F-4E67-4B0A-8428-EF85397C2848}"/>
+                <a16:creationId xmlns:a16="http://schemas.microsoft.com/office/drawing/2014/main" id="{12F8140A-913A-400A-BC43-32BC367793CA}"/>
               </a:ext>
             </a:extLst>
           </p:cNvPr>
@@ -25010,7 +25618,7 @@
           <p:cNvPr id="8" name="p09-fail-title">
             <a:extLst xmlns:a="http://schemas.openxmlformats.org/drawingml/2006/main">
               <a:ext uri="{FF2B5EF4-FFF2-40B4-BE49-F238E27FC236}">
-                <a16:creationId xmlns:a16="http://schemas.microsoft.com/office/drawing/2014/main" id="{7710107D-F655-420E-AE9F-F273EEC51C36}"/>
+                <a16:creationId xmlns:a16="http://schemas.microsoft.com/office/drawing/2014/main" id="{8A944A77-3EF5-4B3B-BFC6-EB83C35B20A2}"/>
               </a:ext>
             </a:extLst>
           </p:cNvPr>
@@ -25063,7 +25671,7 @@
           <p:cNvPr id="9" name="p09-i-0">
             <a:extLst xmlns:a="http://schemas.openxmlformats.org/drawingml/2006/main">
               <a:ext uri="{FF2B5EF4-FFF2-40B4-BE49-F238E27FC236}">
-                <a16:creationId xmlns:a16="http://schemas.microsoft.com/office/drawing/2014/main" id="{F2CEC635-D43F-4BFE-84F5-A522C4B68990}"/>
+                <a16:creationId xmlns:a16="http://schemas.microsoft.com/office/drawing/2014/main" id="{06BBEFFE-DAE3-4C76-8DCE-8A26AE5B133A}"/>
               </a:ext>
             </a:extLst>
           </p:cNvPr>
@@ -25120,7 +25728,7 @@
           <p:cNvPr id="10" name="p09-p-0">
             <a:extLst xmlns:a="http://schemas.openxmlformats.org/drawingml/2006/main">
               <a:ext uri="{FF2B5EF4-FFF2-40B4-BE49-F238E27FC236}">
-                <a16:creationId xmlns:a16="http://schemas.microsoft.com/office/drawing/2014/main" id="{BC0A7F75-E386-41C3-9233-81F2FF724AEE}"/>
+                <a16:creationId xmlns:a16="http://schemas.microsoft.com/office/drawing/2014/main" id="{DECB0FE0-2C2E-4A88-A92B-23D21CC0FCD9}"/>
               </a:ext>
             </a:extLst>
           </p:cNvPr>
@@ -25175,7 +25783,7 @@
           <p:cNvPr id="11" name="p09-i-1">
             <a:extLst xmlns:a="http://schemas.openxmlformats.org/drawingml/2006/main">
               <a:ext uri="{FF2B5EF4-FFF2-40B4-BE49-F238E27FC236}">
-                <a16:creationId xmlns:a16="http://schemas.microsoft.com/office/drawing/2014/main" id="{B33E6472-67B7-464A-A137-88300BC8CBC2}"/>
+                <a16:creationId xmlns:a16="http://schemas.microsoft.com/office/drawing/2014/main" id="{2E850835-278B-485B-A4E8-2D835FA6F830}"/>
               </a:ext>
             </a:extLst>
           </p:cNvPr>
@@ -25232,7 +25840,7 @@
           <p:cNvPr id="12" name="p09-p-1">
             <a:extLst xmlns:a="http://schemas.openxmlformats.org/drawingml/2006/main">
               <a:ext uri="{FF2B5EF4-FFF2-40B4-BE49-F238E27FC236}">
-                <a16:creationId xmlns:a16="http://schemas.microsoft.com/office/drawing/2014/main" id="{1F7540A3-5918-48E6-9BAA-54BB6309E4B4}"/>
+                <a16:creationId xmlns:a16="http://schemas.microsoft.com/office/drawing/2014/main" id="{0FACEA6C-D7E7-401C-B9AC-7C901A91685B}"/>
               </a:ext>
             </a:extLst>
           </p:cNvPr>
@@ -25287,7 +25895,7 @@
           <p:cNvPr id="13" name="p09-i-2">
             <a:extLst xmlns:a="http://schemas.openxmlformats.org/drawingml/2006/main">
               <a:ext uri="{FF2B5EF4-FFF2-40B4-BE49-F238E27FC236}">
-                <a16:creationId xmlns:a16="http://schemas.microsoft.com/office/drawing/2014/main" id="{1EF46D25-D318-4B78-9677-0151162BF4D1}"/>
+                <a16:creationId xmlns:a16="http://schemas.microsoft.com/office/drawing/2014/main" id="{90311649-28D0-4E39-82BB-DC83B5FF378C}"/>
               </a:ext>
             </a:extLst>
           </p:cNvPr>
@@ -25344,7 +25952,7 @@
           <p:cNvPr id="14" name="p09-p-2">
             <a:extLst xmlns:a="http://schemas.openxmlformats.org/drawingml/2006/main">
               <a:ext uri="{FF2B5EF4-FFF2-40B4-BE49-F238E27FC236}">
-                <a16:creationId xmlns:a16="http://schemas.microsoft.com/office/drawing/2014/main" id="{1F7162E0-4265-4DE6-830F-63AA64A7F900}"/>
+                <a16:creationId xmlns:a16="http://schemas.microsoft.com/office/drawing/2014/main" id="{5815E1C5-F9DF-4059-88B2-AAEE0473C2AC}"/>
               </a:ext>
             </a:extLst>
           </p:cNvPr>
@@ -25399,7 +26007,7 @@
           <p:cNvPr id="15" name="p09-i-3">
             <a:extLst xmlns:a="http://schemas.openxmlformats.org/drawingml/2006/main">
               <a:ext uri="{FF2B5EF4-FFF2-40B4-BE49-F238E27FC236}">
-                <a16:creationId xmlns:a16="http://schemas.microsoft.com/office/drawing/2014/main" id="{B9EB92D6-2E8C-4BA7-A17D-DD7C94B5A955}"/>
+                <a16:creationId xmlns:a16="http://schemas.microsoft.com/office/drawing/2014/main" id="{8F4F35BC-C4B0-44B9-BE25-08A4A1304D7B}"/>
               </a:ext>
             </a:extLst>
           </p:cNvPr>
@@ -25456,7 +26064,7 @@
           <p:cNvPr id="16" name="p09-p-3">
             <a:extLst xmlns:a="http://schemas.openxmlformats.org/drawingml/2006/main">
               <a:ext uri="{FF2B5EF4-FFF2-40B4-BE49-F238E27FC236}">
-                <a16:creationId xmlns:a16="http://schemas.microsoft.com/office/drawing/2014/main" id="{1B1D76F1-F3F2-40BE-800A-5FB23E86BD72}"/>
+                <a16:creationId xmlns:a16="http://schemas.microsoft.com/office/drawing/2014/main" id="{EB75AD65-E687-4E86-86E5-585CA25CE5B8}"/>
               </a:ext>
             </a:extLst>
           </p:cNvPr>
@@ -25511,7 +26119,7 @@
           <p:cNvPr id="17" name="p09-bottom">
             <a:extLst xmlns:a="http://schemas.openxmlformats.org/drawingml/2006/main">
               <a:ext uri="{FF2B5EF4-FFF2-40B4-BE49-F238E27FC236}">
-                <a16:creationId xmlns:a16="http://schemas.microsoft.com/office/drawing/2014/main" id="{A98E7721-79DE-448E-9A8B-A4253BF76263}"/>
+                <a16:creationId xmlns:a16="http://schemas.microsoft.com/office/drawing/2014/main" id="{26BE3615-CF49-4BA1-9FE2-24D7D75241FA}"/>
               </a:ext>
             </a:extLst>
           </p:cNvPr>
